--- a/3. Spring_Security_7_Securing_Rest_Endpoints.pptx
+++ b/3. Spring_Security_7_Securing_Rest_Endpoints.pptx
@@ -7,15 +7,20 @@
   <p:sldIdLst>
     <p:sldId id="256" r:id="rId2"/>
     <p:sldId id="257" r:id="rId3"/>
-    <p:sldId id="258" r:id="rId4"/>
-    <p:sldId id="259" r:id="rId5"/>
-    <p:sldId id="262" r:id="rId6"/>
-    <p:sldId id="260" r:id="rId7"/>
-    <p:sldId id="261" r:id="rId8"/>
-    <p:sldId id="263" r:id="rId9"/>
-    <p:sldId id="264" r:id="rId10"/>
-    <p:sldId id="265" r:id="rId11"/>
-    <p:sldId id="266" r:id="rId12"/>
+    <p:sldId id="267" r:id="rId4"/>
+    <p:sldId id="268" r:id="rId5"/>
+    <p:sldId id="269" r:id="rId6"/>
+    <p:sldId id="270" r:id="rId7"/>
+    <p:sldId id="271" r:id="rId8"/>
+    <p:sldId id="258" r:id="rId9"/>
+    <p:sldId id="259" r:id="rId10"/>
+    <p:sldId id="262" r:id="rId11"/>
+    <p:sldId id="260" r:id="rId12"/>
+    <p:sldId id="261" r:id="rId13"/>
+    <p:sldId id="263" r:id="rId14"/>
+    <p:sldId id="264" r:id="rId15"/>
+    <p:sldId id="265" r:id="rId16"/>
+    <p:sldId id="266" r:id="rId17"/>
   </p:sldIdLst>
   <p:sldSz cx="12192000" cy="6858000"/>
   <p:notesSz cx="6858000" cy="9144000"/>
@@ -114,6 +119,11 @@
       </a:defRPr>
     </a:lvl9pPr>
   </p:defaultTextStyle>
+  <p:extLst>
+    <p:ext uri="{EFAFB233-063F-42B5-8137-9DF3F51BA10A}">
+      <p15:sldGuideLst xmlns:p15="http://schemas.microsoft.com/office/powerpoint/2012/main"/>
+    </p:ext>
+  </p:extLst>
 </p:presentation>
 </file>
 
@@ -266,7 +276,7 @@
           <a:p>
             <a:fld id="{7BCE00C5-C8D6-4EF0-9891-2C5D4DF149CD}" type="datetimeFigureOut">
               <a:rPr lang="en-IN" smtClean="0"/>
-              <a:t>26-08-2026</a:t>
+              <a:t>27-08-2026</a:t>
             </a:fld>
             <a:endParaRPr lang="en-IN"/>
           </a:p>
@@ -466,7 +476,7 @@
           <a:p>
             <a:fld id="{7BCE00C5-C8D6-4EF0-9891-2C5D4DF149CD}" type="datetimeFigureOut">
               <a:rPr lang="en-IN" smtClean="0"/>
-              <a:t>26-08-2026</a:t>
+              <a:t>27-08-2026</a:t>
             </a:fld>
             <a:endParaRPr lang="en-IN"/>
           </a:p>
@@ -676,7 +686,7 @@
           <a:p>
             <a:fld id="{7BCE00C5-C8D6-4EF0-9891-2C5D4DF149CD}" type="datetimeFigureOut">
               <a:rPr lang="en-IN" smtClean="0"/>
-              <a:t>26-08-2026</a:t>
+              <a:t>27-08-2026</a:t>
             </a:fld>
             <a:endParaRPr lang="en-IN"/>
           </a:p>
@@ -876,7 +886,7 @@
           <a:p>
             <a:fld id="{7BCE00C5-C8D6-4EF0-9891-2C5D4DF149CD}" type="datetimeFigureOut">
               <a:rPr lang="en-IN" smtClean="0"/>
-              <a:t>26-08-2026</a:t>
+              <a:t>27-08-2026</a:t>
             </a:fld>
             <a:endParaRPr lang="en-IN"/>
           </a:p>
@@ -1152,7 +1162,7 @@
           <a:p>
             <a:fld id="{7BCE00C5-C8D6-4EF0-9891-2C5D4DF149CD}" type="datetimeFigureOut">
               <a:rPr lang="en-IN" smtClean="0"/>
-              <a:t>26-08-2026</a:t>
+              <a:t>27-08-2026</a:t>
             </a:fld>
             <a:endParaRPr lang="en-IN"/>
           </a:p>
@@ -1420,7 +1430,7 @@
           <a:p>
             <a:fld id="{7BCE00C5-C8D6-4EF0-9891-2C5D4DF149CD}" type="datetimeFigureOut">
               <a:rPr lang="en-IN" smtClean="0"/>
-              <a:t>26-08-2026</a:t>
+              <a:t>27-08-2026</a:t>
             </a:fld>
             <a:endParaRPr lang="en-IN"/>
           </a:p>
@@ -1835,7 +1845,7 @@
           <a:p>
             <a:fld id="{7BCE00C5-C8D6-4EF0-9891-2C5D4DF149CD}" type="datetimeFigureOut">
               <a:rPr lang="en-IN" smtClean="0"/>
-              <a:t>26-08-2026</a:t>
+              <a:t>27-08-2026</a:t>
             </a:fld>
             <a:endParaRPr lang="en-IN"/>
           </a:p>
@@ -1977,7 +1987,7 @@
           <a:p>
             <a:fld id="{7BCE00C5-C8D6-4EF0-9891-2C5D4DF149CD}" type="datetimeFigureOut">
               <a:rPr lang="en-IN" smtClean="0"/>
-              <a:t>26-08-2026</a:t>
+              <a:t>27-08-2026</a:t>
             </a:fld>
             <a:endParaRPr lang="en-IN"/>
           </a:p>
@@ -2090,7 +2100,7 @@
           <a:p>
             <a:fld id="{7BCE00C5-C8D6-4EF0-9891-2C5D4DF149CD}" type="datetimeFigureOut">
               <a:rPr lang="en-IN" smtClean="0"/>
-              <a:t>26-08-2026</a:t>
+              <a:t>27-08-2026</a:t>
             </a:fld>
             <a:endParaRPr lang="en-IN"/>
           </a:p>
@@ -2403,7 +2413,7 @@
           <a:p>
             <a:fld id="{7BCE00C5-C8D6-4EF0-9891-2C5D4DF149CD}" type="datetimeFigureOut">
               <a:rPr lang="en-IN" smtClean="0"/>
-              <a:t>26-08-2026</a:t>
+              <a:t>27-08-2026</a:t>
             </a:fld>
             <a:endParaRPr lang="en-IN"/>
           </a:p>
@@ -2692,7 +2702,7 @@
           <a:p>
             <a:fld id="{7BCE00C5-C8D6-4EF0-9891-2C5D4DF149CD}" type="datetimeFigureOut">
               <a:rPr lang="en-IN" smtClean="0"/>
-              <a:t>26-08-2026</a:t>
+              <a:t>27-08-2026</a:t>
             </a:fld>
             <a:endParaRPr lang="en-IN"/>
           </a:p>
@@ -2935,7 +2945,7 @@
           <a:p>
             <a:fld id="{7BCE00C5-C8D6-4EF0-9891-2C5D4DF149CD}" type="datetimeFigureOut">
               <a:rPr lang="en-IN" smtClean="0"/>
-              <a:t>26-08-2026</a:t>
+              <a:t>27-08-2026</a:t>
             </a:fld>
             <a:endParaRPr lang="en-IN"/>
           </a:p>
@@ -3445,7 +3455,7 @@
           <p:cNvPr id="2" name="Title 1">
             <a:extLst>
               <a:ext uri="{FF2B5EF4-FFF2-40B4-BE49-F238E27FC236}">
-                <a16:creationId xmlns:a16="http://schemas.microsoft.com/office/drawing/2014/main" id="{49EBFD67-E5DC-404C-91F8-3000F009793B}"/>
+                <a16:creationId xmlns:a16="http://schemas.microsoft.com/office/drawing/2014/main" id="{62698859-F5FD-4296-8205-9A3C874BB9BA}"/>
               </a:ext>
             </a:extLst>
           </p:cNvPr>
@@ -3463,11 +3473,19 @@
           <a:p>
             <a:r>
               <a:rPr lang="en-US" dirty="0"/>
-              <a:t>Step 9 : Create the </a:t>
+              <a:t>Step 8: Create </a:t>
             </a:r>
             <a:r>
               <a:rPr lang="en-US" dirty="0" err="1"/>
-              <a:t>MyUserController</a:t>
+              <a:t>MyUserPojo</a:t>
+            </a:r>
+            <a:r>
+              <a:rPr lang="en-US" dirty="0"/>
+              <a:t> and </a:t>
+            </a:r>
+            <a:r>
+              <a:rPr lang="en-US" dirty="0" err="1"/>
+              <a:t>MyRolePojo</a:t>
             </a:r>
             <a:endParaRPr lang="en-IN" dirty="0"/>
           </a:p>
@@ -3475,10 +3493,10 @@
       </p:sp>
       <p:sp>
         <p:nvSpPr>
-          <p:cNvPr id="3" name="Content Placeholder 2">
-            <a:extLst>
-              <a:ext uri="{FF2B5EF4-FFF2-40B4-BE49-F238E27FC236}">
-                <a16:creationId xmlns:a16="http://schemas.microsoft.com/office/drawing/2014/main" id="{02DEF689-D1FB-4DF4-9F07-BD7FED400687}"/>
+          <p:cNvPr id="4" name="Content Placeholder 3">
+            <a:extLst>
+              <a:ext uri="{FF2B5EF4-FFF2-40B4-BE49-F238E27FC236}">
+                <a16:creationId xmlns:a16="http://schemas.microsoft.com/office/drawing/2014/main" id="{490FA8CA-2893-4F40-8A38-9C59FFB28F3A}"/>
               </a:ext>
             </a:extLst>
           </p:cNvPr>
@@ -3489,589 +3507,252 @@
             <p:ph sz="half" idx="1"/>
           </p:nvPr>
         </p:nvSpPr>
-        <p:spPr>
-          <a:xfrm>
-            <a:off x="838200" y="1395663"/>
-            <a:ext cx="5181600" cy="4781300"/>
-          </a:xfrm>
-        </p:spPr>
-        <p:txBody>
-          <a:bodyPr>
-            <a:normAutofit fontScale="32500" lnSpcReduction="20000"/>
-          </a:bodyPr>
+        <p:spPr/>
+        <p:txBody>
+          <a:bodyPr/>
           <a:lstStyle/>
           <a:p>
             <a:pPr marL="0" indent="0">
               <a:buNone/>
             </a:pPr>
             <a:r>
-              <a:rPr lang="en-IN" sz="4500" dirty="0"/>
-              <a:t>@</a:t>
-            </a:r>
-            <a:r>
-              <a:rPr lang="en-IN" sz="4500" dirty="0" err="1"/>
-              <a:t>RestController</a:t>
-            </a:r>
-            <a:endParaRPr lang="en-IN" sz="4500" dirty="0"/>
-          </a:p>
-          <a:p>
-            <a:pPr marL="0" indent="0">
-              <a:buNone/>
-            </a:pPr>
-            <a:r>
-              <a:rPr lang="en-IN" sz="4500" dirty="0"/>
-              <a:t>@</a:t>
-            </a:r>
-            <a:r>
-              <a:rPr lang="en-IN" sz="4500" dirty="0" err="1"/>
-              <a:t>RequestMapping</a:t>
-            </a:r>
-            <a:r>
-              <a:rPr lang="en-IN" sz="4500" dirty="0"/>
-              <a:t>("/</a:t>
-            </a:r>
-            <a:r>
-              <a:rPr lang="en-IN" sz="4500" dirty="0" err="1"/>
-              <a:t>api</a:t>
-            </a:r>
-            <a:r>
-              <a:rPr lang="en-IN" sz="4500" dirty="0"/>
-              <a:t>/users")</a:t>
-            </a:r>
-          </a:p>
-          <a:p>
-            <a:pPr marL="0" indent="0">
-              <a:buNone/>
-            </a:pPr>
-            <a:r>
-              <a:rPr lang="en-IN" sz="4500" b="1" dirty="0"/>
+              <a:rPr lang="en-IN" b="1" dirty="0"/>
               <a:t>public</a:t>
             </a:r>
             <a:r>
-              <a:rPr lang="en-IN" sz="4500" dirty="0"/>
+              <a:rPr lang="en-IN" dirty="0"/>
               <a:t> </a:t>
             </a:r>
             <a:r>
-              <a:rPr lang="en-IN" sz="4500" b="1" dirty="0"/>
+              <a:rPr lang="en-IN" b="1" dirty="0"/>
               <a:t>class</a:t>
             </a:r>
             <a:r>
-              <a:rPr lang="en-IN" sz="4500" dirty="0"/>
+              <a:rPr lang="en-IN" dirty="0"/>
               <a:t> </a:t>
             </a:r>
             <a:r>
-              <a:rPr lang="en-IN" sz="4500" dirty="0" err="1"/>
-              <a:t>MyUserController</a:t>
-            </a:r>
-            <a:r>
-              <a:rPr lang="en-IN" sz="4500" dirty="0"/>
+              <a:rPr lang="en-IN" dirty="0" err="1"/>
+              <a:t>MyUserPojo</a:t>
+            </a:r>
+            <a:r>
+              <a:rPr lang="en-IN" dirty="0"/>
               <a:t> {</a:t>
             </a:r>
           </a:p>
           <a:p>
-            <a:pPr marL="0" indent="0">
-              <a:buNone/>
-            </a:pPr>
-            <a:endParaRPr lang="en-IN" sz="4500" dirty="0"/>
-          </a:p>
-          <a:p>
-            <a:pPr marL="0" indent="0">
-              <a:buNone/>
-            </a:pPr>
-            <a:r>
-              <a:rPr lang="en-IN" sz="4500" dirty="0"/>
-              <a:t>@</a:t>
-            </a:r>
-            <a:r>
-              <a:rPr lang="en-IN" sz="4500" dirty="0" err="1"/>
-              <a:t>Autowired</a:t>
-            </a:r>
-            <a:r>
-              <a:rPr lang="en-IN" sz="4500" dirty="0"/>
+            <a:pPr marL="457200" lvl="1" indent="0">
+              <a:buNone/>
+            </a:pPr>
+            <a:r>
+              <a:rPr lang="en-IN" b="1" dirty="0"/>
+              <a:t>private</a:t>
+            </a:r>
+            <a:r>
+              <a:rPr lang="en-IN" dirty="0"/>
               <a:t> </a:t>
             </a:r>
             <a:r>
-              <a:rPr lang="en-IN" sz="4500" b="1" dirty="0"/>
+              <a:rPr lang="en-IN" b="1" dirty="0"/>
+              <a:t>int</a:t>
+            </a:r>
+            <a:r>
+              <a:rPr lang="en-IN" dirty="0"/>
+              <a:t> </a:t>
+            </a:r>
+            <a:r>
+              <a:rPr lang="en-IN" dirty="0" err="1"/>
+              <a:t>userId</a:t>
+            </a:r>
+            <a:r>
+              <a:rPr lang="en-IN" dirty="0"/>
+              <a:t>;</a:t>
+            </a:r>
+          </a:p>
+          <a:p>
+            <a:pPr marL="457200" lvl="1" indent="0">
+              <a:buNone/>
+            </a:pPr>
+            <a:r>
+              <a:rPr lang="en-IN" b="1" dirty="0"/>
               <a:t>private</a:t>
             </a:r>
             <a:r>
-              <a:rPr lang="en-IN" sz="4500" dirty="0"/>
+              <a:rPr lang="en-IN" dirty="0"/>
+              <a:t> String </a:t>
+            </a:r>
+            <a:r>
+              <a:rPr lang="en-IN" dirty="0" err="1"/>
+              <a:t>userName</a:t>
+            </a:r>
+            <a:r>
+              <a:rPr lang="en-IN" dirty="0"/>
+              <a:t>;</a:t>
+            </a:r>
+          </a:p>
+          <a:p>
+            <a:pPr marL="457200" lvl="1" indent="0">
+              <a:buNone/>
+            </a:pPr>
+            <a:r>
+              <a:rPr lang="en-IN" b="1" dirty="0"/>
+              <a:t>private</a:t>
+            </a:r>
+            <a:r>
+              <a:rPr lang="en-IN" dirty="0"/>
+              <a:t> String </a:t>
+            </a:r>
+            <a:r>
+              <a:rPr lang="en-IN" dirty="0" err="1"/>
+              <a:t>userPassword</a:t>
+            </a:r>
+            <a:r>
+              <a:rPr lang="en-IN" dirty="0"/>
+              <a:t>;</a:t>
+            </a:r>
+          </a:p>
+          <a:p>
+            <a:pPr marL="457200" lvl="1" indent="0">
+              <a:buNone/>
+            </a:pPr>
+            <a:r>
+              <a:rPr lang="en-IN" dirty="0"/>
+              <a:t>List&lt;String&gt; </a:t>
+            </a:r>
+            <a:r>
+              <a:rPr lang="en-IN" dirty="0" err="1"/>
+              <a:t>allRoles</a:t>
+            </a:r>
+            <a:r>
+              <a:rPr lang="en-IN" dirty="0"/>
+              <a:t>;</a:t>
+            </a:r>
+          </a:p>
+          <a:p>
+            <a:pPr marL="0" indent="0">
+              <a:buNone/>
+            </a:pPr>
+            <a:r>
+              <a:rPr lang="en-IN" dirty="0"/>
+              <a:t>}</a:t>
+            </a:r>
+          </a:p>
+        </p:txBody>
+      </p:sp>
+      <p:sp>
+        <p:nvSpPr>
+          <p:cNvPr id="5" name="Content Placeholder 4">
+            <a:extLst>
+              <a:ext uri="{FF2B5EF4-FFF2-40B4-BE49-F238E27FC236}">
+                <a16:creationId xmlns:a16="http://schemas.microsoft.com/office/drawing/2014/main" id="{D04FE901-ED73-4CB9-B58E-FC9346DE401A}"/>
+              </a:ext>
+            </a:extLst>
+          </p:cNvPr>
+          <p:cNvSpPr>
+            <a:spLocks noGrp="1"/>
+          </p:cNvSpPr>
+          <p:nvPr>
+            <p:ph sz="half" idx="2"/>
+          </p:nvPr>
+        </p:nvSpPr>
+        <p:spPr/>
+        <p:txBody>
+          <a:bodyPr/>
+          <a:lstStyle/>
+          <a:p>
+            <a:pPr marL="0" indent="0">
+              <a:buNone/>
+            </a:pPr>
+            <a:r>
+              <a:rPr lang="en-IN" b="1" dirty="0"/>
+              <a:t>public</a:t>
+            </a:r>
+            <a:r>
+              <a:rPr lang="en-IN" dirty="0"/>
               <a:t> </a:t>
             </a:r>
             <a:r>
-              <a:rPr lang="en-IN" sz="4500" dirty="0" err="1"/>
-              <a:t>AuthenticationManager</a:t>
-            </a:r>
-            <a:r>
-              <a:rPr lang="en-IN" sz="4500" dirty="0"/>
+              <a:rPr lang="en-IN" b="1" dirty="0"/>
+              <a:t>class</a:t>
+            </a:r>
+            <a:r>
+              <a:rPr lang="en-IN" dirty="0"/>
               <a:t> </a:t>
             </a:r>
             <a:r>
-              <a:rPr lang="en-IN" sz="4500" dirty="0" err="1"/>
-              <a:t>authenticationManager</a:t>
-            </a:r>
-            <a:r>
-              <a:rPr lang="en-IN" sz="4500" dirty="0"/>
+              <a:rPr lang="en-IN" dirty="0" err="1"/>
+              <a:t>MyRolePojo</a:t>
+            </a:r>
+            <a:r>
+              <a:rPr lang="en-IN" dirty="0"/>
+              <a:t> {</a:t>
+            </a:r>
+          </a:p>
+          <a:p>
+            <a:pPr marL="457200" lvl="1" indent="0">
+              <a:buNone/>
+            </a:pPr>
+            <a:r>
+              <a:rPr lang="en-IN" b="1" dirty="0"/>
+              <a:t>private</a:t>
+            </a:r>
+            <a:r>
+              <a:rPr lang="en-IN" dirty="0"/>
+              <a:t> </a:t>
+            </a:r>
+            <a:r>
+              <a:rPr lang="en-IN" b="1" dirty="0"/>
+              <a:t>int</a:t>
+            </a:r>
+            <a:r>
+              <a:rPr lang="en-IN" dirty="0"/>
+              <a:t> </a:t>
+            </a:r>
+            <a:r>
+              <a:rPr lang="en-IN" dirty="0" err="1"/>
+              <a:t>roleId</a:t>
+            </a:r>
+            <a:r>
+              <a:rPr lang="en-IN" dirty="0"/>
               <a:t>;</a:t>
             </a:r>
           </a:p>
           <a:p>
-            <a:pPr marL="0" indent="0">
-              <a:buNone/>
-            </a:pPr>
-            <a:endParaRPr lang="en-IN" sz="4500" dirty="0"/>
-          </a:p>
-          <a:p>
-            <a:pPr marL="0" indent="0">
-              <a:buNone/>
-            </a:pPr>
-            <a:r>
-              <a:rPr lang="en-IN" sz="4500" dirty="0"/>
-              <a:t>@</a:t>
-            </a:r>
-            <a:r>
-              <a:rPr lang="en-IN" sz="4500" dirty="0" err="1"/>
-              <a:t>PostMapping</a:t>
-            </a:r>
-            <a:r>
-              <a:rPr lang="en-IN" sz="4500" dirty="0"/>
-              <a:t>("/login")</a:t>
-            </a:r>
-          </a:p>
-          <a:p>
-            <a:pPr marL="0" indent="0">
-              <a:buNone/>
-            </a:pPr>
-            <a:r>
-              <a:rPr lang="en-IN" sz="4500" b="1" dirty="0"/>
-              <a:t>public</a:t>
-            </a:r>
-            <a:r>
-              <a:rPr lang="en-IN" sz="4500" dirty="0"/>
-              <a:t> </a:t>
-            </a:r>
-            <a:r>
-              <a:rPr lang="en-IN" sz="4500" dirty="0" err="1"/>
-              <a:t>ResponseEntity</a:t>
-            </a:r>
-            <a:r>
-              <a:rPr lang="en-IN" sz="4500" dirty="0"/>
-              <a:t>&lt;?&gt; login(@</a:t>
-            </a:r>
-            <a:r>
-              <a:rPr lang="en-IN" sz="4500" dirty="0" err="1"/>
-              <a:t>RequestBody</a:t>
-            </a:r>
-            <a:r>
-              <a:rPr lang="en-IN" sz="4500" dirty="0"/>
-              <a:t> </a:t>
-            </a:r>
-            <a:r>
-              <a:rPr lang="en-IN" sz="4500" dirty="0" err="1"/>
-              <a:t>MyUserPojo</a:t>
-            </a:r>
-            <a:r>
-              <a:rPr lang="en-IN" sz="4500" dirty="0"/>
-              <a:t> </a:t>
-            </a:r>
-            <a:r>
-              <a:rPr lang="en-IN" sz="4500" dirty="0" err="1"/>
-              <a:t>userPojo</a:t>
-            </a:r>
-            <a:r>
-              <a:rPr lang="en-IN" sz="4500" dirty="0"/>
-              <a:t>) {</a:t>
-            </a:r>
-          </a:p>
-          <a:p>
-            <a:pPr marL="0" indent="0">
-              <a:buNone/>
-            </a:pPr>
-            <a:r>
-              <a:rPr lang="en-IN" sz="4500" b="1" dirty="0"/>
-              <a:t>try</a:t>
-            </a:r>
-            <a:r>
-              <a:rPr lang="en-IN" sz="4500" dirty="0"/>
-              <a:t> {</a:t>
-            </a:r>
-          </a:p>
-          <a:p>
-            <a:pPr marL="0" indent="0">
-              <a:buNone/>
-            </a:pPr>
-            <a:r>
-              <a:rPr lang="en-IN" sz="4500" dirty="0"/>
-              <a:t>// Step 1: Create unauthenticated token wrapper</a:t>
-            </a:r>
-          </a:p>
-          <a:p>
-            <a:pPr marL="0" indent="0">
-              <a:buNone/>
-            </a:pPr>
-            <a:r>
-              <a:rPr lang="en-IN" sz="4500" dirty="0" err="1"/>
-              <a:t>UsernamePasswordAuthenticationToken</a:t>
-            </a:r>
-            <a:r>
-              <a:rPr lang="en-IN" sz="4500" dirty="0"/>
-              <a:t> </a:t>
-            </a:r>
-            <a:r>
-              <a:rPr lang="en-IN" sz="4500" dirty="0" err="1"/>
-              <a:t>authToken</a:t>
-            </a:r>
-            <a:r>
-              <a:rPr lang="en-IN" sz="4500" dirty="0"/>
-              <a:t> = </a:t>
-            </a:r>
-          </a:p>
-          <a:p>
-            <a:pPr marL="0" indent="0">
-              <a:buNone/>
-            </a:pPr>
-            <a:r>
-              <a:rPr lang="en-IN" sz="4500" b="1" dirty="0"/>
-              <a:t>new</a:t>
-            </a:r>
-            <a:r>
-              <a:rPr lang="en-IN" sz="4500" dirty="0"/>
-              <a:t> </a:t>
-            </a:r>
-            <a:r>
-              <a:rPr lang="en-IN" sz="4500" dirty="0" err="1"/>
-              <a:t>UsernamePasswordAuthenticationToken</a:t>
-            </a:r>
-            <a:r>
-              <a:rPr lang="en-IN" sz="4500" dirty="0"/>
-              <a:t>(</a:t>
-            </a:r>
-            <a:r>
-              <a:rPr lang="en-IN" sz="4500" dirty="0" err="1"/>
-              <a:t>userPojo.getUserName</a:t>
-            </a:r>
-            <a:r>
-              <a:rPr lang="en-IN" sz="4500" dirty="0"/>
-              <a:t>(), </a:t>
-            </a:r>
-            <a:r>
-              <a:rPr lang="en-IN" sz="4500" dirty="0" err="1"/>
-              <a:t>userPojo.getUserPassword</a:t>
-            </a:r>
-            <a:r>
-              <a:rPr lang="en-IN" sz="4500" dirty="0"/>
-              <a:t>());</a:t>
-            </a:r>
-          </a:p>
-          <a:p>
-            <a:endParaRPr lang="en-IN" dirty="0"/>
-          </a:p>
-        </p:txBody>
-      </p:sp>
-      <p:sp>
-        <p:nvSpPr>
-          <p:cNvPr id="4" name="Content Placeholder 3">
-            <a:extLst>
-              <a:ext uri="{FF2B5EF4-FFF2-40B4-BE49-F238E27FC236}">
-                <a16:creationId xmlns:a16="http://schemas.microsoft.com/office/drawing/2014/main" id="{348F0E69-918B-4F89-A4EB-48F45F344029}"/>
-              </a:ext>
-            </a:extLst>
-          </p:cNvPr>
-          <p:cNvSpPr>
-            <a:spLocks noGrp="1"/>
-          </p:cNvSpPr>
-          <p:nvPr>
-            <p:ph sz="half" idx="2"/>
-          </p:nvPr>
-        </p:nvSpPr>
-        <p:spPr>
-          <a:xfrm>
-            <a:off x="6172200" y="1395663"/>
-            <a:ext cx="5181600" cy="5226518"/>
-          </a:xfrm>
-        </p:spPr>
-        <p:txBody>
-          <a:bodyPr>
-            <a:normAutofit fontScale="32500" lnSpcReduction="20000"/>
-          </a:bodyPr>
-          <a:lstStyle/>
-          <a:p>
-            <a:pPr marL="0" indent="0">
-              <a:buNone/>
-            </a:pPr>
-            <a:r>
-              <a:rPr lang="en-IN" sz="4900" dirty="0"/>
-              <a:t>// Step 2: Delegate tracking task to authentication manager engine</a:t>
-            </a:r>
-          </a:p>
-          <a:p>
-            <a:pPr marL="0" indent="0">
-              <a:buNone/>
-            </a:pPr>
-            <a:r>
-              <a:rPr lang="en-IN" sz="4900" dirty="0"/>
-              <a:t>Authentication </a:t>
-            </a:r>
-            <a:r>
-              <a:rPr lang="en-IN" sz="4900" dirty="0" err="1"/>
-              <a:t>authResult</a:t>
-            </a:r>
-            <a:r>
-              <a:rPr lang="en-IN" sz="4900" dirty="0"/>
-              <a:t> = </a:t>
-            </a:r>
-            <a:r>
-              <a:rPr lang="en-IN" sz="4900" dirty="0" err="1"/>
-              <a:t>authenticationManager.authenticate</a:t>
-            </a:r>
-            <a:r>
-              <a:rPr lang="en-IN" sz="4900" dirty="0"/>
-              <a:t>(</a:t>
-            </a:r>
-            <a:r>
-              <a:rPr lang="en-IN" sz="4900" dirty="0" err="1"/>
-              <a:t>authToken</a:t>
-            </a:r>
-            <a:r>
-              <a:rPr lang="en-IN" sz="4900" dirty="0"/>
-              <a:t>);</a:t>
-            </a:r>
-          </a:p>
-          <a:p>
-            <a:pPr marL="0" indent="0">
-              <a:buNone/>
-            </a:pPr>
-            <a:r>
-              <a:rPr lang="en-IN" sz="4900" dirty="0"/>
-              <a:t>// Step 3: Extract successfully verified structural role records</a:t>
-            </a:r>
-          </a:p>
-          <a:p>
-            <a:pPr marL="0" indent="0">
-              <a:buNone/>
-            </a:pPr>
-            <a:r>
-              <a:rPr lang="en-IN" sz="4900" dirty="0"/>
-              <a:t>List&lt;String&gt; roles = </a:t>
-            </a:r>
-            <a:r>
-              <a:rPr lang="en-IN" sz="4900" dirty="0" err="1"/>
-              <a:t>authResult</a:t>
-            </a:r>
-            <a:endParaRPr lang="en-IN" sz="4900" dirty="0"/>
-          </a:p>
-          <a:p>
-            <a:pPr marL="0" indent="0">
-              <a:buNone/>
-            </a:pPr>
-            <a:r>
-              <a:rPr lang="en-IN" sz="4900" dirty="0"/>
-              <a:t>.</a:t>
-            </a:r>
-            <a:r>
-              <a:rPr lang="en-IN" sz="4900" dirty="0" err="1"/>
-              <a:t>getAuthorities</a:t>
-            </a:r>
-            <a:r>
-              <a:rPr lang="en-IN" sz="4900" dirty="0"/>
-              <a:t>()</a:t>
-            </a:r>
-          </a:p>
-          <a:p>
-            <a:pPr marL="0" indent="0">
-              <a:buNone/>
-            </a:pPr>
-            <a:r>
-              <a:rPr lang="en-IN" sz="4900" dirty="0"/>
-              <a:t>.stream()</a:t>
-            </a:r>
-          </a:p>
-          <a:p>
-            <a:pPr marL="0" indent="0">
-              <a:buNone/>
-            </a:pPr>
-            <a:r>
-              <a:rPr lang="en-IN" sz="4900" dirty="0"/>
-              <a:t>.map(</a:t>
-            </a:r>
-            <a:r>
-              <a:rPr lang="en-IN" sz="4900" dirty="0" err="1"/>
-              <a:t>GrantedAuthority</a:t>
-            </a:r>
-            <a:r>
-              <a:rPr lang="en-IN" sz="4900" dirty="0"/>
-              <a:t>::</a:t>
-            </a:r>
-            <a:r>
-              <a:rPr lang="en-IN" sz="4900" dirty="0" err="1"/>
-              <a:t>getAuthority</a:t>
-            </a:r>
-            <a:r>
-              <a:rPr lang="en-IN" sz="4900" dirty="0"/>
-              <a:t>)</a:t>
-            </a:r>
-          </a:p>
-          <a:p>
-            <a:pPr marL="0" indent="0">
-              <a:buNone/>
-            </a:pPr>
-            <a:r>
-              <a:rPr lang="en-IN" sz="4900" dirty="0"/>
-              <a:t>.</a:t>
-            </a:r>
-            <a:r>
-              <a:rPr lang="en-IN" sz="4900" dirty="0" err="1"/>
-              <a:t>toList</a:t>
-            </a:r>
-            <a:r>
-              <a:rPr lang="en-IN" sz="4900" dirty="0"/>
-              <a:t>();</a:t>
-            </a:r>
-          </a:p>
-          <a:p>
-            <a:pPr marL="0" indent="0">
-              <a:buNone/>
-            </a:pPr>
-            <a:r>
-              <a:rPr lang="en-IN" sz="4900" dirty="0" err="1"/>
-              <a:t>userPojo.setAllRoles</a:t>
-            </a:r>
-            <a:r>
-              <a:rPr lang="en-IN" sz="4900" dirty="0"/>
-              <a:t>(roles);</a:t>
-            </a:r>
-          </a:p>
-          <a:p>
-            <a:pPr marL="0" indent="0">
-              <a:buNone/>
-            </a:pPr>
-            <a:r>
-              <a:rPr lang="en-IN" sz="4900" b="1" dirty="0"/>
-              <a:t>return</a:t>
-            </a:r>
-            <a:r>
-              <a:rPr lang="en-IN" sz="4900" dirty="0"/>
-              <a:t> </a:t>
-            </a:r>
-            <a:r>
-              <a:rPr lang="en-IN" sz="4900" dirty="0" err="1"/>
-              <a:t>ResponseEntity.</a:t>
-            </a:r>
-            <a:r>
-              <a:rPr lang="en-IN" sz="4900" i="1" dirty="0" err="1"/>
-              <a:t>ok</a:t>
-            </a:r>
-            <a:r>
-              <a:rPr lang="en-IN" sz="4900" dirty="0"/>
-              <a:t>(</a:t>
-            </a:r>
-            <a:r>
-              <a:rPr lang="en-IN" sz="4900" dirty="0" err="1"/>
-              <a:t>userPojo</a:t>
-            </a:r>
-            <a:r>
-              <a:rPr lang="en-IN" sz="4900" dirty="0"/>
-              <a:t>);</a:t>
-            </a:r>
-          </a:p>
-          <a:p>
-            <a:pPr marL="0" indent="0">
-              <a:buNone/>
-            </a:pPr>
-            <a:r>
-              <a:rPr lang="en-IN" sz="4900" dirty="0"/>
-              <a:t>} </a:t>
-            </a:r>
-            <a:r>
-              <a:rPr lang="en-IN" sz="4900" b="1" dirty="0"/>
-              <a:t>catch</a:t>
-            </a:r>
-            <a:r>
-              <a:rPr lang="en-IN" sz="4900" dirty="0"/>
-              <a:t> (</a:t>
-            </a:r>
-            <a:r>
-              <a:rPr lang="en-IN" sz="4900" dirty="0" err="1"/>
-              <a:t>BadCredentialsException</a:t>
-            </a:r>
-            <a:r>
-              <a:rPr lang="en-IN" sz="4900" dirty="0"/>
-              <a:t> ex) {</a:t>
-            </a:r>
-          </a:p>
-          <a:p>
-            <a:pPr marL="0" indent="0">
-              <a:buNone/>
-            </a:pPr>
-            <a:r>
-              <a:rPr lang="en-IN" sz="4900" b="1" dirty="0"/>
-              <a:t>return</a:t>
-            </a:r>
-            <a:r>
-              <a:rPr lang="en-IN" sz="4900" dirty="0"/>
-              <a:t> </a:t>
-            </a:r>
-            <a:r>
-              <a:rPr lang="en-IN" sz="4900" dirty="0" err="1"/>
-              <a:t>ResponseEntity.</a:t>
-            </a:r>
-            <a:r>
-              <a:rPr lang="en-IN" sz="4900" i="1" dirty="0" err="1"/>
-              <a:t>status</a:t>
-            </a:r>
-            <a:r>
-              <a:rPr lang="en-IN" sz="4900" dirty="0"/>
-              <a:t>(</a:t>
-            </a:r>
-            <a:r>
-              <a:rPr lang="en-IN" sz="4900" dirty="0" err="1"/>
-              <a:t>HttpStatus.</a:t>
-            </a:r>
-            <a:r>
-              <a:rPr lang="en-IN" sz="4900" b="1" i="1" dirty="0" err="1"/>
-              <a:t>UNAUTHORIZED</a:t>
-            </a:r>
-            <a:r>
-              <a:rPr lang="en-IN" sz="4900" dirty="0"/>
-              <a:t>).body("Invalid Username or Password");</a:t>
-            </a:r>
-          </a:p>
-          <a:p>
-            <a:pPr marL="0" indent="0">
-              <a:buNone/>
-            </a:pPr>
-            <a:r>
-              <a:rPr lang="en-IN" sz="4900" dirty="0"/>
+            <a:pPr marL="457200" lvl="1" indent="0">
+              <a:buNone/>
+            </a:pPr>
+            <a:r>
+              <a:rPr lang="en-IN" b="1" dirty="0"/>
+              <a:t>private</a:t>
+            </a:r>
+            <a:r>
+              <a:rPr lang="en-IN" dirty="0"/>
+              <a:t> String </a:t>
+            </a:r>
+            <a:r>
+              <a:rPr lang="en-IN" dirty="0" err="1"/>
+              <a:t>roleName</a:t>
+            </a:r>
+            <a:r>
+              <a:rPr lang="en-IN" dirty="0"/>
+              <a:t>;</a:t>
+            </a:r>
+          </a:p>
+          <a:p>
+            <a:pPr marL="0" indent="0">
+              <a:buNone/>
+            </a:pPr>
+            <a:r>
+              <a:rPr lang="en-IN" dirty="0"/>
               <a:t>}</a:t>
             </a:r>
-          </a:p>
-          <a:p>
-            <a:pPr marL="0" indent="0">
-              <a:buNone/>
-            </a:pPr>
-            <a:r>
-              <a:rPr lang="en-IN" sz="4900" dirty="0"/>
-              <a:t>}</a:t>
-            </a:r>
-          </a:p>
-          <a:p>
-            <a:pPr marL="0" indent="0">
-              <a:buNone/>
-            </a:pPr>
-            <a:r>
-              <a:rPr lang="en-IN" sz="4900" dirty="0"/>
-              <a:t>}</a:t>
-            </a:r>
-          </a:p>
-          <a:p>
-            <a:endParaRPr lang="en-IN" dirty="0"/>
           </a:p>
         </p:txBody>
       </p:sp>
     </p:spTree>
     <p:extLst>
       <p:ext uri="{BB962C8B-B14F-4D97-AF65-F5344CB8AC3E}">
-        <p14:creationId xmlns:p14="http://schemas.microsoft.com/office/powerpoint/2010/main" val="1779354759"/>
+        <p14:creationId xmlns:p14="http://schemas.microsoft.com/office/powerpoint/2010/main" val="4291652711"/>
       </p:ext>
     </p:extLst>
   </p:cSld>
@@ -4103,7 +3784,7 @@
           <p:cNvPr id="2" name="Title 1">
             <a:extLst>
               <a:ext uri="{FF2B5EF4-FFF2-40B4-BE49-F238E27FC236}">
-                <a16:creationId xmlns:a16="http://schemas.microsoft.com/office/drawing/2014/main" id="{72DD0300-7368-4756-8489-AB9A69827836}"/>
+                <a16:creationId xmlns:a16="http://schemas.microsoft.com/office/drawing/2014/main" id="{D91A14CF-EB9F-467C-853A-280F74DFC3D6}"/>
               </a:ext>
             </a:extLst>
           </p:cNvPr>
@@ -4121,7 +3802,2294 @@
           <a:p>
             <a:r>
               <a:rPr lang="en-US" dirty="0"/>
-              <a:t>Step 10 : Test the </a:t>
+              <a:t>Step 9: Create the Dao Layer Interface</a:t>
+            </a:r>
+            <a:endParaRPr lang="en-IN" dirty="0"/>
+          </a:p>
+        </p:txBody>
+      </p:sp>
+      <p:sp>
+        <p:nvSpPr>
+          <p:cNvPr id="5" name="Content Placeholder 4">
+            <a:extLst>
+              <a:ext uri="{FF2B5EF4-FFF2-40B4-BE49-F238E27FC236}">
+                <a16:creationId xmlns:a16="http://schemas.microsoft.com/office/drawing/2014/main" id="{24C98108-12F4-4D6F-9F19-92F9F594C4DD}"/>
+              </a:ext>
+            </a:extLst>
+          </p:cNvPr>
+          <p:cNvSpPr>
+            <a:spLocks noGrp="1"/>
+          </p:cNvSpPr>
+          <p:nvPr>
+            <p:ph idx="1"/>
+          </p:nvPr>
+        </p:nvSpPr>
+        <p:spPr/>
+        <p:txBody>
+          <a:bodyPr/>
+          <a:lstStyle/>
+          <a:p>
+            <a:r>
+              <a:rPr lang="en-US" dirty="0"/>
+              <a:t>Create the Dao repository</a:t>
+            </a:r>
+          </a:p>
+          <a:p>
+            <a:pPr marL="0" indent="0">
+              <a:buNone/>
+            </a:pPr>
+            <a:r>
+              <a:rPr lang="en-IN" dirty="0"/>
+              <a:t>@Repository</a:t>
+            </a:r>
+          </a:p>
+          <a:p>
+            <a:pPr marL="0" indent="0">
+              <a:buNone/>
+            </a:pPr>
+            <a:r>
+              <a:rPr lang="en-IN" b="1" dirty="0"/>
+              <a:t>public</a:t>
+            </a:r>
+            <a:r>
+              <a:rPr lang="en-IN" dirty="0"/>
+              <a:t> </a:t>
+            </a:r>
+            <a:r>
+              <a:rPr lang="en-IN" b="1" dirty="0"/>
+              <a:t>interface</a:t>
+            </a:r>
+            <a:r>
+              <a:rPr lang="en-IN" dirty="0"/>
+              <a:t> </a:t>
+            </a:r>
+            <a:r>
+              <a:rPr lang="en-IN" dirty="0" err="1"/>
+              <a:t>MyUserDao</a:t>
+            </a:r>
+            <a:r>
+              <a:rPr lang="en-IN" dirty="0"/>
+              <a:t> </a:t>
+            </a:r>
+            <a:r>
+              <a:rPr lang="en-IN" b="1" dirty="0"/>
+              <a:t>extends</a:t>
+            </a:r>
+            <a:r>
+              <a:rPr lang="en-IN" dirty="0"/>
+              <a:t> </a:t>
+            </a:r>
+            <a:r>
+              <a:rPr lang="en-IN" dirty="0" err="1"/>
+              <a:t>JpaRepository</a:t>
+            </a:r>
+            <a:r>
+              <a:rPr lang="en-IN" dirty="0"/>
+              <a:t>&lt;</a:t>
+            </a:r>
+            <a:r>
+              <a:rPr lang="en-IN" dirty="0" err="1"/>
+              <a:t>MyUserEntity</a:t>
+            </a:r>
+            <a:r>
+              <a:rPr lang="en-IN" dirty="0"/>
+              <a:t>, Integer&gt;{</a:t>
+            </a:r>
+          </a:p>
+          <a:p>
+            <a:pPr marL="0" indent="0">
+              <a:buNone/>
+            </a:pPr>
+            <a:r>
+              <a:rPr lang="en-IN" dirty="0"/>
+              <a:t>	Optional&lt;</a:t>
+            </a:r>
+            <a:r>
+              <a:rPr lang="en-IN" dirty="0" err="1"/>
+              <a:t>MyUserEntity</a:t>
+            </a:r>
+            <a:r>
+              <a:rPr lang="en-IN" dirty="0"/>
+              <a:t>&gt; </a:t>
+            </a:r>
+            <a:r>
+              <a:rPr lang="en-IN" dirty="0" err="1"/>
+              <a:t>findByUserName</a:t>
+            </a:r>
+            <a:r>
+              <a:rPr lang="en-IN" dirty="0"/>
+              <a:t>(String </a:t>
+            </a:r>
+            <a:r>
+              <a:rPr lang="en-IN" dirty="0" err="1"/>
+              <a:t>userName</a:t>
+            </a:r>
+            <a:r>
+              <a:rPr lang="en-IN" dirty="0"/>
+              <a:t>);</a:t>
+            </a:r>
+          </a:p>
+          <a:p>
+            <a:pPr marL="0" indent="0">
+              <a:buNone/>
+            </a:pPr>
+            <a:r>
+              <a:rPr lang="en-IN" dirty="0"/>
+              <a:t>}</a:t>
+            </a:r>
+          </a:p>
+          <a:p>
+            <a:endParaRPr lang="en-IN" dirty="0"/>
+          </a:p>
+        </p:txBody>
+      </p:sp>
+    </p:spTree>
+    <p:extLst>
+      <p:ext uri="{BB962C8B-B14F-4D97-AF65-F5344CB8AC3E}">
+        <p14:creationId xmlns:p14="http://schemas.microsoft.com/office/powerpoint/2010/main" val="3475644981"/>
+      </p:ext>
+    </p:extLst>
+  </p:cSld>
+  <p:clrMapOvr>
+    <a:masterClrMapping/>
+  </p:clrMapOvr>
+</p:sld>
+</file>
+
+<file path=ppt/slides/slide12.xml><?xml version="1.0" encoding="utf-8"?>
+<p:sld xmlns:a="http://schemas.openxmlformats.org/drawingml/2006/main" xmlns:r="http://schemas.openxmlformats.org/officeDocument/2006/relationships" xmlns:p="http://schemas.openxmlformats.org/presentationml/2006/main">
+  <p:cSld>
+    <p:spTree>
+      <p:nvGrpSpPr>
+        <p:cNvPr id="1" name=""/>
+        <p:cNvGrpSpPr/>
+        <p:nvPr/>
+      </p:nvGrpSpPr>
+      <p:grpSpPr>
+        <a:xfrm>
+          <a:off x="0" y="0"/>
+          <a:ext cx="0" cy="0"/>
+          <a:chOff x="0" y="0"/>
+          <a:chExt cx="0" cy="0"/>
+        </a:xfrm>
+      </p:grpSpPr>
+      <p:sp>
+        <p:nvSpPr>
+          <p:cNvPr id="2" name="Title 1">
+            <a:extLst>
+              <a:ext uri="{FF2B5EF4-FFF2-40B4-BE49-F238E27FC236}">
+                <a16:creationId xmlns:a16="http://schemas.microsoft.com/office/drawing/2014/main" id="{F2827259-4740-484B-9030-B5C4D09D02F0}"/>
+              </a:ext>
+            </a:extLst>
+          </p:cNvPr>
+          <p:cNvSpPr>
+            <a:spLocks noGrp="1"/>
+          </p:cNvSpPr>
+          <p:nvPr>
+            <p:ph type="title"/>
+          </p:nvPr>
+        </p:nvSpPr>
+        <p:spPr/>
+        <p:txBody>
+          <a:bodyPr/>
+          <a:lstStyle/>
+          <a:p>
+            <a:r>
+              <a:rPr lang="en-US" dirty="0"/>
+              <a:t>Step 10: Create the </a:t>
+            </a:r>
+            <a:r>
+              <a:rPr lang="en-US" dirty="0" err="1"/>
+              <a:t>CustomUserDetailsService</a:t>
+            </a:r>
+            <a:r>
+              <a:rPr lang="en-US" dirty="0"/>
+              <a:t>  </a:t>
+            </a:r>
+            <a:endParaRPr lang="en-IN" dirty="0"/>
+          </a:p>
+        </p:txBody>
+      </p:sp>
+      <p:sp>
+        <p:nvSpPr>
+          <p:cNvPr id="3" name="Content Placeholder 2">
+            <a:extLst>
+              <a:ext uri="{FF2B5EF4-FFF2-40B4-BE49-F238E27FC236}">
+                <a16:creationId xmlns:a16="http://schemas.microsoft.com/office/drawing/2014/main" id="{53A0AFDF-544A-4F23-9D22-2B21B43DC855}"/>
+              </a:ext>
+            </a:extLst>
+          </p:cNvPr>
+          <p:cNvSpPr>
+            <a:spLocks noGrp="1"/>
+          </p:cNvSpPr>
+          <p:nvPr>
+            <p:ph idx="1"/>
+          </p:nvPr>
+        </p:nvSpPr>
+        <p:spPr>
+          <a:xfrm>
+            <a:off x="838200" y="1443789"/>
+            <a:ext cx="10515600" cy="4733174"/>
+          </a:xfrm>
+        </p:spPr>
+        <p:txBody>
+          <a:bodyPr>
+            <a:normAutofit fontScale="25000" lnSpcReduction="20000"/>
+          </a:bodyPr>
+          <a:lstStyle/>
+          <a:p>
+            <a:pPr marL="0" indent="0">
+              <a:buNone/>
+            </a:pPr>
+            <a:r>
+              <a:rPr lang="en-US" sz="7200" dirty="0"/>
+              <a:t>Bypasses standard in-memory behavior by linking incoming login validation requests to repository models:</a:t>
+            </a:r>
+          </a:p>
+          <a:p>
+            <a:pPr marL="0" indent="0">
+              <a:buNone/>
+            </a:pPr>
+            <a:endParaRPr lang="en-IN" sz="6400" dirty="0"/>
+          </a:p>
+          <a:p>
+            <a:pPr marL="0" indent="0">
+              <a:buNone/>
+            </a:pPr>
+            <a:r>
+              <a:rPr lang="en-IN" sz="6400" dirty="0"/>
+              <a:t>@Service</a:t>
+            </a:r>
+          </a:p>
+          <a:p>
+            <a:pPr marL="0" indent="0">
+              <a:buNone/>
+            </a:pPr>
+            <a:r>
+              <a:rPr lang="en-IN" sz="6400" b="1" dirty="0"/>
+              <a:t>public</a:t>
+            </a:r>
+            <a:r>
+              <a:rPr lang="en-IN" sz="6400" dirty="0"/>
+              <a:t> </a:t>
+            </a:r>
+            <a:r>
+              <a:rPr lang="en-IN" sz="6400" b="1" dirty="0"/>
+              <a:t>class</a:t>
+            </a:r>
+            <a:r>
+              <a:rPr lang="en-IN" sz="6400" dirty="0"/>
+              <a:t> </a:t>
+            </a:r>
+            <a:r>
+              <a:rPr lang="en-IN" sz="6400" dirty="0" err="1"/>
+              <a:t>CustomUserDetailsService</a:t>
+            </a:r>
+            <a:r>
+              <a:rPr lang="en-IN" sz="6400" dirty="0"/>
+              <a:t> </a:t>
+            </a:r>
+            <a:r>
+              <a:rPr lang="en-IN" sz="6400" b="1" dirty="0"/>
+              <a:t>implements</a:t>
+            </a:r>
+            <a:r>
+              <a:rPr lang="en-IN" sz="6400" dirty="0"/>
+              <a:t> </a:t>
+            </a:r>
+            <a:r>
+              <a:rPr lang="en-IN" sz="6400" dirty="0" err="1"/>
+              <a:t>UserDetailsService</a:t>
+            </a:r>
+            <a:r>
+              <a:rPr lang="en-IN" sz="6400" dirty="0"/>
+              <a:t> {</a:t>
+            </a:r>
+            <a:br>
+              <a:rPr lang="en-IN" sz="6400" dirty="0"/>
+            </a:br>
+            <a:endParaRPr lang="en-IN" sz="6400" dirty="0"/>
+          </a:p>
+          <a:p>
+            <a:pPr marL="457200" lvl="1" indent="0">
+              <a:buNone/>
+            </a:pPr>
+            <a:r>
+              <a:rPr lang="en-IN" sz="6400" dirty="0"/>
+              <a:t>@</a:t>
+            </a:r>
+            <a:r>
+              <a:rPr lang="en-IN" sz="6400" dirty="0" err="1"/>
+              <a:t>Autowired</a:t>
+            </a:r>
+            <a:r>
+              <a:rPr lang="en-IN" sz="6400" dirty="0"/>
+              <a:t> </a:t>
+            </a:r>
+          </a:p>
+          <a:p>
+            <a:pPr marL="457200" lvl="1" indent="0">
+              <a:buNone/>
+            </a:pPr>
+            <a:r>
+              <a:rPr lang="en-IN" sz="6400" b="1" dirty="0"/>
+              <a:t>private</a:t>
+            </a:r>
+            <a:r>
+              <a:rPr lang="en-IN" sz="6400" dirty="0"/>
+              <a:t> </a:t>
+            </a:r>
+            <a:r>
+              <a:rPr lang="en-IN" sz="6400" dirty="0" err="1"/>
+              <a:t>MyUserDao</a:t>
+            </a:r>
+            <a:r>
+              <a:rPr lang="en-IN" sz="6400" dirty="0"/>
+              <a:t> </a:t>
+            </a:r>
+            <a:r>
+              <a:rPr lang="en-IN" sz="6400" dirty="0" err="1"/>
+              <a:t>userDao</a:t>
+            </a:r>
+            <a:r>
+              <a:rPr lang="en-IN" sz="6400" dirty="0"/>
+              <a:t>;</a:t>
+            </a:r>
+            <a:br>
+              <a:rPr lang="en-IN" sz="6400" dirty="0"/>
+            </a:br>
+            <a:endParaRPr lang="en-IN" sz="6400" dirty="0"/>
+          </a:p>
+          <a:p>
+            <a:pPr marL="457200" lvl="1" indent="0">
+              <a:buNone/>
+            </a:pPr>
+            <a:r>
+              <a:rPr lang="en-IN" sz="6400" dirty="0"/>
+              <a:t>@Override</a:t>
+            </a:r>
+          </a:p>
+          <a:p>
+            <a:pPr marL="457200" lvl="1" indent="0">
+              <a:buNone/>
+            </a:pPr>
+            <a:r>
+              <a:rPr lang="en-IN" sz="6400" b="1" dirty="0"/>
+              <a:t>public</a:t>
+            </a:r>
+            <a:r>
+              <a:rPr lang="en-IN" sz="6400" dirty="0"/>
+              <a:t> </a:t>
+            </a:r>
+            <a:r>
+              <a:rPr lang="en-IN" sz="6400" dirty="0" err="1"/>
+              <a:t>UserDetails</a:t>
+            </a:r>
+            <a:r>
+              <a:rPr lang="en-IN" sz="6400" dirty="0"/>
+              <a:t> </a:t>
+            </a:r>
+            <a:r>
+              <a:rPr lang="en-IN" sz="6400" dirty="0" err="1"/>
+              <a:t>loadUserByUsername</a:t>
+            </a:r>
+            <a:r>
+              <a:rPr lang="en-IN" sz="6400" dirty="0"/>
+              <a:t>(String </a:t>
+            </a:r>
+            <a:r>
+              <a:rPr lang="en-IN" sz="6400" dirty="0" err="1"/>
+              <a:t>userName</a:t>
+            </a:r>
+            <a:r>
+              <a:rPr lang="en-IN" sz="6400" dirty="0"/>
+              <a:t>) </a:t>
+            </a:r>
+            <a:r>
+              <a:rPr lang="en-IN" sz="6400" b="1" dirty="0"/>
+              <a:t>throws</a:t>
+            </a:r>
+            <a:r>
+              <a:rPr lang="en-IN" sz="6400" dirty="0"/>
+              <a:t> </a:t>
+            </a:r>
+            <a:r>
+              <a:rPr lang="en-IN" sz="6400" dirty="0" err="1"/>
+              <a:t>UsernameNotFoundException</a:t>
+            </a:r>
+            <a:r>
+              <a:rPr lang="en-IN" sz="6400" dirty="0"/>
+              <a:t> {</a:t>
+            </a:r>
+          </a:p>
+          <a:p>
+            <a:pPr marL="914400" lvl="2" indent="0">
+              <a:buNone/>
+            </a:pPr>
+            <a:r>
+              <a:rPr lang="en-IN" sz="6400" dirty="0" err="1"/>
+              <a:t>MyUserEntity</a:t>
+            </a:r>
+            <a:r>
+              <a:rPr lang="en-IN" sz="6400" dirty="0"/>
+              <a:t> </a:t>
+            </a:r>
+            <a:r>
+              <a:rPr lang="en-IN" sz="6400" dirty="0" err="1"/>
+              <a:t>userEntity</a:t>
+            </a:r>
+            <a:r>
+              <a:rPr lang="en-IN" sz="6400" dirty="0"/>
+              <a:t> = </a:t>
+            </a:r>
+            <a:r>
+              <a:rPr lang="en-IN" sz="6400" dirty="0" err="1"/>
+              <a:t>userDao.findByUserName</a:t>
+            </a:r>
+            <a:r>
+              <a:rPr lang="en-IN" sz="6400" dirty="0"/>
+              <a:t>(</a:t>
+            </a:r>
+            <a:r>
+              <a:rPr lang="en-IN" sz="6400" dirty="0" err="1"/>
+              <a:t>userName</a:t>
+            </a:r>
+            <a:r>
+              <a:rPr lang="en-IN" sz="6400" dirty="0"/>
+              <a:t>)</a:t>
+            </a:r>
+          </a:p>
+          <a:p>
+            <a:pPr marL="914400" lvl="2" indent="0">
+              <a:buNone/>
+            </a:pPr>
+            <a:r>
+              <a:rPr lang="en-IN" sz="6400" dirty="0"/>
+              <a:t>.</a:t>
+            </a:r>
+            <a:r>
+              <a:rPr lang="en-IN" sz="6400" dirty="0" err="1"/>
+              <a:t>orElseThrow</a:t>
+            </a:r>
+            <a:r>
+              <a:rPr lang="en-IN" sz="6400" dirty="0"/>
+              <a:t>(() -&gt; </a:t>
+            </a:r>
+            <a:r>
+              <a:rPr lang="en-IN" sz="6400" b="1" dirty="0"/>
+              <a:t>new</a:t>
+            </a:r>
+            <a:r>
+              <a:rPr lang="en-IN" sz="6400" dirty="0"/>
+              <a:t> </a:t>
+            </a:r>
+            <a:r>
+              <a:rPr lang="en-IN" sz="6400" dirty="0" err="1"/>
+              <a:t>UsernameNotFoundException</a:t>
+            </a:r>
+            <a:r>
+              <a:rPr lang="en-IN" sz="6400" dirty="0"/>
+              <a:t>("User identity not found: " + </a:t>
+            </a:r>
+            <a:r>
+              <a:rPr lang="en-IN" sz="6400" dirty="0" err="1"/>
+              <a:t>userName</a:t>
+            </a:r>
+            <a:r>
+              <a:rPr lang="en-IN" sz="6400" dirty="0"/>
+              <a:t>));</a:t>
+            </a:r>
+            <a:br>
+              <a:rPr lang="en-IN" sz="6400" dirty="0"/>
+            </a:br>
+            <a:endParaRPr lang="en-IN" sz="6400" dirty="0"/>
+          </a:p>
+          <a:p>
+            <a:pPr marL="914400" lvl="2" indent="0">
+              <a:buNone/>
+            </a:pPr>
+            <a:r>
+              <a:rPr lang="en-IN" sz="6400" b="1" dirty="0"/>
+              <a:t>return</a:t>
+            </a:r>
+            <a:r>
+              <a:rPr lang="en-IN" sz="6400" dirty="0"/>
+              <a:t> </a:t>
+            </a:r>
+            <a:r>
+              <a:rPr lang="en-IN" sz="6400" dirty="0" err="1"/>
+              <a:t>User.</a:t>
+            </a:r>
+            <a:r>
+              <a:rPr lang="en-IN" sz="6400" i="1" dirty="0" err="1"/>
+              <a:t>builder</a:t>
+            </a:r>
+            <a:r>
+              <a:rPr lang="en-IN" sz="6400" dirty="0"/>
+              <a:t>()</a:t>
+            </a:r>
+          </a:p>
+          <a:p>
+            <a:pPr marL="914400" lvl="2" indent="0">
+              <a:buNone/>
+            </a:pPr>
+            <a:r>
+              <a:rPr lang="en-IN" sz="6400" dirty="0"/>
+              <a:t>	.username(</a:t>
+            </a:r>
+            <a:r>
+              <a:rPr lang="en-IN" sz="6400" dirty="0" err="1"/>
+              <a:t>userEntity.getUserName</a:t>
+            </a:r>
+            <a:r>
+              <a:rPr lang="en-IN" sz="6400" dirty="0"/>
+              <a:t>())</a:t>
+            </a:r>
+          </a:p>
+          <a:p>
+            <a:pPr marL="914400" lvl="2" indent="0">
+              <a:buNone/>
+            </a:pPr>
+            <a:r>
+              <a:rPr lang="en-IN" sz="6400" dirty="0"/>
+              <a:t>	.password(</a:t>
+            </a:r>
+            <a:r>
+              <a:rPr lang="en-IN" sz="6400" dirty="0" err="1"/>
+              <a:t>userEntity.getUserPassword</a:t>
+            </a:r>
+            <a:r>
+              <a:rPr lang="en-IN" sz="6400" dirty="0"/>
+              <a:t>())</a:t>
+            </a:r>
+          </a:p>
+          <a:p>
+            <a:pPr marL="914400" lvl="2" indent="0">
+              <a:buNone/>
+            </a:pPr>
+            <a:r>
+              <a:rPr lang="en-IN" sz="6400" dirty="0"/>
+              <a:t>	.authorities(</a:t>
+            </a:r>
+            <a:r>
+              <a:rPr lang="en-IN" sz="6400" dirty="0" err="1"/>
+              <a:t>userEntity.getAllRoles</a:t>
+            </a:r>
+            <a:r>
+              <a:rPr lang="en-IN" sz="6400" dirty="0"/>
+              <a:t>().stream()</a:t>
+            </a:r>
+          </a:p>
+          <a:p>
+            <a:pPr marL="914400" lvl="2" indent="0">
+              <a:buNone/>
+            </a:pPr>
+            <a:r>
+              <a:rPr lang="en-IN" sz="6400" dirty="0"/>
+              <a:t>	.map((</a:t>
+            </a:r>
+            <a:r>
+              <a:rPr lang="en-IN" sz="6400" dirty="0" err="1"/>
+              <a:t>eachRole</a:t>
+            </a:r>
+            <a:r>
+              <a:rPr lang="en-IN" sz="6400" dirty="0"/>
+              <a:t>) -&gt; </a:t>
+            </a:r>
+            <a:r>
+              <a:rPr lang="en-IN" sz="6400" b="1" dirty="0"/>
+              <a:t>new</a:t>
+            </a:r>
+            <a:r>
+              <a:rPr lang="en-IN" sz="6400" dirty="0"/>
+              <a:t> </a:t>
+            </a:r>
+            <a:r>
+              <a:rPr lang="en-IN" sz="6400" dirty="0" err="1"/>
+              <a:t>SimpleGrantedAuthority</a:t>
+            </a:r>
+            <a:r>
+              <a:rPr lang="en-IN" sz="6400" dirty="0"/>
+              <a:t>(</a:t>
+            </a:r>
+            <a:r>
+              <a:rPr lang="en-IN" sz="6400" dirty="0" err="1"/>
+              <a:t>eachRole.getRoleName</a:t>
+            </a:r>
+            <a:r>
+              <a:rPr lang="en-IN" sz="6400" dirty="0"/>
+              <a:t>()))</a:t>
+            </a:r>
+          </a:p>
+          <a:p>
+            <a:pPr marL="914400" lvl="2" indent="0">
+              <a:buNone/>
+            </a:pPr>
+            <a:r>
+              <a:rPr lang="en-IN" sz="6400" dirty="0"/>
+              <a:t>	.</a:t>
+            </a:r>
+            <a:r>
+              <a:rPr lang="en-IN" sz="6400" dirty="0" err="1"/>
+              <a:t>toList</a:t>
+            </a:r>
+            <a:r>
+              <a:rPr lang="en-IN" sz="6400" dirty="0"/>
+              <a:t>())</a:t>
+            </a:r>
+          </a:p>
+          <a:p>
+            <a:pPr marL="914400" lvl="2" indent="0">
+              <a:buNone/>
+            </a:pPr>
+            <a:r>
+              <a:rPr lang="en-IN" sz="6400" dirty="0"/>
+              <a:t>	.build();</a:t>
+            </a:r>
+          </a:p>
+          <a:p>
+            <a:pPr marL="0" indent="0">
+              <a:buNone/>
+            </a:pPr>
+            <a:r>
+              <a:rPr lang="en-IN" sz="6400" dirty="0"/>
+              <a:t>          }</a:t>
+            </a:r>
+          </a:p>
+          <a:p>
+            <a:pPr marL="0" indent="0">
+              <a:buNone/>
+            </a:pPr>
+            <a:r>
+              <a:rPr lang="en-IN" sz="6400" dirty="0"/>
+              <a:t>}</a:t>
+            </a:r>
+          </a:p>
+          <a:p>
+            <a:endParaRPr lang="en-IN" dirty="0"/>
+          </a:p>
+        </p:txBody>
+      </p:sp>
+    </p:spTree>
+    <p:extLst>
+      <p:ext uri="{BB962C8B-B14F-4D97-AF65-F5344CB8AC3E}">
+        <p14:creationId xmlns:p14="http://schemas.microsoft.com/office/powerpoint/2010/main" val="1626678947"/>
+      </p:ext>
+    </p:extLst>
+  </p:cSld>
+  <p:clrMapOvr>
+    <a:masterClrMapping/>
+  </p:clrMapOvr>
+</p:sld>
+</file>
+
+<file path=ppt/slides/slide13.xml><?xml version="1.0" encoding="utf-8"?>
+<p:sld xmlns:a="http://schemas.openxmlformats.org/drawingml/2006/main" xmlns:r="http://schemas.openxmlformats.org/officeDocument/2006/relationships" xmlns:p="http://schemas.openxmlformats.org/presentationml/2006/main">
+  <p:cSld>
+    <p:spTree>
+      <p:nvGrpSpPr>
+        <p:cNvPr id="1" name=""/>
+        <p:cNvGrpSpPr/>
+        <p:nvPr/>
+      </p:nvGrpSpPr>
+      <p:grpSpPr>
+        <a:xfrm>
+          <a:off x="0" y="0"/>
+          <a:ext cx="0" cy="0"/>
+          <a:chOff x="0" y="0"/>
+          <a:chExt cx="0" cy="0"/>
+        </a:xfrm>
+      </p:grpSpPr>
+      <p:sp>
+        <p:nvSpPr>
+          <p:cNvPr id="2" name="Title 1">
+            <a:extLst>
+              <a:ext uri="{FF2B5EF4-FFF2-40B4-BE49-F238E27FC236}">
+                <a16:creationId xmlns:a16="http://schemas.microsoft.com/office/drawing/2014/main" id="{8F880CDD-30C7-4B9D-96D4-8335872BB8C8}"/>
+              </a:ext>
+            </a:extLst>
+          </p:cNvPr>
+          <p:cNvSpPr>
+            <a:spLocks noGrp="1"/>
+          </p:cNvSpPr>
+          <p:nvPr>
+            <p:ph type="title"/>
+          </p:nvPr>
+        </p:nvSpPr>
+        <p:spPr/>
+        <p:txBody>
+          <a:bodyPr/>
+          <a:lstStyle/>
+          <a:p>
+            <a:r>
+              <a:rPr lang="en-US" dirty="0"/>
+              <a:t>Step 11 : Exposing the </a:t>
+            </a:r>
+            <a:r>
+              <a:rPr lang="en-US" dirty="0" err="1"/>
+              <a:t>AuthenticationManager</a:t>
+            </a:r>
+            <a:endParaRPr lang="en-IN" dirty="0"/>
+          </a:p>
+        </p:txBody>
+      </p:sp>
+      <p:sp>
+        <p:nvSpPr>
+          <p:cNvPr id="3" name="Content Placeholder 2">
+            <a:extLst>
+              <a:ext uri="{FF2B5EF4-FFF2-40B4-BE49-F238E27FC236}">
+                <a16:creationId xmlns:a16="http://schemas.microsoft.com/office/drawing/2014/main" id="{93B60534-44C9-4603-8191-D49251D5932B}"/>
+              </a:ext>
+            </a:extLst>
+          </p:cNvPr>
+          <p:cNvSpPr>
+            <a:spLocks noGrp="1"/>
+          </p:cNvSpPr>
+          <p:nvPr>
+            <p:ph sz="half" idx="1"/>
+          </p:nvPr>
+        </p:nvSpPr>
+        <p:spPr/>
+        <p:txBody>
+          <a:bodyPr>
+            <a:normAutofit fontScale="25000" lnSpcReduction="20000"/>
+          </a:bodyPr>
+          <a:lstStyle/>
+          <a:p>
+            <a:r>
+              <a:rPr lang="en-US" sz="8000" dirty="0"/>
+              <a:t>Spring Security 7 drops old configuration wrappers. </a:t>
+            </a:r>
+          </a:p>
+          <a:p>
+            <a:r>
+              <a:rPr lang="en-US" sz="8000" dirty="0"/>
+              <a:t>You must explicitly register the `</a:t>
+            </a:r>
+            <a:r>
+              <a:rPr lang="en-US" sz="8000" dirty="0" err="1"/>
+              <a:t>AuthenticationManager</a:t>
+            </a:r>
+            <a:r>
+              <a:rPr lang="en-US" sz="8000" dirty="0"/>
+              <a:t>` bean to handle programmatic login tasks manually.</a:t>
+            </a:r>
+          </a:p>
+          <a:p>
+            <a:pPr marL="0" indent="0">
+              <a:buNone/>
+            </a:pPr>
+            <a:r>
+              <a:rPr lang="en-IN" sz="8000" dirty="0"/>
+              <a:t>@Configuration</a:t>
+            </a:r>
+          </a:p>
+          <a:p>
+            <a:pPr marL="0" indent="0">
+              <a:buNone/>
+            </a:pPr>
+            <a:r>
+              <a:rPr lang="en-IN" sz="8000" dirty="0"/>
+              <a:t>@</a:t>
+            </a:r>
+            <a:r>
+              <a:rPr lang="en-IN" sz="8000" dirty="0" err="1"/>
+              <a:t>EnableWebSecurity</a:t>
+            </a:r>
+            <a:endParaRPr lang="en-IN" sz="8000" dirty="0"/>
+          </a:p>
+          <a:p>
+            <a:pPr marL="0" indent="0">
+              <a:buNone/>
+            </a:pPr>
+            <a:r>
+              <a:rPr lang="en-IN" sz="8000" b="1" dirty="0"/>
+              <a:t>public</a:t>
+            </a:r>
+            <a:r>
+              <a:rPr lang="en-IN" sz="8000" dirty="0"/>
+              <a:t> </a:t>
+            </a:r>
+            <a:r>
+              <a:rPr lang="en-IN" sz="8000" b="1" dirty="0"/>
+              <a:t>class</a:t>
+            </a:r>
+            <a:r>
+              <a:rPr lang="en-IN" sz="8000" dirty="0"/>
+              <a:t> </a:t>
+            </a:r>
+            <a:r>
+              <a:rPr lang="en-IN" sz="8000" dirty="0" err="1"/>
+              <a:t>SecurityConfig</a:t>
+            </a:r>
+            <a:r>
+              <a:rPr lang="en-IN" sz="8000" dirty="0"/>
+              <a:t> {</a:t>
+            </a:r>
+            <a:br>
+              <a:rPr lang="en-IN" sz="8000" dirty="0"/>
+            </a:br>
+            <a:endParaRPr lang="en-IN" sz="8000" dirty="0"/>
+          </a:p>
+          <a:p>
+            <a:pPr marL="0" indent="0">
+              <a:buNone/>
+            </a:pPr>
+            <a:r>
+              <a:rPr lang="en-IN" sz="8000" dirty="0"/>
+              <a:t>@Bean</a:t>
+            </a:r>
+          </a:p>
+          <a:p>
+            <a:pPr marL="0" indent="0">
+              <a:buNone/>
+            </a:pPr>
+            <a:r>
+              <a:rPr lang="en-IN" sz="8000" b="1" dirty="0"/>
+              <a:t>public</a:t>
+            </a:r>
+            <a:r>
+              <a:rPr lang="en-IN" sz="8000" dirty="0"/>
+              <a:t> </a:t>
+            </a:r>
+            <a:r>
+              <a:rPr lang="en-IN" sz="8000" dirty="0" err="1"/>
+              <a:t>AuthenticationManager</a:t>
+            </a:r>
+            <a:r>
+              <a:rPr lang="en-IN" sz="8000" dirty="0"/>
+              <a:t> </a:t>
+            </a:r>
+            <a:r>
+              <a:rPr lang="en-IN" sz="8000" dirty="0" err="1"/>
+              <a:t>authenticationManager</a:t>
+            </a:r>
+            <a:r>
+              <a:rPr lang="en-IN" sz="8000" dirty="0"/>
+              <a:t>(</a:t>
+            </a:r>
+          </a:p>
+          <a:p>
+            <a:pPr marL="0" indent="0">
+              <a:buNone/>
+            </a:pPr>
+            <a:r>
+              <a:rPr lang="en-IN" sz="8000" dirty="0" err="1"/>
+              <a:t>UserDetailsService</a:t>
+            </a:r>
+            <a:r>
+              <a:rPr lang="en-IN" sz="8000" dirty="0"/>
+              <a:t> </a:t>
+            </a:r>
+            <a:r>
+              <a:rPr lang="en-IN" sz="8000" dirty="0" err="1"/>
+              <a:t>userDetailsService</a:t>
+            </a:r>
+            <a:r>
+              <a:rPr lang="en-IN" sz="8000" dirty="0"/>
+              <a:t>,</a:t>
+            </a:r>
+          </a:p>
+          <a:p>
+            <a:pPr marL="0" indent="0">
+              <a:buNone/>
+            </a:pPr>
+            <a:r>
+              <a:rPr lang="en-IN" sz="8000" dirty="0" err="1"/>
+              <a:t>PasswordEncoder</a:t>
+            </a:r>
+            <a:r>
+              <a:rPr lang="en-IN" sz="8000" dirty="0"/>
+              <a:t> </a:t>
+            </a:r>
+            <a:r>
+              <a:rPr lang="en-IN" sz="8000" dirty="0" err="1"/>
+              <a:t>passwordEncoder</a:t>
+            </a:r>
+            <a:r>
+              <a:rPr lang="en-IN" sz="8000" dirty="0"/>
+              <a:t>) {</a:t>
+            </a:r>
+          </a:p>
+          <a:p>
+            <a:pPr marL="0" indent="0">
+              <a:buNone/>
+            </a:pPr>
+            <a:r>
+              <a:rPr lang="en-IN" sz="8000" dirty="0" err="1"/>
+              <a:t>DaoAuthenticationProvider</a:t>
+            </a:r>
+            <a:r>
+              <a:rPr lang="en-IN" sz="8000" dirty="0"/>
+              <a:t> provider = </a:t>
+            </a:r>
+            <a:r>
+              <a:rPr lang="en-IN" sz="8000" b="1" dirty="0"/>
+              <a:t>new</a:t>
+            </a:r>
+            <a:r>
+              <a:rPr lang="en-IN" sz="8000" dirty="0"/>
+              <a:t> </a:t>
+            </a:r>
+            <a:r>
+              <a:rPr lang="en-IN" sz="8000" dirty="0" err="1"/>
+              <a:t>DaoAuthenticationProvider</a:t>
+            </a:r>
+            <a:r>
+              <a:rPr lang="en-IN" sz="8000" dirty="0"/>
+              <a:t>(</a:t>
+            </a:r>
+            <a:r>
+              <a:rPr lang="en-IN" sz="8000" dirty="0" err="1"/>
+              <a:t>userDetailsService</a:t>
+            </a:r>
+            <a:r>
+              <a:rPr lang="en-IN" sz="8000" dirty="0"/>
+              <a:t>);</a:t>
+            </a:r>
+          </a:p>
+          <a:p>
+            <a:endParaRPr lang="en-IN" dirty="0"/>
+          </a:p>
+        </p:txBody>
+      </p:sp>
+      <p:sp>
+        <p:nvSpPr>
+          <p:cNvPr id="4" name="Content Placeholder 3">
+            <a:extLst>
+              <a:ext uri="{FF2B5EF4-FFF2-40B4-BE49-F238E27FC236}">
+                <a16:creationId xmlns:a16="http://schemas.microsoft.com/office/drawing/2014/main" id="{23735B9E-FF88-4D67-99F2-71EB40DB4082}"/>
+              </a:ext>
+            </a:extLst>
+          </p:cNvPr>
+          <p:cNvSpPr>
+            <a:spLocks noGrp="1"/>
+          </p:cNvSpPr>
+          <p:nvPr>
+            <p:ph sz="half" idx="2"/>
+          </p:nvPr>
+        </p:nvSpPr>
+        <p:spPr/>
+        <p:txBody>
+          <a:bodyPr>
+            <a:normAutofit fontScale="25000" lnSpcReduction="20000"/>
+          </a:bodyPr>
+          <a:lstStyle/>
+          <a:p>
+            <a:pPr marL="0" indent="0">
+              <a:buNone/>
+            </a:pPr>
+            <a:r>
+              <a:rPr lang="en-IN" sz="8000" dirty="0"/>
+              <a:t>//</a:t>
+            </a:r>
+            <a:r>
+              <a:rPr lang="en-IN" sz="8000" dirty="0" err="1"/>
+              <a:t>provider.setUserDetailsService</a:t>
+            </a:r>
+            <a:r>
+              <a:rPr lang="en-IN" sz="8000" dirty="0"/>
+              <a:t>(</a:t>
+            </a:r>
+            <a:r>
+              <a:rPr lang="en-IN" sz="8000" dirty="0" err="1"/>
+              <a:t>userDetailsService</a:t>
+            </a:r>
+            <a:r>
+              <a:rPr lang="en-IN" sz="8000" dirty="0"/>
+              <a:t>);</a:t>
+            </a:r>
+          </a:p>
+          <a:p>
+            <a:pPr marL="0" indent="0">
+              <a:buNone/>
+            </a:pPr>
+            <a:r>
+              <a:rPr lang="en-IN" sz="8000" dirty="0" err="1"/>
+              <a:t>provider.setPasswordEncoder</a:t>
+            </a:r>
+            <a:r>
+              <a:rPr lang="en-IN" sz="8000" dirty="0"/>
+              <a:t>(</a:t>
+            </a:r>
+            <a:r>
+              <a:rPr lang="en-IN" sz="8000" dirty="0" err="1"/>
+              <a:t>passwordEncoder</a:t>
+            </a:r>
+            <a:r>
+              <a:rPr lang="en-IN" sz="8000" dirty="0"/>
+              <a:t>);</a:t>
+            </a:r>
+          </a:p>
+          <a:p>
+            <a:pPr marL="0" indent="0">
+              <a:buNone/>
+            </a:pPr>
+            <a:r>
+              <a:rPr lang="en-IN" sz="8000" b="1" dirty="0"/>
+              <a:t>return</a:t>
+            </a:r>
+            <a:r>
+              <a:rPr lang="en-IN" sz="8000" dirty="0"/>
+              <a:t> </a:t>
+            </a:r>
+            <a:r>
+              <a:rPr lang="en-IN" sz="8000" b="1" dirty="0"/>
+              <a:t>new</a:t>
+            </a:r>
+            <a:r>
+              <a:rPr lang="en-IN" sz="8000" dirty="0"/>
+              <a:t> </a:t>
+            </a:r>
+            <a:r>
+              <a:rPr lang="en-IN" sz="8000" dirty="0" err="1"/>
+              <a:t>ProviderManager</a:t>
+            </a:r>
+            <a:r>
+              <a:rPr lang="en-IN" sz="8000" dirty="0"/>
+              <a:t>(provider);</a:t>
+            </a:r>
+          </a:p>
+          <a:p>
+            <a:pPr marL="0" indent="0">
+              <a:buNone/>
+            </a:pPr>
+            <a:r>
+              <a:rPr lang="en-IN" sz="8000" dirty="0"/>
+              <a:t>}</a:t>
+            </a:r>
+            <a:br>
+              <a:rPr lang="en-IN" sz="8000" dirty="0"/>
+            </a:br>
+            <a:endParaRPr lang="en-IN" sz="8000" dirty="0"/>
+          </a:p>
+          <a:p>
+            <a:pPr marL="0" indent="0">
+              <a:buNone/>
+            </a:pPr>
+            <a:r>
+              <a:rPr lang="en-IN" sz="8000" dirty="0"/>
+              <a:t>@Bean</a:t>
+            </a:r>
+          </a:p>
+          <a:p>
+            <a:pPr marL="0" indent="0">
+              <a:buNone/>
+            </a:pPr>
+            <a:r>
+              <a:rPr lang="en-IN" sz="8000" b="1" dirty="0"/>
+              <a:t>public</a:t>
+            </a:r>
+            <a:r>
+              <a:rPr lang="en-IN" sz="8000" dirty="0"/>
+              <a:t> </a:t>
+            </a:r>
+            <a:r>
+              <a:rPr lang="en-IN" sz="8000" dirty="0" err="1"/>
+              <a:t>PasswordEncoder</a:t>
+            </a:r>
+            <a:r>
+              <a:rPr lang="en-IN" sz="8000" dirty="0"/>
+              <a:t> </a:t>
+            </a:r>
+            <a:r>
+              <a:rPr lang="en-IN" sz="8000" dirty="0" err="1"/>
+              <a:t>passwordEncoder</a:t>
+            </a:r>
+            <a:r>
+              <a:rPr lang="en-IN" sz="8000" dirty="0"/>
+              <a:t>() {</a:t>
+            </a:r>
+          </a:p>
+          <a:p>
+            <a:pPr marL="0" indent="0">
+              <a:buNone/>
+            </a:pPr>
+            <a:r>
+              <a:rPr lang="en-IN" sz="8000" b="1" dirty="0"/>
+              <a:t>return</a:t>
+            </a:r>
+            <a:r>
+              <a:rPr lang="en-IN" sz="8000" dirty="0"/>
+              <a:t> </a:t>
+            </a:r>
+            <a:r>
+              <a:rPr lang="en-IN" sz="8000" b="1" dirty="0"/>
+              <a:t>new</a:t>
+            </a:r>
+            <a:r>
+              <a:rPr lang="en-IN" sz="8000" dirty="0"/>
+              <a:t> </a:t>
+            </a:r>
+            <a:r>
+              <a:rPr lang="en-IN" sz="8000" dirty="0" err="1"/>
+              <a:t>BCryptPasswordEncoder</a:t>
+            </a:r>
+            <a:r>
+              <a:rPr lang="en-IN" sz="8000" dirty="0"/>
+              <a:t>(); // Hashing algorithm bean</a:t>
+            </a:r>
+          </a:p>
+          <a:p>
+            <a:pPr marL="0" indent="0">
+              <a:buNone/>
+            </a:pPr>
+            <a:r>
+              <a:rPr lang="en-IN" sz="8000" dirty="0"/>
+              <a:t>}</a:t>
+            </a:r>
+          </a:p>
+          <a:p>
+            <a:pPr marL="0" indent="0">
+              <a:buNone/>
+            </a:pPr>
+            <a:r>
+              <a:rPr lang="en-IN" sz="8000" dirty="0"/>
+              <a:t>}</a:t>
+            </a:r>
+          </a:p>
+          <a:p>
+            <a:endParaRPr lang="en-IN" dirty="0"/>
+          </a:p>
+        </p:txBody>
+      </p:sp>
+    </p:spTree>
+    <p:extLst>
+      <p:ext uri="{BB962C8B-B14F-4D97-AF65-F5344CB8AC3E}">
+        <p14:creationId xmlns:p14="http://schemas.microsoft.com/office/powerpoint/2010/main" val="3486115344"/>
+      </p:ext>
+    </p:extLst>
+  </p:cSld>
+  <p:clrMapOvr>
+    <a:masterClrMapping/>
+  </p:clrMapOvr>
+</p:sld>
+</file>
+
+<file path=ppt/slides/slide14.xml><?xml version="1.0" encoding="utf-8"?>
+<p:sld xmlns:a="http://schemas.openxmlformats.org/drawingml/2006/main" xmlns:r="http://schemas.openxmlformats.org/officeDocument/2006/relationships" xmlns:p="http://schemas.openxmlformats.org/presentationml/2006/main">
+  <p:cSld>
+    <p:spTree>
+      <p:nvGrpSpPr>
+        <p:cNvPr id="1" name=""/>
+        <p:cNvGrpSpPr/>
+        <p:nvPr/>
+      </p:nvGrpSpPr>
+      <p:grpSpPr>
+        <a:xfrm>
+          <a:off x="0" y="0"/>
+          <a:ext cx="0" cy="0"/>
+          <a:chOff x="0" y="0"/>
+          <a:chExt cx="0" cy="0"/>
+        </a:xfrm>
+      </p:grpSpPr>
+      <p:sp>
+        <p:nvSpPr>
+          <p:cNvPr id="2" name="Title 1">
+            <a:extLst>
+              <a:ext uri="{FF2B5EF4-FFF2-40B4-BE49-F238E27FC236}">
+                <a16:creationId xmlns:a16="http://schemas.microsoft.com/office/drawing/2014/main" id="{07516F82-3667-401F-B46E-8114661CFF58}"/>
+              </a:ext>
+            </a:extLst>
+          </p:cNvPr>
+          <p:cNvSpPr>
+            <a:spLocks noGrp="1"/>
+          </p:cNvSpPr>
+          <p:nvPr>
+            <p:ph type="title"/>
+          </p:nvPr>
+        </p:nvSpPr>
+        <p:spPr/>
+        <p:txBody>
+          <a:bodyPr/>
+          <a:lstStyle/>
+          <a:p>
+            <a:r>
+              <a:rPr lang="en-US" dirty="0"/>
+              <a:t>Step 12 : </a:t>
+            </a:r>
+            <a:r>
+              <a:rPr lang="en-US" dirty="0" err="1"/>
+              <a:t>SecurityFulterChain</a:t>
+            </a:r>
+            <a:r>
+              <a:rPr lang="en-US" dirty="0"/>
+              <a:t> Configuration</a:t>
+            </a:r>
+            <a:endParaRPr lang="en-IN" dirty="0"/>
+          </a:p>
+        </p:txBody>
+      </p:sp>
+      <p:sp>
+        <p:nvSpPr>
+          <p:cNvPr id="5" name="Content Placeholder 4">
+            <a:extLst>
+              <a:ext uri="{FF2B5EF4-FFF2-40B4-BE49-F238E27FC236}">
+                <a16:creationId xmlns:a16="http://schemas.microsoft.com/office/drawing/2014/main" id="{2896FB0E-328A-47B4-B779-6F3167AFD334}"/>
+              </a:ext>
+            </a:extLst>
+          </p:cNvPr>
+          <p:cNvSpPr>
+            <a:spLocks noGrp="1"/>
+          </p:cNvSpPr>
+          <p:nvPr>
+            <p:ph idx="1"/>
+          </p:nvPr>
+        </p:nvSpPr>
+        <p:spPr>
+          <a:xfrm>
+            <a:off x="838200" y="1597794"/>
+            <a:ext cx="10515600" cy="5014761"/>
+          </a:xfrm>
+        </p:spPr>
+        <p:txBody>
+          <a:bodyPr>
+            <a:normAutofit fontScale="77500" lnSpcReduction="20000"/>
+          </a:bodyPr>
+          <a:lstStyle/>
+          <a:p>
+            <a:pPr marL="0" indent="0">
+              <a:buNone/>
+            </a:pPr>
+            <a:r>
+              <a:rPr lang="en-IN" sz="3200" dirty="0"/>
+              <a:t>@Bean</a:t>
+            </a:r>
+          </a:p>
+          <a:p>
+            <a:pPr marL="0" indent="0">
+              <a:buNone/>
+            </a:pPr>
+            <a:r>
+              <a:rPr lang="en-IN" sz="3200" b="1" dirty="0"/>
+              <a:t>public</a:t>
+            </a:r>
+            <a:r>
+              <a:rPr lang="en-IN" sz="3200" dirty="0"/>
+              <a:t> </a:t>
+            </a:r>
+            <a:r>
+              <a:rPr lang="en-IN" sz="3200" dirty="0" err="1"/>
+              <a:t>SecurityFilterChain</a:t>
+            </a:r>
+            <a:r>
+              <a:rPr lang="en-IN" sz="3200" dirty="0"/>
+              <a:t> </a:t>
+            </a:r>
+            <a:r>
+              <a:rPr lang="en-IN" sz="3200" dirty="0" err="1"/>
+              <a:t>securityFilterChain</a:t>
+            </a:r>
+            <a:r>
+              <a:rPr lang="en-IN" sz="3200" dirty="0"/>
+              <a:t>(</a:t>
+            </a:r>
+            <a:r>
+              <a:rPr lang="en-IN" sz="3200" dirty="0" err="1"/>
+              <a:t>HttpSecurity</a:t>
+            </a:r>
+            <a:r>
+              <a:rPr lang="en-IN" sz="3200" dirty="0"/>
+              <a:t> http, </a:t>
+            </a:r>
+          </a:p>
+          <a:p>
+            <a:pPr marL="0" indent="0">
+              <a:buNone/>
+            </a:pPr>
+            <a:r>
+              <a:rPr lang="en-IN" sz="3200" dirty="0" err="1"/>
+              <a:t>AuthenticationManager</a:t>
+            </a:r>
+            <a:r>
+              <a:rPr lang="en-IN" sz="3200" dirty="0"/>
+              <a:t> </a:t>
+            </a:r>
+            <a:r>
+              <a:rPr lang="en-IN" sz="3200" dirty="0" err="1"/>
+              <a:t>authManager</a:t>
+            </a:r>
+            <a:r>
+              <a:rPr lang="en-IN" sz="3200" dirty="0"/>
+              <a:t>) </a:t>
+            </a:r>
+            <a:r>
+              <a:rPr lang="en-IN" sz="3200" b="1" dirty="0"/>
+              <a:t>throws</a:t>
+            </a:r>
+            <a:r>
+              <a:rPr lang="en-IN" sz="3200" dirty="0"/>
+              <a:t> Exception {</a:t>
+            </a:r>
+          </a:p>
+          <a:p>
+            <a:pPr marL="457200" lvl="1" indent="0">
+              <a:buNone/>
+            </a:pPr>
+            <a:r>
+              <a:rPr lang="en-IN" sz="2800" b="1" dirty="0"/>
+              <a:t>return</a:t>
+            </a:r>
+            <a:r>
+              <a:rPr lang="en-IN" sz="2800" dirty="0"/>
+              <a:t> http</a:t>
+            </a:r>
+          </a:p>
+          <a:p>
+            <a:pPr marL="457200" lvl="1" indent="0">
+              <a:buNone/>
+            </a:pPr>
+            <a:r>
+              <a:rPr lang="en-IN" sz="2800" dirty="0"/>
+              <a:t>.</a:t>
+            </a:r>
+            <a:r>
+              <a:rPr lang="en-IN" sz="2800" dirty="0" err="1"/>
+              <a:t>csrf</a:t>
+            </a:r>
+            <a:r>
+              <a:rPr lang="en-IN" sz="2800" dirty="0"/>
+              <a:t>(</a:t>
+            </a:r>
+            <a:r>
+              <a:rPr lang="en-IN" sz="2800" dirty="0" err="1"/>
+              <a:t>csrf</a:t>
+            </a:r>
+            <a:r>
+              <a:rPr lang="en-IN" sz="2800" dirty="0"/>
+              <a:t> -&gt; </a:t>
+            </a:r>
+            <a:r>
+              <a:rPr lang="en-IN" sz="2800" dirty="0" err="1"/>
+              <a:t>csrf.disable</a:t>
+            </a:r>
+            <a:r>
+              <a:rPr lang="en-IN" sz="2800" dirty="0"/>
+              <a:t>()) // Safe to disable for strictly </a:t>
+            </a:r>
+            <a:r>
+              <a:rPr lang="en-IN" sz="2800" u="sng" dirty="0"/>
+              <a:t>stateless</a:t>
+            </a:r>
+            <a:r>
+              <a:rPr lang="en-IN" sz="2800" dirty="0"/>
+              <a:t> REST APIs</a:t>
+            </a:r>
+          </a:p>
+          <a:p>
+            <a:pPr marL="457200" lvl="1" indent="0">
+              <a:buNone/>
+            </a:pPr>
+            <a:r>
+              <a:rPr lang="en-IN" sz="2800" dirty="0"/>
+              <a:t>.</a:t>
+            </a:r>
+            <a:r>
+              <a:rPr lang="en-IN" sz="2800" dirty="0" err="1"/>
+              <a:t>sessionManagement</a:t>
+            </a:r>
+            <a:r>
+              <a:rPr lang="en-IN" sz="2800" dirty="0"/>
+              <a:t>(</a:t>
+            </a:r>
+            <a:r>
+              <a:rPr lang="en-IN" sz="2800" dirty="0" err="1"/>
+              <a:t>sm</a:t>
+            </a:r>
+            <a:r>
+              <a:rPr lang="en-IN" sz="2800" dirty="0"/>
+              <a:t> -&gt; </a:t>
+            </a:r>
+            <a:r>
+              <a:rPr lang="en-IN" sz="2800" dirty="0" err="1"/>
+              <a:t>sm.sessionCreationPolicy</a:t>
+            </a:r>
+            <a:r>
+              <a:rPr lang="en-IN" sz="2800" dirty="0"/>
+              <a:t>(</a:t>
+            </a:r>
+            <a:r>
+              <a:rPr lang="en-IN" sz="2800" dirty="0" err="1"/>
+              <a:t>SessionCreationPolicy.</a:t>
+            </a:r>
+            <a:r>
+              <a:rPr lang="en-IN" sz="2800" b="1" i="1" dirty="0" err="1"/>
+              <a:t>STATELESS</a:t>
+            </a:r>
+            <a:r>
+              <a:rPr lang="en-IN" sz="2800" dirty="0"/>
+              <a:t>))</a:t>
+            </a:r>
+          </a:p>
+          <a:p>
+            <a:pPr marL="457200" lvl="1" indent="0">
+              <a:buNone/>
+            </a:pPr>
+            <a:r>
+              <a:rPr lang="en-IN" sz="2800" dirty="0"/>
+              <a:t>.</a:t>
+            </a:r>
+            <a:r>
+              <a:rPr lang="en-IN" sz="2800" dirty="0" err="1"/>
+              <a:t>authorizeHttpRequests</a:t>
+            </a:r>
+            <a:r>
+              <a:rPr lang="en-IN" sz="2800" dirty="0"/>
+              <a:t>(auth -&gt; auth</a:t>
+            </a:r>
+          </a:p>
+          <a:p>
+            <a:pPr marL="457200" lvl="1" indent="0">
+              <a:buNone/>
+            </a:pPr>
+            <a:r>
+              <a:rPr lang="en-IN" sz="2800" dirty="0"/>
+              <a:t>.</a:t>
+            </a:r>
+            <a:r>
+              <a:rPr lang="en-IN" sz="2800" dirty="0" err="1"/>
+              <a:t>requestMatchers</a:t>
+            </a:r>
+            <a:r>
+              <a:rPr lang="en-IN" sz="2800" dirty="0"/>
+              <a:t>("/</a:t>
+            </a:r>
+            <a:r>
+              <a:rPr lang="en-IN" sz="2800" dirty="0" err="1"/>
+              <a:t>api</a:t>
+            </a:r>
+            <a:r>
+              <a:rPr lang="en-IN" sz="2800" dirty="0"/>
+              <a:t>/users/login").</a:t>
+            </a:r>
+            <a:r>
+              <a:rPr lang="en-IN" sz="2800" dirty="0" err="1"/>
+              <a:t>permitAll</a:t>
+            </a:r>
+            <a:r>
+              <a:rPr lang="en-IN" sz="2800" dirty="0"/>
+              <a:t>() // Open login route</a:t>
+            </a:r>
+          </a:p>
+          <a:p>
+            <a:pPr marL="457200" lvl="1" indent="0">
+              <a:buNone/>
+            </a:pPr>
+            <a:r>
+              <a:rPr lang="en-IN" sz="2800" dirty="0"/>
+              <a:t>.</a:t>
+            </a:r>
+            <a:r>
+              <a:rPr lang="en-IN" sz="2800" dirty="0" err="1"/>
+              <a:t>anyRequest</a:t>
+            </a:r>
+            <a:r>
+              <a:rPr lang="en-IN" sz="2800" dirty="0"/>
+              <a:t>().authenticated()</a:t>
+            </a:r>
+          </a:p>
+          <a:p>
+            <a:pPr marL="457200" lvl="1" indent="0">
+              <a:buNone/>
+            </a:pPr>
+            <a:r>
+              <a:rPr lang="en-IN" sz="2800" dirty="0"/>
+              <a:t>)</a:t>
+            </a:r>
+          </a:p>
+          <a:p>
+            <a:pPr marL="457200" lvl="1" indent="0">
+              <a:buNone/>
+            </a:pPr>
+            <a:r>
+              <a:rPr lang="en-IN" sz="2800" dirty="0"/>
+              <a:t>.</a:t>
+            </a:r>
+            <a:r>
+              <a:rPr lang="en-IN" sz="2800" dirty="0" err="1"/>
+              <a:t>authenticationManager</a:t>
+            </a:r>
+            <a:r>
+              <a:rPr lang="en-IN" sz="2800" dirty="0"/>
+              <a:t>(</a:t>
+            </a:r>
+            <a:r>
+              <a:rPr lang="en-IN" sz="2800" dirty="0" err="1"/>
+              <a:t>authManager</a:t>
+            </a:r>
+            <a:r>
+              <a:rPr lang="en-IN" sz="2800" dirty="0"/>
+              <a:t>) // Set custom authentication manager</a:t>
+            </a:r>
+          </a:p>
+          <a:p>
+            <a:pPr marL="457200" lvl="1" indent="0">
+              <a:buNone/>
+            </a:pPr>
+            <a:r>
+              <a:rPr lang="en-IN" sz="2800" dirty="0"/>
+              <a:t>.</a:t>
+            </a:r>
+            <a:r>
+              <a:rPr lang="en-IN" sz="2800" dirty="0" err="1"/>
+              <a:t>httpBasic</a:t>
+            </a:r>
+            <a:r>
+              <a:rPr lang="en-IN" sz="2800" dirty="0"/>
+              <a:t>(</a:t>
+            </a:r>
+            <a:r>
+              <a:rPr lang="en-IN" sz="2800" dirty="0" err="1"/>
+              <a:t>Customizer.</a:t>
+            </a:r>
+            <a:r>
+              <a:rPr lang="en-IN" sz="2800" i="1" dirty="0" err="1"/>
+              <a:t>withDefaults</a:t>
+            </a:r>
+            <a:r>
+              <a:rPr lang="en-IN" sz="2800" dirty="0"/>
+              <a:t>())</a:t>
+            </a:r>
+          </a:p>
+          <a:p>
+            <a:pPr marL="457200" lvl="1" indent="0">
+              <a:buNone/>
+            </a:pPr>
+            <a:r>
+              <a:rPr lang="en-IN" sz="2800" dirty="0"/>
+              <a:t>.build();</a:t>
+            </a:r>
+          </a:p>
+          <a:p>
+            <a:pPr marL="0" indent="0">
+              <a:buNone/>
+            </a:pPr>
+            <a:r>
+              <a:rPr lang="en-IN" sz="3200" dirty="0"/>
+              <a:t>}</a:t>
+            </a:r>
+          </a:p>
+          <a:p>
+            <a:endParaRPr lang="en-IN" dirty="0"/>
+          </a:p>
+        </p:txBody>
+      </p:sp>
+    </p:spTree>
+    <p:extLst>
+      <p:ext uri="{BB962C8B-B14F-4D97-AF65-F5344CB8AC3E}">
+        <p14:creationId xmlns:p14="http://schemas.microsoft.com/office/powerpoint/2010/main" val="3892901182"/>
+      </p:ext>
+    </p:extLst>
+  </p:cSld>
+  <p:clrMapOvr>
+    <a:masterClrMapping/>
+  </p:clrMapOvr>
+</p:sld>
+</file>
+
+<file path=ppt/slides/slide15.xml><?xml version="1.0" encoding="utf-8"?>
+<p:sld xmlns:a="http://schemas.openxmlformats.org/drawingml/2006/main" xmlns:r="http://schemas.openxmlformats.org/officeDocument/2006/relationships" xmlns:p="http://schemas.openxmlformats.org/presentationml/2006/main">
+  <p:cSld>
+    <p:spTree>
+      <p:nvGrpSpPr>
+        <p:cNvPr id="1" name=""/>
+        <p:cNvGrpSpPr/>
+        <p:nvPr/>
+      </p:nvGrpSpPr>
+      <p:grpSpPr>
+        <a:xfrm>
+          <a:off x="0" y="0"/>
+          <a:ext cx="0" cy="0"/>
+          <a:chOff x="0" y="0"/>
+          <a:chExt cx="0" cy="0"/>
+        </a:xfrm>
+      </p:grpSpPr>
+      <p:sp>
+        <p:nvSpPr>
+          <p:cNvPr id="2" name="Title 1">
+            <a:extLst>
+              <a:ext uri="{FF2B5EF4-FFF2-40B4-BE49-F238E27FC236}">
+                <a16:creationId xmlns:a16="http://schemas.microsoft.com/office/drawing/2014/main" id="{49EBFD67-E5DC-404C-91F8-3000F009793B}"/>
+              </a:ext>
+            </a:extLst>
+          </p:cNvPr>
+          <p:cNvSpPr>
+            <a:spLocks noGrp="1"/>
+          </p:cNvSpPr>
+          <p:nvPr>
+            <p:ph type="title"/>
+          </p:nvPr>
+        </p:nvSpPr>
+        <p:spPr/>
+        <p:txBody>
+          <a:bodyPr/>
+          <a:lstStyle/>
+          <a:p>
+            <a:r>
+              <a:rPr lang="en-US" dirty="0"/>
+              <a:t>Step 13 : Create the </a:t>
+            </a:r>
+            <a:r>
+              <a:rPr lang="en-US" dirty="0" err="1"/>
+              <a:t>MyUserController</a:t>
+            </a:r>
+            <a:endParaRPr lang="en-IN" dirty="0"/>
+          </a:p>
+        </p:txBody>
+      </p:sp>
+      <p:sp>
+        <p:nvSpPr>
+          <p:cNvPr id="3" name="Content Placeholder 2">
+            <a:extLst>
+              <a:ext uri="{FF2B5EF4-FFF2-40B4-BE49-F238E27FC236}">
+                <a16:creationId xmlns:a16="http://schemas.microsoft.com/office/drawing/2014/main" id="{02DEF689-D1FB-4DF4-9F07-BD7FED400687}"/>
+              </a:ext>
+            </a:extLst>
+          </p:cNvPr>
+          <p:cNvSpPr>
+            <a:spLocks noGrp="1"/>
+          </p:cNvSpPr>
+          <p:nvPr>
+            <p:ph sz="half" idx="1"/>
+          </p:nvPr>
+        </p:nvSpPr>
+        <p:spPr>
+          <a:xfrm>
+            <a:off x="838200" y="1395663"/>
+            <a:ext cx="5181600" cy="4781300"/>
+          </a:xfrm>
+        </p:spPr>
+        <p:txBody>
+          <a:bodyPr>
+            <a:normAutofit fontScale="32500" lnSpcReduction="20000"/>
+          </a:bodyPr>
+          <a:lstStyle/>
+          <a:p>
+            <a:pPr marL="0" indent="0">
+              <a:buNone/>
+            </a:pPr>
+            <a:r>
+              <a:rPr lang="en-IN" sz="4500" dirty="0"/>
+              <a:t>@</a:t>
+            </a:r>
+            <a:r>
+              <a:rPr lang="en-IN" sz="4500" dirty="0" err="1"/>
+              <a:t>RestController</a:t>
+            </a:r>
+            <a:endParaRPr lang="en-IN" sz="4500" dirty="0"/>
+          </a:p>
+          <a:p>
+            <a:pPr marL="0" indent="0">
+              <a:buNone/>
+            </a:pPr>
+            <a:r>
+              <a:rPr lang="en-IN" sz="4500" dirty="0"/>
+              <a:t>@</a:t>
+            </a:r>
+            <a:r>
+              <a:rPr lang="en-IN" sz="4500" dirty="0" err="1"/>
+              <a:t>RequestMapping</a:t>
+            </a:r>
+            <a:r>
+              <a:rPr lang="en-IN" sz="4500" dirty="0"/>
+              <a:t>("/</a:t>
+            </a:r>
+            <a:r>
+              <a:rPr lang="en-IN" sz="4500" dirty="0" err="1"/>
+              <a:t>api</a:t>
+            </a:r>
+            <a:r>
+              <a:rPr lang="en-IN" sz="4500" dirty="0"/>
+              <a:t>/users")</a:t>
+            </a:r>
+          </a:p>
+          <a:p>
+            <a:pPr marL="0" indent="0">
+              <a:buNone/>
+            </a:pPr>
+            <a:r>
+              <a:rPr lang="en-IN" sz="4500" b="1" dirty="0"/>
+              <a:t>public</a:t>
+            </a:r>
+            <a:r>
+              <a:rPr lang="en-IN" sz="4500" dirty="0"/>
+              <a:t> </a:t>
+            </a:r>
+            <a:r>
+              <a:rPr lang="en-IN" sz="4500" b="1" dirty="0"/>
+              <a:t>class</a:t>
+            </a:r>
+            <a:r>
+              <a:rPr lang="en-IN" sz="4500" dirty="0"/>
+              <a:t> </a:t>
+            </a:r>
+            <a:r>
+              <a:rPr lang="en-IN" sz="4500" dirty="0" err="1"/>
+              <a:t>MyUserController</a:t>
+            </a:r>
+            <a:r>
+              <a:rPr lang="en-IN" sz="4500" dirty="0"/>
+              <a:t> {</a:t>
+            </a:r>
+          </a:p>
+          <a:p>
+            <a:pPr marL="0" indent="0">
+              <a:buNone/>
+            </a:pPr>
+            <a:endParaRPr lang="en-IN" sz="4500" dirty="0"/>
+          </a:p>
+          <a:p>
+            <a:pPr marL="0" indent="0">
+              <a:buNone/>
+            </a:pPr>
+            <a:r>
+              <a:rPr lang="en-IN" sz="4500" dirty="0"/>
+              <a:t>@</a:t>
+            </a:r>
+            <a:r>
+              <a:rPr lang="en-IN" sz="4500" dirty="0" err="1"/>
+              <a:t>Autowired</a:t>
+            </a:r>
+            <a:r>
+              <a:rPr lang="en-IN" sz="4500" dirty="0"/>
+              <a:t> </a:t>
+            </a:r>
+            <a:r>
+              <a:rPr lang="en-IN" sz="4500" b="1" dirty="0"/>
+              <a:t>private</a:t>
+            </a:r>
+            <a:r>
+              <a:rPr lang="en-IN" sz="4500" dirty="0"/>
+              <a:t> </a:t>
+            </a:r>
+            <a:r>
+              <a:rPr lang="en-IN" sz="4500" dirty="0" err="1"/>
+              <a:t>AuthenticationManager</a:t>
+            </a:r>
+            <a:r>
+              <a:rPr lang="en-IN" sz="4500" dirty="0"/>
+              <a:t> </a:t>
+            </a:r>
+            <a:r>
+              <a:rPr lang="en-IN" sz="4500" dirty="0" err="1"/>
+              <a:t>authenticationManager</a:t>
+            </a:r>
+            <a:r>
+              <a:rPr lang="en-IN" sz="4500" dirty="0"/>
+              <a:t>;</a:t>
+            </a:r>
+          </a:p>
+          <a:p>
+            <a:pPr marL="0" indent="0">
+              <a:buNone/>
+            </a:pPr>
+            <a:endParaRPr lang="en-IN" sz="4500" dirty="0"/>
+          </a:p>
+          <a:p>
+            <a:pPr marL="0" indent="0">
+              <a:buNone/>
+            </a:pPr>
+            <a:r>
+              <a:rPr lang="en-IN" sz="4500" dirty="0"/>
+              <a:t>@</a:t>
+            </a:r>
+            <a:r>
+              <a:rPr lang="en-IN" sz="4500" dirty="0" err="1"/>
+              <a:t>PostMapping</a:t>
+            </a:r>
+            <a:r>
+              <a:rPr lang="en-IN" sz="4500" dirty="0"/>
+              <a:t>("/login")</a:t>
+            </a:r>
+          </a:p>
+          <a:p>
+            <a:pPr marL="0" indent="0">
+              <a:buNone/>
+            </a:pPr>
+            <a:r>
+              <a:rPr lang="en-IN" sz="4500" b="1" dirty="0"/>
+              <a:t>public</a:t>
+            </a:r>
+            <a:r>
+              <a:rPr lang="en-IN" sz="4500" dirty="0"/>
+              <a:t> </a:t>
+            </a:r>
+            <a:r>
+              <a:rPr lang="en-IN" sz="4500" dirty="0" err="1"/>
+              <a:t>ResponseEntity</a:t>
+            </a:r>
+            <a:r>
+              <a:rPr lang="en-IN" sz="4500" dirty="0"/>
+              <a:t>&lt;?&gt; login(@</a:t>
+            </a:r>
+            <a:r>
+              <a:rPr lang="en-IN" sz="4500" dirty="0" err="1"/>
+              <a:t>RequestBody</a:t>
+            </a:r>
+            <a:r>
+              <a:rPr lang="en-IN" sz="4500" dirty="0"/>
+              <a:t> </a:t>
+            </a:r>
+            <a:r>
+              <a:rPr lang="en-IN" sz="4500" dirty="0" err="1"/>
+              <a:t>MyUserPojo</a:t>
+            </a:r>
+            <a:r>
+              <a:rPr lang="en-IN" sz="4500" dirty="0"/>
+              <a:t> </a:t>
+            </a:r>
+            <a:r>
+              <a:rPr lang="en-IN" sz="4500" dirty="0" err="1"/>
+              <a:t>userPojo</a:t>
+            </a:r>
+            <a:r>
+              <a:rPr lang="en-IN" sz="4500" dirty="0"/>
+              <a:t>) {</a:t>
+            </a:r>
+          </a:p>
+          <a:p>
+            <a:pPr marL="0" indent="0">
+              <a:buNone/>
+            </a:pPr>
+            <a:r>
+              <a:rPr lang="en-IN" sz="4500" b="1" dirty="0"/>
+              <a:t>try</a:t>
+            </a:r>
+            <a:r>
+              <a:rPr lang="en-IN" sz="4500" dirty="0"/>
+              <a:t> {</a:t>
+            </a:r>
+          </a:p>
+          <a:p>
+            <a:pPr marL="0" indent="0">
+              <a:buNone/>
+            </a:pPr>
+            <a:r>
+              <a:rPr lang="en-IN" sz="4500" dirty="0"/>
+              <a:t>// Step 1: Create unauthenticated token wrapper</a:t>
+            </a:r>
+          </a:p>
+          <a:p>
+            <a:pPr marL="0" indent="0">
+              <a:buNone/>
+            </a:pPr>
+            <a:r>
+              <a:rPr lang="en-IN" sz="4500" dirty="0" err="1"/>
+              <a:t>UsernamePasswordAuthenticationToken</a:t>
+            </a:r>
+            <a:r>
+              <a:rPr lang="en-IN" sz="4500" dirty="0"/>
+              <a:t> </a:t>
+            </a:r>
+            <a:r>
+              <a:rPr lang="en-IN" sz="4500" dirty="0" err="1"/>
+              <a:t>authToken</a:t>
+            </a:r>
+            <a:r>
+              <a:rPr lang="en-IN" sz="4500" dirty="0"/>
+              <a:t> = </a:t>
+            </a:r>
+          </a:p>
+          <a:p>
+            <a:pPr marL="0" indent="0">
+              <a:buNone/>
+            </a:pPr>
+            <a:r>
+              <a:rPr lang="en-IN" sz="4500" b="1" dirty="0"/>
+              <a:t>new</a:t>
+            </a:r>
+            <a:r>
+              <a:rPr lang="en-IN" sz="4500" dirty="0"/>
+              <a:t> </a:t>
+            </a:r>
+            <a:r>
+              <a:rPr lang="en-IN" sz="4500" dirty="0" err="1"/>
+              <a:t>UsernamePasswordAuthenticationToken</a:t>
+            </a:r>
+            <a:r>
+              <a:rPr lang="en-IN" sz="4500" dirty="0"/>
+              <a:t>(</a:t>
+            </a:r>
+            <a:r>
+              <a:rPr lang="en-IN" sz="4500" dirty="0" err="1"/>
+              <a:t>userPojo.getUserName</a:t>
+            </a:r>
+            <a:r>
+              <a:rPr lang="en-IN" sz="4500" dirty="0"/>
+              <a:t>(), </a:t>
+            </a:r>
+            <a:r>
+              <a:rPr lang="en-IN" sz="4500" dirty="0" err="1"/>
+              <a:t>userPojo.getUserPassword</a:t>
+            </a:r>
+            <a:r>
+              <a:rPr lang="en-IN" sz="4500" dirty="0"/>
+              <a:t>());</a:t>
+            </a:r>
+          </a:p>
+          <a:p>
+            <a:endParaRPr lang="en-IN" dirty="0"/>
+          </a:p>
+        </p:txBody>
+      </p:sp>
+      <p:sp>
+        <p:nvSpPr>
+          <p:cNvPr id="4" name="Content Placeholder 3">
+            <a:extLst>
+              <a:ext uri="{FF2B5EF4-FFF2-40B4-BE49-F238E27FC236}">
+                <a16:creationId xmlns:a16="http://schemas.microsoft.com/office/drawing/2014/main" id="{348F0E69-918B-4F89-A4EB-48F45F344029}"/>
+              </a:ext>
+            </a:extLst>
+          </p:cNvPr>
+          <p:cNvSpPr>
+            <a:spLocks noGrp="1"/>
+          </p:cNvSpPr>
+          <p:nvPr>
+            <p:ph sz="half" idx="2"/>
+          </p:nvPr>
+        </p:nvSpPr>
+        <p:spPr>
+          <a:xfrm>
+            <a:off x="6172200" y="1395663"/>
+            <a:ext cx="5181600" cy="5226518"/>
+          </a:xfrm>
+        </p:spPr>
+        <p:txBody>
+          <a:bodyPr>
+            <a:normAutofit fontScale="32500" lnSpcReduction="20000"/>
+          </a:bodyPr>
+          <a:lstStyle/>
+          <a:p>
+            <a:pPr marL="0" indent="0">
+              <a:buNone/>
+            </a:pPr>
+            <a:r>
+              <a:rPr lang="en-IN" sz="4900" dirty="0"/>
+              <a:t>// Step 2: Delegate tracking task to authentication manager engine</a:t>
+            </a:r>
+          </a:p>
+          <a:p>
+            <a:pPr marL="0" indent="0">
+              <a:buNone/>
+            </a:pPr>
+            <a:r>
+              <a:rPr lang="en-IN" sz="4900" dirty="0"/>
+              <a:t>Authentication </a:t>
+            </a:r>
+            <a:r>
+              <a:rPr lang="en-IN" sz="4900" dirty="0" err="1"/>
+              <a:t>authResult</a:t>
+            </a:r>
+            <a:r>
+              <a:rPr lang="en-IN" sz="4900" dirty="0"/>
+              <a:t> = </a:t>
+            </a:r>
+            <a:r>
+              <a:rPr lang="en-IN" sz="4900" dirty="0" err="1"/>
+              <a:t>authenticationManager.authenticate</a:t>
+            </a:r>
+            <a:r>
+              <a:rPr lang="en-IN" sz="4900" dirty="0"/>
+              <a:t>(</a:t>
+            </a:r>
+            <a:r>
+              <a:rPr lang="en-IN" sz="4900" dirty="0" err="1"/>
+              <a:t>authToken</a:t>
+            </a:r>
+            <a:r>
+              <a:rPr lang="en-IN" sz="4900" dirty="0"/>
+              <a:t>);</a:t>
+            </a:r>
+          </a:p>
+          <a:p>
+            <a:pPr marL="0" indent="0">
+              <a:buNone/>
+            </a:pPr>
+            <a:r>
+              <a:rPr lang="en-IN" sz="4900" dirty="0"/>
+              <a:t>// Step 3: Extract successfully verified structural role records</a:t>
+            </a:r>
+          </a:p>
+          <a:p>
+            <a:pPr marL="0" indent="0">
+              <a:buNone/>
+            </a:pPr>
+            <a:r>
+              <a:rPr lang="en-IN" sz="4900" dirty="0"/>
+              <a:t>List&lt;String&gt; roles = </a:t>
+            </a:r>
+            <a:r>
+              <a:rPr lang="en-IN" sz="4900" dirty="0" err="1"/>
+              <a:t>authResult</a:t>
+            </a:r>
+            <a:endParaRPr lang="en-IN" sz="4900" dirty="0"/>
+          </a:p>
+          <a:p>
+            <a:pPr marL="0" indent="0">
+              <a:buNone/>
+            </a:pPr>
+            <a:r>
+              <a:rPr lang="en-IN" sz="4900" dirty="0"/>
+              <a:t>.</a:t>
+            </a:r>
+            <a:r>
+              <a:rPr lang="en-IN" sz="4900" dirty="0" err="1"/>
+              <a:t>getAuthorities</a:t>
+            </a:r>
+            <a:r>
+              <a:rPr lang="en-IN" sz="4900" dirty="0"/>
+              <a:t>()</a:t>
+            </a:r>
+          </a:p>
+          <a:p>
+            <a:pPr marL="0" indent="0">
+              <a:buNone/>
+            </a:pPr>
+            <a:r>
+              <a:rPr lang="en-IN" sz="4900" dirty="0"/>
+              <a:t>.stream()</a:t>
+            </a:r>
+          </a:p>
+          <a:p>
+            <a:pPr marL="0" indent="0">
+              <a:buNone/>
+            </a:pPr>
+            <a:r>
+              <a:rPr lang="en-IN" sz="4900" dirty="0"/>
+              <a:t>.map(</a:t>
+            </a:r>
+            <a:r>
+              <a:rPr lang="en-IN" sz="4900" dirty="0" err="1"/>
+              <a:t>GrantedAuthority</a:t>
+            </a:r>
+            <a:r>
+              <a:rPr lang="en-IN" sz="4900" dirty="0"/>
+              <a:t>::</a:t>
+            </a:r>
+            <a:r>
+              <a:rPr lang="en-IN" sz="4900" dirty="0" err="1"/>
+              <a:t>getAuthority</a:t>
+            </a:r>
+            <a:r>
+              <a:rPr lang="en-IN" sz="4900" dirty="0"/>
+              <a:t>)</a:t>
+            </a:r>
+          </a:p>
+          <a:p>
+            <a:pPr marL="0" indent="0">
+              <a:buNone/>
+            </a:pPr>
+            <a:r>
+              <a:rPr lang="en-IN" sz="4900" dirty="0"/>
+              <a:t>.</a:t>
+            </a:r>
+            <a:r>
+              <a:rPr lang="en-IN" sz="4900" dirty="0" err="1"/>
+              <a:t>toList</a:t>
+            </a:r>
+            <a:r>
+              <a:rPr lang="en-IN" sz="4900" dirty="0"/>
+              <a:t>();</a:t>
+            </a:r>
+          </a:p>
+          <a:p>
+            <a:pPr marL="0" indent="0">
+              <a:buNone/>
+            </a:pPr>
+            <a:r>
+              <a:rPr lang="en-IN" sz="4900" dirty="0" err="1"/>
+              <a:t>userPojo.setAllRoles</a:t>
+            </a:r>
+            <a:r>
+              <a:rPr lang="en-IN" sz="4900" dirty="0"/>
+              <a:t>(roles);</a:t>
+            </a:r>
+          </a:p>
+          <a:p>
+            <a:pPr marL="0" indent="0">
+              <a:buNone/>
+            </a:pPr>
+            <a:r>
+              <a:rPr lang="en-IN" sz="4900" b="1" dirty="0"/>
+              <a:t>return</a:t>
+            </a:r>
+            <a:r>
+              <a:rPr lang="en-IN" sz="4900" dirty="0"/>
+              <a:t> </a:t>
+            </a:r>
+            <a:r>
+              <a:rPr lang="en-IN" sz="4900" dirty="0" err="1"/>
+              <a:t>ResponseEntity.</a:t>
+            </a:r>
+            <a:r>
+              <a:rPr lang="en-IN" sz="4900" i="1" dirty="0" err="1"/>
+              <a:t>ok</a:t>
+            </a:r>
+            <a:r>
+              <a:rPr lang="en-IN" sz="4900" dirty="0"/>
+              <a:t>(</a:t>
+            </a:r>
+            <a:r>
+              <a:rPr lang="en-IN" sz="4900" dirty="0" err="1"/>
+              <a:t>userPojo</a:t>
+            </a:r>
+            <a:r>
+              <a:rPr lang="en-IN" sz="4900" dirty="0"/>
+              <a:t>);</a:t>
+            </a:r>
+          </a:p>
+          <a:p>
+            <a:pPr marL="0" indent="0">
+              <a:buNone/>
+            </a:pPr>
+            <a:r>
+              <a:rPr lang="en-IN" sz="4900" dirty="0"/>
+              <a:t>} </a:t>
+            </a:r>
+            <a:r>
+              <a:rPr lang="en-IN" sz="4900" b="1" dirty="0"/>
+              <a:t>catch</a:t>
+            </a:r>
+            <a:r>
+              <a:rPr lang="en-IN" sz="4900" dirty="0"/>
+              <a:t> (</a:t>
+            </a:r>
+            <a:r>
+              <a:rPr lang="en-IN" sz="4900" dirty="0" err="1"/>
+              <a:t>BadCredentialsException</a:t>
+            </a:r>
+            <a:r>
+              <a:rPr lang="en-IN" sz="4900" dirty="0"/>
+              <a:t> ex) {</a:t>
+            </a:r>
+          </a:p>
+          <a:p>
+            <a:pPr marL="0" indent="0">
+              <a:buNone/>
+            </a:pPr>
+            <a:r>
+              <a:rPr lang="en-IN" sz="4900" b="1" dirty="0"/>
+              <a:t>return</a:t>
+            </a:r>
+            <a:r>
+              <a:rPr lang="en-IN" sz="4900" dirty="0"/>
+              <a:t> </a:t>
+            </a:r>
+            <a:r>
+              <a:rPr lang="en-IN" sz="4900" dirty="0" err="1"/>
+              <a:t>ResponseEntity.</a:t>
+            </a:r>
+            <a:r>
+              <a:rPr lang="en-IN" sz="4900" i="1" dirty="0" err="1"/>
+              <a:t>status</a:t>
+            </a:r>
+            <a:r>
+              <a:rPr lang="en-IN" sz="4900" dirty="0"/>
+              <a:t>(</a:t>
+            </a:r>
+            <a:r>
+              <a:rPr lang="en-IN" sz="4900" dirty="0" err="1"/>
+              <a:t>HttpStatus.</a:t>
+            </a:r>
+            <a:r>
+              <a:rPr lang="en-IN" sz="4900" b="1" i="1" dirty="0" err="1"/>
+              <a:t>UNAUTHORIZED</a:t>
+            </a:r>
+            <a:r>
+              <a:rPr lang="en-IN" sz="4900" dirty="0"/>
+              <a:t>).body("Invalid Username or Password");</a:t>
+            </a:r>
+          </a:p>
+          <a:p>
+            <a:pPr marL="0" indent="0">
+              <a:buNone/>
+            </a:pPr>
+            <a:r>
+              <a:rPr lang="en-IN" sz="4900" dirty="0"/>
+              <a:t>}</a:t>
+            </a:r>
+          </a:p>
+          <a:p>
+            <a:pPr marL="0" indent="0">
+              <a:buNone/>
+            </a:pPr>
+            <a:r>
+              <a:rPr lang="en-IN" sz="4900" dirty="0"/>
+              <a:t>}</a:t>
+            </a:r>
+          </a:p>
+          <a:p>
+            <a:pPr marL="0" indent="0">
+              <a:buNone/>
+            </a:pPr>
+            <a:r>
+              <a:rPr lang="en-IN" sz="4900" dirty="0"/>
+              <a:t>}</a:t>
+            </a:r>
+          </a:p>
+          <a:p>
+            <a:endParaRPr lang="en-IN" dirty="0"/>
+          </a:p>
+        </p:txBody>
+      </p:sp>
+    </p:spTree>
+    <p:extLst>
+      <p:ext uri="{BB962C8B-B14F-4D97-AF65-F5344CB8AC3E}">
+        <p14:creationId xmlns:p14="http://schemas.microsoft.com/office/powerpoint/2010/main" val="1779354759"/>
+      </p:ext>
+    </p:extLst>
+  </p:cSld>
+  <p:clrMapOvr>
+    <a:masterClrMapping/>
+  </p:clrMapOvr>
+</p:sld>
+</file>
+
+<file path=ppt/slides/slide16.xml><?xml version="1.0" encoding="utf-8"?>
+<p:sld xmlns:a="http://schemas.openxmlformats.org/drawingml/2006/main" xmlns:r="http://schemas.openxmlformats.org/officeDocument/2006/relationships" xmlns:p="http://schemas.openxmlformats.org/presentationml/2006/main">
+  <p:cSld>
+    <p:spTree>
+      <p:nvGrpSpPr>
+        <p:cNvPr id="1" name=""/>
+        <p:cNvGrpSpPr/>
+        <p:nvPr/>
+      </p:nvGrpSpPr>
+      <p:grpSpPr>
+        <a:xfrm>
+          <a:off x="0" y="0"/>
+          <a:ext cx="0" cy="0"/>
+          <a:chOff x="0" y="0"/>
+          <a:chExt cx="0" cy="0"/>
+        </a:xfrm>
+      </p:grpSpPr>
+      <p:sp>
+        <p:nvSpPr>
+          <p:cNvPr id="2" name="Title 1">
+            <a:extLst>
+              <a:ext uri="{FF2B5EF4-FFF2-40B4-BE49-F238E27FC236}">
+                <a16:creationId xmlns:a16="http://schemas.microsoft.com/office/drawing/2014/main" id="{72DD0300-7368-4756-8489-AB9A69827836}"/>
+              </a:ext>
+            </a:extLst>
+          </p:cNvPr>
+          <p:cNvSpPr>
+            <a:spLocks noGrp="1"/>
+          </p:cNvSpPr>
+          <p:nvPr>
+            <p:ph type="title"/>
+          </p:nvPr>
+        </p:nvSpPr>
+        <p:spPr/>
+        <p:txBody>
+          <a:bodyPr/>
+          <a:lstStyle/>
+          <a:p>
+            <a:r>
+              <a:rPr lang="en-US"/>
+              <a:t>Step 14 </a:t>
+            </a:r>
+            <a:r>
+              <a:rPr lang="en-US" dirty="0"/>
+              <a:t>: Test the </a:t>
             </a:r>
             <a:r>
               <a:rPr lang="en-US" dirty="0" err="1"/>
@@ -4378,7 +6346,7 @@
           <p:cNvPr id="2" name="Title 1">
             <a:extLst>
               <a:ext uri="{FF2B5EF4-FFF2-40B4-BE49-F238E27FC236}">
-                <a16:creationId xmlns:a16="http://schemas.microsoft.com/office/drawing/2014/main" id="{EF7B03DE-3AA7-47BD-B9ED-DF5745C87F0B}"/>
+                <a16:creationId xmlns:a16="http://schemas.microsoft.com/office/drawing/2014/main" id="{1736DF38-908C-4CA1-B90C-EF765D0303FF}"/>
               </a:ext>
             </a:extLst>
           </p:cNvPr>
@@ -4395,10 +6363,17 @@
           <a:lstStyle/>
           <a:p>
             <a:r>
-              <a:rPr lang="en-US" dirty="0"/>
-              <a:t>Step 2 : Create tables in DB</a:t>
-            </a:r>
-            <a:endParaRPr lang="en-IN" dirty="0"/>
+              <a:rPr lang="en-IN" dirty="0"/>
+              <a:t>Step 2 - Configure username/password in </a:t>
+            </a:r>
+            <a:r>
+              <a:rPr lang="en-IN" dirty="0" err="1"/>
+              <a:t>application.properties</a:t>
+            </a:r>
+            <a:r>
+              <a:rPr lang="en-IN" dirty="0"/>
+              <a:t> files</a:t>
+            </a:r>
           </a:p>
         </p:txBody>
       </p:sp>
@@ -4407,38 +6382,35 @@
           <p:cNvPr id="3" name="Content Placeholder 2">
             <a:extLst>
               <a:ext uri="{FF2B5EF4-FFF2-40B4-BE49-F238E27FC236}">
-                <a16:creationId xmlns:a16="http://schemas.microsoft.com/office/drawing/2014/main" id="{03C2EB59-4066-41DE-808B-483ACAABAA8D}"/>
-              </a:ext>
-            </a:extLst>
-          </p:cNvPr>
-          <p:cNvSpPr>
-            <a:spLocks noGrp="1"/>
-          </p:cNvSpPr>
-          <p:nvPr>
-            <p:ph sz="half" idx="1"/>
+                <a16:creationId xmlns:a16="http://schemas.microsoft.com/office/drawing/2014/main" id="{24E11269-D463-44DA-B0E1-0FED4EBE7944}"/>
+              </a:ext>
+            </a:extLst>
+          </p:cNvPr>
+          <p:cNvSpPr>
+            <a:spLocks noGrp="1"/>
+          </p:cNvSpPr>
+          <p:nvPr>
+            <p:ph idx="1"/>
           </p:nvPr>
         </p:nvSpPr>
         <p:spPr/>
         <p:txBody>
           <a:bodyPr>
-            <a:normAutofit fontScale="62500" lnSpcReduction="20000"/>
+            <a:normAutofit fontScale="92500" lnSpcReduction="20000"/>
           </a:bodyPr>
           <a:lstStyle/>
           <a:p>
-            <a:pPr marL="0" indent="0">
-              <a:buNone/>
-            </a:pPr>
-            <a:r>
-              <a:rPr lang="en-IN" dirty="0"/>
-              <a:t>create table </a:t>
+            <a:r>
+              <a:rPr lang="en-IN" dirty="0"/>
+              <a:t>Now try to configure the user name and password in </a:t>
             </a:r>
             <a:r>
               <a:rPr lang="en-IN" dirty="0" err="1"/>
-              <a:t>my_user_details</a:t>
-            </a:r>
-            <a:r>
-              <a:rPr lang="en-IN" dirty="0"/>
-              <a:t>(	</a:t>
+              <a:t>application.properties</a:t>
+            </a:r>
+            <a:r>
+              <a:rPr lang="en-IN" dirty="0"/>
+              <a:t> file.</a:t>
             </a:r>
           </a:p>
           <a:p>
@@ -4446,577 +6418,70 @@
               <a:buNone/>
             </a:pPr>
             <a:r>
+              <a:rPr lang="en-IN" dirty="0"/>
+              <a:t>spring.security.user.name=test</a:t>
+            </a:r>
+          </a:p>
+          <a:p>
+            <a:pPr marL="457200" lvl="1" indent="0">
+              <a:buNone/>
+            </a:pPr>
+            <a:r>
               <a:rPr lang="en-IN" dirty="0" err="1"/>
-              <a:t>user_id</a:t>
-            </a:r>
-            <a:r>
-              <a:rPr lang="en-IN" dirty="0"/>
-              <a:t> int primary key </a:t>
+              <a:t>spring.security.user.password</a:t>
+            </a:r>
+            <a:r>
+              <a:rPr lang="en-IN" dirty="0"/>
+              <a:t>=test</a:t>
+            </a:r>
+          </a:p>
+          <a:p>
+            <a:r>
+              <a:rPr lang="en-IN" dirty="0"/>
+              <a:t>Now restart the application.</a:t>
+            </a:r>
+          </a:p>
+          <a:p>
+            <a:r>
+              <a:rPr lang="en-IN" dirty="0"/>
+              <a:t>While accessing an endpoint provide username as test and password as test when prompted.</a:t>
+            </a:r>
+          </a:p>
+          <a:p>
+            <a:r>
+              <a:rPr lang="en-IN" dirty="0"/>
+              <a:t>Now you can access all the endpoints.</a:t>
+            </a:r>
+          </a:p>
+          <a:p>
+            <a:r>
+              <a:rPr lang="en-IN" dirty="0"/>
+              <a:t>In </a:t>
             </a:r>
             <a:r>
               <a:rPr lang="en-IN" dirty="0" err="1"/>
-              <a:t>auto_increment</a:t>
-            </a:r>
-            <a:r>
-              <a:rPr lang="en-IN" dirty="0"/>
-              <a:t>,    </a:t>
-            </a:r>
-          </a:p>
-          <a:p>
-            <a:pPr marL="457200" lvl="1" indent="0">
-              <a:buNone/>
-            </a:pPr>
-            <a:r>
-              <a:rPr lang="en-IN" dirty="0" err="1"/>
-              <a:t>user_name</a:t>
-            </a:r>
-            <a:r>
-              <a:rPr lang="en-IN" dirty="0"/>
-              <a:t> varchar(20),    </a:t>
-            </a:r>
-          </a:p>
-          <a:p>
-            <a:pPr marL="457200" lvl="1" indent="0">
-              <a:buNone/>
-            </a:pPr>
-            <a:r>
-              <a:rPr lang="en-IN" dirty="0" err="1"/>
-              <a:t>user_password</a:t>
-            </a:r>
-            <a:r>
-              <a:rPr lang="en-IN" dirty="0"/>
-              <a:t> varchar(20)</a:t>
-            </a:r>
-          </a:p>
-          <a:p>
-            <a:pPr marL="0" indent="0">
-              <a:buNone/>
-            </a:pPr>
-            <a:r>
-              <a:rPr lang="en-IN" dirty="0"/>
-              <a:t>);</a:t>
-            </a:r>
-          </a:p>
-          <a:p>
-            <a:pPr marL="0" indent="0">
-              <a:buNone/>
-            </a:pPr>
-            <a:r>
-              <a:rPr lang="en-IN" dirty="0"/>
-              <a:t>create table </a:t>
-            </a:r>
-            <a:r>
-              <a:rPr lang="en-IN" dirty="0" err="1"/>
-              <a:t>my_role_details</a:t>
-            </a:r>
-            <a:r>
-              <a:rPr lang="en-IN" dirty="0"/>
-              <a:t>(	</a:t>
-            </a:r>
-          </a:p>
-          <a:p>
-            <a:pPr marL="457200" lvl="1" indent="0">
-              <a:buNone/>
-            </a:pPr>
-            <a:r>
-              <a:rPr lang="en-IN" dirty="0" err="1"/>
-              <a:t>role_id</a:t>
-            </a:r>
-            <a:r>
-              <a:rPr lang="en-IN" dirty="0"/>
-              <a:t> int primary key </a:t>
-            </a:r>
-            <a:r>
-              <a:rPr lang="en-IN" dirty="0" err="1"/>
-              <a:t>auto_increment</a:t>
-            </a:r>
-            <a:r>
-              <a:rPr lang="en-IN" dirty="0"/>
-              <a:t>,    </a:t>
-            </a:r>
-          </a:p>
-          <a:p>
-            <a:pPr marL="457200" lvl="1" indent="0">
-              <a:buNone/>
-            </a:pPr>
-            <a:r>
-              <a:rPr lang="en-IN" dirty="0" err="1"/>
-              <a:t>role_name</a:t>
-            </a:r>
-            <a:r>
-              <a:rPr lang="en-IN" dirty="0"/>
-              <a:t> varchar(20)</a:t>
-            </a:r>
-          </a:p>
-          <a:p>
-            <a:pPr marL="0" indent="0">
-              <a:buNone/>
-            </a:pPr>
-            <a:r>
-              <a:rPr lang="en-IN" dirty="0"/>
-              <a:t>);</a:t>
-            </a:r>
-          </a:p>
-          <a:p>
-            <a:pPr marL="0" indent="0">
-              <a:buNone/>
-            </a:pPr>
-            <a:r>
-              <a:rPr lang="en-IN" dirty="0"/>
-              <a:t>create table </a:t>
-            </a:r>
-            <a:r>
-              <a:rPr lang="en-IN" dirty="0" err="1"/>
-              <a:t>my_user_role_details</a:t>
-            </a:r>
-            <a:r>
-              <a:rPr lang="en-IN" dirty="0"/>
-              <a:t>(	</a:t>
-            </a:r>
-          </a:p>
-          <a:p>
-            <a:pPr marL="457200" lvl="1" indent="0">
-              <a:buNone/>
-            </a:pPr>
-            <a:r>
-              <a:rPr lang="en-IN" dirty="0" err="1"/>
-              <a:t>user_role_id</a:t>
-            </a:r>
-            <a:r>
-              <a:rPr lang="en-IN" dirty="0"/>
-              <a:t> int primary key </a:t>
-            </a:r>
-            <a:r>
-              <a:rPr lang="en-IN" dirty="0" err="1"/>
-              <a:t>auto_increment</a:t>
-            </a:r>
-            <a:r>
-              <a:rPr lang="en-IN" dirty="0"/>
-              <a:t>,    </a:t>
-            </a:r>
-          </a:p>
-          <a:p>
-            <a:pPr marL="457200" lvl="1" indent="0">
-              <a:buNone/>
-            </a:pPr>
-            <a:r>
-              <a:rPr lang="en-IN" dirty="0" err="1"/>
-              <a:t>user_id</a:t>
-            </a:r>
-            <a:r>
-              <a:rPr lang="en-IN" dirty="0"/>
-              <a:t> int,    </a:t>
-            </a:r>
-          </a:p>
-          <a:p>
-            <a:pPr marL="457200" lvl="1" indent="0">
-              <a:buNone/>
-            </a:pPr>
-            <a:r>
-              <a:rPr lang="en-IN" dirty="0" err="1"/>
-              <a:t>role_id</a:t>
-            </a:r>
-            <a:r>
-              <a:rPr lang="en-IN" dirty="0"/>
-              <a:t> int,    </a:t>
-            </a:r>
-          </a:p>
-          <a:p>
-            <a:pPr marL="457200" lvl="1" indent="0">
-              <a:buNone/>
-            </a:pPr>
-            <a:r>
-              <a:rPr lang="en-IN" dirty="0"/>
-              <a:t>foreign key(</a:t>
-            </a:r>
-            <a:r>
-              <a:rPr lang="en-IN" dirty="0" err="1"/>
-              <a:t>user_id</a:t>
-            </a:r>
-            <a:r>
-              <a:rPr lang="en-IN" dirty="0"/>
-              <a:t>) references </a:t>
-            </a:r>
-            <a:r>
-              <a:rPr lang="en-IN" dirty="0" err="1"/>
-              <a:t>my_user_details</a:t>
-            </a:r>
-            <a:r>
-              <a:rPr lang="en-IN" dirty="0"/>
-              <a:t>(</a:t>
-            </a:r>
-            <a:r>
-              <a:rPr lang="en-IN" dirty="0" err="1"/>
-              <a:t>user_id</a:t>
-            </a:r>
-            <a:r>
-              <a:rPr lang="en-IN" dirty="0"/>
-              <a:t>),    </a:t>
-            </a:r>
-          </a:p>
-          <a:p>
-            <a:pPr marL="457200" lvl="1" indent="0">
-              <a:buNone/>
-            </a:pPr>
-            <a:r>
-              <a:rPr lang="en-IN" dirty="0"/>
-              <a:t>foreign key(</a:t>
-            </a:r>
-            <a:r>
-              <a:rPr lang="en-IN" dirty="0" err="1"/>
-              <a:t>role_id</a:t>
-            </a:r>
-            <a:r>
-              <a:rPr lang="en-IN" dirty="0"/>
-              <a:t>) references </a:t>
-            </a:r>
-            <a:r>
-              <a:rPr lang="en-IN" dirty="0" err="1"/>
-              <a:t>my_role_details</a:t>
-            </a:r>
-            <a:r>
-              <a:rPr lang="en-IN" dirty="0"/>
-              <a:t>(</a:t>
-            </a:r>
-            <a:r>
-              <a:rPr lang="en-IN" dirty="0" err="1"/>
-              <a:t>role_id</a:t>
-            </a:r>
-            <a:r>
-              <a:rPr lang="en-IN" dirty="0"/>
-              <a:t>)</a:t>
-            </a:r>
-          </a:p>
-          <a:p>
-            <a:pPr marL="0" indent="0">
-              <a:buNone/>
-            </a:pPr>
-            <a:r>
-              <a:rPr lang="en-IN" dirty="0"/>
-              <a:t>);</a:t>
-            </a:r>
-          </a:p>
-        </p:txBody>
-      </p:sp>
-      <p:sp>
-        <p:nvSpPr>
-          <p:cNvPr id="4" name="Content Placeholder 3">
-            <a:extLst>
-              <a:ext uri="{FF2B5EF4-FFF2-40B4-BE49-F238E27FC236}">
-                <a16:creationId xmlns:a16="http://schemas.microsoft.com/office/drawing/2014/main" id="{F3F47A4A-00D3-4062-A4E6-FAF23A5DECEF}"/>
-              </a:ext>
-            </a:extLst>
-          </p:cNvPr>
-          <p:cNvSpPr>
-            <a:spLocks noGrp="1"/>
-          </p:cNvSpPr>
-          <p:nvPr>
-            <p:ph sz="half" idx="2"/>
-          </p:nvPr>
-        </p:nvSpPr>
-        <p:spPr>
-          <a:xfrm>
-            <a:off x="5784783" y="1825625"/>
-            <a:ext cx="6208295" cy="4351338"/>
-          </a:xfrm>
-        </p:spPr>
-        <p:txBody>
-          <a:bodyPr>
-            <a:normAutofit fontScale="62500" lnSpcReduction="20000"/>
-          </a:bodyPr>
-          <a:lstStyle/>
-          <a:p>
-            <a:r>
-              <a:rPr lang="en-IN" dirty="0"/>
-              <a:t>insert into </a:t>
-            </a:r>
-            <a:r>
-              <a:rPr lang="en-IN" dirty="0" err="1"/>
-              <a:t>my_user_details</a:t>
-            </a:r>
-            <a:r>
-              <a:rPr lang="en-IN" dirty="0"/>
-              <a:t>(</a:t>
-            </a:r>
-            <a:r>
-              <a:rPr lang="en-IN" dirty="0" err="1"/>
-              <a:t>user_name</a:t>
-            </a:r>
-            <a:r>
-              <a:rPr lang="en-IN" dirty="0"/>
-              <a:t>, </a:t>
-            </a:r>
-            <a:r>
-              <a:rPr lang="en-IN" dirty="0" err="1"/>
-              <a:t>user_password</a:t>
-            </a:r>
-            <a:r>
-              <a:rPr lang="en-IN" dirty="0"/>
-              <a:t>) values("</a:t>
-            </a:r>
-            <a:r>
-              <a:rPr lang="en-IN" dirty="0" err="1"/>
-              <a:t>admin","admin</a:t>
-            </a:r>
-            <a:r>
-              <a:rPr lang="en-IN" dirty="0"/>
-              <a:t>");</a:t>
-            </a:r>
-          </a:p>
-          <a:p>
-            <a:r>
-              <a:rPr lang="en-IN" dirty="0"/>
-              <a:t>insert into </a:t>
-            </a:r>
-            <a:r>
-              <a:rPr lang="en-IN" dirty="0" err="1"/>
-              <a:t>my_user_details</a:t>
-            </a:r>
-            <a:r>
-              <a:rPr lang="en-IN" dirty="0"/>
-              <a:t>(</a:t>
-            </a:r>
-            <a:r>
-              <a:rPr lang="en-IN" dirty="0" err="1"/>
-              <a:t>user_name</a:t>
-            </a:r>
-            <a:r>
-              <a:rPr lang="en-IN" dirty="0"/>
-              <a:t>, </a:t>
-            </a:r>
-            <a:r>
-              <a:rPr lang="en-IN" dirty="0" err="1"/>
-              <a:t>user_password</a:t>
-            </a:r>
-            <a:r>
-              <a:rPr lang="en-IN" dirty="0"/>
-              <a:t>) values("</a:t>
-            </a:r>
-            <a:r>
-              <a:rPr lang="en-IN" dirty="0" err="1"/>
-              <a:t>john","john</a:t>
-            </a:r>
-            <a:r>
-              <a:rPr lang="en-IN" dirty="0"/>
-              <a:t>");</a:t>
-            </a:r>
-          </a:p>
-          <a:p>
-            <a:r>
-              <a:rPr lang="en-IN" dirty="0"/>
-              <a:t>insert into </a:t>
-            </a:r>
-            <a:r>
-              <a:rPr lang="en-IN" dirty="0" err="1"/>
-              <a:t>my_user_details</a:t>
-            </a:r>
-            <a:r>
-              <a:rPr lang="en-IN" dirty="0"/>
-              <a:t>(</a:t>
-            </a:r>
-            <a:r>
-              <a:rPr lang="en-IN" dirty="0" err="1"/>
-              <a:t>user_name</a:t>
-            </a:r>
-            <a:r>
-              <a:rPr lang="en-IN" dirty="0"/>
-              <a:t>, </a:t>
-            </a:r>
-            <a:r>
-              <a:rPr lang="en-IN" dirty="0" err="1"/>
-              <a:t>user_password</a:t>
-            </a:r>
-            <a:r>
-              <a:rPr lang="en-IN" dirty="0"/>
-              <a:t>) values("</a:t>
-            </a:r>
-            <a:r>
-              <a:rPr lang="en-IN" dirty="0" err="1"/>
-              <a:t>priya</a:t>
-            </a:r>
-            <a:r>
-              <a:rPr lang="en-IN" dirty="0"/>
-              <a:t>","</a:t>
-            </a:r>
-            <a:r>
-              <a:rPr lang="en-IN" dirty="0" err="1"/>
-              <a:t>priya</a:t>
-            </a:r>
-            <a:r>
-              <a:rPr lang="en-IN" dirty="0"/>
-              <a:t>");</a:t>
-            </a:r>
-          </a:p>
-          <a:p>
-            <a:r>
-              <a:rPr lang="en-IN" dirty="0"/>
-              <a:t>insert into </a:t>
-            </a:r>
-            <a:r>
-              <a:rPr lang="en-IN" dirty="0" err="1"/>
-              <a:t>my_role_details</a:t>
-            </a:r>
-            <a:r>
-              <a:rPr lang="en-IN" dirty="0"/>
-              <a:t>(</a:t>
-            </a:r>
-            <a:r>
-              <a:rPr lang="en-IN" dirty="0" err="1"/>
-              <a:t>role_name</a:t>
-            </a:r>
-            <a:r>
-              <a:rPr lang="en-IN" dirty="0"/>
-              <a:t>) values ("ADMIN");</a:t>
-            </a:r>
-          </a:p>
-          <a:p>
-            <a:r>
-              <a:rPr lang="en-IN" dirty="0"/>
-              <a:t>insert into </a:t>
-            </a:r>
-            <a:r>
-              <a:rPr lang="en-IN" dirty="0" err="1"/>
-              <a:t>my_role_details</a:t>
-            </a:r>
-            <a:r>
-              <a:rPr lang="en-IN" dirty="0"/>
-              <a:t>(</a:t>
-            </a:r>
-            <a:r>
-              <a:rPr lang="en-IN" dirty="0" err="1"/>
-              <a:t>role_name</a:t>
-            </a:r>
-            <a:r>
-              <a:rPr lang="en-IN" dirty="0"/>
-              <a:t>) values ("CUSTOMER");</a:t>
-            </a:r>
-          </a:p>
-          <a:p>
-            <a:r>
-              <a:rPr lang="en-IN" dirty="0"/>
-              <a:t>insert into </a:t>
-            </a:r>
-            <a:r>
-              <a:rPr lang="en-IN" dirty="0" err="1"/>
-              <a:t>my_user_role_details</a:t>
-            </a:r>
-            <a:r>
-              <a:rPr lang="en-IN" dirty="0"/>
-              <a:t>(</a:t>
-            </a:r>
-            <a:r>
-              <a:rPr lang="en-IN" dirty="0" err="1"/>
-              <a:t>user_id</a:t>
-            </a:r>
-            <a:r>
-              <a:rPr lang="en-IN" dirty="0"/>
-              <a:t>, </a:t>
-            </a:r>
-            <a:r>
-              <a:rPr lang="en-IN" dirty="0" err="1"/>
-              <a:t>role_id</a:t>
-            </a:r>
-            <a:r>
-              <a:rPr lang="en-IN" dirty="0"/>
-              <a:t>) values(1, 1);</a:t>
-            </a:r>
-          </a:p>
-          <a:p>
-            <a:r>
-              <a:rPr lang="en-IN" dirty="0"/>
-              <a:t>insert into </a:t>
-            </a:r>
-            <a:r>
-              <a:rPr lang="en-IN" dirty="0" err="1"/>
-              <a:t>my_user_role_details</a:t>
-            </a:r>
-            <a:r>
-              <a:rPr lang="en-IN" dirty="0"/>
-              <a:t>(</a:t>
-            </a:r>
-            <a:r>
-              <a:rPr lang="en-IN" dirty="0" err="1"/>
-              <a:t>user_id</a:t>
-            </a:r>
-            <a:r>
-              <a:rPr lang="en-IN" dirty="0"/>
-              <a:t>, </a:t>
-            </a:r>
-            <a:r>
-              <a:rPr lang="en-IN" dirty="0" err="1"/>
-              <a:t>role_id</a:t>
-            </a:r>
-            <a:r>
-              <a:rPr lang="en-IN" dirty="0"/>
-              <a:t>) values(2, 2);</a:t>
-            </a:r>
-          </a:p>
-          <a:p>
-            <a:r>
-              <a:rPr lang="en-IN" dirty="0"/>
-              <a:t>insert into </a:t>
-            </a:r>
-            <a:r>
-              <a:rPr lang="en-IN" dirty="0" err="1"/>
-              <a:t>my_user_role_details</a:t>
-            </a:r>
-            <a:r>
-              <a:rPr lang="en-IN" dirty="0"/>
-              <a:t>(</a:t>
-            </a:r>
-            <a:r>
-              <a:rPr lang="en-IN" dirty="0" err="1"/>
-              <a:t>user_id</a:t>
-            </a:r>
-            <a:r>
-              <a:rPr lang="en-IN" dirty="0"/>
-              <a:t>, </a:t>
-            </a:r>
-            <a:r>
-              <a:rPr lang="en-IN" dirty="0" err="1"/>
-              <a:t>role_id</a:t>
-            </a:r>
-            <a:r>
-              <a:rPr lang="en-IN" dirty="0"/>
-              <a:t>) values(3, 1);</a:t>
-            </a:r>
-          </a:p>
-          <a:p>
-            <a:r>
-              <a:rPr lang="en-IN" dirty="0"/>
-              <a:t>insert into </a:t>
-            </a:r>
-            <a:r>
-              <a:rPr lang="en-IN" dirty="0" err="1"/>
-              <a:t>my_user_role_details</a:t>
-            </a:r>
-            <a:r>
-              <a:rPr lang="en-IN" dirty="0"/>
-              <a:t>(</a:t>
-            </a:r>
-            <a:r>
-              <a:rPr lang="en-IN" dirty="0" err="1"/>
-              <a:t>user_id</a:t>
-            </a:r>
-            <a:r>
-              <a:rPr lang="en-IN" dirty="0"/>
-              <a:t>, </a:t>
-            </a:r>
-            <a:r>
-              <a:rPr lang="en-IN" dirty="0" err="1"/>
-              <a:t>role_id</a:t>
-            </a:r>
-            <a:r>
-              <a:rPr lang="en-IN" dirty="0"/>
-              <a:t>) values(3, 2);</a:t>
-            </a:r>
+              <a:t>application.properties</a:t>
+            </a:r>
+            <a:r>
+              <a:rPr lang="en-IN" dirty="0"/>
+              <a:t> file we can only configure one username and password.</a:t>
+            </a:r>
+          </a:p>
+          <a:p>
+            <a:r>
+              <a:rPr lang="en-IN" dirty="0"/>
+              <a:t>If we need multiple username and password, configure it in a configuration class.</a:t>
+            </a:r>
+          </a:p>
+          <a:p>
+            <a:endParaRPr lang="en-IN" dirty="0"/>
           </a:p>
         </p:txBody>
       </p:sp>
     </p:spTree>
     <p:extLst>
       <p:ext uri="{BB962C8B-B14F-4D97-AF65-F5344CB8AC3E}">
-        <p14:creationId xmlns:p14="http://schemas.microsoft.com/office/powerpoint/2010/main" val="1619040822"/>
+        <p14:creationId xmlns:p14="http://schemas.microsoft.com/office/powerpoint/2010/main" val="4029777180"/>
       </p:ext>
     </p:extLst>
   </p:cSld>
@@ -5048,7 +6513,7 @@
           <p:cNvPr id="2" name="Title 1">
             <a:extLst>
               <a:ext uri="{FF2B5EF4-FFF2-40B4-BE49-F238E27FC236}">
-                <a16:creationId xmlns:a16="http://schemas.microsoft.com/office/drawing/2014/main" id="{BE930EC4-FAEC-42DA-BA07-A0065F8B0905}"/>
+                <a16:creationId xmlns:a16="http://schemas.microsoft.com/office/drawing/2014/main" id="{D5C89B6F-9686-4197-846A-B1205772DAAF}"/>
               </a:ext>
             </a:extLst>
           </p:cNvPr>
@@ -5065,22 +6530,9 @@
           <a:lstStyle/>
           <a:p>
             <a:r>
-              <a:rPr lang="en-US" dirty="0"/>
-              <a:t>Step 3: Create </a:t>
-            </a:r>
-            <a:r>
-              <a:rPr lang="en-US" dirty="0" err="1"/>
-              <a:t>MyUserEntity</a:t>
-            </a:r>
-            <a:r>
-              <a:rPr lang="en-US" dirty="0"/>
-              <a:t> and </a:t>
-            </a:r>
-            <a:r>
-              <a:rPr lang="en-US" dirty="0" err="1"/>
-              <a:t>MyRoleEntity</a:t>
-            </a:r>
-            <a:endParaRPr lang="en-IN" dirty="0"/>
+              <a:rPr lang="en-IN" dirty="0"/>
+              <a:t>Step 3 - Configure username/password in the Configuration class</a:t>
+            </a:r>
           </a:p>
         </p:txBody>
       </p:sp>
@@ -5089,607 +6541,750 @@
           <p:cNvPr id="3" name="Content Placeholder 2">
             <a:extLst>
               <a:ext uri="{FF2B5EF4-FFF2-40B4-BE49-F238E27FC236}">
-                <a16:creationId xmlns:a16="http://schemas.microsoft.com/office/drawing/2014/main" id="{0376C8C4-3C9F-48C0-A02A-2BD9964E6BF6}"/>
-              </a:ext>
-            </a:extLst>
-          </p:cNvPr>
-          <p:cNvSpPr>
-            <a:spLocks noGrp="1"/>
-          </p:cNvSpPr>
-          <p:nvPr>
-            <p:ph sz="half" idx="1"/>
-          </p:nvPr>
-        </p:nvSpPr>
-        <p:spPr>
-          <a:xfrm>
-            <a:off x="838200" y="1825624"/>
-            <a:ext cx="5181600" cy="5032375"/>
-          </a:xfrm>
-        </p:spPr>
+                <a16:creationId xmlns:a16="http://schemas.microsoft.com/office/drawing/2014/main" id="{593A9C6C-4530-4C90-8A22-864D89A9D221}"/>
+              </a:ext>
+            </a:extLst>
+          </p:cNvPr>
+          <p:cNvSpPr>
+            <a:spLocks noGrp="1"/>
+          </p:cNvSpPr>
+          <p:nvPr>
+            <p:ph idx="1"/>
+          </p:nvPr>
+        </p:nvSpPr>
+        <p:spPr/>
         <p:txBody>
           <a:bodyPr>
-            <a:normAutofit fontScale="40000" lnSpcReduction="20000"/>
+            <a:normAutofit fontScale="92500" lnSpcReduction="20000"/>
           </a:bodyPr>
           <a:lstStyle/>
           <a:p>
-            <a:pPr marL="0" indent="0">
-              <a:buNone/>
-            </a:pPr>
-            <a:r>
-              <a:rPr lang="en-US" sz="3400" dirty="0"/>
-              <a:t>@Entity</a:t>
-            </a:r>
-          </a:p>
-          <a:p>
-            <a:pPr marL="0" indent="0">
-              <a:buNone/>
-            </a:pPr>
-            <a:r>
-              <a:rPr lang="en-US" sz="3400" dirty="0"/>
-              <a:t>@Table(name="</a:t>
-            </a:r>
-            <a:r>
-              <a:rPr lang="en-US" sz="3400" dirty="0" err="1"/>
-              <a:t>my_user_details</a:t>
-            </a:r>
-            <a:r>
-              <a:rPr lang="en-US" sz="3400" dirty="0"/>
-              <a:t>")</a:t>
-            </a:r>
-          </a:p>
-          <a:p>
-            <a:pPr marL="0" indent="0">
-              <a:buNone/>
-            </a:pPr>
-            <a:r>
-              <a:rPr lang="en-US" sz="3400" b="1" dirty="0"/>
+            <a:r>
+              <a:rPr lang="en-IN" dirty="0"/>
+              <a:t>Create a class </a:t>
+            </a:r>
+            <a:r>
+              <a:rPr lang="en-IN" dirty="0" err="1"/>
+              <a:t>SecurityConfig</a:t>
+            </a:r>
+            <a:endParaRPr lang="en-IN" dirty="0"/>
+          </a:p>
+          <a:p>
+            <a:r>
+              <a:rPr lang="en-IN" dirty="0"/>
+              <a:t>Annotate it with @Configuration and @</a:t>
+            </a:r>
+            <a:r>
+              <a:rPr lang="en-IN" dirty="0" err="1"/>
+              <a:t>EnableWebSecurity</a:t>
+            </a:r>
+            <a:endParaRPr lang="en-IN" dirty="0"/>
+          </a:p>
+          <a:p>
+            <a:r>
+              <a:rPr lang="en-IN" dirty="0"/>
+              <a:t>Configure </a:t>
+            </a:r>
+            <a:r>
+              <a:rPr lang="en-IN" dirty="0" err="1"/>
+              <a:t>UserDetailsService</a:t>
+            </a:r>
+            <a:r>
+              <a:rPr lang="en-IN" dirty="0"/>
+              <a:t> Bean as follows</a:t>
+            </a:r>
+          </a:p>
+          <a:p>
+            <a:pPr marL="457200" lvl="1" indent="0">
+              <a:spcBef>
+                <a:spcPts val="0"/>
+              </a:spcBef>
+              <a:buNone/>
+            </a:pPr>
+            <a:r>
+              <a:rPr lang="en-IN" sz="1800" dirty="0">
+                <a:solidFill>
+                  <a:srgbClr val="646464"/>
+                </a:solidFill>
+                <a:latin typeface="Courier New" panose="02070309020205020404" pitchFamily="49" charset="0"/>
+              </a:rPr>
+              <a:t>@Bean</a:t>
+            </a:r>
+            <a:endParaRPr lang="en-IN" sz="1800" dirty="0">
+              <a:solidFill>
+                <a:srgbClr val="000000"/>
+              </a:solidFill>
+              <a:latin typeface="Courier New" panose="02070309020205020404" pitchFamily="49" charset="0"/>
+            </a:endParaRPr>
+          </a:p>
+          <a:p>
+            <a:pPr marL="457200" lvl="1" indent="0">
+              <a:spcBef>
+                <a:spcPts val="0"/>
+              </a:spcBef>
+              <a:buNone/>
+            </a:pPr>
+            <a:r>
+              <a:rPr lang="en-IN" sz="1800" b="1" dirty="0">
+                <a:solidFill>
+                  <a:srgbClr val="7F0055"/>
+                </a:solidFill>
+                <a:latin typeface="Courier New" panose="02070309020205020404" pitchFamily="49" charset="0"/>
+              </a:rPr>
               <a:t>public</a:t>
             </a:r>
             <a:r>
-              <a:rPr lang="en-US" sz="3400" dirty="0"/>
+              <a:rPr lang="en-IN" sz="1800" dirty="0">
+                <a:solidFill>
+                  <a:srgbClr val="000000"/>
+                </a:solidFill>
+                <a:latin typeface="Courier New" panose="02070309020205020404" pitchFamily="49" charset="0"/>
+              </a:rPr>
               <a:t> </a:t>
             </a:r>
             <a:r>
-              <a:rPr lang="en-US" sz="3400" b="1" dirty="0"/>
-              <a:t>class</a:t>
-            </a:r>
-            <a:r>
-              <a:rPr lang="en-US" sz="3400" dirty="0"/>
+              <a:rPr lang="en-IN" sz="1800" dirty="0" err="1">
+                <a:solidFill>
+                  <a:srgbClr val="000000"/>
+                </a:solidFill>
+                <a:latin typeface="Courier New" panose="02070309020205020404" pitchFamily="49" charset="0"/>
+              </a:rPr>
+              <a:t>UserDetailsService</a:t>
+            </a:r>
+            <a:r>
+              <a:rPr lang="en-IN" sz="1800" dirty="0">
+                <a:solidFill>
+                  <a:srgbClr val="000000"/>
+                </a:solidFill>
+                <a:latin typeface="Courier New" panose="02070309020205020404" pitchFamily="49" charset="0"/>
+              </a:rPr>
               <a:t> </a:t>
             </a:r>
             <a:r>
-              <a:rPr lang="en-US" sz="3400" dirty="0" err="1"/>
-              <a:t>MyUserEntity</a:t>
-            </a:r>
-            <a:r>
-              <a:rPr lang="en-US" sz="3400" dirty="0"/>
-              <a:t> {</a:t>
-            </a:r>
-          </a:p>
-          <a:p>
-            <a:pPr marL="0" indent="0">
-              <a:buNone/>
-            </a:pPr>
-            <a:r>
-              <a:rPr lang="en-US" sz="3400" dirty="0"/>
-              <a:t>@Id</a:t>
-            </a:r>
-          </a:p>
-          <a:p>
-            <a:pPr marL="0" indent="0">
-              <a:buNone/>
-            </a:pPr>
-            <a:r>
-              <a:rPr lang="en-US" sz="3400" dirty="0"/>
-              <a:t>@</a:t>
-            </a:r>
-            <a:r>
-              <a:rPr lang="en-US" sz="3400" dirty="0" err="1"/>
-              <a:t>GeneratedValue</a:t>
-            </a:r>
-            <a:r>
-              <a:rPr lang="en-US" sz="3400" dirty="0"/>
-              <a:t>(strategy = </a:t>
-            </a:r>
-            <a:r>
-              <a:rPr lang="en-US" sz="3400" dirty="0" err="1"/>
-              <a:t>GenerationType.</a:t>
-            </a:r>
-            <a:r>
-              <a:rPr lang="en-US" sz="3400" b="1" i="1" dirty="0" err="1"/>
-              <a:t>IDENTITY</a:t>
-            </a:r>
-            <a:r>
-              <a:rPr lang="en-US" sz="3400" dirty="0"/>
+              <a:rPr lang="en-IN" sz="1800" dirty="0" err="1">
+                <a:solidFill>
+                  <a:srgbClr val="000000"/>
+                </a:solidFill>
+                <a:latin typeface="Courier New" panose="02070309020205020404" pitchFamily="49" charset="0"/>
+              </a:rPr>
+              <a:t>userDetailsService</a:t>
+            </a:r>
+            <a:r>
+              <a:rPr lang="en-IN" sz="1800" dirty="0">
+                <a:solidFill>
+                  <a:srgbClr val="000000"/>
+                </a:solidFill>
+                <a:latin typeface="Courier New" panose="02070309020205020404" pitchFamily="49" charset="0"/>
+              </a:rPr>
+              <a:t>(</a:t>
+            </a:r>
+            <a:r>
+              <a:rPr lang="en-IN" sz="1800" dirty="0" err="1">
+                <a:solidFill>
+                  <a:srgbClr val="000000"/>
+                </a:solidFill>
+                <a:latin typeface="Courier New" panose="02070309020205020404" pitchFamily="49" charset="0"/>
+              </a:rPr>
+              <a:t>PasswordEncoder</a:t>
+            </a:r>
+            <a:r>
+              <a:rPr lang="en-IN" sz="1800" dirty="0">
+                <a:solidFill>
+                  <a:srgbClr val="000000"/>
+                </a:solidFill>
+                <a:latin typeface="Courier New" panose="02070309020205020404" pitchFamily="49" charset="0"/>
+              </a:rPr>
+              <a:t> </a:t>
+            </a:r>
+            <a:r>
+              <a:rPr lang="en-IN" sz="1800" dirty="0">
+                <a:solidFill>
+                  <a:srgbClr val="6A3E3E"/>
+                </a:solidFill>
+                <a:latin typeface="Courier New" panose="02070309020205020404" pitchFamily="49" charset="0"/>
+              </a:rPr>
+              <a:t>encoder</a:t>
+            </a:r>
+            <a:r>
+              <a:rPr lang="en-IN" sz="1800" dirty="0">
+                <a:solidFill>
+                  <a:srgbClr val="000000"/>
+                </a:solidFill>
+                <a:latin typeface="Courier New" panose="02070309020205020404" pitchFamily="49" charset="0"/>
+              </a:rPr>
+              <a:t>) {</a:t>
+            </a:r>
+          </a:p>
+          <a:p>
+            <a:pPr marL="457200" lvl="1" indent="0">
+              <a:spcBef>
+                <a:spcPts val="0"/>
+              </a:spcBef>
+              <a:buNone/>
+            </a:pPr>
+            <a:r>
+              <a:rPr lang="en-IN" sz="1800" dirty="0">
+                <a:solidFill>
+                  <a:srgbClr val="000000"/>
+                </a:solidFill>
+                <a:latin typeface="Courier New" panose="02070309020205020404" pitchFamily="49" charset="0"/>
+              </a:rPr>
+              <a:t>	</a:t>
+            </a:r>
+            <a:r>
+              <a:rPr lang="en-IN" sz="1800" dirty="0" err="1">
+                <a:solidFill>
+                  <a:srgbClr val="000000"/>
+                </a:solidFill>
+                <a:latin typeface="Courier New" panose="02070309020205020404" pitchFamily="49" charset="0"/>
+              </a:rPr>
+              <a:t>UserDetails</a:t>
+            </a:r>
+            <a:r>
+              <a:rPr lang="en-IN" sz="1800" dirty="0">
+                <a:solidFill>
+                  <a:srgbClr val="000000"/>
+                </a:solidFill>
+                <a:latin typeface="Courier New" panose="02070309020205020404" pitchFamily="49" charset="0"/>
+              </a:rPr>
+              <a:t> </a:t>
+            </a:r>
+            <a:r>
+              <a:rPr lang="en-IN" sz="1800" dirty="0">
+                <a:solidFill>
+                  <a:srgbClr val="6A3E3E"/>
+                </a:solidFill>
+                <a:latin typeface="Courier New" panose="02070309020205020404" pitchFamily="49" charset="0"/>
+              </a:rPr>
+              <a:t>admin</a:t>
+            </a:r>
+            <a:r>
+              <a:rPr lang="en-IN" sz="1800" dirty="0">
+                <a:solidFill>
+                  <a:srgbClr val="000000"/>
+                </a:solidFill>
+                <a:latin typeface="Courier New" panose="02070309020205020404" pitchFamily="49" charset="0"/>
+              </a:rPr>
+              <a:t> = </a:t>
+            </a:r>
+            <a:r>
+              <a:rPr lang="en-IN" sz="1800" dirty="0" err="1">
+                <a:solidFill>
+                  <a:srgbClr val="000000"/>
+                </a:solidFill>
+                <a:latin typeface="Courier New" panose="02070309020205020404" pitchFamily="49" charset="0"/>
+              </a:rPr>
+              <a:t>User.</a:t>
+            </a:r>
+            <a:r>
+              <a:rPr lang="en-IN" sz="1800" i="1" dirty="0" err="1">
+                <a:solidFill>
+                  <a:srgbClr val="000000"/>
+                </a:solidFill>
+                <a:latin typeface="Courier New" panose="02070309020205020404" pitchFamily="49" charset="0"/>
+              </a:rPr>
+              <a:t>withUsername</a:t>
+            </a:r>
+            <a:r>
+              <a:rPr lang="en-IN" sz="1800" dirty="0">
+                <a:solidFill>
+                  <a:srgbClr val="000000"/>
+                </a:solidFill>
+                <a:latin typeface="Courier New" panose="02070309020205020404" pitchFamily="49" charset="0"/>
+              </a:rPr>
+              <a:t>(</a:t>
+            </a:r>
+            <a:r>
+              <a:rPr lang="en-IN" sz="1800" dirty="0">
+                <a:solidFill>
+                  <a:srgbClr val="2A00FF"/>
+                </a:solidFill>
+                <a:latin typeface="Courier New" panose="02070309020205020404" pitchFamily="49" charset="0"/>
+              </a:rPr>
+              <a:t>"Emma"</a:t>
+            </a:r>
+            <a:r>
+              <a:rPr lang="en-IN" sz="1800" dirty="0">
+                <a:solidFill>
+                  <a:srgbClr val="000000"/>
+                </a:solidFill>
+                <a:latin typeface="Courier New" panose="02070309020205020404" pitchFamily="49" charset="0"/>
+              </a:rPr>
               <a:t>)</a:t>
             </a:r>
           </a:p>
           <a:p>
-            <a:pPr marL="0" indent="0">
-              <a:buNone/>
-            </a:pPr>
-            <a:r>
-              <a:rPr lang="en-US" sz="3400" dirty="0"/>
-              <a:t>@Column(name="</a:t>
-            </a:r>
-            <a:r>
-              <a:rPr lang="en-US" sz="3400" dirty="0" err="1"/>
-              <a:t>user_id</a:t>
-            </a:r>
-            <a:r>
-              <a:rPr lang="en-US" sz="3400" dirty="0"/>
-              <a:t>")</a:t>
-            </a:r>
-          </a:p>
-          <a:p>
-            <a:pPr marL="0" indent="0">
-              <a:buNone/>
-            </a:pPr>
-            <a:r>
-              <a:rPr lang="en-US" sz="3400" b="1" dirty="0"/>
-              <a:t>private</a:t>
-            </a:r>
-            <a:r>
-              <a:rPr lang="en-US" sz="3400" dirty="0"/>
+            <a:pPr marL="457200" lvl="1" indent="0">
+              <a:spcBef>
+                <a:spcPts val="0"/>
+              </a:spcBef>
+              <a:buNone/>
+            </a:pPr>
+            <a:r>
+              <a:rPr lang="en-IN" sz="1800" dirty="0">
+                <a:solidFill>
+                  <a:srgbClr val="000000"/>
+                </a:solidFill>
+                <a:latin typeface="Courier New" panose="02070309020205020404" pitchFamily="49" charset="0"/>
+              </a:rPr>
+              <a:t>					.password(</a:t>
+            </a:r>
+            <a:r>
+              <a:rPr lang="en-IN" sz="1800" dirty="0" err="1">
+                <a:solidFill>
+                  <a:srgbClr val="6A3E3E"/>
+                </a:solidFill>
+                <a:latin typeface="Courier New" panose="02070309020205020404" pitchFamily="49" charset="0"/>
+              </a:rPr>
+              <a:t>encoder</a:t>
+            </a:r>
+            <a:r>
+              <a:rPr lang="en-IN" sz="1800" dirty="0" err="1">
+                <a:solidFill>
+                  <a:srgbClr val="000000"/>
+                </a:solidFill>
+                <a:latin typeface="Courier New" panose="02070309020205020404" pitchFamily="49" charset="0"/>
+              </a:rPr>
+              <a:t>.encode</a:t>
+            </a:r>
+            <a:r>
+              <a:rPr lang="en-IN" sz="1800" dirty="0">
+                <a:solidFill>
+                  <a:srgbClr val="000000"/>
+                </a:solidFill>
+                <a:latin typeface="Courier New" panose="02070309020205020404" pitchFamily="49" charset="0"/>
+              </a:rPr>
+              <a:t>(</a:t>
+            </a:r>
+            <a:r>
+              <a:rPr lang="en-IN" sz="1800" dirty="0">
+                <a:solidFill>
+                  <a:srgbClr val="2A00FF"/>
+                </a:solidFill>
+                <a:latin typeface="Courier New" panose="02070309020205020404" pitchFamily="49" charset="0"/>
+              </a:rPr>
+              <a:t>"Watson"</a:t>
+            </a:r>
+            <a:r>
+              <a:rPr lang="en-IN" sz="1800" dirty="0">
+                <a:solidFill>
+                  <a:srgbClr val="000000"/>
+                </a:solidFill>
+                <a:latin typeface="Courier New" panose="02070309020205020404" pitchFamily="49" charset="0"/>
+              </a:rPr>
+              <a:t>))</a:t>
+            </a:r>
+          </a:p>
+          <a:p>
+            <a:pPr marL="457200" lvl="1" indent="0">
+              <a:spcBef>
+                <a:spcPts val="0"/>
+              </a:spcBef>
+              <a:buNone/>
+            </a:pPr>
+            <a:r>
+              <a:rPr lang="en-IN" sz="1800" dirty="0">
+                <a:solidFill>
+                  <a:srgbClr val="000000"/>
+                </a:solidFill>
+                <a:latin typeface="Courier New" panose="02070309020205020404" pitchFamily="49" charset="0"/>
+              </a:rPr>
+              <a:t>					.roles(</a:t>
+            </a:r>
+            <a:r>
+              <a:rPr lang="en-IN" sz="1800" dirty="0">
+                <a:solidFill>
+                  <a:srgbClr val="2A00FF"/>
+                </a:solidFill>
+                <a:latin typeface="Courier New" panose="02070309020205020404" pitchFamily="49" charset="0"/>
+              </a:rPr>
+              <a:t>"ADMIN"</a:t>
+            </a:r>
+            <a:r>
+              <a:rPr lang="en-IN" sz="1800" dirty="0">
+                <a:solidFill>
+                  <a:srgbClr val="000000"/>
+                </a:solidFill>
+                <a:latin typeface="Courier New" panose="02070309020205020404" pitchFamily="49" charset="0"/>
+              </a:rPr>
+              <a:t>)</a:t>
+            </a:r>
+          </a:p>
+          <a:p>
+            <a:pPr marL="457200" lvl="1" indent="0">
+              <a:spcBef>
+                <a:spcPts val="0"/>
+              </a:spcBef>
+              <a:buNone/>
+            </a:pPr>
+            <a:r>
+              <a:rPr lang="en-IN" sz="1800" dirty="0">
+                <a:solidFill>
+                  <a:srgbClr val="000000"/>
+                </a:solidFill>
+                <a:latin typeface="Courier New" panose="02070309020205020404" pitchFamily="49" charset="0"/>
+              </a:rPr>
+              <a:t>					.build();</a:t>
+            </a:r>
+          </a:p>
+          <a:p>
+            <a:pPr marL="457200" lvl="1" indent="0">
+              <a:spcBef>
+                <a:spcPts val="0"/>
+              </a:spcBef>
+              <a:buNone/>
+            </a:pPr>
+            <a:r>
+              <a:rPr lang="en-IN" sz="1800" dirty="0">
+                <a:solidFill>
+                  <a:srgbClr val="000000"/>
+                </a:solidFill>
+                <a:latin typeface="Courier New" panose="02070309020205020404" pitchFamily="49" charset="0"/>
+              </a:rPr>
+              <a:t>	</a:t>
+            </a:r>
+            <a:r>
+              <a:rPr lang="en-IN" sz="1800" dirty="0" err="1">
+                <a:solidFill>
+                  <a:srgbClr val="000000"/>
+                </a:solidFill>
+                <a:latin typeface="Courier New" panose="02070309020205020404" pitchFamily="49" charset="0"/>
+              </a:rPr>
+              <a:t>UserDetails</a:t>
+            </a:r>
+            <a:r>
+              <a:rPr lang="en-IN" sz="1800" dirty="0">
+                <a:solidFill>
+                  <a:srgbClr val="000000"/>
+                </a:solidFill>
+                <a:latin typeface="Courier New" panose="02070309020205020404" pitchFamily="49" charset="0"/>
+              </a:rPr>
               <a:t> </a:t>
             </a:r>
             <a:r>
-              <a:rPr lang="en-US" sz="3400" b="1" dirty="0"/>
-              <a:t>int</a:t>
-            </a:r>
-            <a:r>
-              <a:rPr lang="en-US" sz="3400" dirty="0"/>
+              <a:rPr lang="en-IN" sz="1800" dirty="0">
+                <a:solidFill>
+                  <a:srgbClr val="6A3E3E"/>
+                </a:solidFill>
+                <a:latin typeface="Courier New" panose="02070309020205020404" pitchFamily="49" charset="0"/>
+              </a:rPr>
+              <a:t>user</a:t>
+            </a:r>
+            <a:r>
+              <a:rPr lang="en-IN" sz="1800" dirty="0">
+                <a:solidFill>
+                  <a:srgbClr val="000000"/>
+                </a:solidFill>
+                <a:latin typeface="Courier New" panose="02070309020205020404" pitchFamily="49" charset="0"/>
+              </a:rPr>
+              <a:t> = </a:t>
+            </a:r>
+            <a:r>
+              <a:rPr lang="en-IN" sz="1800" dirty="0" err="1">
+                <a:solidFill>
+                  <a:srgbClr val="000000"/>
+                </a:solidFill>
+                <a:latin typeface="Courier New" panose="02070309020205020404" pitchFamily="49" charset="0"/>
+              </a:rPr>
+              <a:t>User.</a:t>
+            </a:r>
+            <a:r>
+              <a:rPr lang="en-IN" sz="1800" i="1" dirty="0" err="1">
+                <a:solidFill>
+                  <a:srgbClr val="000000"/>
+                </a:solidFill>
+                <a:latin typeface="Courier New" panose="02070309020205020404" pitchFamily="49" charset="0"/>
+              </a:rPr>
+              <a:t>withUsername</a:t>
+            </a:r>
+            <a:r>
+              <a:rPr lang="en-IN" sz="1800" dirty="0">
+                <a:solidFill>
+                  <a:srgbClr val="000000"/>
+                </a:solidFill>
+                <a:latin typeface="Courier New" panose="02070309020205020404" pitchFamily="49" charset="0"/>
+              </a:rPr>
+              <a:t>(</a:t>
+            </a:r>
+            <a:r>
+              <a:rPr lang="en-IN" sz="1800" dirty="0">
+                <a:solidFill>
+                  <a:srgbClr val="2A00FF"/>
+                </a:solidFill>
+                <a:latin typeface="Courier New" panose="02070309020205020404" pitchFamily="49" charset="0"/>
+              </a:rPr>
+              <a:t>"user123"</a:t>
+            </a:r>
+            <a:r>
+              <a:rPr lang="en-IN" sz="1800" dirty="0">
+                <a:solidFill>
+                  <a:srgbClr val="000000"/>
+                </a:solidFill>
+                <a:latin typeface="Courier New" panose="02070309020205020404" pitchFamily="49" charset="0"/>
+              </a:rPr>
+              <a:t>)</a:t>
+            </a:r>
+          </a:p>
+          <a:p>
+            <a:pPr marL="457200" lvl="1" indent="0">
+              <a:spcBef>
+                <a:spcPts val="0"/>
+              </a:spcBef>
+              <a:buNone/>
+            </a:pPr>
+            <a:r>
+              <a:rPr lang="en-IN" sz="1800" dirty="0">
+                <a:solidFill>
+                  <a:srgbClr val="000000"/>
+                </a:solidFill>
+                <a:latin typeface="Courier New" panose="02070309020205020404" pitchFamily="49" charset="0"/>
+              </a:rPr>
+              <a:t>					.password(</a:t>
+            </a:r>
+            <a:r>
+              <a:rPr lang="en-IN" sz="1800" dirty="0" err="1">
+                <a:solidFill>
+                  <a:srgbClr val="6A3E3E"/>
+                </a:solidFill>
+                <a:latin typeface="Courier New" panose="02070309020205020404" pitchFamily="49" charset="0"/>
+              </a:rPr>
+              <a:t>encoder</a:t>
+            </a:r>
+            <a:r>
+              <a:rPr lang="en-IN" sz="1800" dirty="0" err="1">
+                <a:solidFill>
+                  <a:srgbClr val="000000"/>
+                </a:solidFill>
+                <a:latin typeface="Courier New" panose="02070309020205020404" pitchFamily="49" charset="0"/>
+              </a:rPr>
+              <a:t>.encode</a:t>
+            </a:r>
+            <a:r>
+              <a:rPr lang="en-IN" sz="1800" dirty="0">
+                <a:solidFill>
+                  <a:srgbClr val="000000"/>
+                </a:solidFill>
+                <a:latin typeface="Courier New" panose="02070309020205020404" pitchFamily="49" charset="0"/>
+              </a:rPr>
+              <a:t>(</a:t>
+            </a:r>
+            <a:r>
+              <a:rPr lang="en-IN" sz="1800" dirty="0">
+                <a:solidFill>
+                  <a:srgbClr val="2A00FF"/>
+                </a:solidFill>
+                <a:latin typeface="Courier New" panose="02070309020205020404" pitchFamily="49" charset="0"/>
+              </a:rPr>
+              <a:t>"pass123"</a:t>
+            </a:r>
+            <a:r>
+              <a:rPr lang="en-IN" sz="1800" dirty="0">
+                <a:solidFill>
+                  <a:srgbClr val="000000"/>
+                </a:solidFill>
+                <a:latin typeface="Courier New" panose="02070309020205020404" pitchFamily="49" charset="0"/>
+              </a:rPr>
+              <a:t>))</a:t>
+            </a:r>
+          </a:p>
+          <a:p>
+            <a:pPr marL="457200" lvl="1" indent="0">
+              <a:spcBef>
+                <a:spcPts val="0"/>
+              </a:spcBef>
+              <a:buNone/>
+            </a:pPr>
+            <a:r>
+              <a:rPr lang="en-IN" sz="1800" dirty="0">
+                <a:solidFill>
+                  <a:srgbClr val="000000"/>
+                </a:solidFill>
+                <a:latin typeface="Courier New" panose="02070309020205020404" pitchFamily="49" charset="0"/>
+              </a:rPr>
+              <a:t>					.roles(</a:t>
+            </a:r>
+            <a:r>
+              <a:rPr lang="en-IN" sz="1800" dirty="0">
+                <a:solidFill>
+                  <a:srgbClr val="2A00FF"/>
+                </a:solidFill>
+                <a:latin typeface="Courier New" panose="02070309020205020404" pitchFamily="49" charset="0"/>
+              </a:rPr>
+              <a:t>"USER, ADMIN"</a:t>
+            </a:r>
+            <a:r>
+              <a:rPr lang="en-IN" sz="1800" dirty="0">
+                <a:solidFill>
+                  <a:srgbClr val="000000"/>
+                </a:solidFill>
+                <a:latin typeface="Courier New" panose="02070309020205020404" pitchFamily="49" charset="0"/>
+              </a:rPr>
+              <a:t>)</a:t>
+            </a:r>
+          </a:p>
+          <a:p>
+            <a:pPr marL="457200" lvl="1" indent="0">
+              <a:spcBef>
+                <a:spcPts val="0"/>
+              </a:spcBef>
+              <a:buNone/>
+            </a:pPr>
+            <a:r>
+              <a:rPr lang="en-IN" sz="1800" dirty="0">
+                <a:solidFill>
+                  <a:srgbClr val="000000"/>
+                </a:solidFill>
+                <a:latin typeface="Courier New" panose="02070309020205020404" pitchFamily="49" charset="0"/>
+              </a:rPr>
+              <a:t>					.build();</a:t>
+            </a:r>
+          </a:p>
+          <a:p>
+            <a:pPr marL="457200" lvl="1" indent="0">
+              <a:spcBef>
+                <a:spcPts val="0"/>
+              </a:spcBef>
+              <a:buNone/>
+            </a:pPr>
+            <a:r>
+              <a:rPr lang="en-IN" sz="1800" b="1" dirty="0">
+                <a:solidFill>
+                  <a:srgbClr val="7F0055"/>
+                </a:solidFill>
+                <a:latin typeface="Courier New" panose="02070309020205020404" pitchFamily="49" charset="0"/>
+              </a:rPr>
+              <a:t>	return</a:t>
+            </a:r>
+            <a:r>
+              <a:rPr lang="en-IN" sz="1800" dirty="0">
+                <a:solidFill>
+                  <a:srgbClr val="000000"/>
+                </a:solidFill>
+                <a:latin typeface="Courier New" panose="02070309020205020404" pitchFamily="49" charset="0"/>
+              </a:rPr>
               <a:t> </a:t>
             </a:r>
             <a:r>
-              <a:rPr lang="en-US" sz="3400" dirty="0" err="1"/>
-              <a:t>userId</a:t>
-            </a:r>
-            <a:r>
-              <a:rPr lang="en-US" sz="3400" dirty="0"/>
-              <a:t>;</a:t>
-            </a:r>
-          </a:p>
-          <a:p>
-            <a:pPr marL="0" indent="0">
-              <a:buNone/>
-            </a:pPr>
-            <a:r>
-              <a:rPr lang="en-US" sz="3400" dirty="0"/>
-              <a:t>@Column(name="</a:t>
-            </a:r>
-            <a:r>
-              <a:rPr lang="en-US" sz="3400" dirty="0" err="1"/>
-              <a:t>user_name</a:t>
-            </a:r>
-            <a:r>
-              <a:rPr lang="en-US" sz="3400" dirty="0"/>
-              <a:t>")</a:t>
-            </a:r>
-          </a:p>
-          <a:p>
-            <a:pPr marL="0" indent="0">
-              <a:buNone/>
-            </a:pPr>
-            <a:r>
-              <a:rPr lang="en-US" sz="3400" b="1" dirty="0"/>
-              <a:t>private</a:t>
-            </a:r>
-            <a:r>
-              <a:rPr lang="en-US" sz="3400" dirty="0"/>
-              <a:t> String </a:t>
-            </a:r>
-            <a:r>
-              <a:rPr lang="en-US" sz="3400" dirty="0" err="1"/>
-              <a:t>userName</a:t>
-            </a:r>
-            <a:r>
-              <a:rPr lang="en-US" sz="3400" dirty="0"/>
-              <a:t>;</a:t>
-            </a:r>
-          </a:p>
-          <a:p>
-            <a:pPr marL="0" indent="0">
-              <a:buNone/>
-            </a:pPr>
-            <a:r>
-              <a:rPr lang="en-US" sz="3400" dirty="0"/>
-              <a:t>@Column(name="</a:t>
-            </a:r>
-            <a:r>
-              <a:rPr lang="en-US" sz="3400" dirty="0" err="1"/>
-              <a:t>user_password</a:t>
-            </a:r>
-            <a:r>
-              <a:rPr lang="en-US" sz="3400" dirty="0"/>
-              <a:t>")</a:t>
-            </a:r>
-          </a:p>
-          <a:p>
-            <a:pPr marL="0" indent="0">
-              <a:buNone/>
-            </a:pPr>
-            <a:r>
-              <a:rPr lang="en-US" sz="3400" b="1" dirty="0"/>
-              <a:t>private</a:t>
-            </a:r>
-            <a:r>
-              <a:rPr lang="en-US" sz="3400" dirty="0"/>
-              <a:t> String </a:t>
-            </a:r>
-            <a:r>
-              <a:rPr lang="en-US" sz="3400" dirty="0" err="1"/>
-              <a:t>userPassword</a:t>
-            </a:r>
-            <a:r>
-              <a:rPr lang="en-US" sz="3400" dirty="0"/>
-              <a:t>;</a:t>
-            </a:r>
-          </a:p>
-          <a:p>
-            <a:pPr marL="0" indent="0">
-              <a:buNone/>
-            </a:pPr>
-            <a:r>
-              <a:rPr lang="en-US" sz="3400" dirty="0"/>
-              <a:t>@</a:t>
-            </a:r>
-            <a:r>
-              <a:rPr lang="en-US" sz="3400" dirty="0" err="1"/>
-              <a:t>ManyToMany</a:t>
-            </a:r>
-            <a:endParaRPr lang="en-US" sz="3400" dirty="0"/>
-          </a:p>
-          <a:p>
-            <a:pPr marL="0" indent="0">
-              <a:buNone/>
-            </a:pPr>
-            <a:r>
-              <a:rPr lang="en-US" sz="3400" dirty="0"/>
-              <a:t>@</a:t>
-            </a:r>
-            <a:r>
-              <a:rPr lang="en-US" sz="3400" dirty="0" err="1"/>
-              <a:t>JoinTable</a:t>
-            </a:r>
-            <a:r>
-              <a:rPr lang="en-US" sz="3400" dirty="0"/>
-              <a:t>(name="</a:t>
-            </a:r>
-            <a:r>
-              <a:rPr lang="en-US" sz="3400" dirty="0" err="1"/>
-              <a:t>my_user_role_details</a:t>
-            </a:r>
-            <a:r>
-              <a:rPr lang="en-US" sz="3400" dirty="0"/>
-              <a:t>",</a:t>
-            </a:r>
-          </a:p>
-          <a:p>
-            <a:pPr marL="0" indent="0">
-              <a:buNone/>
-            </a:pPr>
-            <a:r>
-              <a:rPr lang="en-US" sz="3400" dirty="0" err="1"/>
-              <a:t>joinColumns</a:t>
-            </a:r>
-            <a:r>
-              <a:rPr lang="en-US" sz="3400" dirty="0"/>
-              <a:t>= {@</a:t>
-            </a:r>
-            <a:r>
-              <a:rPr lang="en-US" sz="3400" dirty="0" err="1"/>
-              <a:t>JoinColumn</a:t>
-            </a:r>
-            <a:r>
-              <a:rPr lang="en-US" sz="3400" dirty="0"/>
-              <a:t>(name="</a:t>
-            </a:r>
-            <a:r>
-              <a:rPr lang="en-US" sz="3400" dirty="0" err="1"/>
-              <a:t>user_id</a:t>
-            </a:r>
-            <a:r>
-              <a:rPr lang="en-US" sz="3400" dirty="0"/>
-              <a:t>")},</a:t>
-            </a:r>
-          </a:p>
-          <a:p>
-            <a:pPr marL="0" indent="0">
-              <a:buNone/>
-            </a:pPr>
-            <a:r>
-              <a:rPr lang="en-US" sz="3400" dirty="0" err="1"/>
-              <a:t>inverseJoinColumns</a:t>
-            </a:r>
-            <a:r>
-              <a:rPr lang="en-US" sz="3400" dirty="0"/>
-              <a:t> = {@</a:t>
-            </a:r>
-            <a:r>
-              <a:rPr lang="en-US" sz="3400" dirty="0" err="1"/>
-              <a:t>JoinColumn</a:t>
-            </a:r>
-            <a:r>
-              <a:rPr lang="en-US" sz="3400" dirty="0"/>
-              <a:t>(name="</a:t>
-            </a:r>
-            <a:r>
-              <a:rPr lang="en-US" sz="3400" dirty="0" err="1"/>
-              <a:t>role_id</a:t>
-            </a:r>
-            <a:r>
-              <a:rPr lang="en-US" sz="3400" dirty="0"/>
-              <a:t>")}</a:t>
-            </a:r>
-          </a:p>
-          <a:p>
-            <a:pPr marL="0" indent="0">
-              <a:buNone/>
-            </a:pPr>
-            <a:r>
-              <a:rPr lang="en-US" sz="3400" dirty="0"/>
-              <a:t>)</a:t>
-            </a:r>
-          </a:p>
-          <a:p>
-            <a:pPr marL="0" indent="0">
-              <a:buNone/>
-            </a:pPr>
-            <a:r>
-              <a:rPr lang="en-US" sz="3400" dirty="0"/>
-              <a:t>List&lt;</a:t>
-            </a:r>
-            <a:r>
-              <a:rPr lang="en-US" sz="3400" dirty="0" err="1"/>
-              <a:t>MyRoleEntity</a:t>
-            </a:r>
-            <a:r>
-              <a:rPr lang="en-US" sz="3400" dirty="0"/>
-              <a:t>&gt; </a:t>
-            </a:r>
-            <a:r>
-              <a:rPr lang="en-US" sz="3400" dirty="0" err="1"/>
-              <a:t>allRoles</a:t>
-            </a:r>
-            <a:r>
-              <a:rPr lang="en-US" sz="3400" dirty="0"/>
-              <a:t>;</a:t>
-            </a:r>
-          </a:p>
-          <a:p>
-            <a:pPr marL="0" indent="0">
-              <a:buNone/>
-            </a:pPr>
-            <a:r>
-              <a:rPr lang="en-US" sz="3400" dirty="0"/>
+              <a:rPr lang="en-IN" sz="1800" b="1" dirty="0">
+                <a:solidFill>
+                  <a:srgbClr val="7F0055"/>
+                </a:solidFill>
+                <a:latin typeface="Courier New" panose="02070309020205020404" pitchFamily="49" charset="0"/>
+              </a:rPr>
+              <a:t>new</a:t>
+            </a:r>
+            <a:r>
+              <a:rPr lang="en-IN" sz="1800" dirty="0">
+                <a:solidFill>
+                  <a:srgbClr val="000000"/>
+                </a:solidFill>
+                <a:latin typeface="Courier New" panose="02070309020205020404" pitchFamily="49" charset="0"/>
+              </a:rPr>
+              <a:t> </a:t>
+            </a:r>
+            <a:r>
+              <a:rPr lang="en-IN" sz="1800" dirty="0" err="1">
+                <a:solidFill>
+                  <a:srgbClr val="000000"/>
+                </a:solidFill>
+                <a:latin typeface="Courier New" panose="02070309020205020404" pitchFamily="49" charset="0"/>
+              </a:rPr>
+              <a:t>InMemoryUserDetailsManager</a:t>
+            </a:r>
+            <a:r>
+              <a:rPr lang="en-IN" sz="1800" dirty="0">
+                <a:solidFill>
+                  <a:srgbClr val="000000"/>
+                </a:solidFill>
+                <a:latin typeface="Courier New" panose="02070309020205020404" pitchFamily="49" charset="0"/>
+              </a:rPr>
+              <a:t>(</a:t>
+            </a:r>
+            <a:r>
+              <a:rPr lang="en-IN" sz="1800" dirty="0">
+                <a:solidFill>
+                  <a:srgbClr val="6A3E3E"/>
+                </a:solidFill>
+                <a:latin typeface="Courier New" panose="02070309020205020404" pitchFamily="49" charset="0"/>
+              </a:rPr>
+              <a:t>admin</a:t>
+            </a:r>
+            <a:r>
+              <a:rPr lang="en-IN" sz="1800" dirty="0">
+                <a:solidFill>
+                  <a:srgbClr val="000000"/>
+                </a:solidFill>
+                <a:latin typeface="Courier New" panose="02070309020205020404" pitchFamily="49" charset="0"/>
+              </a:rPr>
+              <a:t>, </a:t>
+            </a:r>
+            <a:r>
+              <a:rPr lang="en-IN" sz="1800" dirty="0">
+                <a:solidFill>
+                  <a:srgbClr val="6A3E3E"/>
+                </a:solidFill>
+                <a:latin typeface="Courier New" panose="02070309020205020404" pitchFamily="49" charset="0"/>
+              </a:rPr>
+              <a:t>user</a:t>
+            </a:r>
+            <a:r>
+              <a:rPr lang="en-IN" sz="1800" dirty="0">
+                <a:solidFill>
+                  <a:srgbClr val="000000"/>
+                </a:solidFill>
+                <a:latin typeface="Courier New" panose="02070309020205020404" pitchFamily="49" charset="0"/>
+              </a:rPr>
+              <a:t>);</a:t>
+            </a:r>
+          </a:p>
+          <a:p>
+            <a:pPr marL="457200" lvl="1" indent="0">
+              <a:spcBef>
+                <a:spcPts val="0"/>
+              </a:spcBef>
+              <a:buNone/>
+            </a:pPr>
+            <a:r>
+              <a:rPr lang="en-IN" sz="1800" dirty="0">
+                <a:solidFill>
+                  <a:srgbClr val="000000"/>
+                </a:solidFill>
+                <a:latin typeface="Courier New" panose="02070309020205020404" pitchFamily="49" charset="0"/>
+              </a:rPr>
               <a:t>}</a:t>
             </a:r>
           </a:p>
           <a:p>
+            <a:r>
+              <a:rPr lang="en-IN" dirty="0"/>
+              <a:t>We return </a:t>
+            </a:r>
+            <a:r>
+              <a:rPr lang="en-IN" dirty="0" err="1"/>
+              <a:t>InMemoryUserDetails</a:t>
+            </a:r>
+            <a:r>
+              <a:rPr lang="en-IN" dirty="0"/>
+              <a:t> object as the </a:t>
+            </a:r>
+            <a:r>
+              <a:rPr lang="en-IN" dirty="0" err="1"/>
+              <a:t>UserDetails</a:t>
+            </a:r>
+            <a:r>
+              <a:rPr lang="en-IN" dirty="0"/>
+              <a:t> are maintained in-memory</a:t>
+            </a:r>
+          </a:p>
+          <a:p>
             <a:endParaRPr lang="en-IN" dirty="0"/>
-          </a:p>
-        </p:txBody>
-      </p:sp>
-      <p:sp>
-        <p:nvSpPr>
-          <p:cNvPr id="4" name="Content Placeholder 3">
-            <a:extLst>
-              <a:ext uri="{FF2B5EF4-FFF2-40B4-BE49-F238E27FC236}">
-                <a16:creationId xmlns:a16="http://schemas.microsoft.com/office/drawing/2014/main" id="{A2A10DF4-5447-4F6B-85E1-2BA3BAF6182A}"/>
-              </a:ext>
-            </a:extLst>
-          </p:cNvPr>
-          <p:cNvSpPr>
-            <a:spLocks noGrp="1"/>
-          </p:cNvSpPr>
-          <p:nvPr>
-            <p:ph sz="half" idx="2"/>
-          </p:nvPr>
-        </p:nvSpPr>
-        <p:spPr>
-          <a:xfrm>
-            <a:off x="6172200" y="1825625"/>
-            <a:ext cx="5181600" cy="4351338"/>
-          </a:xfrm>
-        </p:spPr>
-        <p:txBody>
-          <a:bodyPr>
-            <a:noAutofit/>
-          </a:bodyPr>
-          <a:lstStyle/>
-          <a:p>
-            <a:pPr marL="0" indent="0">
-              <a:buNone/>
-            </a:pPr>
-            <a:r>
-              <a:rPr lang="en-US" sz="2000" dirty="0"/>
-              <a:t>@Entity</a:t>
-            </a:r>
-          </a:p>
-          <a:p>
-            <a:pPr marL="0" indent="0">
-              <a:buNone/>
-            </a:pPr>
-            <a:r>
-              <a:rPr lang="en-US" sz="2000" dirty="0"/>
-              <a:t>@Table(name="</a:t>
-            </a:r>
-            <a:r>
-              <a:rPr lang="en-US" sz="2000" dirty="0" err="1"/>
-              <a:t>my_role_details</a:t>
-            </a:r>
-            <a:r>
-              <a:rPr lang="en-US" sz="2000" dirty="0"/>
-              <a:t>")</a:t>
-            </a:r>
-          </a:p>
-          <a:p>
-            <a:pPr marL="0" indent="0">
-              <a:buNone/>
-            </a:pPr>
-            <a:r>
-              <a:rPr lang="en-US" sz="2000" b="1" dirty="0"/>
-              <a:t>public</a:t>
-            </a:r>
-            <a:r>
-              <a:rPr lang="en-US" sz="2000" dirty="0"/>
-              <a:t> </a:t>
-            </a:r>
-            <a:r>
-              <a:rPr lang="en-US" sz="2000" b="1" dirty="0"/>
-              <a:t>class</a:t>
-            </a:r>
-            <a:r>
-              <a:rPr lang="en-US" sz="2000" dirty="0"/>
-              <a:t> </a:t>
-            </a:r>
-            <a:r>
-              <a:rPr lang="en-US" sz="2000" dirty="0" err="1"/>
-              <a:t>MyRoleEntity</a:t>
-            </a:r>
-            <a:r>
-              <a:rPr lang="en-US" sz="2000" dirty="0"/>
-              <a:t> {</a:t>
-            </a:r>
-          </a:p>
-          <a:p>
-            <a:pPr marL="0" indent="0">
-              <a:buNone/>
-            </a:pPr>
-            <a:r>
-              <a:rPr lang="en-US" sz="2000" dirty="0"/>
-              <a:t>@Id</a:t>
-            </a:r>
-          </a:p>
-          <a:p>
-            <a:pPr marL="0" indent="0">
-              <a:buNone/>
-            </a:pPr>
-            <a:r>
-              <a:rPr lang="en-US" sz="2000" dirty="0"/>
-              <a:t>@</a:t>
-            </a:r>
-            <a:r>
-              <a:rPr lang="en-US" sz="2000" dirty="0" err="1"/>
-              <a:t>GeneratedValue</a:t>
-            </a:r>
-            <a:r>
-              <a:rPr lang="en-US" sz="2000" dirty="0"/>
-              <a:t>(strategy = </a:t>
-            </a:r>
-            <a:r>
-              <a:rPr lang="en-US" sz="2000" dirty="0" err="1"/>
-              <a:t>GenerationType.</a:t>
-            </a:r>
-            <a:r>
-              <a:rPr lang="en-US" sz="2000" b="1" i="1" dirty="0" err="1"/>
-              <a:t>IDENTITY</a:t>
-            </a:r>
-            <a:r>
-              <a:rPr lang="en-US" sz="2000" dirty="0"/>
-              <a:t>)</a:t>
-            </a:r>
-          </a:p>
-          <a:p>
-            <a:pPr marL="0" indent="0">
-              <a:buNone/>
-            </a:pPr>
-            <a:r>
-              <a:rPr lang="en-US" sz="2000" dirty="0"/>
-              <a:t>@Column(name="</a:t>
-            </a:r>
-            <a:r>
-              <a:rPr lang="en-US" sz="2000" dirty="0" err="1"/>
-              <a:t>role_id</a:t>
-            </a:r>
-            <a:r>
-              <a:rPr lang="en-US" sz="2000" dirty="0"/>
-              <a:t>")</a:t>
-            </a:r>
-          </a:p>
-          <a:p>
-            <a:pPr marL="0" indent="0">
-              <a:buNone/>
-            </a:pPr>
-            <a:r>
-              <a:rPr lang="en-US" sz="2000" b="1" dirty="0"/>
-              <a:t>private</a:t>
-            </a:r>
-            <a:r>
-              <a:rPr lang="en-US" sz="2000" dirty="0"/>
-              <a:t> </a:t>
-            </a:r>
-            <a:r>
-              <a:rPr lang="en-US" sz="2000" b="1" dirty="0"/>
-              <a:t>int</a:t>
-            </a:r>
-            <a:r>
-              <a:rPr lang="en-US" sz="2000" dirty="0"/>
-              <a:t> </a:t>
-            </a:r>
-            <a:r>
-              <a:rPr lang="en-US" sz="2000" dirty="0" err="1"/>
-              <a:t>roleId</a:t>
-            </a:r>
-            <a:r>
-              <a:rPr lang="en-US" sz="2000" dirty="0"/>
-              <a:t>;</a:t>
-            </a:r>
-          </a:p>
-          <a:p>
-            <a:pPr marL="0" indent="0">
-              <a:buNone/>
-            </a:pPr>
-            <a:r>
-              <a:rPr lang="en-US" sz="2000" dirty="0"/>
-              <a:t>@Column(name="</a:t>
-            </a:r>
-            <a:r>
-              <a:rPr lang="en-US" sz="2000" dirty="0" err="1"/>
-              <a:t>role_name</a:t>
-            </a:r>
-            <a:r>
-              <a:rPr lang="en-US" sz="2000" dirty="0"/>
-              <a:t>")</a:t>
-            </a:r>
-          </a:p>
-          <a:p>
-            <a:pPr marL="0" indent="0">
-              <a:buNone/>
-            </a:pPr>
-            <a:r>
-              <a:rPr lang="en-US" sz="2000" b="1" dirty="0"/>
-              <a:t>private</a:t>
-            </a:r>
-            <a:r>
-              <a:rPr lang="en-US" sz="2000" dirty="0"/>
-              <a:t> String </a:t>
-            </a:r>
-            <a:r>
-              <a:rPr lang="en-US" sz="2000" dirty="0" err="1"/>
-              <a:t>roleName</a:t>
-            </a:r>
-            <a:r>
-              <a:rPr lang="en-US" sz="2000" dirty="0"/>
-              <a:t>;</a:t>
-            </a:r>
-          </a:p>
-          <a:p>
-            <a:pPr marL="0" indent="0">
-              <a:buNone/>
-            </a:pPr>
-            <a:r>
-              <a:rPr lang="en-IN" sz="2000" dirty="0"/>
-              <a:t>}</a:t>
-            </a:r>
           </a:p>
         </p:txBody>
       </p:sp>
     </p:spTree>
     <p:extLst>
       <p:ext uri="{BB962C8B-B14F-4D97-AF65-F5344CB8AC3E}">
-        <p14:creationId xmlns:p14="http://schemas.microsoft.com/office/powerpoint/2010/main" val="295295673"/>
+        <p14:creationId xmlns:p14="http://schemas.microsoft.com/office/powerpoint/2010/main" val="587685046"/>
       </p:ext>
     </p:extLst>
   </p:cSld>
@@ -5721,7 +7316,7 @@
           <p:cNvPr id="2" name="Title 1">
             <a:extLst>
               <a:ext uri="{FF2B5EF4-FFF2-40B4-BE49-F238E27FC236}">
-                <a16:creationId xmlns:a16="http://schemas.microsoft.com/office/drawing/2014/main" id="{62698859-F5FD-4296-8205-9A3C874BB9BA}"/>
+                <a16:creationId xmlns:a16="http://schemas.microsoft.com/office/drawing/2014/main" id="{E564A3D2-928A-47F2-B0F2-761024E90593}"/>
               </a:ext>
             </a:extLst>
           </p:cNvPr>
@@ -5738,20 +7333,12 @@
           <a:lstStyle/>
           <a:p>
             <a:r>
-              <a:rPr lang="en-US" dirty="0"/>
-              <a:t>Step 4: Create </a:t>
-            </a:r>
-            <a:r>
-              <a:rPr lang="en-US" dirty="0" err="1"/>
-              <a:t>MyUserPojo</a:t>
-            </a:r>
-            <a:r>
-              <a:rPr lang="en-US" dirty="0"/>
-              <a:t> and </a:t>
-            </a:r>
-            <a:r>
-              <a:rPr lang="en-US" dirty="0" err="1"/>
-              <a:t>MyRolePojo</a:t>
+              <a:rPr lang="en-IN" dirty="0"/>
+              <a:t>Step 3 - Configure username/password in the Configuration class - </a:t>
+            </a:r>
+            <a:r>
+              <a:rPr lang="en-IN" dirty="0" err="1"/>
+              <a:t>contd</a:t>
             </a:r>
             <a:endParaRPr lang="en-IN" dirty="0"/>
           </a:p>
@@ -5759,18 +7346,18 @@
       </p:sp>
       <p:sp>
         <p:nvSpPr>
-          <p:cNvPr id="4" name="Content Placeholder 3">
-            <a:extLst>
-              <a:ext uri="{FF2B5EF4-FFF2-40B4-BE49-F238E27FC236}">
-                <a16:creationId xmlns:a16="http://schemas.microsoft.com/office/drawing/2014/main" id="{490FA8CA-2893-4F40-8A38-9C59FFB28F3A}"/>
-              </a:ext>
-            </a:extLst>
-          </p:cNvPr>
-          <p:cNvSpPr>
-            <a:spLocks noGrp="1"/>
-          </p:cNvSpPr>
-          <p:nvPr>
-            <p:ph sz="half" idx="1"/>
+          <p:cNvPr id="3" name="Content Placeholder 2">
+            <a:extLst>
+              <a:ext uri="{FF2B5EF4-FFF2-40B4-BE49-F238E27FC236}">
+                <a16:creationId xmlns:a16="http://schemas.microsoft.com/office/drawing/2014/main" id="{59DD8874-888F-42DF-A899-665DF7831B6D}"/>
+              </a:ext>
+            </a:extLst>
+          </p:cNvPr>
+          <p:cNvSpPr>
+            <a:spLocks noGrp="1"/>
+          </p:cNvSpPr>
+          <p:nvPr>
+            <p:ph idx="1"/>
           </p:nvPr>
         </p:nvSpPr>
         <p:spPr/>
@@ -5778,247 +7365,212 @@
           <a:bodyPr/>
           <a:lstStyle/>
           <a:p>
-            <a:pPr marL="0" indent="0">
-              <a:buNone/>
-            </a:pPr>
-            <a:r>
-              <a:rPr lang="en-IN" b="1" dirty="0"/>
+            <a:r>
+              <a:rPr lang="en-IN" dirty="0"/>
+              <a:t>Keep the passwords encoded</a:t>
+            </a:r>
+          </a:p>
+          <a:p>
+            <a:r>
+              <a:rPr lang="en-IN" dirty="0"/>
+              <a:t>So configure the </a:t>
+            </a:r>
+            <a:r>
+              <a:rPr lang="en-IN" dirty="0" err="1"/>
+              <a:t>PasswordEncoder</a:t>
+            </a:r>
+            <a:r>
+              <a:rPr lang="en-IN" dirty="0"/>
+              <a:t> Bean </a:t>
+            </a:r>
+          </a:p>
+          <a:p>
+            <a:pPr marL="457200" lvl="1" indent="0">
+              <a:spcBef>
+                <a:spcPts val="0"/>
+              </a:spcBef>
+              <a:buNone/>
+            </a:pPr>
+            <a:r>
+              <a:rPr lang="en-US" sz="2000" dirty="0">
+                <a:solidFill>
+                  <a:srgbClr val="646464"/>
+                </a:solidFill>
+                <a:latin typeface="Courier New" panose="02070309020205020404" pitchFamily="49" charset="0"/>
+              </a:rPr>
+              <a:t>@Bean</a:t>
+            </a:r>
+            <a:endParaRPr lang="en-US" sz="2000" dirty="0">
+              <a:solidFill>
+                <a:srgbClr val="000000"/>
+              </a:solidFill>
+              <a:latin typeface="Courier New" panose="02070309020205020404" pitchFamily="49" charset="0"/>
+            </a:endParaRPr>
+          </a:p>
+          <a:p>
+            <a:pPr marL="457200" lvl="1" indent="0">
+              <a:spcBef>
+                <a:spcPts val="0"/>
+              </a:spcBef>
+              <a:buNone/>
+            </a:pPr>
+            <a:r>
+              <a:rPr lang="en-US" sz="2000" b="1" dirty="0">
+                <a:solidFill>
+                  <a:srgbClr val="7F0055"/>
+                </a:solidFill>
+                <a:latin typeface="Courier New" panose="02070309020205020404" pitchFamily="49" charset="0"/>
+              </a:rPr>
               <a:t>public</a:t>
             </a:r>
             <a:r>
-              <a:rPr lang="en-IN" dirty="0"/>
+              <a:rPr lang="en-US" sz="2000" dirty="0">
+                <a:solidFill>
+                  <a:srgbClr val="000000"/>
+                </a:solidFill>
+                <a:latin typeface="Courier New" panose="02070309020205020404" pitchFamily="49" charset="0"/>
+              </a:rPr>
               <a:t> </a:t>
             </a:r>
             <a:r>
-              <a:rPr lang="en-IN" b="1" dirty="0"/>
-              <a:t>class</a:t>
-            </a:r>
-            <a:r>
-              <a:rPr lang="en-IN" dirty="0"/>
+              <a:rPr lang="en-US" sz="2000" dirty="0" err="1">
+                <a:solidFill>
+                  <a:srgbClr val="000000"/>
+                </a:solidFill>
+                <a:latin typeface="Courier New" panose="02070309020205020404" pitchFamily="49" charset="0"/>
+              </a:rPr>
+              <a:t>PasswordEncoder</a:t>
+            </a:r>
+            <a:r>
+              <a:rPr lang="en-US" sz="2000" dirty="0">
+                <a:solidFill>
+                  <a:srgbClr val="000000"/>
+                </a:solidFill>
+                <a:latin typeface="Courier New" panose="02070309020205020404" pitchFamily="49" charset="0"/>
+              </a:rPr>
               <a:t> </a:t>
             </a:r>
             <a:r>
+              <a:rPr lang="en-US" sz="2000" dirty="0" err="1">
+                <a:solidFill>
+                  <a:srgbClr val="000000"/>
+                </a:solidFill>
+                <a:latin typeface="Courier New" panose="02070309020205020404" pitchFamily="49" charset="0"/>
+              </a:rPr>
+              <a:t>passwordEncoder</a:t>
+            </a:r>
+            <a:r>
+              <a:rPr lang="en-US" sz="2000" dirty="0">
+                <a:solidFill>
+                  <a:srgbClr val="000000"/>
+                </a:solidFill>
+                <a:latin typeface="Courier New" panose="02070309020205020404" pitchFamily="49" charset="0"/>
+              </a:rPr>
+              <a:t>() {</a:t>
+            </a:r>
+          </a:p>
+          <a:p>
+            <a:pPr marL="457200" lvl="1" indent="0">
+              <a:spcBef>
+                <a:spcPts val="0"/>
+              </a:spcBef>
+              <a:buNone/>
+            </a:pPr>
+            <a:r>
+              <a:rPr lang="en-US" sz="2000" b="1" dirty="0">
+                <a:solidFill>
+                  <a:srgbClr val="7F0055"/>
+                </a:solidFill>
+                <a:latin typeface="Courier New" panose="02070309020205020404" pitchFamily="49" charset="0"/>
+              </a:rPr>
+              <a:t>return</a:t>
+            </a:r>
+            <a:r>
+              <a:rPr lang="en-US" sz="2000" dirty="0">
+                <a:solidFill>
+                  <a:srgbClr val="000000"/>
+                </a:solidFill>
+                <a:latin typeface="Courier New" panose="02070309020205020404" pitchFamily="49" charset="0"/>
+              </a:rPr>
+              <a:t> </a:t>
+            </a:r>
+            <a:r>
+              <a:rPr lang="en-US" sz="2000" b="1" dirty="0">
+                <a:solidFill>
+                  <a:srgbClr val="7F0055"/>
+                </a:solidFill>
+                <a:latin typeface="Courier New" panose="02070309020205020404" pitchFamily="49" charset="0"/>
+              </a:rPr>
+              <a:t>new</a:t>
+            </a:r>
+            <a:r>
+              <a:rPr lang="en-US" sz="2000" dirty="0">
+                <a:solidFill>
+                  <a:srgbClr val="000000"/>
+                </a:solidFill>
+                <a:latin typeface="Courier New" panose="02070309020205020404" pitchFamily="49" charset="0"/>
+              </a:rPr>
+              <a:t> </a:t>
+            </a:r>
+            <a:r>
+              <a:rPr lang="en-US" sz="2000" dirty="0" err="1">
+                <a:solidFill>
+                  <a:srgbClr val="000000"/>
+                </a:solidFill>
+                <a:latin typeface="Courier New" panose="02070309020205020404" pitchFamily="49" charset="0"/>
+              </a:rPr>
+              <a:t>BCryptPasswordEncoder</a:t>
+            </a:r>
+            <a:r>
+              <a:rPr lang="en-US" sz="2000" dirty="0">
+                <a:solidFill>
+                  <a:srgbClr val="000000"/>
+                </a:solidFill>
+                <a:latin typeface="Courier New" panose="02070309020205020404" pitchFamily="49" charset="0"/>
+              </a:rPr>
+              <a:t>();</a:t>
+            </a:r>
+          </a:p>
+          <a:p>
+            <a:pPr marL="457200" lvl="1" indent="0">
+              <a:spcBef>
+                <a:spcPts val="0"/>
+              </a:spcBef>
+              <a:buNone/>
+            </a:pPr>
+            <a:r>
+              <a:rPr lang="en-US" sz="2000" dirty="0">
+                <a:solidFill>
+                  <a:srgbClr val="000000"/>
+                </a:solidFill>
+                <a:latin typeface="Courier New" panose="02070309020205020404" pitchFamily="49" charset="0"/>
+              </a:rPr>
+              <a:t>}</a:t>
+            </a:r>
+          </a:p>
+          <a:p>
+            <a:r>
+              <a:rPr lang="en-IN" dirty="0"/>
+              <a:t>Pass this to the </a:t>
+            </a:r>
+            <a:r>
               <a:rPr lang="en-IN" dirty="0" err="1"/>
-              <a:t>MyUserPojo</a:t>
-            </a:r>
-            <a:r>
-              <a:rPr lang="en-IN" dirty="0"/>
-              <a:t> {</a:t>
-            </a:r>
-          </a:p>
-          <a:p>
-            <a:pPr marL="457200" lvl="1" indent="0">
-              <a:buNone/>
-            </a:pPr>
-            <a:r>
-              <a:rPr lang="en-IN" b="1" dirty="0"/>
-              <a:t>private</a:t>
-            </a:r>
-            <a:r>
-              <a:rPr lang="en-IN" dirty="0"/>
-              <a:t> </a:t>
-            </a:r>
-            <a:r>
-              <a:rPr lang="en-IN" b="1" dirty="0"/>
-              <a:t>int</a:t>
-            </a:r>
-            <a:r>
-              <a:rPr lang="en-IN" dirty="0"/>
-              <a:t> </a:t>
-            </a:r>
-            <a:r>
-              <a:rPr lang="en-IN" dirty="0" err="1"/>
-              <a:t>userId</a:t>
-            </a:r>
-            <a:r>
-              <a:rPr lang="en-IN" dirty="0"/>
-              <a:t>;</a:t>
-            </a:r>
-          </a:p>
-          <a:p>
-            <a:pPr marL="457200" lvl="1" indent="0">
-              <a:buNone/>
-            </a:pPr>
-            <a:r>
-              <a:rPr lang="en-IN" b="1" dirty="0"/>
-              <a:t>private</a:t>
-            </a:r>
-            <a:r>
-              <a:rPr lang="en-IN" dirty="0"/>
-              <a:t> String </a:t>
-            </a:r>
-            <a:r>
-              <a:rPr lang="en-IN" dirty="0" err="1"/>
-              <a:t>userName</a:t>
-            </a:r>
-            <a:r>
-              <a:rPr lang="en-IN" dirty="0"/>
-              <a:t>;</a:t>
-            </a:r>
-          </a:p>
-          <a:p>
-            <a:pPr marL="457200" lvl="1" indent="0">
-              <a:buNone/>
-            </a:pPr>
-            <a:r>
-              <a:rPr lang="en-IN" b="1" dirty="0"/>
-              <a:t>private</a:t>
-            </a:r>
-            <a:r>
-              <a:rPr lang="en-IN" dirty="0"/>
-              <a:t> String </a:t>
-            </a:r>
-            <a:r>
-              <a:rPr lang="en-IN" dirty="0" err="1"/>
-              <a:t>userPassword</a:t>
-            </a:r>
-            <a:r>
-              <a:rPr lang="en-IN" dirty="0"/>
-              <a:t>;</a:t>
-            </a:r>
-          </a:p>
-          <a:p>
-            <a:pPr marL="457200" lvl="1" indent="0">
-              <a:buNone/>
-            </a:pPr>
-            <a:r>
-              <a:rPr lang="en-IN" dirty="0"/>
-              <a:t>List&lt;String&gt; </a:t>
-            </a:r>
-            <a:r>
-              <a:rPr lang="en-IN" dirty="0" err="1"/>
-              <a:t>allRoles</a:t>
-            </a:r>
-            <a:r>
-              <a:rPr lang="en-IN" dirty="0"/>
-              <a:t>;</a:t>
-            </a:r>
-          </a:p>
-          <a:p>
-            <a:pPr marL="0" indent="0">
-              <a:buNone/>
-            </a:pPr>
-            <a:r>
-              <a:rPr lang="en-IN" dirty="0"/>
-              <a:t>}</a:t>
-            </a:r>
-          </a:p>
-        </p:txBody>
-      </p:sp>
-      <p:sp>
-        <p:nvSpPr>
-          <p:cNvPr id="5" name="Content Placeholder 4">
-            <a:extLst>
-              <a:ext uri="{FF2B5EF4-FFF2-40B4-BE49-F238E27FC236}">
-                <a16:creationId xmlns:a16="http://schemas.microsoft.com/office/drawing/2014/main" id="{D04FE901-ED73-4CB9-B58E-FC9346DE401A}"/>
-              </a:ext>
-            </a:extLst>
-          </p:cNvPr>
-          <p:cNvSpPr>
-            <a:spLocks noGrp="1"/>
-          </p:cNvSpPr>
-          <p:nvPr>
-            <p:ph sz="half" idx="2"/>
-          </p:nvPr>
-        </p:nvSpPr>
-        <p:spPr/>
-        <p:txBody>
-          <a:bodyPr/>
-          <a:lstStyle/>
-          <a:p>
-            <a:pPr marL="0" indent="0">
-              <a:buNone/>
-            </a:pPr>
-            <a:r>
-              <a:rPr lang="en-IN" b="1" dirty="0"/>
-              <a:t>public</a:t>
-            </a:r>
-            <a:r>
-              <a:rPr lang="en-IN" dirty="0"/>
-              <a:t> </a:t>
-            </a:r>
-            <a:r>
-              <a:rPr lang="en-IN" b="1" dirty="0"/>
-              <a:t>class</a:t>
-            </a:r>
-            <a:r>
-              <a:rPr lang="en-IN" dirty="0"/>
-              <a:t> </a:t>
-            </a:r>
-            <a:r>
-              <a:rPr lang="en-IN" dirty="0" err="1"/>
-              <a:t>MyRolePojo</a:t>
-            </a:r>
-            <a:r>
-              <a:rPr lang="en-IN" dirty="0"/>
-              <a:t> {</a:t>
-            </a:r>
-          </a:p>
-          <a:p>
-            <a:pPr marL="457200" lvl="1" indent="0">
-              <a:buNone/>
-            </a:pPr>
-            <a:r>
-              <a:rPr lang="en-IN" b="1" dirty="0"/>
-              <a:t>private</a:t>
-            </a:r>
-            <a:r>
-              <a:rPr lang="en-IN" dirty="0"/>
-              <a:t> </a:t>
-            </a:r>
-            <a:r>
-              <a:rPr lang="en-IN" b="1" dirty="0"/>
-              <a:t>int</a:t>
-            </a:r>
-            <a:r>
-              <a:rPr lang="en-IN" dirty="0"/>
-              <a:t> </a:t>
-            </a:r>
-            <a:r>
-              <a:rPr lang="en-IN" dirty="0" err="1"/>
-              <a:t>roleId</a:t>
-            </a:r>
-            <a:r>
-              <a:rPr lang="en-IN" dirty="0"/>
-              <a:t>;</a:t>
-            </a:r>
-          </a:p>
-          <a:p>
-            <a:pPr marL="457200" lvl="1" indent="0">
-              <a:buNone/>
-            </a:pPr>
-            <a:r>
-              <a:rPr lang="en-IN" b="1" dirty="0"/>
-              <a:t>private</a:t>
-            </a:r>
-            <a:r>
-              <a:rPr lang="en-IN" dirty="0"/>
-              <a:t> String </a:t>
-            </a:r>
-            <a:r>
-              <a:rPr lang="en-IN" dirty="0" err="1"/>
-              <a:t>roleName</a:t>
-            </a:r>
-            <a:r>
-              <a:rPr lang="en-IN" dirty="0"/>
-              <a:t>;</a:t>
-            </a:r>
-          </a:p>
-          <a:p>
-            <a:pPr marL="0" indent="0">
-              <a:buNone/>
-            </a:pPr>
-            <a:r>
-              <a:rPr lang="en-IN" dirty="0"/>
-              <a:t>}</a:t>
-            </a:r>
+              <a:t>userDetailsService</a:t>
+            </a:r>
+            <a:r>
+              <a:rPr lang="en-IN" dirty="0"/>
+              <a:t>() method and encode the passwords.</a:t>
+            </a:r>
+          </a:p>
+          <a:p>
+            <a:endParaRPr lang="en-IN" dirty="0"/>
           </a:p>
         </p:txBody>
       </p:sp>
     </p:spTree>
     <p:extLst>
       <p:ext uri="{BB962C8B-B14F-4D97-AF65-F5344CB8AC3E}">
-        <p14:creationId xmlns:p14="http://schemas.microsoft.com/office/powerpoint/2010/main" val="4291652711"/>
+        <p14:creationId xmlns:p14="http://schemas.microsoft.com/office/powerpoint/2010/main" val="3639827844"/>
       </p:ext>
     </p:extLst>
   </p:cSld>
@@ -6050,7 +7602,7 @@
           <p:cNvPr id="2" name="Title 1">
             <a:extLst>
               <a:ext uri="{FF2B5EF4-FFF2-40B4-BE49-F238E27FC236}">
-                <a16:creationId xmlns:a16="http://schemas.microsoft.com/office/drawing/2014/main" id="{D91A14CF-EB9F-467C-853A-280F74DFC3D6}"/>
+                <a16:creationId xmlns:a16="http://schemas.microsoft.com/office/drawing/2014/main" id="{E2BD3F9B-34EA-4B2B-86A9-316B033C8042}"/>
               </a:ext>
             </a:extLst>
           </p:cNvPr>
@@ -6067,19 +7619,18 @@
           <a:lstStyle/>
           <a:p>
             <a:r>
-              <a:rPr lang="en-US" dirty="0"/>
-              <a:t>Step 5: Create the Dao Layer Interface</a:t>
-            </a:r>
-            <a:endParaRPr lang="en-IN" dirty="0"/>
-          </a:p>
-        </p:txBody>
-      </p:sp>
-      <p:sp>
-        <p:nvSpPr>
-          <p:cNvPr id="5" name="Content Placeholder 4">
-            <a:extLst>
-              <a:ext uri="{FF2B5EF4-FFF2-40B4-BE49-F238E27FC236}">
-                <a16:creationId xmlns:a16="http://schemas.microsoft.com/office/drawing/2014/main" id="{24C98108-12F4-4D6F-9F19-92F9F594C4DD}"/>
+              <a:rPr lang="en-IN" dirty="0"/>
+              <a:t>Step 4 - Configure secured endpoints in the configuration class</a:t>
+            </a:r>
+          </a:p>
+        </p:txBody>
+      </p:sp>
+      <p:sp>
+        <p:nvSpPr>
+          <p:cNvPr id="3" name="Content Placeholder 2">
+            <a:extLst>
+              <a:ext uri="{FF2B5EF4-FFF2-40B4-BE49-F238E27FC236}">
+                <a16:creationId xmlns:a16="http://schemas.microsoft.com/office/drawing/2014/main" id="{08F47857-832C-46E6-80F1-F8DF21C7E59A}"/>
               </a:ext>
             </a:extLst>
           </p:cNvPr>
@@ -6092,115 +7643,329 @@
         </p:nvSpPr>
         <p:spPr/>
         <p:txBody>
-          <a:bodyPr/>
+          <a:bodyPr>
+            <a:normAutofit fontScale="70000" lnSpcReduction="20000"/>
+          </a:bodyPr>
           <a:lstStyle/>
           <a:p>
-            <a:r>
-              <a:rPr lang="en-US" dirty="0"/>
-              <a:t>Create the Dao repository</a:t>
-            </a:r>
-          </a:p>
-          <a:p>
-            <a:pPr marL="0" indent="0">
-              <a:buNone/>
-            </a:pPr>
-            <a:r>
-              <a:rPr lang="en-IN" dirty="0"/>
-              <a:t>@Repository</a:t>
-            </a:r>
-          </a:p>
-          <a:p>
-            <a:pPr marL="0" indent="0">
-              <a:buNone/>
-            </a:pPr>
-            <a:r>
-              <a:rPr lang="en-IN" b="1" dirty="0"/>
+            <a:pPr marL="0" indent="0">
+              <a:buNone/>
+            </a:pPr>
+            <a:r>
+              <a:rPr lang="en-IN" sz="3200" dirty="0"/>
+              <a:t>@Bean</a:t>
+            </a:r>
+          </a:p>
+          <a:p>
+            <a:pPr marL="0" indent="0">
+              <a:buNone/>
+            </a:pPr>
+            <a:r>
+              <a:rPr lang="en-IN" sz="3200" b="1" dirty="0"/>
               <a:t>public</a:t>
             </a:r>
             <a:r>
-              <a:rPr lang="en-IN" dirty="0"/>
+              <a:rPr lang="en-IN" sz="3200" dirty="0"/>
               <a:t> </a:t>
             </a:r>
             <a:r>
-              <a:rPr lang="en-IN" b="1" dirty="0"/>
-              <a:t>interface</a:t>
-            </a:r>
-            <a:r>
-              <a:rPr lang="en-IN" dirty="0"/>
+              <a:rPr lang="en-IN" sz="3200" dirty="0" err="1"/>
+              <a:t>SecurityFilterChain</a:t>
+            </a:r>
+            <a:r>
+              <a:rPr lang="en-IN" sz="3200" dirty="0"/>
               <a:t> </a:t>
             </a:r>
             <a:r>
-              <a:rPr lang="en-IN" dirty="0" err="1"/>
-              <a:t>MyUserDao</a:t>
-            </a:r>
-            <a:r>
-              <a:rPr lang="en-IN" dirty="0"/>
+              <a:rPr lang="en-IN" sz="3200" dirty="0" err="1"/>
+              <a:t>securityFilterChain</a:t>
+            </a:r>
+            <a:r>
+              <a:rPr lang="en-IN" sz="3200" dirty="0"/>
+              <a:t>(</a:t>
+            </a:r>
+            <a:r>
+              <a:rPr lang="en-IN" sz="3200" dirty="0" err="1"/>
+              <a:t>HttpSecurity</a:t>
+            </a:r>
+            <a:r>
+              <a:rPr lang="en-IN" sz="3200" dirty="0"/>
+              <a:t> http, </a:t>
+            </a:r>
+          </a:p>
+          <a:p>
+            <a:pPr marL="0" indent="0">
+              <a:buNone/>
+            </a:pPr>
+            <a:r>
+              <a:rPr lang="en-IN" sz="3200" dirty="0" err="1"/>
+              <a:t>AuthenticationManager</a:t>
+            </a:r>
+            <a:r>
+              <a:rPr lang="en-IN" sz="3200" dirty="0"/>
               <a:t> </a:t>
             </a:r>
             <a:r>
-              <a:rPr lang="en-IN" b="1" dirty="0"/>
-              <a:t>extends</a:t>
-            </a:r>
-            <a:r>
-              <a:rPr lang="en-IN" dirty="0"/>
-              <a:t> </a:t>
-            </a:r>
-            <a:r>
-              <a:rPr lang="en-IN" dirty="0" err="1"/>
-              <a:t>JpaRepository</a:t>
-            </a:r>
-            <a:r>
-              <a:rPr lang="en-IN" dirty="0"/>
-              <a:t>&lt;</a:t>
-            </a:r>
-            <a:r>
-              <a:rPr lang="en-IN" dirty="0" err="1"/>
-              <a:t>MyUserEntity</a:t>
-            </a:r>
-            <a:r>
-              <a:rPr lang="en-IN" dirty="0"/>
-              <a:t>, Integer&gt;{</a:t>
-            </a:r>
-          </a:p>
-          <a:p>
-            <a:pPr marL="0" indent="0">
-              <a:buNone/>
-            </a:pPr>
-            <a:r>
-              <a:rPr lang="en-IN" dirty="0"/>
-              <a:t>	Optional&lt;</a:t>
-            </a:r>
-            <a:r>
-              <a:rPr lang="en-IN" dirty="0" err="1"/>
-              <a:t>MyUserEntity</a:t>
-            </a:r>
-            <a:r>
-              <a:rPr lang="en-IN" dirty="0"/>
-              <a:t>&gt; </a:t>
-            </a:r>
-            <a:r>
-              <a:rPr lang="en-IN" dirty="0" err="1"/>
-              <a:t>findByUserName</a:t>
-            </a:r>
-            <a:r>
-              <a:rPr lang="en-IN" dirty="0"/>
-              <a:t>(String </a:t>
-            </a:r>
-            <a:r>
-              <a:rPr lang="en-IN" dirty="0" err="1"/>
-              <a:t>userName</a:t>
-            </a:r>
-            <a:r>
-              <a:rPr lang="en-IN" dirty="0"/>
-              <a:t>);</a:t>
-            </a:r>
-          </a:p>
-          <a:p>
-            <a:pPr marL="0" indent="0">
-              <a:buNone/>
-            </a:pPr>
-            <a:r>
-              <a:rPr lang="en-IN" dirty="0"/>
+              <a:rPr lang="en-IN" sz="3200" dirty="0" err="1"/>
+              <a:t>authManager</a:t>
+            </a:r>
+            <a:r>
+              <a:rPr lang="en-IN" sz="3200" dirty="0"/>
+              <a:t>) </a:t>
+            </a:r>
+            <a:r>
+              <a:rPr lang="en-IN" sz="3200" b="1" dirty="0"/>
+              <a:t>throws</a:t>
+            </a:r>
+            <a:r>
+              <a:rPr lang="en-IN" sz="3200" dirty="0"/>
+              <a:t> Exception {</a:t>
+            </a:r>
+          </a:p>
+          <a:p>
+            <a:pPr marL="457200" lvl="1" indent="0">
+              <a:buNone/>
+            </a:pPr>
+            <a:r>
+              <a:rPr lang="en-IN" sz="2800" b="1" dirty="0"/>
+              <a:t>return</a:t>
+            </a:r>
+            <a:r>
+              <a:rPr lang="en-IN" sz="2800" dirty="0"/>
+              <a:t> http</a:t>
+            </a:r>
+          </a:p>
+          <a:p>
+            <a:pPr marL="457200" lvl="1" indent="0">
+              <a:buNone/>
+            </a:pPr>
+            <a:r>
+              <a:rPr lang="en-IN" sz="2800" dirty="0"/>
+              <a:t>.</a:t>
+            </a:r>
+            <a:r>
+              <a:rPr lang="en-IN" sz="2800" dirty="0" err="1"/>
+              <a:t>csrf</a:t>
+            </a:r>
+            <a:r>
+              <a:rPr lang="en-IN" sz="2800" dirty="0"/>
+              <a:t>(</a:t>
+            </a:r>
+            <a:r>
+              <a:rPr lang="en-IN" sz="2800" dirty="0" err="1"/>
+              <a:t>csrf</a:t>
+            </a:r>
+            <a:r>
+              <a:rPr lang="en-IN" sz="2800" dirty="0"/>
+              <a:t> -&gt; </a:t>
+            </a:r>
+            <a:r>
+              <a:rPr lang="en-IN" sz="2800" dirty="0" err="1"/>
+              <a:t>csrf.disable</a:t>
+            </a:r>
+            <a:r>
+              <a:rPr lang="en-IN" sz="2800" dirty="0"/>
+              <a:t>()) // Safe to disable for strictly </a:t>
+            </a:r>
+            <a:r>
+              <a:rPr lang="en-IN" sz="2800" u="sng" dirty="0"/>
+              <a:t>stateless</a:t>
+            </a:r>
+            <a:r>
+              <a:rPr lang="en-IN" sz="2800" dirty="0"/>
+              <a:t> REST APIs</a:t>
+            </a:r>
+          </a:p>
+          <a:p>
+            <a:pPr marL="457200" lvl="1" indent="0">
+              <a:buNone/>
+            </a:pPr>
+            <a:r>
+              <a:rPr lang="en-IN" sz="2800" dirty="0"/>
+              <a:t>.</a:t>
+            </a:r>
+            <a:r>
+              <a:rPr lang="en-IN" sz="2800" dirty="0" err="1"/>
+              <a:t>sessionManagement</a:t>
+            </a:r>
+            <a:r>
+              <a:rPr lang="en-IN" sz="2800" dirty="0"/>
+              <a:t>(</a:t>
+            </a:r>
+            <a:r>
+              <a:rPr lang="en-IN" sz="2800" dirty="0" err="1"/>
+              <a:t>sm</a:t>
+            </a:r>
+            <a:r>
+              <a:rPr lang="en-IN" sz="2800" dirty="0"/>
+              <a:t> -&gt; </a:t>
+            </a:r>
+            <a:r>
+              <a:rPr lang="en-IN" sz="2800" dirty="0" err="1"/>
+              <a:t>sm.sessionCreationPolicy</a:t>
+            </a:r>
+            <a:r>
+              <a:rPr lang="en-IN" sz="2800" dirty="0"/>
+              <a:t>(</a:t>
+            </a:r>
+            <a:r>
+              <a:rPr lang="en-IN" sz="2800" dirty="0" err="1"/>
+              <a:t>SessionCreationPolicy.</a:t>
+            </a:r>
+            <a:r>
+              <a:rPr lang="en-IN" sz="2800" b="1" i="1" dirty="0" err="1"/>
+              <a:t>STATELESS</a:t>
+            </a:r>
+            <a:r>
+              <a:rPr lang="en-IN" sz="2800" dirty="0"/>
+              <a:t>))</a:t>
+            </a:r>
+          </a:p>
+          <a:p>
+            <a:pPr marL="457200" lvl="1" indent="0">
+              <a:buNone/>
+            </a:pPr>
+            <a:r>
+              <a:rPr lang="en-IN" sz="2800" dirty="0"/>
+              <a:t>.</a:t>
+            </a:r>
+            <a:r>
+              <a:rPr lang="en-IN" sz="2800" dirty="0" err="1"/>
+              <a:t>authorizeHttpRequests</a:t>
+            </a:r>
+            <a:r>
+              <a:rPr lang="en-IN" sz="2800" dirty="0"/>
+              <a:t>(auth -&gt; auth</a:t>
+            </a:r>
+          </a:p>
+          <a:p>
+            <a:pPr marL="457200" lvl="1" indent="0">
+              <a:buNone/>
+            </a:pPr>
+            <a:r>
+              <a:rPr lang="en-IN" sz="2800" dirty="0"/>
+              <a:t>.</a:t>
+            </a:r>
+            <a:r>
+              <a:rPr lang="en-IN" sz="2800" dirty="0" err="1"/>
+              <a:t>requestMatchers</a:t>
+            </a:r>
+            <a:r>
+              <a:rPr lang="en-IN" sz="2800" dirty="0"/>
+              <a:t>("/</a:t>
+            </a:r>
+            <a:r>
+              <a:rPr lang="en-IN" sz="2800" dirty="0" err="1"/>
+              <a:t>api</a:t>
+            </a:r>
+            <a:r>
+              <a:rPr lang="en-IN" sz="2800" dirty="0"/>
+              <a:t>/users/login").</a:t>
+            </a:r>
+            <a:r>
+              <a:rPr lang="en-IN" sz="2800" dirty="0" err="1"/>
+              <a:t>permitAll</a:t>
+            </a:r>
+            <a:r>
+              <a:rPr lang="en-IN" sz="2800" dirty="0"/>
+              <a:t>() // Open login route</a:t>
+            </a:r>
+          </a:p>
+          <a:p>
+            <a:pPr marL="457200" lvl="1" indent="0">
+              <a:buNone/>
+            </a:pPr>
+            <a:r>
+              <a:rPr lang="en-IN" sz="2800" dirty="0"/>
+              <a:t>.</a:t>
+            </a:r>
+            <a:r>
+              <a:rPr lang="en-IN" sz="2800" dirty="0" err="1"/>
+              <a:t>anyRequest</a:t>
+            </a:r>
+            <a:r>
+              <a:rPr lang="en-IN" sz="2800" dirty="0"/>
+              <a:t>().authenticated()</a:t>
+            </a:r>
+          </a:p>
+          <a:p>
+            <a:pPr marL="457200" lvl="1" indent="0">
+              <a:buNone/>
+            </a:pPr>
+            <a:r>
+              <a:rPr lang="en-IN" sz="2800" dirty="0"/>
+              <a:t>)</a:t>
+            </a:r>
+          </a:p>
+          <a:p>
+            <a:pPr marL="457200" lvl="1" indent="0">
+              <a:buNone/>
+            </a:pPr>
+            <a:r>
+              <a:rPr lang="en-IN" sz="2800" dirty="0"/>
+              <a:t>.</a:t>
+            </a:r>
+            <a:r>
+              <a:rPr lang="en-IN" sz="2800" dirty="0" err="1"/>
+              <a:t>authenticationManager</a:t>
+            </a:r>
+            <a:r>
+              <a:rPr lang="en-IN" sz="2800" dirty="0"/>
+              <a:t>(</a:t>
+            </a:r>
+            <a:r>
+              <a:rPr lang="en-IN" sz="2800" dirty="0" err="1"/>
+              <a:t>authManager</a:t>
+            </a:r>
+            <a:r>
+              <a:rPr lang="en-IN" sz="2800" dirty="0"/>
+              <a:t>) // Set custom authentication manager</a:t>
+            </a:r>
+          </a:p>
+          <a:p>
+            <a:pPr marL="457200" lvl="1" indent="0">
+              <a:buNone/>
+            </a:pPr>
+            <a:r>
+              <a:rPr lang="en-IN" sz="2800" dirty="0"/>
+              <a:t>.</a:t>
+            </a:r>
+            <a:r>
+              <a:rPr lang="en-IN" sz="2800" dirty="0" err="1"/>
+              <a:t>httpBasic</a:t>
+            </a:r>
+            <a:r>
+              <a:rPr lang="en-IN" sz="2800" dirty="0"/>
+              <a:t>(</a:t>
+            </a:r>
+            <a:r>
+              <a:rPr lang="en-IN" sz="2800" dirty="0" err="1"/>
+              <a:t>Customizer.</a:t>
+            </a:r>
+            <a:r>
+              <a:rPr lang="en-IN" sz="2800" i="1" dirty="0" err="1"/>
+              <a:t>withDefaults</a:t>
+            </a:r>
+            <a:r>
+              <a:rPr lang="en-IN" sz="2800" dirty="0"/>
+              <a:t>())</a:t>
+            </a:r>
+          </a:p>
+          <a:p>
+            <a:pPr marL="457200" lvl="1" indent="0">
+              <a:buNone/>
+            </a:pPr>
+            <a:r>
+              <a:rPr lang="en-IN" sz="2800" dirty="0"/>
+              <a:t>.build();</a:t>
+            </a:r>
+          </a:p>
+          <a:p>
+            <a:pPr marL="0" indent="0">
+              <a:buNone/>
+            </a:pPr>
+            <a:r>
+              <a:rPr lang="en-IN" sz="3200" dirty="0"/>
               <a:t>}</a:t>
             </a:r>
           </a:p>
@@ -6212,7 +7977,7 @@
     </p:spTree>
     <p:extLst>
       <p:ext uri="{BB962C8B-B14F-4D97-AF65-F5344CB8AC3E}">
-        <p14:creationId xmlns:p14="http://schemas.microsoft.com/office/powerpoint/2010/main" val="3475644981"/>
+        <p14:creationId xmlns:p14="http://schemas.microsoft.com/office/powerpoint/2010/main" val="1182762928"/>
       </p:ext>
     </p:extLst>
   </p:cSld>
@@ -6244,7 +8009,7 @@
           <p:cNvPr id="2" name="Title 1">
             <a:extLst>
               <a:ext uri="{FF2B5EF4-FFF2-40B4-BE49-F238E27FC236}">
-                <a16:creationId xmlns:a16="http://schemas.microsoft.com/office/drawing/2014/main" id="{F2827259-4740-484B-9030-B5C4D09D02F0}"/>
+                <a16:creationId xmlns:a16="http://schemas.microsoft.com/office/drawing/2014/main" id="{09318A7E-1540-4FE1-8DB8-78A2CC9F3498}"/>
               </a:ext>
             </a:extLst>
           </p:cNvPr>
@@ -6261,474 +8026,193 @@
           <a:lstStyle/>
           <a:p>
             <a:r>
-              <a:rPr lang="en-US" dirty="0"/>
-              <a:t>Step 6 : Create the </a:t>
-            </a:r>
-            <a:r>
-              <a:rPr lang="en-US" dirty="0" err="1"/>
-              <a:t>CustomUserDetailsService</a:t>
-            </a:r>
-            <a:r>
-              <a:rPr lang="en-US" dirty="0"/>
-              <a:t>  </a:t>
+              <a:rPr lang="en-IN" dirty="0"/>
+              <a:t>Step 5 - Configure role based authorization to the endpoints</a:t>
+            </a:r>
+          </a:p>
+        </p:txBody>
+      </p:sp>
+      <p:sp>
+        <p:nvSpPr>
+          <p:cNvPr id="3" name="Content Placeholder 2">
+            <a:extLst>
+              <a:ext uri="{FF2B5EF4-FFF2-40B4-BE49-F238E27FC236}">
+                <a16:creationId xmlns:a16="http://schemas.microsoft.com/office/drawing/2014/main" id="{DA0ED4C8-0742-451D-AC32-B3D794F42DDB}"/>
+              </a:ext>
+            </a:extLst>
+          </p:cNvPr>
+          <p:cNvSpPr>
+            <a:spLocks noGrp="1"/>
+          </p:cNvSpPr>
+          <p:nvPr>
+            <p:ph idx="1"/>
+          </p:nvPr>
+        </p:nvSpPr>
+        <p:spPr/>
+        <p:txBody>
+          <a:bodyPr/>
+          <a:lstStyle/>
+          <a:p>
+            <a:r>
+              <a:rPr lang="en-IN" dirty="0"/>
+              <a:t>In the controller class specify the role access for each endpoint</a:t>
+            </a:r>
+          </a:p>
+          <a:p>
+            <a:pPr lvl="1"/>
+            <a:r>
+              <a:rPr lang="en-IN" sz="1800" dirty="0">
+                <a:solidFill>
+                  <a:srgbClr val="646464"/>
+                </a:solidFill>
+                <a:latin typeface="Courier New" panose="02070309020205020404" pitchFamily="49" charset="0"/>
+              </a:rPr>
+              <a:t>@</a:t>
+            </a:r>
+            <a:r>
+              <a:rPr lang="en-IN" sz="1800" dirty="0" err="1">
+                <a:solidFill>
+                  <a:srgbClr val="646464"/>
+                </a:solidFill>
+                <a:latin typeface="Courier New" panose="02070309020205020404" pitchFamily="49" charset="0"/>
+              </a:rPr>
+              <a:t>PreAuthorize</a:t>
+            </a:r>
+            <a:r>
+              <a:rPr lang="en-IN" sz="1800" dirty="0">
+                <a:solidFill>
+                  <a:srgbClr val="000000"/>
+                </a:solidFill>
+                <a:latin typeface="Courier New" panose="02070309020205020404" pitchFamily="49" charset="0"/>
+              </a:rPr>
+              <a:t>(</a:t>
+            </a:r>
+            <a:r>
+              <a:rPr lang="en-IN" sz="1800" dirty="0">
+                <a:solidFill>
+                  <a:srgbClr val="2A00FF"/>
+                </a:solidFill>
+                <a:latin typeface="Courier New" panose="02070309020205020404" pitchFamily="49" charset="0"/>
+              </a:rPr>
+              <a:t>"</a:t>
+            </a:r>
+            <a:r>
+              <a:rPr lang="en-IN" sz="1800" dirty="0" err="1">
+                <a:solidFill>
+                  <a:srgbClr val="2A00FF"/>
+                </a:solidFill>
+                <a:latin typeface="Courier New" panose="02070309020205020404" pitchFamily="49" charset="0"/>
+              </a:rPr>
+              <a:t>hasAuthority</a:t>
+            </a:r>
+            <a:r>
+              <a:rPr lang="en-IN" sz="1800" dirty="0">
+                <a:solidFill>
+                  <a:srgbClr val="2A00FF"/>
+                </a:solidFill>
+                <a:latin typeface="Courier New" panose="02070309020205020404" pitchFamily="49" charset="0"/>
+              </a:rPr>
+              <a:t>(‘ROLE_ADMIN’)"</a:t>
+            </a:r>
+            <a:r>
+              <a:rPr lang="en-IN" sz="1800" dirty="0">
+                <a:solidFill>
+                  <a:srgbClr val="000000"/>
+                </a:solidFill>
+                <a:latin typeface="Courier New" panose="02070309020205020404" pitchFamily="49" charset="0"/>
+              </a:rPr>
+              <a:t>)</a:t>
+            </a:r>
+          </a:p>
+          <a:p>
+            <a:pPr lvl="1"/>
+            <a:r>
+              <a:rPr lang="en-IN" sz="1800" dirty="0">
+                <a:solidFill>
+                  <a:srgbClr val="646464"/>
+                </a:solidFill>
+                <a:latin typeface="Courier New" panose="02070309020205020404" pitchFamily="49" charset="0"/>
+              </a:rPr>
+              <a:t>@</a:t>
+            </a:r>
+            <a:r>
+              <a:rPr lang="en-IN" sz="1800" dirty="0" err="1">
+                <a:solidFill>
+                  <a:srgbClr val="646464"/>
+                </a:solidFill>
+                <a:latin typeface="Courier New" panose="02070309020205020404" pitchFamily="49" charset="0"/>
+              </a:rPr>
+              <a:t>PreAuthorize</a:t>
+            </a:r>
+            <a:r>
+              <a:rPr lang="en-IN" sz="1800" dirty="0">
+                <a:solidFill>
+                  <a:srgbClr val="000000"/>
+                </a:solidFill>
+                <a:latin typeface="Courier New" panose="02070309020205020404" pitchFamily="49" charset="0"/>
+              </a:rPr>
+              <a:t>(</a:t>
+            </a:r>
+            <a:r>
+              <a:rPr lang="en-IN" sz="1800" dirty="0">
+                <a:solidFill>
+                  <a:srgbClr val="2A00FF"/>
+                </a:solidFill>
+                <a:latin typeface="Courier New" panose="02070309020205020404" pitchFamily="49" charset="0"/>
+              </a:rPr>
+              <a:t>"</a:t>
+            </a:r>
+            <a:r>
+              <a:rPr lang="en-IN" sz="1800" dirty="0" err="1">
+                <a:solidFill>
+                  <a:srgbClr val="2A00FF"/>
+                </a:solidFill>
+                <a:latin typeface="Courier New" panose="02070309020205020404" pitchFamily="49" charset="0"/>
+              </a:rPr>
+              <a:t>hasAuthority</a:t>
+            </a:r>
+            <a:r>
+              <a:rPr lang="en-IN" sz="1800" dirty="0">
+                <a:solidFill>
+                  <a:srgbClr val="2A00FF"/>
+                </a:solidFill>
+                <a:latin typeface="Courier New" panose="02070309020205020404" pitchFamily="49" charset="0"/>
+              </a:rPr>
+              <a:t>(‘ROLE_USER’)"</a:t>
+            </a:r>
+            <a:r>
+              <a:rPr lang="en-IN" sz="1800" dirty="0">
+                <a:solidFill>
+                  <a:srgbClr val="000000"/>
+                </a:solidFill>
+                <a:latin typeface="Courier New" panose="02070309020205020404" pitchFamily="49" charset="0"/>
+              </a:rPr>
+              <a:t>)</a:t>
+            </a:r>
+          </a:p>
+          <a:p>
+            <a:r>
+              <a:rPr lang="en-IN" dirty="0"/>
+              <a:t>In the </a:t>
+            </a:r>
+            <a:r>
+              <a:rPr lang="en-IN" dirty="0" err="1"/>
+              <a:t>SecurityConfig</a:t>
+            </a:r>
+            <a:r>
+              <a:rPr lang="en-IN" dirty="0"/>
+              <a:t> class use @</a:t>
+            </a:r>
+            <a:r>
+              <a:rPr lang="en-IN" dirty="0" err="1"/>
+              <a:t>EnableMethodSecurity</a:t>
             </a:r>
             <a:endParaRPr lang="en-IN" dirty="0"/>
           </a:p>
-        </p:txBody>
-      </p:sp>
-      <p:sp>
-        <p:nvSpPr>
-          <p:cNvPr id="3" name="Content Placeholder 2">
-            <a:extLst>
-              <a:ext uri="{FF2B5EF4-FFF2-40B4-BE49-F238E27FC236}">
-                <a16:creationId xmlns:a16="http://schemas.microsoft.com/office/drawing/2014/main" id="{53A0AFDF-544A-4F23-9D22-2B21B43DC855}"/>
-              </a:ext>
-            </a:extLst>
-          </p:cNvPr>
-          <p:cNvSpPr>
-            <a:spLocks noGrp="1"/>
-          </p:cNvSpPr>
-          <p:nvPr>
-            <p:ph idx="1"/>
-          </p:nvPr>
-        </p:nvSpPr>
-        <p:spPr>
-          <a:xfrm>
-            <a:off x="838200" y="1443789"/>
-            <a:ext cx="10515600" cy="4733174"/>
-          </a:xfrm>
-        </p:spPr>
-        <p:txBody>
-          <a:bodyPr>
-            <a:normAutofit fontScale="25000" lnSpcReduction="20000"/>
-          </a:bodyPr>
-          <a:lstStyle/>
-          <a:p>
-            <a:pPr marL="0" indent="0">
-              <a:buNone/>
-            </a:pPr>
-            <a:r>
-              <a:rPr lang="en-US" sz="7200" dirty="0"/>
-              <a:t>Bypasses standard in-memory behavior by linking incoming login validation requests to repository models:</a:t>
-            </a:r>
-          </a:p>
-          <a:p>
-            <a:pPr marL="0" indent="0">
-              <a:buNone/>
-            </a:pPr>
-            <a:endParaRPr lang="en-IN" sz="6400" dirty="0"/>
-          </a:p>
-          <a:p>
-            <a:pPr marL="0" indent="0">
-              <a:buNone/>
-            </a:pPr>
-            <a:r>
-              <a:rPr lang="en-IN" sz="6400" dirty="0"/>
-              <a:t>@Service</a:t>
-            </a:r>
-          </a:p>
-          <a:p>
-            <a:pPr marL="0" indent="0">
-              <a:buNone/>
-            </a:pPr>
-            <a:r>
-              <a:rPr lang="en-IN" sz="6400" b="1" dirty="0"/>
-              <a:t>public</a:t>
-            </a:r>
-            <a:r>
-              <a:rPr lang="en-IN" sz="6400" dirty="0"/>
-              <a:t> </a:t>
-            </a:r>
-            <a:r>
-              <a:rPr lang="en-IN" sz="6400" b="1" dirty="0"/>
-              <a:t>class</a:t>
-            </a:r>
-            <a:r>
-              <a:rPr lang="en-IN" sz="6400" dirty="0"/>
-              <a:t> </a:t>
-            </a:r>
-            <a:r>
-              <a:rPr lang="en-IN" sz="6400" dirty="0" err="1"/>
-              <a:t>CustomUserDetailsService</a:t>
-            </a:r>
-            <a:r>
-              <a:rPr lang="en-IN" sz="6400" dirty="0"/>
-              <a:t> </a:t>
-            </a:r>
-            <a:r>
-              <a:rPr lang="en-IN" sz="6400" b="1" dirty="0"/>
-              <a:t>implements</a:t>
-            </a:r>
-            <a:r>
-              <a:rPr lang="en-IN" sz="6400" dirty="0"/>
-              <a:t> </a:t>
-            </a:r>
-            <a:r>
-              <a:rPr lang="en-IN" sz="6400" dirty="0" err="1"/>
-              <a:t>UserDetailsService</a:t>
-            </a:r>
-            <a:r>
-              <a:rPr lang="en-IN" sz="6400" dirty="0"/>
-              <a:t> {</a:t>
-            </a:r>
-            <a:br>
-              <a:rPr lang="en-IN" sz="6400" dirty="0"/>
-            </a:br>
-            <a:endParaRPr lang="en-IN" sz="6400" dirty="0"/>
-          </a:p>
-          <a:p>
-            <a:pPr marL="457200" lvl="1" indent="0">
-              <a:buNone/>
-            </a:pPr>
-            <a:r>
-              <a:rPr lang="en-IN" sz="6400" dirty="0"/>
-              <a:t>@</a:t>
-            </a:r>
-            <a:r>
-              <a:rPr lang="en-IN" sz="6400" dirty="0" err="1"/>
-              <a:t>Autowired</a:t>
-            </a:r>
-            <a:r>
-              <a:rPr lang="en-IN" sz="6400" dirty="0"/>
-              <a:t> </a:t>
-            </a:r>
-          </a:p>
-          <a:p>
-            <a:pPr marL="457200" lvl="1" indent="0">
-              <a:buNone/>
-            </a:pPr>
-            <a:r>
-              <a:rPr lang="en-IN" sz="6400" b="1" dirty="0"/>
-              <a:t>private</a:t>
-            </a:r>
-            <a:r>
-              <a:rPr lang="en-IN" sz="6400" dirty="0"/>
-              <a:t> </a:t>
-            </a:r>
-            <a:r>
-              <a:rPr lang="en-IN" sz="6400" dirty="0" err="1"/>
-              <a:t>MyUserDao</a:t>
-            </a:r>
-            <a:r>
-              <a:rPr lang="en-IN" sz="6400" dirty="0"/>
-              <a:t> </a:t>
-            </a:r>
-            <a:r>
-              <a:rPr lang="en-IN" sz="6400" dirty="0" err="1"/>
-              <a:t>userDao</a:t>
-            </a:r>
-            <a:r>
-              <a:rPr lang="en-IN" sz="6400" dirty="0"/>
-              <a:t>;</a:t>
-            </a:r>
-            <a:br>
-              <a:rPr lang="en-IN" sz="6400" dirty="0"/>
-            </a:br>
-            <a:endParaRPr lang="en-IN" sz="6400" dirty="0"/>
-          </a:p>
-          <a:p>
-            <a:pPr marL="457200" lvl="1" indent="0">
-              <a:buNone/>
-            </a:pPr>
-            <a:r>
-              <a:rPr lang="en-IN" sz="6400" dirty="0"/>
-              <a:t>@Override</a:t>
-            </a:r>
-          </a:p>
-          <a:p>
-            <a:pPr marL="457200" lvl="1" indent="0">
-              <a:buNone/>
-            </a:pPr>
-            <a:r>
-              <a:rPr lang="en-IN" sz="6400" b="1" dirty="0"/>
-              <a:t>public</a:t>
-            </a:r>
-            <a:r>
-              <a:rPr lang="en-IN" sz="6400" dirty="0"/>
-              <a:t> </a:t>
-            </a:r>
-            <a:r>
-              <a:rPr lang="en-IN" sz="6400" dirty="0" err="1"/>
-              <a:t>UserDetails</a:t>
-            </a:r>
-            <a:r>
-              <a:rPr lang="en-IN" sz="6400" dirty="0"/>
-              <a:t> </a:t>
-            </a:r>
-            <a:r>
-              <a:rPr lang="en-IN" sz="6400" dirty="0" err="1"/>
-              <a:t>loadUserByUsername</a:t>
-            </a:r>
-            <a:r>
-              <a:rPr lang="en-IN" sz="6400" dirty="0"/>
-              <a:t>(String </a:t>
-            </a:r>
-            <a:r>
-              <a:rPr lang="en-IN" sz="6400" dirty="0" err="1"/>
-              <a:t>userName</a:t>
-            </a:r>
-            <a:r>
-              <a:rPr lang="en-IN" sz="6400" dirty="0"/>
-              <a:t>) </a:t>
-            </a:r>
-            <a:r>
-              <a:rPr lang="en-IN" sz="6400" b="1" dirty="0"/>
-              <a:t>throws</a:t>
-            </a:r>
-            <a:r>
-              <a:rPr lang="en-IN" sz="6400" dirty="0"/>
-              <a:t> </a:t>
-            </a:r>
-            <a:r>
-              <a:rPr lang="en-IN" sz="6400" dirty="0" err="1"/>
-              <a:t>UsernameNotFoundException</a:t>
-            </a:r>
-            <a:r>
-              <a:rPr lang="en-IN" sz="6400" dirty="0"/>
-              <a:t> {</a:t>
-            </a:r>
-          </a:p>
-          <a:p>
-            <a:pPr marL="914400" lvl="2" indent="0">
-              <a:buNone/>
-            </a:pPr>
-            <a:r>
-              <a:rPr lang="en-IN" sz="6400" dirty="0" err="1"/>
-              <a:t>MyUserEntity</a:t>
-            </a:r>
-            <a:r>
-              <a:rPr lang="en-IN" sz="6400" dirty="0"/>
-              <a:t> </a:t>
-            </a:r>
-            <a:r>
-              <a:rPr lang="en-IN" sz="6400" dirty="0" err="1"/>
-              <a:t>userEntity</a:t>
-            </a:r>
-            <a:r>
-              <a:rPr lang="en-IN" sz="6400" dirty="0"/>
-              <a:t> = </a:t>
-            </a:r>
-            <a:r>
-              <a:rPr lang="en-IN" sz="6400" dirty="0" err="1"/>
-              <a:t>userDao.findByUserName</a:t>
-            </a:r>
-            <a:r>
-              <a:rPr lang="en-IN" sz="6400" dirty="0"/>
-              <a:t>(</a:t>
-            </a:r>
-            <a:r>
-              <a:rPr lang="en-IN" sz="6400" dirty="0" err="1"/>
-              <a:t>userName</a:t>
-            </a:r>
-            <a:r>
-              <a:rPr lang="en-IN" sz="6400" dirty="0"/>
-              <a:t>)</a:t>
-            </a:r>
-          </a:p>
-          <a:p>
-            <a:pPr marL="914400" lvl="2" indent="0">
-              <a:buNone/>
-            </a:pPr>
-            <a:r>
-              <a:rPr lang="en-IN" sz="6400" dirty="0"/>
-              <a:t>.</a:t>
-            </a:r>
-            <a:r>
-              <a:rPr lang="en-IN" sz="6400" dirty="0" err="1"/>
-              <a:t>orElseThrow</a:t>
-            </a:r>
-            <a:r>
-              <a:rPr lang="en-IN" sz="6400" dirty="0"/>
-              <a:t>(() -&gt; </a:t>
-            </a:r>
-            <a:r>
-              <a:rPr lang="en-IN" sz="6400" b="1" dirty="0"/>
-              <a:t>new</a:t>
-            </a:r>
-            <a:r>
-              <a:rPr lang="en-IN" sz="6400" dirty="0"/>
-              <a:t> </a:t>
-            </a:r>
-            <a:r>
-              <a:rPr lang="en-IN" sz="6400" dirty="0" err="1"/>
-              <a:t>UsernameNotFoundException</a:t>
-            </a:r>
-            <a:r>
-              <a:rPr lang="en-IN" sz="6400" dirty="0"/>
-              <a:t>("User identity not found: " + </a:t>
-            </a:r>
-            <a:r>
-              <a:rPr lang="en-IN" sz="6400" dirty="0" err="1"/>
-              <a:t>userName</a:t>
-            </a:r>
-            <a:r>
-              <a:rPr lang="en-IN" sz="6400" dirty="0"/>
-              <a:t>));</a:t>
-            </a:r>
-            <a:br>
-              <a:rPr lang="en-IN" sz="6400" dirty="0"/>
-            </a:br>
-            <a:endParaRPr lang="en-IN" sz="6400" dirty="0"/>
-          </a:p>
-          <a:p>
-            <a:pPr marL="914400" lvl="2" indent="0">
-              <a:buNone/>
-            </a:pPr>
-            <a:r>
-              <a:rPr lang="en-IN" sz="6400" b="1" dirty="0"/>
-              <a:t>return</a:t>
-            </a:r>
-            <a:r>
-              <a:rPr lang="en-IN" sz="6400" dirty="0"/>
-              <a:t> </a:t>
-            </a:r>
-            <a:r>
-              <a:rPr lang="en-IN" sz="6400" dirty="0" err="1"/>
-              <a:t>User.</a:t>
-            </a:r>
-            <a:r>
-              <a:rPr lang="en-IN" sz="6400" i="1" dirty="0" err="1"/>
-              <a:t>builder</a:t>
-            </a:r>
-            <a:r>
-              <a:rPr lang="en-IN" sz="6400" dirty="0"/>
-              <a:t>()</a:t>
-            </a:r>
-          </a:p>
-          <a:p>
-            <a:pPr marL="914400" lvl="2" indent="0">
-              <a:buNone/>
-            </a:pPr>
-            <a:r>
-              <a:rPr lang="en-IN" sz="6400" dirty="0"/>
-              <a:t>	.username(</a:t>
-            </a:r>
-            <a:r>
-              <a:rPr lang="en-IN" sz="6400" dirty="0" err="1"/>
-              <a:t>userEntity.getUserName</a:t>
-            </a:r>
-            <a:r>
-              <a:rPr lang="en-IN" sz="6400" dirty="0"/>
-              <a:t>())</a:t>
-            </a:r>
-          </a:p>
-          <a:p>
-            <a:pPr marL="914400" lvl="2" indent="0">
-              <a:buNone/>
-            </a:pPr>
-            <a:r>
-              <a:rPr lang="en-IN" sz="6400" dirty="0"/>
-              <a:t>	.password(</a:t>
-            </a:r>
-            <a:r>
-              <a:rPr lang="en-IN" sz="6400" dirty="0" err="1"/>
-              <a:t>userEntity.getUserPassword</a:t>
-            </a:r>
-            <a:r>
-              <a:rPr lang="en-IN" sz="6400" dirty="0"/>
-              <a:t>())</a:t>
-            </a:r>
-          </a:p>
-          <a:p>
-            <a:pPr marL="914400" lvl="2" indent="0">
-              <a:buNone/>
-            </a:pPr>
-            <a:r>
-              <a:rPr lang="en-IN" sz="6400" dirty="0"/>
-              <a:t>	.authorities(</a:t>
-            </a:r>
-            <a:r>
-              <a:rPr lang="en-IN" sz="6400" dirty="0" err="1"/>
-              <a:t>userEntity.getAllRoles</a:t>
-            </a:r>
-            <a:r>
-              <a:rPr lang="en-IN" sz="6400" dirty="0"/>
-              <a:t>().stream()</a:t>
-            </a:r>
-          </a:p>
-          <a:p>
-            <a:pPr marL="914400" lvl="2" indent="0">
-              <a:buNone/>
-            </a:pPr>
-            <a:r>
-              <a:rPr lang="en-IN" sz="6400" dirty="0"/>
-              <a:t>	.map((</a:t>
-            </a:r>
-            <a:r>
-              <a:rPr lang="en-IN" sz="6400" dirty="0" err="1"/>
-              <a:t>eachRole</a:t>
-            </a:r>
-            <a:r>
-              <a:rPr lang="en-IN" sz="6400" dirty="0"/>
-              <a:t>) -&gt; </a:t>
-            </a:r>
-            <a:r>
-              <a:rPr lang="en-IN" sz="6400" b="1" dirty="0"/>
-              <a:t>new</a:t>
-            </a:r>
-            <a:r>
-              <a:rPr lang="en-IN" sz="6400" dirty="0"/>
-              <a:t> </a:t>
-            </a:r>
-            <a:r>
-              <a:rPr lang="en-IN" sz="6400" dirty="0" err="1"/>
-              <a:t>SimpleGrantedAuthority</a:t>
-            </a:r>
-            <a:r>
-              <a:rPr lang="en-IN" sz="6400" dirty="0"/>
-              <a:t>(</a:t>
-            </a:r>
-            <a:r>
-              <a:rPr lang="en-IN" sz="6400" dirty="0" err="1"/>
-              <a:t>eachRole.getRoleName</a:t>
-            </a:r>
-            <a:r>
-              <a:rPr lang="en-IN" sz="6400" dirty="0"/>
-              <a:t>()))</a:t>
-            </a:r>
-          </a:p>
-          <a:p>
-            <a:pPr marL="914400" lvl="2" indent="0">
-              <a:buNone/>
-            </a:pPr>
-            <a:r>
-              <a:rPr lang="en-IN" sz="6400" dirty="0"/>
-              <a:t>	.</a:t>
-            </a:r>
-            <a:r>
-              <a:rPr lang="en-IN" sz="6400" dirty="0" err="1"/>
-              <a:t>toList</a:t>
-            </a:r>
-            <a:r>
-              <a:rPr lang="en-IN" sz="6400" dirty="0"/>
-              <a:t>())</a:t>
-            </a:r>
-          </a:p>
-          <a:p>
-            <a:pPr marL="914400" lvl="2" indent="0">
-              <a:buNone/>
-            </a:pPr>
-            <a:r>
-              <a:rPr lang="en-IN" sz="6400" dirty="0"/>
-              <a:t>	.build();</a:t>
-            </a:r>
-          </a:p>
-          <a:p>
-            <a:pPr marL="0" indent="0">
-              <a:buNone/>
-            </a:pPr>
-            <a:r>
-              <a:rPr lang="en-IN" sz="6400" dirty="0"/>
-              <a:t>          }</a:t>
-            </a:r>
-          </a:p>
-          <a:p>
-            <a:pPr marL="0" indent="0">
-              <a:buNone/>
-            </a:pPr>
-            <a:r>
-              <a:rPr lang="en-IN" sz="6400" dirty="0"/>
-              <a:t>}</a:t>
+          <a:p>
+            <a:r>
+              <a:rPr lang="en-IN" dirty="0"/>
+              <a:t>Now test the application for role based authorization of endpoints</a:t>
             </a:r>
           </a:p>
           <a:p>
@@ -6739,7 +8223,7 @@
     </p:spTree>
     <p:extLst>
       <p:ext uri="{BB962C8B-B14F-4D97-AF65-F5344CB8AC3E}">
-        <p14:creationId xmlns:p14="http://schemas.microsoft.com/office/powerpoint/2010/main" val="1626678947"/>
+        <p14:creationId xmlns:p14="http://schemas.microsoft.com/office/powerpoint/2010/main" val="1672076945"/>
       </p:ext>
     </p:extLst>
   </p:cSld>
@@ -6771,7 +8255,7 @@
           <p:cNvPr id="2" name="Title 1">
             <a:extLst>
               <a:ext uri="{FF2B5EF4-FFF2-40B4-BE49-F238E27FC236}">
-                <a16:creationId xmlns:a16="http://schemas.microsoft.com/office/drawing/2014/main" id="{8F880CDD-30C7-4B9D-96D4-8335872BB8C8}"/>
+                <a16:creationId xmlns:a16="http://schemas.microsoft.com/office/drawing/2014/main" id="{EF7B03DE-3AA7-47BD-B9ED-DF5745C87F0B}"/>
               </a:ext>
             </a:extLst>
           </p:cNvPr>
@@ -6789,11 +8273,7 @@
           <a:p>
             <a:r>
               <a:rPr lang="en-US" dirty="0"/>
-              <a:t>Step 7 : Exposing the </a:t>
-            </a:r>
-            <a:r>
-              <a:rPr lang="en-US" dirty="0" err="1"/>
-              <a:t>AuthenticationManager</a:t>
+              <a:t>Step 6 : Create tables in DB</a:t>
             </a:r>
             <a:endParaRPr lang="en-IN" dirty="0"/>
           </a:p>
@@ -6804,7 +8284,7 @@
           <p:cNvPr id="3" name="Content Placeholder 2">
             <a:extLst>
               <a:ext uri="{FF2B5EF4-FFF2-40B4-BE49-F238E27FC236}">
-                <a16:creationId xmlns:a16="http://schemas.microsoft.com/office/drawing/2014/main" id="{93B60534-44C9-4603-8191-D49251D5932B}"/>
+                <a16:creationId xmlns:a16="http://schemas.microsoft.com/office/drawing/2014/main" id="{03C2EB59-4066-41DE-808B-483ACAABAA8D}"/>
               </a:ext>
             </a:extLst>
           </p:cNvPr>
@@ -6818,205 +8298,281 @@
         <p:spPr/>
         <p:txBody>
           <a:bodyPr>
-            <a:normAutofit fontScale="25000" lnSpcReduction="20000"/>
+            <a:normAutofit fontScale="62500" lnSpcReduction="20000"/>
           </a:bodyPr>
           <a:lstStyle/>
           <a:p>
-            <a:r>
-              <a:rPr lang="en-US" sz="8000" dirty="0"/>
-              <a:t>Spring Security 7 drops old configuration wrappers. </a:t>
-            </a:r>
-          </a:p>
-          <a:p>
-            <a:r>
-              <a:rPr lang="en-US" sz="8000" dirty="0"/>
-              <a:t>You must explicitly register the `</a:t>
-            </a:r>
-            <a:r>
-              <a:rPr lang="en-US" sz="8000" dirty="0" err="1"/>
-              <a:t>AuthenticationManager</a:t>
-            </a:r>
-            <a:r>
-              <a:rPr lang="en-US" sz="8000" dirty="0"/>
-              <a:t>` bean to handle programmatic login tasks manually.</a:t>
-            </a:r>
-          </a:p>
-          <a:p>
-            <a:pPr marL="0" indent="0">
-              <a:buNone/>
-            </a:pPr>
-            <a:r>
-              <a:rPr lang="en-IN" sz="8000" dirty="0"/>
-              <a:t>@Configuration</a:t>
-            </a:r>
-          </a:p>
-          <a:p>
-            <a:pPr marL="0" indent="0">
-              <a:buNone/>
-            </a:pPr>
-            <a:r>
-              <a:rPr lang="en-IN" sz="8000" dirty="0"/>
-              <a:t>@</a:t>
-            </a:r>
-            <a:r>
-              <a:rPr lang="en-IN" sz="8000" dirty="0" err="1"/>
-              <a:t>EnableWebSecurity</a:t>
-            </a:r>
-            <a:endParaRPr lang="en-IN" sz="8000" dirty="0"/>
-          </a:p>
-          <a:p>
-            <a:pPr marL="0" indent="0">
-              <a:buNone/>
-            </a:pPr>
-            <a:r>
-              <a:rPr lang="en-IN" sz="8000" b="1" dirty="0"/>
-              <a:t>public</a:t>
-            </a:r>
-            <a:r>
-              <a:rPr lang="en-IN" sz="8000" dirty="0"/>
-              <a:t> </a:t>
-            </a:r>
-            <a:r>
-              <a:rPr lang="en-IN" sz="8000" b="1" dirty="0"/>
-              <a:t>class</a:t>
-            </a:r>
-            <a:r>
-              <a:rPr lang="en-IN" sz="8000" dirty="0"/>
-              <a:t> </a:t>
-            </a:r>
-            <a:r>
-              <a:rPr lang="en-IN" sz="8000" dirty="0" err="1"/>
-              <a:t>SecurityConfig</a:t>
-            </a:r>
-            <a:r>
-              <a:rPr lang="en-IN" sz="8000" dirty="0"/>
-              <a:t> {</a:t>
-            </a:r>
-            <a:br>
-              <a:rPr lang="en-IN" sz="8000" dirty="0"/>
-            </a:br>
-            <a:endParaRPr lang="en-IN" sz="8000" dirty="0"/>
-          </a:p>
-          <a:p>
-            <a:pPr marL="0" indent="0">
-              <a:buNone/>
-            </a:pPr>
-            <a:r>
-              <a:rPr lang="en-IN" sz="8000" dirty="0"/>
-              <a:t>@Bean</a:t>
-            </a:r>
-          </a:p>
-          <a:p>
-            <a:pPr marL="0" indent="0">
-              <a:buNone/>
-            </a:pPr>
-            <a:r>
-              <a:rPr lang="en-IN" sz="8000" b="1" dirty="0"/>
-              <a:t>public</a:t>
-            </a:r>
-            <a:r>
-              <a:rPr lang="en-IN" sz="8000" dirty="0"/>
-              <a:t> </a:t>
-            </a:r>
-            <a:r>
-              <a:rPr lang="en-IN" sz="8000" dirty="0" err="1"/>
-              <a:t>AuthenticationManager</a:t>
-            </a:r>
-            <a:r>
-              <a:rPr lang="en-IN" sz="8000" dirty="0"/>
-              <a:t> </a:t>
-            </a:r>
-            <a:r>
-              <a:rPr lang="en-IN" sz="8000" dirty="0" err="1"/>
-              <a:t>authenticationManager</a:t>
-            </a:r>
-            <a:r>
-              <a:rPr lang="en-IN" sz="8000" dirty="0"/>
+            <a:pPr marL="0" indent="0">
+              <a:buNone/>
+            </a:pPr>
+            <a:r>
+              <a:rPr lang="en-IN" dirty="0"/>
+              <a:t>create table </a:t>
+            </a:r>
+            <a:r>
+              <a:rPr lang="en-IN" dirty="0" err="1"/>
+              <a:t>my_user_details</a:t>
+            </a:r>
+            <a:r>
+              <a:rPr lang="en-IN" dirty="0"/>
+              <a:t>(	</a:t>
+            </a:r>
+          </a:p>
+          <a:p>
+            <a:pPr marL="457200" lvl="1" indent="0">
+              <a:buNone/>
+            </a:pPr>
+            <a:r>
+              <a:rPr lang="en-IN" dirty="0" err="1"/>
+              <a:t>user_id</a:t>
+            </a:r>
+            <a:r>
+              <a:rPr lang="en-IN" dirty="0"/>
+              <a:t> int primary key </a:t>
+            </a:r>
+            <a:r>
+              <a:rPr lang="en-IN" dirty="0" err="1"/>
+              <a:t>auto_increment</a:t>
+            </a:r>
+            <a:r>
+              <a:rPr lang="en-IN" dirty="0"/>
+              <a:t>,    </a:t>
+            </a:r>
+          </a:p>
+          <a:p>
+            <a:pPr marL="457200" lvl="1" indent="0">
+              <a:buNone/>
+            </a:pPr>
+            <a:r>
+              <a:rPr lang="en-IN" dirty="0" err="1"/>
+              <a:t>user_name</a:t>
+            </a:r>
+            <a:r>
+              <a:rPr lang="en-IN" dirty="0"/>
+              <a:t> varchar(20),    </a:t>
+            </a:r>
+          </a:p>
+          <a:p>
+            <a:pPr marL="457200" lvl="1" indent="0">
+              <a:buNone/>
+            </a:pPr>
+            <a:r>
+              <a:rPr lang="en-IN" dirty="0" err="1"/>
+              <a:t>user_password</a:t>
+            </a:r>
+            <a:r>
+              <a:rPr lang="en-IN" dirty="0"/>
+              <a:t> varchar(20)</a:t>
+            </a:r>
+          </a:p>
+          <a:p>
+            <a:pPr marL="0" indent="0">
+              <a:buNone/>
+            </a:pPr>
+            <a:r>
+              <a:rPr lang="en-IN" dirty="0"/>
+              <a:t>);</a:t>
+            </a:r>
+          </a:p>
+          <a:p>
+            <a:pPr marL="0" indent="0">
+              <a:buNone/>
+            </a:pPr>
+            <a:r>
+              <a:rPr lang="en-IN" dirty="0"/>
+              <a:t>create table </a:t>
+            </a:r>
+            <a:r>
+              <a:rPr lang="en-IN" dirty="0" err="1"/>
+              <a:t>my_role_details</a:t>
+            </a:r>
+            <a:r>
+              <a:rPr lang="en-IN" dirty="0"/>
+              <a:t>(	</a:t>
+            </a:r>
+          </a:p>
+          <a:p>
+            <a:pPr marL="457200" lvl="1" indent="0">
+              <a:buNone/>
+            </a:pPr>
+            <a:r>
+              <a:rPr lang="en-IN" dirty="0" err="1"/>
+              <a:t>role_id</a:t>
+            </a:r>
+            <a:r>
+              <a:rPr lang="en-IN" dirty="0"/>
+              <a:t> int primary key </a:t>
+            </a:r>
+            <a:r>
+              <a:rPr lang="en-IN" dirty="0" err="1"/>
+              <a:t>auto_increment</a:t>
+            </a:r>
+            <a:r>
+              <a:rPr lang="en-IN" dirty="0"/>
+              <a:t>,    </a:t>
+            </a:r>
+          </a:p>
+          <a:p>
+            <a:pPr marL="457200" lvl="1" indent="0">
+              <a:buNone/>
+            </a:pPr>
+            <a:r>
+              <a:rPr lang="en-IN" dirty="0" err="1"/>
+              <a:t>role_name</a:t>
+            </a:r>
+            <a:r>
+              <a:rPr lang="en-IN" dirty="0"/>
+              <a:t> varchar(20)</a:t>
+            </a:r>
+          </a:p>
+          <a:p>
+            <a:pPr marL="0" indent="0">
+              <a:buNone/>
+            </a:pPr>
+            <a:r>
+              <a:rPr lang="en-IN" dirty="0"/>
+              <a:t>);</a:t>
+            </a:r>
+          </a:p>
+          <a:p>
+            <a:pPr marL="0" indent="0">
+              <a:buNone/>
+            </a:pPr>
+            <a:r>
+              <a:rPr lang="en-IN" dirty="0"/>
+              <a:t>create table </a:t>
+            </a:r>
+            <a:r>
+              <a:rPr lang="en-IN" dirty="0" err="1"/>
+              <a:t>my_user_role_details</a:t>
+            </a:r>
+            <a:r>
+              <a:rPr lang="en-IN" dirty="0"/>
+              <a:t>(	</a:t>
+            </a:r>
+          </a:p>
+          <a:p>
+            <a:pPr marL="457200" lvl="1" indent="0">
+              <a:buNone/>
+            </a:pPr>
+            <a:r>
+              <a:rPr lang="en-IN" dirty="0" err="1"/>
+              <a:t>user_role_id</a:t>
+            </a:r>
+            <a:r>
+              <a:rPr lang="en-IN" dirty="0"/>
+              <a:t> int primary key </a:t>
+            </a:r>
+            <a:r>
+              <a:rPr lang="en-IN" dirty="0" err="1"/>
+              <a:t>auto_increment</a:t>
+            </a:r>
+            <a:r>
+              <a:rPr lang="en-IN" dirty="0"/>
+              <a:t>,    </a:t>
+            </a:r>
+          </a:p>
+          <a:p>
+            <a:pPr marL="457200" lvl="1" indent="0">
+              <a:buNone/>
+            </a:pPr>
+            <a:r>
+              <a:rPr lang="en-IN" dirty="0" err="1"/>
+              <a:t>user_id</a:t>
+            </a:r>
+            <a:r>
+              <a:rPr lang="en-IN" dirty="0"/>
+              <a:t> int,    </a:t>
+            </a:r>
+          </a:p>
+          <a:p>
+            <a:pPr marL="457200" lvl="1" indent="0">
+              <a:buNone/>
+            </a:pPr>
+            <a:r>
+              <a:rPr lang="en-IN" dirty="0" err="1"/>
+              <a:t>role_id</a:t>
+            </a:r>
+            <a:r>
+              <a:rPr lang="en-IN" dirty="0"/>
+              <a:t> int,    </a:t>
+            </a:r>
+          </a:p>
+          <a:p>
+            <a:pPr marL="457200" lvl="1" indent="0">
+              <a:buNone/>
+            </a:pPr>
+            <a:r>
+              <a:rPr lang="en-IN" dirty="0"/>
+              <a:t>foreign key(</a:t>
+            </a:r>
+            <a:r>
+              <a:rPr lang="en-IN" dirty="0" err="1"/>
+              <a:t>user_id</a:t>
+            </a:r>
+            <a:r>
+              <a:rPr lang="en-IN" dirty="0"/>
+              <a:t>) references </a:t>
+            </a:r>
+            <a:r>
+              <a:rPr lang="en-IN" dirty="0" err="1"/>
+              <a:t>my_user_details</a:t>
+            </a:r>
+            <a:r>
+              <a:rPr lang="en-IN" dirty="0"/>
               <a:t>(</a:t>
             </a:r>
-          </a:p>
-          <a:p>
-            <a:pPr marL="0" indent="0">
-              <a:buNone/>
-            </a:pPr>
-            <a:r>
-              <a:rPr lang="en-IN" sz="8000" dirty="0" err="1"/>
-              <a:t>UserDetailsService</a:t>
-            </a:r>
-            <a:r>
-              <a:rPr lang="en-IN" sz="8000" dirty="0"/>
-              <a:t> </a:t>
-            </a:r>
-            <a:r>
-              <a:rPr lang="en-IN" sz="8000" dirty="0" err="1"/>
-              <a:t>userDetailsService</a:t>
-            </a:r>
-            <a:r>
-              <a:rPr lang="en-IN" sz="8000" dirty="0"/>
-              <a:t>,</a:t>
-            </a:r>
-          </a:p>
-          <a:p>
-            <a:pPr marL="0" indent="0">
-              <a:buNone/>
-            </a:pPr>
-            <a:r>
-              <a:rPr lang="en-IN" sz="8000" dirty="0" err="1"/>
-              <a:t>PasswordEncoder</a:t>
-            </a:r>
-            <a:r>
-              <a:rPr lang="en-IN" sz="8000" dirty="0"/>
-              <a:t> </a:t>
-            </a:r>
-            <a:r>
-              <a:rPr lang="en-IN" sz="8000" dirty="0" err="1"/>
-              <a:t>passwordEncoder</a:t>
-            </a:r>
-            <a:r>
-              <a:rPr lang="en-IN" sz="8000" dirty="0"/>
-              <a:t>) {</a:t>
-            </a:r>
-          </a:p>
-          <a:p>
-            <a:pPr marL="0" indent="0">
-              <a:buNone/>
-            </a:pPr>
-            <a:r>
-              <a:rPr lang="en-IN" sz="8000" dirty="0" err="1"/>
-              <a:t>DaoAuthenticationProvider</a:t>
-            </a:r>
-            <a:r>
-              <a:rPr lang="en-IN" sz="8000" dirty="0"/>
-              <a:t> provider = </a:t>
-            </a:r>
-            <a:r>
-              <a:rPr lang="en-IN" sz="8000" b="1" dirty="0"/>
-              <a:t>new</a:t>
-            </a:r>
-            <a:r>
-              <a:rPr lang="en-IN" sz="8000" dirty="0"/>
-              <a:t> </a:t>
-            </a:r>
-            <a:r>
-              <a:rPr lang="en-IN" sz="8000" dirty="0" err="1"/>
-              <a:t>DaoAuthenticationProvider</a:t>
-            </a:r>
-            <a:r>
-              <a:rPr lang="en-IN" sz="8000" dirty="0"/>
+            <a:r>
+              <a:rPr lang="en-IN" dirty="0" err="1"/>
+              <a:t>user_id</a:t>
+            </a:r>
+            <a:r>
+              <a:rPr lang="en-IN" dirty="0"/>
+              <a:t>),    </a:t>
+            </a:r>
+          </a:p>
+          <a:p>
+            <a:pPr marL="457200" lvl="1" indent="0">
+              <a:buNone/>
+            </a:pPr>
+            <a:r>
+              <a:rPr lang="en-IN" dirty="0"/>
+              <a:t>foreign key(</a:t>
+            </a:r>
+            <a:r>
+              <a:rPr lang="en-IN" dirty="0" err="1"/>
+              <a:t>role_id</a:t>
+            </a:r>
+            <a:r>
+              <a:rPr lang="en-IN" dirty="0"/>
+              <a:t>) references </a:t>
+            </a:r>
+            <a:r>
+              <a:rPr lang="en-IN" dirty="0" err="1"/>
+              <a:t>my_role_details</a:t>
+            </a:r>
+            <a:r>
+              <a:rPr lang="en-IN" dirty="0"/>
               <a:t>(</a:t>
             </a:r>
             <a:r>
-              <a:rPr lang="en-IN" sz="8000" dirty="0" err="1"/>
-              <a:t>userDetailsService</a:t>
-            </a:r>
-            <a:r>
-              <a:rPr lang="en-IN" sz="8000" dirty="0"/>
+              <a:rPr lang="en-IN" dirty="0" err="1"/>
+              <a:t>role_id</a:t>
+            </a:r>
+            <a:r>
+              <a:rPr lang="en-IN" dirty="0"/>
+              <a:t>)</a:t>
+            </a:r>
+          </a:p>
+          <a:p>
+            <a:pPr marL="0" indent="0">
+              <a:buNone/>
+            </a:pPr>
+            <a:r>
+              <a:rPr lang="en-IN" dirty="0"/>
               <a:t>);</a:t>
             </a:r>
           </a:p>
-          <a:p>
-            <a:endParaRPr lang="en-IN" dirty="0"/>
-          </a:p>
         </p:txBody>
       </p:sp>
       <p:sp>
@@ -7024,7 +8580,7 @@
           <p:cNvPr id="4" name="Content Placeholder 3">
             <a:extLst>
               <a:ext uri="{FF2B5EF4-FFF2-40B4-BE49-F238E27FC236}">
-                <a16:creationId xmlns:a16="http://schemas.microsoft.com/office/drawing/2014/main" id="{23735B9E-FF88-4D67-99F2-71EB40DB4082}"/>
+                <a16:creationId xmlns:a16="http://schemas.microsoft.com/office/drawing/2014/main" id="{F3F47A4A-00D3-4062-A4E6-FAF23A5DECEF}"/>
               </a:ext>
             </a:extLst>
           </p:cNvPr>
@@ -7035,194 +8591,309 @@
             <p:ph sz="half" idx="2"/>
           </p:nvPr>
         </p:nvSpPr>
-        <p:spPr/>
+        <p:spPr>
+          <a:xfrm>
+            <a:off x="5784783" y="1825625"/>
+            <a:ext cx="6208295" cy="4351338"/>
+          </a:xfrm>
+        </p:spPr>
         <p:txBody>
           <a:bodyPr>
-            <a:normAutofit fontScale="25000" lnSpcReduction="20000"/>
+            <a:normAutofit fontScale="62500" lnSpcReduction="20000"/>
           </a:bodyPr>
           <a:lstStyle/>
           <a:p>
-            <a:pPr marL="0" indent="0">
-              <a:buNone/>
-            </a:pPr>
-            <a:r>
-              <a:rPr lang="en-IN" sz="8000" dirty="0"/>
-              <a:t>//</a:t>
-            </a:r>
-            <a:r>
-              <a:rPr lang="en-IN" sz="8000" dirty="0" err="1"/>
-              <a:t>provider.setUserDetailsService</a:t>
-            </a:r>
-            <a:r>
-              <a:rPr lang="en-IN" sz="8000" dirty="0"/>
+            <a:r>
+              <a:rPr lang="en-IN" dirty="0"/>
+              <a:t>insert into </a:t>
+            </a:r>
+            <a:r>
+              <a:rPr lang="en-IN" dirty="0" err="1"/>
+              <a:t>my_user_details</a:t>
+            </a:r>
+            <a:r>
+              <a:rPr lang="en-IN" dirty="0"/>
               <a:t>(</a:t>
             </a:r>
             <a:r>
-              <a:rPr lang="en-IN" sz="8000" dirty="0" err="1"/>
-              <a:t>userDetailsService</a:t>
-            </a:r>
-            <a:r>
-              <a:rPr lang="en-IN" sz="8000" dirty="0"/>
-              <a:t>);</a:t>
-            </a:r>
-          </a:p>
-          <a:p>
-            <a:pPr marL="0" indent="0">
-              <a:buNone/>
-            </a:pPr>
-            <a:r>
-              <a:rPr lang="en-IN" sz="8000" dirty="0" err="1"/>
-              <a:t>provider.setPasswordEncoder</a:t>
-            </a:r>
-            <a:r>
-              <a:rPr lang="en-IN" sz="8000" dirty="0"/>
+              <a:rPr lang="en-IN" dirty="0" err="1"/>
+              <a:t>user_name</a:t>
+            </a:r>
+            <a:r>
+              <a:rPr lang="en-IN" dirty="0"/>
+              <a:t>, </a:t>
+            </a:r>
+            <a:r>
+              <a:rPr lang="en-IN" dirty="0" err="1"/>
+              <a:t>user_password</a:t>
+            </a:r>
+            <a:r>
+              <a:rPr lang="en-IN" dirty="0"/>
+              <a:t>) values("</a:t>
+            </a:r>
+            <a:r>
+              <a:rPr lang="en-IN" dirty="0" err="1"/>
+              <a:t>admin","admin</a:t>
+            </a:r>
+            <a:r>
+              <a:rPr lang="en-IN" dirty="0"/>
+              <a:t>");</a:t>
+            </a:r>
+          </a:p>
+          <a:p>
+            <a:r>
+              <a:rPr lang="en-IN" dirty="0"/>
+              <a:t>insert into </a:t>
+            </a:r>
+            <a:r>
+              <a:rPr lang="en-IN" dirty="0" err="1"/>
+              <a:t>my_user_details</a:t>
+            </a:r>
+            <a:r>
+              <a:rPr lang="en-IN" dirty="0"/>
               <a:t>(</a:t>
             </a:r>
             <a:r>
-              <a:rPr lang="en-IN" sz="8000" dirty="0" err="1"/>
-              <a:t>passwordEncoder</a:t>
-            </a:r>
-            <a:r>
-              <a:rPr lang="en-IN" sz="8000" dirty="0"/>
-              <a:t>);</a:t>
-            </a:r>
-          </a:p>
-          <a:p>
-            <a:pPr marL="0" indent="0">
-              <a:buNone/>
-            </a:pPr>
-            <a:r>
-              <a:rPr lang="en-IN" sz="8000" b="1" dirty="0"/>
-              <a:t>return</a:t>
-            </a:r>
-            <a:r>
-              <a:rPr lang="en-IN" sz="8000" dirty="0"/>
-              <a:t> </a:t>
-            </a:r>
-            <a:r>
-              <a:rPr lang="en-IN" sz="8000" b="1" dirty="0"/>
-              <a:t>new</a:t>
-            </a:r>
-            <a:r>
-              <a:rPr lang="en-IN" sz="8000" dirty="0"/>
-              <a:t> </a:t>
-            </a:r>
-            <a:r>
-              <a:rPr lang="en-IN" sz="8000" dirty="0" err="1"/>
-              <a:t>ProviderManager</a:t>
-            </a:r>
-            <a:r>
-              <a:rPr lang="en-IN" sz="8000" dirty="0"/>
-              <a:t>(provider);</a:t>
-            </a:r>
-          </a:p>
-          <a:p>
-            <a:pPr marL="0" indent="0">
-              <a:buNone/>
-            </a:pPr>
-            <a:r>
-              <a:rPr lang="en-IN" sz="8000" dirty="0"/>
-              <a:t>}</a:t>
-            </a:r>
-            <a:br>
-              <a:rPr lang="en-IN" sz="8000" dirty="0"/>
-            </a:br>
-            <a:endParaRPr lang="en-IN" sz="8000" dirty="0"/>
-          </a:p>
-          <a:p>
-            <a:pPr marL="0" indent="0">
-              <a:buNone/>
-            </a:pPr>
-            <a:r>
-              <a:rPr lang="en-IN" sz="8000" dirty="0"/>
-              <a:t>@Bean</a:t>
-            </a:r>
-          </a:p>
-          <a:p>
-            <a:pPr marL="0" indent="0">
-              <a:buNone/>
-            </a:pPr>
-            <a:r>
-              <a:rPr lang="en-IN" sz="8000" b="1" dirty="0"/>
-              <a:t>public</a:t>
-            </a:r>
-            <a:r>
-              <a:rPr lang="en-IN" sz="8000" dirty="0"/>
-              <a:t> </a:t>
-            </a:r>
-            <a:r>
-              <a:rPr lang="en-IN" sz="8000" dirty="0" err="1"/>
-              <a:t>PasswordEncoder</a:t>
-            </a:r>
-            <a:r>
-              <a:rPr lang="en-IN" sz="8000" dirty="0"/>
-              <a:t> </a:t>
-            </a:r>
-            <a:r>
-              <a:rPr lang="en-IN" sz="8000" dirty="0" err="1"/>
-              <a:t>passwordEncoder</a:t>
-            </a:r>
-            <a:r>
-              <a:rPr lang="en-IN" sz="8000" dirty="0"/>
-              <a:t>() {</a:t>
-            </a:r>
-          </a:p>
-          <a:p>
-            <a:pPr marL="0" indent="0">
-              <a:buNone/>
-            </a:pPr>
-            <a:r>
-              <a:rPr lang="en-IN" sz="8000" b="1" dirty="0"/>
-              <a:t>return</a:t>
-            </a:r>
-            <a:r>
-              <a:rPr lang="en-IN" sz="8000" dirty="0"/>
-              <a:t> </a:t>
-            </a:r>
-            <a:r>
-              <a:rPr lang="en-IN" sz="8000" b="1" dirty="0"/>
-              <a:t>new</a:t>
-            </a:r>
-            <a:r>
-              <a:rPr lang="en-IN" sz="8000" dirty="0"/>
-              <a:t> </a:t>
-            </a:r>
-            <a:r>
-              <a:rPr lang="en-IN" sz="8000" dirty="0" err="1"/>
-              <a:t>BCryptPasswordEncoder</a:t>
-            </a:r>
-            <a:r>
-              <a:rPr lang="en-IN" sz="8000" dirty="0"/>
-              <a:t>(); // Hashing algorithm bean</a:t>
-            </a:r>
-          </a:p>
-          <a:p>
-            <a:pPr marL="0" indent="0">
-              <a:buNone/>
-            </a:pPr>
-            <a:r>
-              <a:rPr lang="en-IN" sz="8000" dirty="0"/>
-              <a:t>}</a:t>
-            </a:r>
-          </a:p>
-          <a:p>
-            <a:pPr marL="0" indent="0">
-              <a:buNone/>
-            </a:pPr>
-            <a:r>
-              <a:rPr lang="en-IN" sz="8000" dirty="0"/>
-              <a:t>}</a:t>
-            </a:r>
-          </a:p>
-          <a:p>
-            <a:endParaRPr lang="en-IN" dirty="0"/>
+              <a:rPr lang="en-IN" dirty="0" err="1"/>
+              <a:t>user_name</a:t>
+            </a:r>
+            <a:r>
+              <a:rPr lang="en-IN" dirty="0"/>
+              <a:t>, </a:t>
+            </a:r>
+            <a:r>
+              <a:rPr lang="en-IN" dirty="0" err="1"/>
+              <a:t>user_password</a:t>
+            </a:r>
+            <a:r>
+              <a:rPr lang="en-IN" dirty="0"/>
+              <a:t>) values("</a:t>
+            </a:r>
+            <a:r>
+              <a:rPr lang="en-IN" dirty="0" err="1"/>
+              <a:t>john","john</a:t>
+            </a:r>
+            <a:r>
+              <a:rPr lang="en-IN" dirty="0"/>
+              <a:t>");</a:t>
+            </a:r>
+          </a:p>
+          <a:p>
+            <a:r>
+              <a:rPr lang="en-IN" dirty="0"/>
+              <a:t>insert into </a:t>
+            </a:r>
+            <a:r>
+              <a:rPr lang="en-IN" dirty="0" err="1"/>
+              <a:t>my_user_details</a:t>
+            </a:r>
+            <a:r>
+              <a:rPr lang="en-IN" dirty="0"/>
+              <a:t>(</a:t>
+            </a:r>
+            <a:r>
+              <a:rPr lang="en-IN" dirty="0" err="1"/>
+              <a:t>user_name</a:t>
+            </a:r>
+            <a:r>
+              <a:rPr lang="en-IN" dirty="0"/>
+              <a:t>, </a:t>
+            </a:r>
+            <a:r>
+              <a:rPr lang="en-IN" dirty="0" err="1"/>
+              <a:t>user_password</a:t>
+            </a:r>
+            <a:r>
+              <a:rPr lang="en-IN" dirty="0"/>
+              <a:t>) values("</a:t>
+            </a:r>
+            <a:r>
+              <a:rPr lang="en-IN" dirty="0" err="1"/>
+              <a:t>priya</a:t>
+            </a:r>
+            <a:r>
+              <a:rPr lang="en-IN" dirty="0"/>
+              <a:t>","</a:t>
+            </a:r>
+            <a:r>
+              <a:rPr lang="en-IN" dirty="0" err="1"/>
+              <a:t>priya</a:t>
+            </a:r>
+            <a:r>
+              <a:rPr lang="en-IN" dirty="0"/>
+              <a:t>");</a:t>
+            </a:r>
+          </a:p>
+          <a:p>
+            <a:r>
+              <a:rPr lang="en-IN" dirty="0"/>
+              <a:t>insert into </a:t>
+            </a:r>
+            <a:r>
+              <a:rPr lang="en-IN" dirty="0" err="1"/>
+              <a:t>my_role_details</a:t>
+            </a:r>
+            <a:r>
+              <a:rPr lang="en-IN" dirty="0"/>
+              <a:t>(</a:t>
+            </a:r>
+            <a:r>
+              <a:rPr lang="en-IN" dirty="0" err="1"/>
+              <a:t>role_name</a:t>
+            </a:r>
+            <a:r>
+              <a:rPr lang="en-IN" dirty="0"/>
+              <a:t>) values ("ADMIN");</a:t>
+            </a:r>
+          </a:p>
+          <a:p>
+            <a:r>
+              <a:rPr lang="en-IN" dirty="0"/>
+              <a:t>insert into </a:t>
+            </a:r>
+            <a:r>
+              <a:rPr lang="en-IN" dirty="0" err="1"/>
+              <a:t>my_role_details</a:t>
+            </a:r>
+            <a:r>
+              <a:rPr lang="en-IN" dirty="0"/>
+              <a:t>(</a:t>
+            </a:r>
+            <a:r>
+              <a:rPr lang="en-IN" dirty="0" err="1"/>
+              <a:t>role_name</a:t>
+            </a:r>
+            <a:r>
+              <a:rPr lang="en-IN" dirty="0"/>
+              <a:t>) values ("CUSTOMER");</a:t>
+            </a:r>
+          </a:p>
+          <a:p>
+            <a:r>
+              <a:rPr lang="en-IN" dirty="0"/>
+              <a:t>insert into </a:t>
+            </a:r>
+            <a:r>
+              <a:rPr lang="en-IN" dirty="0" err="1"/>
+              <a:t>my_user_role_details</a:t>
+            </a:r>
+            <a:r>
+              <a:rPr lang="en-IN" dirty="0"/>
+              <a:t>(</a:t>
+            </a:r>
+            <a:r>
+              <a:rPr lang="en-IN" dirty="0" err="1"/>
+              <a:t>user_id</a:t>
+            </a:r>
+            <a:r>
+              <a:rPr lang="en-IN" dirty="0"/>
+              <a:t>, </a:t>
+            </a:r>
+            <a:r>
+              <a:rPr lang="en-IN" dirty="0" err="1"/>
+              <a:t>role_id</a:t>
+            </a:r>
+            <a:r>
+              <a:rPr lang="en-IN" dirty="0"/>
+              <a:t>) values(1, 1);</a:t>
+            </a:r>
+          </a:p>
+          <a:p>
+            <a:r>
+              <a:rPr lang="en-IN" dirty="0"/>
+              <a:t>insert into </a:t>
+            </a:r>
+            <a:r>
+              <a:rPr lang="en-IN" dirty="0" err="1"/>
+              <a:t>my_user_role_details</a:t>
+            </a:r>
+            <a:r>
+              <a:rPr lang="en-IN" dirty="0"/>
+              <a:t>(</a:t>
+            </a:r>
+            <a:r>
+              <a:rPr lang="en-IN" dirty="0" err="1"/>
+              <a:t>user_id</a:t>
+            </a:r>
+            <a:r>
+              <a:rPr lang="en-IN" dirty="0"/>
+              <a:t>, </a:t>
+            </a:r>
+            <a:r>
+              <a:rPr lang="en-IN" dirty="0" err="1"/>
+              <a:t>role_id</a:t>
+            </a:r>
+            <a:r>
+              <a:rPr lang="en-IN" dirty="0"/>
+              <a:t>) values(2, 2);</a:t>
+            </a:r>
+          </a:p>
+          <a:p>
+            <a:r>
+              <a:rPr lang="en-IN" dirty="0"/>
+              <a:t>insert into </a:t>
+            </a:r>
+            <a:r>
+              <a:rPr lang="en-IN" dirty="0" err="1"/>
+              <a:t>my_user_role_details</a:t>
+            </a:r>
+            <a:r>
+              <a:rPr lang="en-IN" dirty="0"/>
+              <a:t>(</a:t>
+            </a:r>
+            <a:r>
+              <a:rPr lang="en-IN" dirty="0" err="1"/>
+              <a:t>user_id</a:t>
+            </a:r>
+            <a:r>
+              <a:rPr lang="en-IN" dirty="0"/>
+              <a:t>, </a:t>
+            </a:r>
+            <a:r>
+              <a:rPr lang="en-IN" dirty="0" err="1"/>
+              <a:t>role_id</a:t>
+            </a:r>
+            <a:r>
+              <a:rPr lang="en-IN" dirty="0"/>
+              <a:t>) values(3, 1);</a:t>
+            </a:r>
+          </a:p>
+          <a:p>
+            <a:r>
+              <a:rPr lang="en-IN" dirty="0"/>
+              <a:t>insert into </a:t>
+            </a:r>
+            <a:r>
+              <a:rPr lang="en-IN" dirty="0" err="1"/>
+              <a:t>my_user_role_details</a:t>
+            </a:r>
+            <a:r>
+              <a:rPr lang="en-IN" dirty="0"/>
+              <a:t>(</a:t>
+            </a:r>
+            <a:r>
+              <a:rPr lang="en-IN" dirty="0" err="1"/>
+              <a:t>user_id</a:t>
+            </a:r>
+            <a:r>
+              <a:rPr lang="en-IN" dirty="0"/>
+              <a:t>, </a:t>
+            </a:r>
+            <a:r>
+              <a:rPr lang="en-IN" dirty="0" err="1"/>
+              <a:t>role_id</a:t>
+            </a:r>
+            <a:r>
+              <a:rPr lang="en-IN" dirty="0"/>
+              <a:t>) values(3, 2);</a:t>
+            </a:r>
           </a:p>
         </p:txBody>
       </p:sp>
     </p:spTree>
     <p:extLst>
       <p:ext uri="{BB962C8B-B14F-4D97-AF65-F5344CB8AC3E}">
-        <p14:creationId xmlns:p14="http://schemas.microsoft.com/office/powerpoint/2010/main" val="3486115344"/>
+        <p14:creationId xmlns:p14="http://schemas.microsoft.com/office/powerpoint/2010/main" val="1619040822"/>
       </p:ext>
     </p:extLst>
   </p:cSld>
@@ -7254,7 +8925,7 @@
           <p:cNvPr id="2" name="Title 1">
             <a:extLst>
               <a:ext uri="{FF2B5EF4-FFF2-40B4-BE49-F238E27FC236}">
-                <a16:creationId xmlns:a16="http://schemas.microsoft.com/office/drawing/2014/main" id="{07516F82-3667-401F-B46E-8114661CFF58}"/>
+                <a16:creationId xmlns:a16="http://schemas.microsoft.com/office/drawing/2014/main" id="{BE930EC4-FAEC-42DA-BA07-A0065F8B0905}"/>
               </a:ext>
             </a:extLst>
           </p:cNvPr>
@@ -7272,15 +8943,19 @@
           <a:p>
             <a:r>
               <a:rPr lang="en-US" dirty="0"/>
-              <a:t>Step 8 : </a:t>
+              <a:t>Step 7: Create </a:t>
             </a:r>
             <a:r>
               <a:rPr lang="en-US" dirty="0" err="1"/>
-              <a:t>SecurityFulterChain</a:t>
+              <a:t>MyUserEntity</a:t>
             </a:r>
             <a:r>
               <a:rPr lang="en-US" dirty="0"/>
-              <a:t> Configuration</a:t>
+              <a:t> and </a:t>
+            </a:r>
+            <a:r>
+              <a:rPr lang="en-US" dirty="0" err="1"/>
+              <a:t>MyRoleEntity</a:t>
             </a:r>
             <a:endParaRPr lang="en-IN" dirty="0"/>
           </a:p>
@@ -7288,29 +8963,29 @@
       </p:sp>
       <p:sp>
         <p:nvSpPr>
-          <p:cNvPr id="5" name="Content Placeholder 4">
-            <a:extLst>
-              <a:ext uri="{FF2B5EF4-FFF2-40B4-BE49-F238E27FC236}">
-                <a16:creationId xmlns:a16="http://schemas.microsoft.com/office/drawing/2014/main" id="{2896FB0E-328A-47B4-B779-6F3167AFD334}"/>
-              </a:ext>
-            </a:extLst>
-          </p:cNvPr>
-          <p:cNvSpPr>
-            <a:spLocks noGrp="1"/>
-          </p:cNvSpPr>
-          <p:nvPr>
-            <p:ph idx="1"/>
+          <p:cNvPr id="3" name="Content Placeholder 2">
+            <a:extLst>
+              <a:ext uri="{FF2B5EF4-FFF2-40B4-BE49-F238E27FC236}">
+                <a16:creationId xmlns:a16="http://schemas.microsoft.com/office/drawing/2014/main" id="{0376C8C4-3C9F-48C0-A02A-2BD9964E6BF6}"/>
+              </a:ext>
+            </a:extLst>
+          </p:cNvPr>
+          <p:cNvSpPr>
+            <a:spLocks noGrp="1"/>
+          </p:cNvSpPr>
+          <p:nvPr>
+            <p:ph sz="half" idx="1"/>
           </p:nvPr>
         </p:nvSpPr>
         <p:spPr>
           <a:xfrm>
-            <a:off x="838200" y="1597794"/>
-            <a:ext cx="10515600" cy="5014761"/>
+            <a:off x="838200" y="1825624"/>
+            <a:ext cx="5181600" cy="5032375"/>
           </a:xfrm>
         </p:spPr>
         <p:txBody>
           <a:bodyPr>
-            <a:normAutofit fontScale="77500" lnSpcReduction="20000"/>
+            <a:normAutofit fontScale="40000" lnSpcReduction="20000"/>
           </a:bodyPr>
           <a:lstStyle/>
           <a:p>
@@ -7318,332 +8993,580 @@
               <a:buNone/>
             </a:pPr>
             <a:r>
-              <a:rPr lang="en-IN" sz="3200" dirty="0"/>
-              <a:t>@Bean</a:t>
-            </a:r>
-          </a:p>
-          <a:p>
-            <a:pPr marL="0" indent="0">
-              <a:buNone/>
-            </a:pPr>
-            <a:r>
-              <a:rPr lang="en-IN" sz="3200" b="1" dirty="0"/>
+              <a:rPr lang="en-US" sz="3400" dirty="0"/>
+              <a:t>@Entity</a:t>
+            </a:r>
+          </a:p>
+          <a:p>
+            <a:pPr marL="0" indent="0">
+              <a:buNone/>
+            </a:pPr>
+            <a:r>
+              <a:rPr lang="en-US" sz="3400" dirty="0"/>
+              <a:t>@Table(name="</a:t>
+            </a:r>
+            <a:r>
+              <a:rPr lang="en-US" sz="3400" dirty="0" err="1"/>
+              <a:t>my_user_details</a:t>
+            </a:r>
+            <a:r>
+              <a:rPr lang="en-US" sz="3400" dirty="0"/>
+              <a:t>")</a:t>
+            </a:r>
+          </a:p>
+          <a:p>
+            <a:pPr marL="0" indent="0">
+              <a:buNone/>
+            </a:pPr>
+            <a:r>
+              <a:rPr lang="en-US" sz="3400" b="1" dirty="0"/>
               <a:t>public</a:t>
             </a:r>
             <a:r>
-              <a:rPr lang="en-IN" sz="3200" dirty="0"/>
+              <a:rPr lang="en-US" sz="3400" dirty="0"/>
               <a:t> </a:t>
             </a:r>
             <a:r>
-              <a:rPr lang="en-IN" sz="3200" dirty="0" err="1"/>
-              <a:t>SecurityFilterChain</a:t>
-            </a:r>
-            <a:r>
-              <a:rPr lang="en-IN" sz="3200" dirty="0"/>
+              <a:rPr lang="en-US" sz="3400" b="1" dirty="0"/>
+              <a:t>class</a:t>
+            </a:r>
+            <a:r>
+              <a:rPr lang="en-US" sz="3400" dirty="0"/>
               <a:t> </a:t>
             </a:r>
             <a:r>
-              <a:rPr lang="en-IN" sz="3200" dirty="0" err="1"/>
-              <a:t>securityFilterChain</a:t>
-            </a:r>
-            <a:r>
-              <a:rPr lang="en-IN" sz="3200" dirty="0"/>
-              <a:t>(</a:t>
-            </a:r>
-            <a:r>
-              <a:rPr lang="en-IN" sz="3200" dirty="0" err="1"/>
-              <a:t>HttpSecurity</a:t>
-            </a:r>
-            <a:r>
-              <a:rPr lang="en-IN" sz="3200" dirty="0"/>
-              <a:t> http, </a:t>
-            </a:r>
-          </a:p>
-          <a:p>
-            <a:pPr marL="0" indent="0">
-              <a:buNone/>
-            </a:pPr>
-            <a:r>
-              <a:rPr lang="en-IN" sz="3200" dirty="0" err="1"/>
-              <a:t>AuthenticationManager</a:t>
-            </a:r>
-            <a:r>
-              <a:rPr lang="en-IN" sz="3200" dirty="0"/>
+              <a:rPr lang="en-US" sz="3400" dirty="0" err="1"/>
+              <a:t>MyUserEntity</a:t>
+            </a:r>
+            <a:r>
+              <a:rPr lang="en-US" sz="3400" dirty="0"/>
+              <a:t> {</a:t>
+            </a:r>
+          </a:p>
+          <a:p>
+            <a:pPr marL="0" indent="0">
+              <a:buNone/>
+            </a:pPr>
+            <a:r>
+              <a:rPr lang="en-US" sz="3400" dirty="0"/>
+              <a:t>@Id</a:t>
+            </a:r>
+          </a:p>
+          <a:p>
+            <a:pPr marL="0" indent="0">
+              <a:buNone/>
+            </a:pPr>
+            <a:r>
+              <a:rPr lang="en-US" sz="3400" dirty="0"/>
+              <a:t>@</a:t>
+            </a:r>
+            <a:r>
+              <a:rPr lang="en-US" sz="3400" dirty="0" err="1"/>
+              <a:t>GeneratedValue</a:t>
+            </a:r>
+            <a:r>
+              <a:rPr lang="en-US" sz="3400" dirty="0"/>
+              <a:t>(strategy = </a:t>
+            </a:r>
+            <a:r>
+              <a:rPr lang="en-US" sz="3400" dirty="0" err="1"/>
+              <a:t>GenerationType.</a:t>
+            </a:r>
+            <a:r>
+              <a:rPr lang="en-US" sz="3400" b="1" i="1" dirty="0" err="1"/>
+              <a:t>IDENTITY</a:t>
+            </a:r>
+            <a:r>
+              <a:rPr lang="en-US" sz="3400" dirty="0"/>
+              <a:t>)</a:t>
+            </a:r>
+          </a:p>
+          <a:p>
+            <a:pPr marL="0" indent="0">
+              <a:buNone/>
+            </a:pPr>
+            <a:r>
+              <a:rPr lang="en-US" sz="3400" dirty="0"/>
+              <a:t>@Column(name="</a:t>
+            </a:r>
+            <a:r>
+              <a:rPr lang="en-US" sz="3400" dirty="0" err="1"/>
+              <a:t>user_id</a:t>
+            </a:r>
+            <a:r>
+              <a:rPr lang="en-US" sz="3400" dirty="0"/>
+              <a:t>")</a:t>
+            </a:r>
+          </a:p>
+          <a:p>
+            <a:pPr marL="0" indent="0">
+              <a:buNone/>
+            </a:pPr>
+            <a:r>
+              <a:rPr lang="en-US" sz="3400" b="1" dirty="0"/>
+              <a:t>private</a:t>
+            </a:r>
+            <a:r>
+              <a:rPr lang="en-US" sz="3400" dirty="0"/>
               <a:t> </a:t>
             </a:r>
             <a:r>
-              <a:rPr lang="en-IN" sz="3200" dirty="0" err="1"/>
-              <a:t>authManager</a:t>
-            </a:r>
-            <a:r>
-              <a:rPr lang="en-IN" sz="3200" dirty="0"/>
-              <a:t>) </a:t>
-            </a:r>
-            <a:r>
-              <a:rPr lang="en-IN" sz="3200" b="1" dirty="0"/>
-              <a:t>throws</a:t>
-            </a:r>
-            <a:r>
-              <a:rPr lang="en-IN" sz="3200" dirty="0"/>
-              <a:t> Exception {</a:t>
-            </a:r>
-          </a:p>
-          <a:p>
-            <a:pPr marL="457200" lvl="1" indent="0">
-              <a:buNone/>
-            </a:pPr>
-            <a:r>
-              <a:rPr lang="en-IN" sz="2800" b="1" dirty="0"/>
-              <a:t>return</a:t>
-            </a:r>
-            <a:r>
-              <a:rPr lang="en-IN" sz="2800" dirty="0"/>
-              <a:t> http</a:t>
-            </a:r>
-          </a:p>
-          <a:p>
-            <a:pPr marL="457200" lvl="1" indent="0">
-              <a:buNone/>
-            </a:pPr>
-            <a:r>
-              <a:rPr lang="en-IN" sz="2800" dirty="0"/>
-              <a:t>.</a:t>
-            </a:r>
-            <a:r>
-              <a:rPr lang="en-IN" sz="2800" dirty="0" err="1"/>
-              <a:t>csrf</a:t>
-            </a:r>
-            <a:r>
-              <a:rPr lang="en-IN" sz="2800" dirty="0"/>
-              <a:t>(</a:t>
-            </a:r>
-            <a:r>
-              <a:rPr lang="en-IN" sz="2800" dirty="0" err="1"/>
-              <a:t>csrf</a:t>
-            </a:r>
-            <a:r>
-              <a:rPr lang="en-IN" sz="2800" dirty="0"/>
-              <a:t> -&gt; </a:t>
-            </a:r>
-            <a:r>
-              <a:rPr lang="en-IN" sz="2800" dirty="0" err="1"/>
-              <a:t>csrf.disable</a:t>
-            </a:r>
-            <a:r>
-              <a:rPr lang="en-IN" sz="2800" dirty="0"/>
-              <a:t>()) // Safe to disable for strictly </a:t>
-            </a:r>
-            <a:r>
-              <a:rPr lang="en-IN" sz="2800" u="sng" dirty="0"/>
-              <a:t>stateless</a:t>
-            </a:r>
-            <a:r>
-              <a:rPr lang="en-IN" sz="2800" dirty="0"/>
-              <a:t> REST APIs</a:t>
-            </a:r>
-          </a:p>
-          <a:p>
-            <a:pPr marL="457200" lvl="1" indent="0">
-              <a:buNone/>
-            </a:pPr>
-            <a:r>
-              <a:rPr lang="en-IN" sz="2800" dirty="0"/>
-              <a:t>.</a:t>
-            </a:r>
-            <a:r>
-              <a:rPr lang="en-IN" sz="2800" dirty="0" err="1"/>
-              <a:t>sessionManagement</a:t>
-            </a:r>
-            <a:r>
-              <a:rPr lang="en-IN" sz="2800" dirty="0"/>
-              <a:t>(</a:t>
-            </a:r>
-            <a:r>
-              <a:rPr lang="en-IN" sz="2800" dirty="0" err="1"/>
-              <a:t>sm</a:t>
-            </a:r>
-            <a:r>
-              <a:rPr lang="en-IN" sz="2800" dirty="0"/>
-              <a:t> -&gt; </a:t>
-            </a:r>
-            <a:r>
-              <a:rPr lang="en-IN" sz="2800" dirty="0" err="1"/>
-              <a:t>sm.sessionCreationPolicy</a:t>
-            </a:r>
-            <a:r>
-              <a:rPr lang="en-IN" sz="2800" dirty="0"/>
-              <a:t>(</a:t>
-            </a:r>
-            <a:r>
-              <a:rPr lang="en-IN" sz="2800" dirty="0" err="1"/>
-              <a:t>SessionCreationPolicy.</a:t>
-            </a:r>
-            <a:r>
-              <a:rPr lang="en-IN" sz="2800" b="1" i="1" dirty="0" err="1"/>
-              <a:t>STATELESS</a:t>
-            </a:r>
-            <a:r>
-              <a:rPr lang="en-IN" sz="2800" dirty="0"/>
-              <a:t>))</a:t>
-            </a:r>
-          </a:p>
-          <a:p>
-            <a:pPr marL="457200" lvl="1" indent="0">
-              <a:buNone/>
-            </a:pPr>
-            <a:r>
-              <a:rPr lang="en-IN" sz="2800" dirty="0"/>
-              <a:t>.</a:t>
-            </a:r>
-            <a:r>
-              <a:rPr lang="en-IN" sz="2800" dirty="0" err="1"/>
-              <a:t>authorizeHttpRequests</a:t>
-            </a:r>
-            <a:r>
-              <a:rPr lang="en-IN" sz="2800" dirty="0"/>
-              <a:t>(auth -&gt; auth</a:t>
-            </a:r>
-          </a:p>
-          <a:p>
-            <a:pPr marL="457200" lvl="1" indent="0">
-              <a:buNone/>
-            </a:pPr>
-            <a:r>
-              <a:rPr lang="en-IN" sz="2800" dirty="0"/>
-              <a:t>.</a:t>
-            </a:r>
-            <a:r>
-              <a:rPr lang="en-IN" sz="2800" dirty="0" err="1"/>
-              <a:t>requestMatchers</a:t>
-            </a:r>
-            <a:r>
-              <a:rPr lang="en-IN" sz="2800" dirty="0"/>
-              <a:t>("/</a:t>
-            </a:r>
-            <a:r>
-              <a:rPr lang="en-IN" sz="2800" dirty="0" err="1"/>
-              <a:t>api</a:t>
-            </a:r>
-            <a:r>
-              <a:rPr lang="en-IN" sz="2800" dirty="0"/>
-              <a:t>/users/login").</a:t>
-            </a:r>
-            <a:r>
-              <a:rPr lang="en-IN" sz="2800" dirty="0" err="1"/>
-              <a:t>permitAll</a:t>
-            </a:r>
-            <a:r>
-              <a:rPr lang="en-IN" sz="2800" dirty="0"/>
-              <a:t>() // Open login route</a:t>
-            </a:r>
-          </a:p>
-          <a:p>
-            <a:pPr marL="457200" lvl="1" indent="0">
-              <a:buNone/>
-            </a:pPr>
-            <a:r>
-              <a:rPr lang="en-IN" sz="2800" dirty="0"/>
-              <a:t>.</a:t>
-            </a:r>
-            <a:r>
-              <a:rPr lang="en-IN" sz="2800" dirty="0" err="1"/>
-              <a:t>anyRequest</a:t>
-            </a:r>
-            <a:r>
-              <a:rPr lang="en-IN" sz="2800" dirty="0"/>
-              <a:t>().authenticated()</a:t>
-            </a:r>
-          </a:p>
-          <a:p>
-            <a:pPr marL="457200" lvl="1" indent="0">
-              <a:buNone/>
-            </a:pPr>
-            <a:r>
-              <a:rPr lang="en-IN" sz="2800" dirty="0"/>
+              <a:rPr lang="en-US" sz="3400" b="1" dirty="0"/>
+              <a:t>int</a:t>
+            </a:r>
+            <a:r>
+              <a:rPr lang="en-US" sz="3400" dirty="0"/>
+              <a:t> </a:t>
+            </a:r>
+            <a:r>
+              <a:rPr lang="en-US" sz="3400" dirty="0" err="1"/>
+              <a:t>userId</a:t>
+            </a:r>
+            <a:r>
+              <a:rPr lang="en-US" sz="3400" dirty="0"/>
+              <a:t>;</a:t>
+            </a:r>
+          </a:p>
+          <a:p>
+            <a:pPr marL="0" indent="0">
+              <a:buNone/>
+            </a:pPr>
+            <a:r>
+              <a:rPr lang="en-US" sz="3400" dirty="0"/>
+              <a:t>@Column(name="</a:t>
+            </a:r>
+            <a:r>
+              <a:rPr lang="en-US" sz="3400" dirty="0" err="1"/>
+              <a:t>user_name</a:t>
+            </a:r>
+            <a:r>
+              <a:rPr lang="en-US" sz="3400" dirty="0"/>
+              <a:t>")</a:t>
+            </a:r>
+          </a:p>
+          <a:p>
+            <a:pPr marL="0" indent="0">
+              <a:buNone/>
+            </a:pPr>
+            <a:r>
+              <a:rPr lang="en-US" sz="3400" b="1" dirty="0"/>
+              <a:t>private</a:t>
+            </a:r>
+            <a:r>
+              <a:rPr lang="en-US" sz="3400" dirty="0"/>
+              <a:t> String </a:t>
+            </a:r>
+            <a:r>
+              <a:rPr lang="en-US" sz="3400" dirty="0" err="1"/>
+              <a:t>userName</a:t>
+            </a:r>
+            <a:r>
+              <a:rPr lang="en-US" sz="3400" dirty="0"/>
+              <a:t>;</a:t>
+            </a:r>
+          </a:p>
+          <a:p>
+            <a:pPr marL="0" indent="0">
+              <a:buNone/>
+            </a:pPr>
+            <a:r>
+              <a:rPr lang="en-US" sz="3400" dirty="0"/>
+              <a:t>@Column(name="</a:t>
+            </a:r>
+            <a:r>
+              <a:rPr lang="en-US" sz="3400" dirty="0" err="1"/>
+              <a:t>user_password</a:t>
+            </a:r>
+            <a:r>
+              <a:rPr lang="en-US" sz="3400" dirty="0"/>
+              <a:t>")</a:t>
+            </a:r>
+          </a:p>
+          <a:p>
+            <a:pPr marL="0" indent="0">
+              <a:buNone/>
+            </a:pPr>
+            <a:r>
+              <a:rPr lang="en-US" sz="3400" b="1" dirty="0"/>
+              <a:t>private</a:t>
+            </a:r>
+            <a:r>
+              <a:rPr lang="en-US" sz="3400" dirty="0"/>
+              <a:t> String </a:t>
+            </a:r>
+            <a:r>
+              <a:rPr lang="en-US" sz="3400" dirty="0" err="1"/>
+              <a:t>userPassword</a:t>
+            </a:r>
+            <a:r>
+              <a:rPr lang="en-US" sz="3400" dirty="0"/>
+              <a:t>;</a:t>
+            </a:r>
+          </a:p>
+          <a:p>
+            <a:pPr marL="0" indent="0">
+              <a:buNone/>
+            </a:pPr>
+            <a:r>
+              <a:rPr lang="en-US" sz="3400" dirty="0"/>
+              <a:t>@</a:t>
+            </a:r>
+            <a:r>
+              <a:rPr lang="en-US" sz="3400" dirty="0" err="1"/>
+              <a:t>ManyToMany</a:t>
+            </a:r>
+            <a:endParaRPr lang="en-US" sz="3400" dirty="0"/>
+          </a:p>
+          <a:p>
+            <a:pPr marL="0" indent="0">
+              <a:buNone/>
+            </a:pPr>
+            <a:r>
+              <a:rPr lang="en-US" sz="3400" dirty="0"/>
+              <a:t>@</a:t>
+            </a:r>
+            <a:r>
+              <a:rPr lang="en-US" sz="3400" dirty="0" err="1"/>
+              <a:t>JoinTable</a:t>
+            </a:r>
+            <a:r>
+              <a:rPr lang="en-US" sz="3400" dirty="0"/>
+              <a:t>(name="</a:t>
+            </a:r>
+            <a:r>
+              <a:rPr lang="en-US" sz="3400" dirty="0" err="1"/>
+              <a:t>my_user_role_details</a:t>
+            </a:r>
+            <a:r>
+              <a:rPr lang="en-US" sz="3400" dirty="0"/>
+              <a:t>",</a:t>
+            </a:r>
+          </a:p>
+          <a:p>
+            <a:pPr marL="0" indent="0">
+              <a:buNone/>
+            </a:pPr>
+            <a:r>
+              <a:rPr lang="en-US" sz="3400" dirty="0" err="1"/>
+              <a:t>joinColumns</a:t>
+            </a:r>
+            <a:r>
+              <a:rPr lang="en-US" sz="3400" dirty="0"/>
+              <a:t>= {@</a:t>
+            </a:r>
+            <a:r>
+              <a:rPr lang="en-US" sz="3400" dirty="0" err="1"/>
+              <a:t>JoinColumn</a:t>
+            </a:r>
+            <a:r>
+              <a:rPr lang="en-US" sz="3400" dirty="0"/>
+              <a:t>(name="</a:t>
+            </a:r>
+            <a:r>
+              <a:rPr lang="en-US" sz="3400" dirty="0" err="1"/>
+              <a:t>user_id</a:t>
+            </a:r>
+            <a:r>
+              <a:rPr lang="en-US" sz="3400" dirty="0"/>
+              <a:t>")},</a:t>
+            </a:r>
+          </a:p>
+          <a:p>
+            <a:pPr marL="0" indent="0">
+              <a:buNone/>
+            </a:pPr>
+            <a:r>
+              <a:rPr lang="en-US" sz="3400" dirty="0" err="1"/>
+              <a:t>inverseJoinColumns</a:t>
+            </a:r>
+            <a:r>
+              <a:rPr lang="en-US" sz="3400" dirty="0"/>
+              <a:t> = {@</a:t>
+            </a:r>
+            <a:r>
+              <a:rPr lang="en-US" sz="3400" dirty="0" err="1"/>
+              <a:t>JoinColumn</a:t>
+            </a:r>
+            <a:r>
+              <a:rPr lang="en-US" sz="3400" dirty="0"/>
+              <a:t>(name="</a:t>
+            </a:r>
+            <a:r>
+              <a:rPr lang="en-US" sz="3400" dirty="0" err="1"/>
+              <a:t>role_id</a:t>
+            </a:r>
+            <a:r>
+              <a:rPr lang="en-US" sz="3400" dirty="0"/>
+              <a:t>")}</a:t>
+            </a:r>
+          </a:p>
+          <a:p>
+            <a:pPr marL="0" indent="0">
+              <a:buNone/>
+            </a:pPr>
+            <a:r>
+              <a:rPr lang="en-US" sz="3400" dirty="0"/>
               <a:t>)</a:t>
             </a:r>
           </a:p>
           <a:p>
-            <a:pPr marL="457200" lvl="1" indent="0">
-              <a:buNone/>
-            </a:pPr>
-            <a:r>
-              <a:rPr lang="en-IN" sz="2800" dirty="0"/>
-              <a:t>.</a:t>
-            </a:r>
-            <a:r>
-              <a:rPr lang="en-IN" sz="2800" dirty="0" err="1"/>
-              <a:t>authenticationManager</a:t>
-            </a:r>
-            <a:r>
-              <a:rPr lang="en-IN" sz="2800" dirty="0"/>
-              <a:t>(</a:t>
-            </a:r>
-            <a:r>
-              <a:rPr lang="en-IN" sz="2800" dirty="0" err="1"/>
-              <a:t>authManager</a:t>
-            </a:r>
-            <a:r>
-              <a:rPr lang="en-IN" sz="2800" dirty="0"/>
-              <a:t>) // Set custom authentication manager</a:t>
-            </a:r>
-          </a:p>
-          <a:p>
-            <a:pPr marL="457200" lvl="1" indent="0">
-              <a:buNone/>
-            </a:pPr>
-            <a:r>
-              <a:rPr lang="en-IN" sz="2800" dirty="0"/>
-              <a:t>.</a:t>
-            </a:r>
-            <a:r>
-              <a:rPr lang="en-IN" sz="2800" dirty="0" err="1"/>
-              <a:t>httpBasic</a:t>
-            </a:r>
-            <a:r>
-              <a:rPr lang="en-IN" sz="2800" dirty="0"/>
-              <a:t>(</a:t>
-            </a:r>
-            <a:r>
-              <a:rPr lang="en-IN" sz="2800" dirty="0" err="1"/>
-              <a:t>Customizer.</a:t>
-            </a:r>
-            <a:r>
-              <a:rPr lang="en-IN" sz="2800" i="1" dirty="0" err="1"/>
-              <a:t>withDefaults</a:t>
-            </a:r>
-            <a:r>
-              <a:rPr lang="en-IN" sz="2800" dirty="0"/>
-              <a:t>())</a:t>
-            </a:r>
-          </a:p>
-          <a:p>
-            <a:pPr marL="457200" lvl="1" indent="0">
-              <a:buNone/>
-            </a:pPr>
-            <a:r>
-              <a:rPr lang="en-IN" sz="2800" dirty="0"/>
-              <a:t>.build();</a:t>
-            </a:r>
-          </a:p>
-          <a:p>
-            <a:pPr marL="0" indent="0">
-              <a:buNone/>
-            </a:pPr>
-            <a:r>
-              <a:rPr lang="en-IN" sz="3200" dirty="0"/>
+            <a:pPr marL="0" indent="0">
+              <a:buNone/>
+            </a:pPr>
+            <a:r>
+              <a:rPr lang="en-US" sz="3400" dirty="0"/>
+              <a:t>List&lt;</a:t>
+            </a:r>
+            <a:r>
+              <a:rPr lang="en-US" sz="3400" dirty="0" err="1"/>
+              <a:t>MyRoleEntity</a:t>
+            </a:r>
+            <a:r>
+              <a:rPr lang="en-US" sz="3400" dirty="0"/>
+              <a:t>&gt; </a:t>
+            </a:r>
+            <a:r>
+              <a:rPr lang="en-US" sz="3400" dirty="0" err="1"/>
+              <a:t>allRoles</a:t>
+            </a:r>
+            <a:r>
+              <a:rPr lang="en-US" sz="3400" dirty="0"/>
+              <a:t>;</a:t>
+            </a:r>
+          </a:p>
+          <a:p>
+            <a:pPr marL="0" indent="0">
+              <a:buNone/>
+            </a:pPr>
+            <a:r>
+              <a:rPr lang="en-US" sz="3400" dirty="0"/>
               <a:t>}</a:t>
             </a:r>
           </a:p>
           <a:p>
             <a:endParaRPr lang="en-IN" dirty="0"/>
+          </a:p>
+        </p:txBody>
+      </p:sp>
+      <p:sp>
+        <p:nvSpPr>
+          <p:cNvPr id="4" name="Content Placeholder 3">
+            <a:extLst>
+              <a:ext uri="{FF2B5EF4-FFF2-40B4-BE49-F238E27FC236}">
+                <a16:creationId xmlns:a16="http://schemas.microsoft.com/office/drawing/2014/main" id="{A2A10DF4-5447-4F6B-85E1-2BA3BAF6182A}"/>
+              </a:ext>
+            </a:extLst>
+          </p:cNvPr>
+          <p:cNvSpPr>
+            <a:spLocks noGrp="1"/>
+          </p:cNvSpPr>
+          <p:nvPr>
+            <p:ph sz="half" idx="2"/>
+          </p:nvPr>
+        </p:nvSpPr>
+        <p:spPr>
+          <a:xfrm>
+            <a:off x="6172200" y="1825625"/>
+            <a:ext cx="5181600" cy="4351338"/>
+          </a:xfrm>
+        </p:spPr>
+        <p:txBody>
+          <a:bodyPr>
+            <a:noAutofit/>
+          </a:bodyPr>
+          <a:lstStyle/>
+          <a:p>
+            <a:pPr marL="0" indent="0">
+              <a:buNone/>
+            </a:pPr>
+            <a:r>
+              <a:rPr lang="en-US" sz="2000" dirty="0"/>
+              <a:t>@Entity</a:t>
+            </a:r>
+          </a:p>
+          <a:p>
+            <a:pPr marL="0" indent="0">
+              <a:buNone/>
+            </a:pPr>
+            <a:r>
+              <a:rPr lang="en-US" sz="2000" dirty="0"/>
+              <a:t>@Table(name="</a:t>
+            </a:r>
+            <a:r>
+              <a:rPr lang="en-US" sz="2000" dirty="0" err="1"/>
+              <a:t>my_role_details</a:t>
+            </a:r>
+            <a:r>
+              <a:rPr lang="en-US" sz="2000" dirty="0"/>
+              <a:t>")</a:t>
+            </a:r>
+          </a:p>
+          <a:p>
+            <a:pPr marL="0" indent="0">
+              <a:buNone/>
+            </a:pPr>
+            <a:r>
+              <a:rPr lang="en-US" sz="2000" b="1" dirty="0"/>
+              <a:t>public</a:t>
+            </a:r>
+            <a:r>
+              <a:rPr lang="en-US" sz="2000" dirty="0"/>
+              <a:t> </a:t>
+            </a:r>
+            <a:r>
+              <a:rPr lang="en-US" sz="2000" b="1" dirty="0"/>
+              <a:t>class</a:t>
+            </a:r>
+            <a:r>
+              <a:rPr lang="en-US" sz="2000" dirty="0"/>
+              <a:t> </a:t>
+            </a:r>
+            <a:r>
+              <a:rPr lang="en-US" sz="2000" dirty="0" err="1"/>
+              <a:t>MyRoleEntity</a:t>
+            </a:r>
+            <a:r>
+              <a:rPr lang="en-US" sz="2000" dirty="0"/>
+              <a:t> {</a:t>
+            </a:r>
+          </a:p>
+          <a:p>
+            <a:pPr marL="0" indent="0">
+              <a:buNone/>
+            </a:pPr>
+            <a:r>
+              <a:rPr lang="en-US" sz="2000" dirty="0"/>
+              <a:t>@Id</a:t>
+            </a:r>
+          </a:p>
+          <a:p>
+            <a:pPr marL="0" indent="0">
+              <a:buNone/>
+            </a:pPr>
+            <a:r>
+              <a:rPr lang="en-US" sz="2000" dirty="0"/>
+              <a:t>@</a:t>
+            </a:r>
+            <a:r>
+              <a:rPr lang="en-US" sz="2000" dirty="0" err="1"/>
+              <a:t>GeneratedValue</a:t>
+            </a:r>
+            <a:r>
+              <a:rPr lang="en-US" sz="2000" dirty="0"/>
+              <a:t>(strategy = </a:t>
+            </a:r>
+            <a:r>
+              <a:rPr lang="en-US" sz="2000" dirty="0" err="1"/>
+              <a:t>GenerationType.</a:t>
+            </a:r>
+            <a:r>
+              <a:rPr lang="en-US" sz="2000" b="1" i="1" dirty="0" err="1"/>
+              <a:t>IDENTITY</a:t>
+            </a:r>
+            <a:r>
+              <a:rPr lang="en-US" sz="2000" dirty="0"/>
+              <a:t>)</a:t>
+            </a:r>
+          </a:p>
+          <a:p>
+            <a:pPr marL="0" indent="0">
+              <a:buNone/>
+            </a:pPr>
+            <a:r>
+              <a:rPr lang="en-US" sz="2000" dirty="0"/>
+              <a:t>@Column(name="</a:t>
+            </a:r>
+            <a:r>
+              <a:rPr lang="en-US" sz="2000" dirty="0" err="1"/>
+              <a:t>role_id</a:t>
+            </a:r>
+            <a:r>
+              <a:rPr lang="en-US" sz="2000" dirty="0"/>
+              <a:t>")</a:t>
+            </a:r>
+          </a:p>
+          <a:p>
+            <a:pPr marL="0" indent="0">
+              <a:buNone/>
+            </a:pPr>
+            <a:r>
+              <a:rPr lang="en-US" sz="2000" b="1" dirty="0"/>
+              <a:t>private</a:t>
+            </a:r>
+            <a:r>
+              <a:rPr lang="en-US" sz="2000" dirty="0"/>
+              <a:t> </a:t>
+            </a:r>
+            <a:r>
+              <a:rPr lang="en-US" sz="2000" b="1" dirty="0"/>
+              <a:t>int</a:t>
+            </a:r>
+            <a:r>
+              <a:rPr lang="en-US" sz="2000" dirty="0"/>
+              <a:t> </a:t>
+            </a:r>
+            <a:r>
+              <a:rPr lang="en-US" sz="2000" dirty="0" err="1"/>
+              <a:t>roleId</a:t>
+            </a:r>
+            <a:r>
+              <a:rPr lang="en-US" sz="2000" dirty="0"/>
+              <a:t>;</a:t>
+            </a:r>
+          </a:p>
+          <a:p>
+            <a:pPr marL="0" indent="0">
+              <a:buNone/>
+            </a:pPr>
+            <a:r>
+              <a:rPr lang="en-US" sz="2000" dirty="0"/>
+              <a:t>@Column(name="</a:t>
+            </a:r>
+            <a:r>
+              <a:rPr lang="en-US" sz="2000" dirty="0" err="1"/>
+              <a:t>role_name</a:t>
+            </a:r>
+            <a:r>
+              <a:rPr lang="en-US" sz="2000" dirty="0"/>
+              <a:t>")</a:t>
+            </a:r>
+          </a:p>
+          <a:p>
+            <a:pPr marL="0" indent="0">
+              <a:buNone/>
+            </a:pPr>
+            <a:r>
+              <a:rPr lang="en-US" sz="2000" b="1" dirty="0"/>
+              <a:t>private</a:t>
+            </a:r>
+            <a:r>
+              <a:rPr lang="en-US" sz="2000" dirty="0"/>
+              <a:t> String </a:t>
+            </a:r>
+            <a:r>
+              <a:rPr lang="en-US" sz="2000" dirty="0" err="1"/>
+              <a:t>roleName</a:t>
+            </a:r>
+            <a:r>
+              <a:rPr lang="en-US" sz="2000" dirty="0"/>
+              <a:t>;</a:t>
+            </a:r>
+          </a:p>
+          <a:p>
+            <a:pPr marL="0" indent="0">
+              <a:buNone/>
+            </a:pPr>
+            <a:r>
+              <a:rPr lang="en-IN" sz="2000" dirty="0"/>
+              <a:t>}</a:t>
+            </a:r>
           </a:p>
         </p:txBody>
       </p:sp>
     </p:spTree>
     <p:extLst>
       <p:ext uri="{BB962C8B-B14F-4D97-AF65-F5344CB8AC3E}">
-        <p14:creationId xmlns:p14="http://schemas.microsoft.com/office/powerpoint/2010/main" val="3892901182"/>
+        <p14:creationId xmlns:p14="http://schemas.microsoft.com/office/powerpoint/2010/main" val="295295673"/>
       </p:ext>
     </p:extLst>
   </p:cSld>

--- a/3. Spring_Security_7_Securing_Rest_Endpoints.pptx
+++ b/3. Spring_Security_7_Securing_Rest_Endpoints.pptx
@@ -11,16 +11,17 @@
     <p:sldId id="268" r:id="rId5"/>
     <p:sldId id="269" r:id="rId6"/>
     <p:sldId id="270" r:id="rId7"/>
-    <p:sldId id="271" r:id="rId8"/>
-    <p:sldId id="258" r:id="rId9"/>
-    <p:sldId id="259" r:id="rId10"/>
-    <p:sldId id="262" r:id="rId11"/>
-    <p:sldId id="260" r:id="rId12"/>
-    <p:sldId id="261" r:id="rId13"/>
-    <p:sldId id="263" r:id="rId14"/>
-    <p:sldId id="264" r:id="rId15"/>
-    <p:sldId id="265" r:id="rId16"/>
-    <p:sldId id="266" r:id="rId17"/>
+    <p:sldId id="272" r:id="rId8"/>
+    <p:sldId id="271" r:id="rId9"/>
+    <p:sldId id="258" r:id="rId10"/>
+    <p:sldId id="259" r:id="rId11"/>
+    <p:sldId id="262" r:id="rId12"/>
+    <p:sldId id="260" r:id="rId13"/>
+    <p:sldId id="261" r:id="rId14"/>
+    <p:sldId id="263" r:id="rId15"/>
+    <p:sldId id="264" r:id="rId16"/>
+    <p:sldId id="265" r:id="rId17"/>
+    <p:sldId id="266" r:id="rId18"/>
   </p:sldIdLst>
   <p:sldSz cx="12192000" cy="6858000"/>
   <p:notesSz cx="6858000" cy="9144000"/>
@@ -3455,6 +3456,679 @@
           <p:cNvPr id="2" name="Title 1">
             <a:extLst>
               <a:ext uri="{FF2B5EF4-FFF2-40B4-BE49-F238E27FC236}">
+                <a16:creationId xmlns:a16="http://schemas.microsoft.com/office/drawing/2014/main" id="{BE930EC4-FAEC-42DA-BA07-A0065F8B0905}"/>
+              </a:ext>
+            </a:extLst>
+          </p:cNvPr>
+          <p:cNvSpPr>
+            <a:spLocks noGrp="1"/>
+          </p:cNvSpPr>
+          <p:nvPr>
+            <p:ph type="title"/>
+          </p:nvPr>
+        </p:nvSpPr>
+        <p:spPr/>
+        <p:txBody>
+          <a:bodyPr/>
+          <a:lstStyle/>
+          <a:p>
+            <a:r>
+              <a:rPr lang="en-US" dirty="0"/>
+              <a:t>Step 7: Create </a:t>
+            </a:r>
+            <a:r>
+              <a:rPr lang="en-US" dirty="0" err="1"/>
+              <a:t>MyUserEntity</a:t>
+            </a:r>
+            <a:r>
+              <a:rPr lang="en-US" dirty="0"/>
+              <a:t> and </a:t>
+            </a:r>
+            <a:r>
+              <a:rPr lang="en-US" dirty="0" err="1"/>
+              <a:t>MyRoleEntity</a:t>
+            </a:r>
+            <a:endParaRPr lang="en-IN" dirty="0"/>
+          </a:p>
+        </p:txBody>
+      </p:sp>
+      <p:sp>
+        <p:nvSpPr>
+          <p:cNvPr id="3" name="Content Placeholder 2">
+            <a:extLst>
+              <a:ext uri="{FF2B5EF4-FFF2-40B4-BE49-F238E27FC236}">
+                <a16:creationId xmlns:a16="http://schemas.microsoft.com/office/drawing/2014/main" id="{0376C8C4-3C9F-48C0-A02A-2BD9964E6BF6}"/>
+              </a:ext>
+            </a:extLst>
+          </p:cNvPr>
+          <p:cNvSpPr>
+            <a:spLocks noGrp="1"/>
+          </p:cNvSpPr>
+          <p:nvPr>
+            <p:ph sz="half" idx="1"/>
+          </p:nvPr>
+        </p:nvSpPr>
+        <p:spPr>
+          <a:xfrm>
+            <a:off x="838200" y="1825624"/>
+            <a:ext cx="5181600" cy="5032375"/>
+          </a:xfrm>
+        </p:spPr>
+        <p:txBody>
+          <a:bodyPr>
+            <a:normAutofit fontScale="40000" lnSpcReduction="20000"/>
+          </a:bodyPr>
+          <a:lstStyle/>
+          <a:p>
+            <a:pPr marL="0" indent="0">
+              <a:buNone/>
+            </a:pPr>
+            <a:r>
+              <a:rPr lang="en-US" sz="3400" dirty="0"/>
+              <a:t>@Entity</a:t>
+            </a:r>
+          </a:p>
+          <a:p>
+            <a:pPr marL="0" indent="0">
+              <a:buNone/>
+            </a:pPr>
+            <a:r>
+              <a:rPr lang="en-US" sz="3400" dirty="0"/>
+              <a:t>@Table(name="</a:t>
+            </a:r>
+            <a:r>
+              <a:rPr lang="en-US" sz="3400" dirty="0" err="1"/>
+              <a:t>my_user_details</a:t>
+            </a:r>
+            <a:r>
+              <a:rPr lang="en-US" sz="3400" dirty="0"/>
+              <a:t>")</a:t>
+            </a:r>
+          </a:p>
+          <a:p>
+            <a:pPr marL="0" indent="0">
+              <a:buNone/>
+            </a:pPr>
+            <a:r>
+              <a:rPr lang="en-US" sz="3400" b="1" dirty="0"/>
+              <a:t>public</a:t>
+            </a:r>
+            <a:r>
+              <a:rPr lang="en-US" sz="3400" dirty="0"/>
+              <a:t> </a:t>
+            </a:r>
+            <a:r>
+              <a:rPr lang="en-US" sz="3400" b="1" dirty="0"/>
+              <a:t>class</a:t>
+            </a:r>
+            <a:r>
+              <a:rPr lang="en-US" sz="3400" dirty="0"/>
+              <a:t> </a:t>
+            </a:r>
+            <a:r>
+              <a:rPr lang="en-US" sz="3400" dirty="0" err="1"/>
+              <a:t>MyUserEntity</a:t>
+            </a:r>
+            <a:r>
+              <a:rPr lang="en-US" sz="3400" dirty="0"/>
+              <a:t> {</a:t>
+            </a:r>
+          </a:p>
+          <a:p>
+            <a:pPr marL="0" indent="0">
+              <a:buNone/>
+            </a:pPr>
+            <a:r>
+              <a:rPr lang="en-US" sz="3400" dirty="0"/>
+              <a:t>@Id</a:t>
+            </a:r>
+          </a:p>
+          <a:p>
+            <a:pPr marL="0" indent="0">
+              <a:buNone/>
+            </a:pPr>
+            <a:r>
+              <a:rPr lang="en-US" sz="3400" dirty="0"/>
+              <a:t>@</a:t>
+            </a:r>
+            <a:r>
+              <a:rPr lang="en-US" sz="3400" dirty="0" err="1"/>
+              <a:t>GeneratedValue</a:t>
+            </a:r>
+            <a:r>
+              <a:rPr lang="en-US" sz="3400" dirty="0"/>
+              <a:t>(strategy = </a:t>
+            </a:r>
+            <a:r>
+              <a:rPr lang="en-US" sz="3400" dirty="0" err="1"/>
+              <a:t>GenerationType.</a:t>
+            </a:r>
+            <a:r>
+              <a:rPr lang="en-US" sz="3400" b="1" i="1" dirty="0" err="1"/>
+              <a:t>IDENTITY</a:t>
+            </a:r>
+            <a:r>
+              <a:rPr lang="en-US" sz="3400" dirty="0"/>
+              <a:t>)</a:t>
+            </a:r>
+          </a:p>
+          <a:p>
+            <a:pPr marL="0" indent="0">
+              <a:buNone/>
+            </a:pPr>
+            <a:r>
+              <a:rPr lang="en-US" sz="3400" dirty="0"/>
+              <a:t>@Column(name="</a:t>
+            </a:r>
+            <a:r>
+              <a:rPr lang="en-US" sz="3400" dirty="0" err="1"/>
+              <a:t>user_id</a:t>
+            </a:r>
+            <a:r>
+              <a:rPr lang="en-US" sz="3400" dirty="0"/>
+              <a:t>")</a:t>
+            </a:r>
+          </a:p>
+          <a:p>
+            <a:pPr marL="0" indent="0">
+              <a:buNone/>
+            </a:pPr>
+            <a:r>
+              <a:rPr lang="en-US" sz="3400" b="1" dirty="0"/>
+              <a:t>private</a:t>
+            </a:r>
+            <a:r>
+              <a:rPr lang="en-US" sz="3400" dirty="0"/>
+              <a:t> </a:t>
+            </a:r>
+            <a:r>
+              <a:rPr lang="en-US" sz="3400" b="1" dirty="0"/>
+              <a:t>int</a:t>
+            </a:r>
+            <a:r>
+              <a:rPr lang="en-US" sz="3400" dirty="0"/>
+              <a:t> </a:t>
+            </a:r>
+            <a:r>
+              <a:rPr lang="en-US" sz="3400" dirty="0" err="1"/>
+              <a:t>userId</a:t>
+            </a:r>
+            <a:r>
+              <a:rPr lang="en-US" sz="3400" dirty="0"/>
+              <a:t>;</a:t>
+            </a:r>
+          </a:p>
+          <a:p>
+            <a:pPr marL="0" indent="0">
+              <a:buNone/>
+            </a:pPr>
+            <a:r>
+              <a:rPr lang="en-US" sz="3400" dirty="0"/>
+              <a:t>@Column(name="</a:t>
+            </a:r>
+            <a:r>
+              <a:rPr lang="en-US" sz="3400" dirty="0" err="1"/>
+              <a:t>user_name</a:t>
+            </a:r>
+            <a:r>
+              <a:rPr lang="en-US" sz="3400" dirty="0"/>
+              <a:t>")</a:t>
+            </a:r>
+          </a:p>
+          <a:p>
+            <a:pPr marL="0" indent="0">
+              <a:buNone/>
+            </a:pPr>
+            <a:r>
+              <a:rPr lang="en-US" sz="3400" b="1" dirty="0"/>
+              <a:t>private</a:t>
+            </a:r>
+            <a:r>
+              <a:rPr lang="en-US" sz="3400" dirty="0"/>
+              <a:t> String </a:t>
+            </a:r>
+            <a:r>
+              <a:rPr lang="en-US" sz="3400" dirty="0" err="1"/>
+              <a:t>userName</a:t>
+            </a:r>
+            <a:r>
+              <a:rPr lang="en-US" sz="3400" dirty="0"/>
+              <a:t>;</a:t>
+            </a:r>
+          </a:p>
+          <a:p>
+            <a:pPr marL="0" indent="0">
+              <a:buNone/>
+            </a:pPr>
+            <a:r>
+              <a:rPr lang="en-US" sz="3400" dirty="0"/>
+              <a:t>@Column(name="</a:t>
+            </a:r>
+            <a:r>
+              <a:rPr lang="en-US" sz="3400" dirty="0" err="1"/>
+              <a:t>user_password</a:t>
+            </a:r>
+            <a:r>
+              <a:rPr lang="en-US" sz="3400" dirty="0"/>
+              <a:t>")</a:t>
+            </a:r>
+          </a:p>
+          <a:p>
+            <a:pPr marL="0" indent="0">
+              <a:buNone/>
+            </a:pPr>
+            <a:r>
+              <a:rPr lang="en-US" sz="3400" b="1" dirty="0"/>
+              <a:t>private</a:t>
+            </a:r>
+            <a:r>
+              <a:rPr lang="en-US" sz="3400" dirty="0"/>
+              <a:t> String </a:t>
+            </a:r>
+            <a:r>
+              <a:rPr lang="en-US" sz="3400" dirty="0" err="1"/>
+              <a:t>userPassword</a:t>
+            </a:r>
+            <a:r>
+              <a:rPr lang="en-US" sz="3400" dirty="0"/>
+              <a:t>;</a:t>
+            </a:r>
+          </a:p>
+          <a:p>
+            <a:pPr marL="0" indent="0">
+              <a:buNone/>
+            </a:pPr>
+            <a:r>
+              <a:rPr lang="en-US" sz="3400" dirty="0"/>
+              <a:t>@</a:t>
+            </a:r>
+            <a:r>
+              <a:rPr lang="en-US" sz="3400" dirty="0" err="1"/>
+              <a:t>ManyToMany</a:t>
+            </a:r>
+            <a:endParaRPr lang="en-US" sz="3400" dirty="0"/>
+          </a:p>
+          <a:p>
+            <a:pPr marL="0" indent="0">
+              <a:buNone/>
+            </a:pPr>
+            <a:r>
+              <a:rPr lang="en-US" sz="3400" dirty="0"/>
+              <a:t>@</a:t>
+            </a:r>
+            <a:r>
+              <a:rPr lang="en-US" sz="3400" dirty="0" err="1"/>
+              <a:t>JoinTable</a:t>
+            </a:r>
+            <a:r>
+              <a:rPr lang="en-US" sz="3400" dirty="0"/>
+              <a:t>(name="</a:t>
+            </a:r>
+            <a:r>
+              <a:rPr lang="en-US" sz="3400" dirty="0" err="1"/>
+              <a:t>my_user_role_details</a:t>
+            </a:r>
+            <a:r>
+              <a:rPr lang="en-US" sz="3400" dirty="0"/>
+              <a:t>",</a:t>
+            </a:r>
+          </a:p>
+          <a:p>
+            <a:pPr marL="0" indent="0">
+              <a:buNone/>
+            </a:pPr>
+            <a:r>
+              <a:rPr lang="en-US" sz="3400" dirty="0" err="1"/>
+              <a:t>joinColumns</a:t>
+            </a:r>
+            <a:r>
+              <a:rPr lang="en-US" sz="3400" dirty="0"/>
+              <a:t>= {@</a:t>
+            </a:r>
+            <a:r>
+              <a:rPr lang="en-US" sz="3400" dirty="0" err="1"/>
+              <a:t>JoinColumn</a:t>
+            </a:r>
+            <a:r>
+              <a:rPr lang="en-US" sz="3400" dirty="0"/>
+              <a:t>(name="</a:t>
+            </a:r>
+            <a:r>
+              <a:rPr lang="en-US" sz="3400" dirty="0" err="1"/>
+              <a:t>user_id</a:t>
+            </a:r>
+            <a:r>
+              <a:rPr lang="en-US" sz="3400" dirty="0"/>
+              <a:t>")},</a:t>
+            </a:r>
+          </a:p>
+          <a:p>
+            <a:pPr marL="0" indent="0">
+              <a:buNone/>
+            </a:pPr>
+            <a:r>
+              <a:rPr lang="en-US" sz="3400" dirty="0" err="1"/>
+              <a:t>inverseJoinColumns</a:t>
+            </a:r>
+            <a:r>
+              <a:rPr lang="en-US" sz="3400" dirty="0"/>
+              <a:t> = {@</a:t>
+            </a:r>
+            <a:r>
+              <a:rPr lang="en-US" sz="3400" dirty="0" err="1"/>
+              <a:t>JoinColumn</a:t>
+            </a:r>
+            <a:r>
+              <a:rPr lang="en-US" sz="3400" dirty="0"/>
+              <a:t>(name="</a:t>
+            </a:r>
+            <a:r>
+              <a:rPr lang="en-US" sz="3400" dirty="0" err="1"/>
+              <a:t>role_id</a:t>
+            </a:r>
+            <a:r>
+              <a:rPr lang="en-US" sz="3400" dirty="0"/>
+              <a:t>")}</a:t>
+            </a:r>
+          </a:p>
+          <a:p>
+            <a:pPr marL="0" indent="0">
+              <a:buNone/>
+            </a:pPr>
+            <a:r>
+              <a:rPr lang="en-US" sz="3400" dirty="0"/>
+              <a:t>)</a:t>
+            </a:r>
+          </a:p>
+          <a:p>
+            <a:pPr marL="0" indent="0">
+              <a:buNone/>
+            </a:pPr>
+            <a:r>
+              <a:rPr lang="en-US" sz="3400" dirty="0"/>
+              <a:t>List&lt;</a:t>
+            </a:r>
+            <a:r>
+              <a:rPr lang="en-US" sz="3400" dirty="0" err="1"/>
+              <a:t>MyRoleEntity</a:t>
+            </a:r>
+            <a:r>
+              <a:rPr lang="en-US" sz="3400" dirty="0"/>
+              <a:t>&gt; </a:t>
+            </a:r>
+            <a:r>
+              <a:rPr lang="en-US" sz="3400" dirty="0" err="1"/>
+              <a:t>allRoles</a:t>
+            </a:r>
+            <a:r>
+              <a:rPr lang="en-US" sz="3400" dirty="0"/>
+              <a:t>;</a:t>
+            </a:r>
+          </a:p>
+          <a:p>
+            <a:pPr marL="0" indent="0">
+              <a:buNone/>
+            </a:pPr>
+            <a:r>
+              <a:rPr lang="en-US" sz="3400" dirty="0"/>
+              <a:t>}</a:t>
+            </a:r>
+          </a:p>
+          <a:p>
+            <a:endParaRPr lang="en-IN" dirty="0"/>
+          </a:p>
+        </p:txBody>
+      </p:sp>
+      <p:sp>
+        <p:nvSpPr>
+          <p:cNvPr id="4" name="Content Placeholder 3">
+            <a:extLst>
+              <a:ext uri="{FF2B5EF4-FFF2-40B4-BE49-F238E27FC236}">
+                <a16:creationId xmlns:a16="http://schemas.microsoft.com/office/drawing/2014/main" id="{A2A10DF4-5447-4F6B-85E1-2BA3BAF6182A}"/>
+              </a:ext>
+            </a:extLst>
+          </p:cNvPr>
+          <p:cNvSpPr>
+            <a:spLocks noGrp="1"/>
+          </p:cNvSpPr>
+          <p:nvPr>
+            <p:ph sz="half" idx="2"/>
+          </p:nvPr>
+        </p:nvSpPr>
+        <p:spPr>
+          <a:xfrm>
+            <a:off x="6172200" y="1825625"/>
+            <a:ext cx="5181600" cy="4351338"/>
+          </a:xfrm>
+        </p:spPr>
+        <p:txBody>
+          <a:bodyPr>
+            <a:noAutofit/>
+          </a:bodyPr>
+          <a:lstStyle/>
+          <a:p>
+            <a:pPr marL="0" indent="0">
+              <a:buNone/>
+            </a:pPr>
+            <a:r>
+              <a:rPr lang="en-US" sz="2000" dirty="0"/>
+              <a:t>@Entity</a:t>
+            </a:r>
+          </a:p>
+          <a:p>
+            <a:pPr marL="0" indent="0">
+              <a:buNone/>
+            </a:pPr>
+            <a:r>
+              <a:rPr lang="en-US" sz="2000" dirty="0"/>
+              <a:t>@Table(name="</a:t>
+            </a:r>
+            <a:r>
+              <a:rPr lang="en-US" sz="2000" dirty="0" err="1"/>
+              <a:t>my_role_details</a:t>
+            </a:r>
+            <a:r>
+              <a:rPr lang="en-US" sz="2000" dirty="0"/>
+              <a:t>")</a:t>
+            </a:r>
+          </a:p>
+          <a:p>
+            <a:pPr marL="0" indent="0">
+              <a:buNone/>
+            </a:pPr>
+            <a:r>
+              <a:rPr lang="en-US" sz="2000" b="1" dirty="0"/>
+              <a:t>public</a:t>
+            </a:r>
+            <a:r>
+              <a:rPr lang="en-US" sz="2000" dirty="0"/>
+              <a:t> </a:t>
+            </a:r>
+            <a:r>
+              <a:rPr lang="en-US" sz="2000" b="1" dirty="0"/>
+              <a:t>class</a:t>
+            </a:r>
+            <a:r>
+              <a:rPr lang="en-US" sz="2000" dirty="0"/>
+              <a:t> </a:t>
+            </a:r>
+            <a:r>
+              <a:rPr lang="en-US" sz="2000" dirty="0" err="1"/>
+              <a:t>MyRoleEntity</a:t>
+            </a:r>
+            <a:r>
+              <a:rPr lang="en-US" sz="2000" dirty="0"/>
+              <a:t> {</a:t>
+            </a:r>
+          </a:p>
+          <a:p>
+            <a:pPr marL="0" indent="0">
+              <a:buNone/>
+            </a:pPr>
+            <a:r>
+              <a:rPr lang="en-US" sz="2000" dirty="0"/>
+              <a:t>@Id</a:t>
+            </a:r>
+          </a:p>
+          <a:p>
+            <a:pPr marL="0" indent="0">
+              <a:buNone/>
+            </a:pPr>
+            <a:r>
+              <a:rPr lang="en-US" sz="2000" dirty="0"/>
+              <a:t>@</a:t>
+            </a:r>
+            <a:r>
+              <a:rPr lang="en-US" sz="2000" dirty="0" err="1"/>
+              <a:t>GeneratedValue</a:t>
+            </a:r>
+            <a:r>
+              <a:rPr lang="en-US" sz="2000" dirty="0"/>
+              <a:t>(strategy = </a:t>
+            </a:r>
+            <a:r>
+              <a:rPr lang="en-US" sz="2000" dirty="0" err="1"/>
+              <a:t>GenerationType.</a:t>
+            </a:r>
+            <a:r>
+              <a:rPr lang="en-US" sz="2000" b="1" i="1" dirty="0" err="1"/>
+              <a:t>IDENTITY</a:t>
+            </a:r>
+            <a:r>
+              <a:rPr lang="en-US" sz="2000" dirty="0"/>
+              <a:t>)</a:t>
+            </a:r>
+          </a:p>
+          <a:p>
+            <a:pPr marL="0" indent="0">
+              <a:buNone/>
+            </a:pPr>
+            <a:r>
+              <a:rPr lang="en-US" sz="2000" dirty="0"/>
+              <a:t>@Column(name="</a:t>
+            </a:r>
+            <a:r>
+              <a:rPr lang="en-US" sz="2000" dirty="0" err="1"/>
+              <a:t>role_id</a:t>
+            </a:r>
+            <a:r>
+              <a:rPr lang="en-US" sz="2000" dirty="0"/>
+              <a:t>")</a:t>
+            </a:r>
+          </a:p>
+          <a:p>
+            <a:pPr marL="0" indent="0">
+              <a:buNone/>
+            </a:pPr>
+            <a:r>
+              <a:rPr lang="en-US" sz="2000" b="1" dirty="0"/>
+              <a:t>private</a:t>
+            </a:r>
+            <a:r>
+              <a:rPr lang="en-US" sz="2000" dirty="0"/>
+              <a:t> </a:t>
+            </a:r>
+            <a:r>
+              <a:rPr lang="en-US" sz="2000" b="1" dirty="0"/>
+              <a:t>int</a:t>
+            </a:r>
+            <a:r>
+              <a:rPr lang="en-US" sz="2000" dirty="0"/>
+              <a:t> </a:t>
+            </a:r>
+            <a:r>
+              <a:rPr lang="en-US" sz="2000" dirty="0" err="1"/>
+              <a:t>roleId</a:t>
+            </a:r>
+            <a:r>
+              <a:rPr lang="en-US" sz="2000" dirty="0"/>
+              <a:t>;</a:t>
+            </a:r>
+          </a:p>
+          <a:p>
+            <a:pPr marL="0" indent="0">
+              <a:buNone/>
+            </a:pPr>
+            <a:r>
+              <a:rPr lang="en-US" sz="2000" dirty="0"/>
+              <a:t>@Column(name="</a:t>
+            </a:r>
+            <a:r>
+              <a:rPr lang="en-US" sz="2000" dirty="0" err="1"/>
+              <a:t>role_name</a:t>
+            </a:r>
+            <a:r>
+              <a:rPr lang="en-US" sz="2000" dirty="0"/>
+              <a:t>")</a:t>
+            </a:r>
+          </a:p>
+          <a:p>
+            <a:pPr marL="0" indent="0">
+              <a:buNone/>
+            </a:pPr>
+            <a:r>
+              <a:rPr lang="en-US" sz="2000" b="1" dirty="0"/>
+              <a:t>private</a:t>
+            </a:r>
+            <a:r>
+              <a:rPr lang="en-US" sz="2000" dirty="0"/>
+              <a:t> String </a:t>
+            </a:r>
+            <a:r>
+              <a:rPr lang="en-US" sz="2000" dirty="0" err="1"/>
+              <a:t>roleName</a:t>
+            </a:r>
+            <a:r>
+              <a:rPr lang="en-US" sz="2000" dirty="0"/>
+              <a:t>;</a:t>
+            </a:r>
+          </a:p>
+          <a:p>
+            <a:pPr marL="0" indent="0">
+              <a:buNone/>
+            </a:pPr>
+            <a:r>
+              <a:rPr lang="en-IN" sz="2000" dirty="0"/>
+              <a:t>}</a:t>
+            </a:r>
+          </a:p>
+        </p:txBody>
+      </p:sp>
+    </p:spTree>
+    <p:extLst>
+      <p:ext uri="{BB962C8B-B14F-4D97-AF65-F5344CB8AC3E}">
+        <p14:creationId xmlns:p14="http://schemas.microsoft.com/office/powerpoint/2010/main" val="295295673"/>
+      </p:ext>
+    </p:extLst>
+  </p:cSld>
+  <p:clrMapOvr>
+    <a:masterClrMapping/>
+  </p:clrMapOvr>
+</p:sld>
+</file>
+
+<file path=ppt/slides/slide11.xml><?xml version="1.0" encoding="utf-8"?>
+<p:sld xmlns:a="http://schemas.openxmlformats.org/drawingml/2006/main" xmlns:r="http://schemas.openxmlformats.org/officeDocument/2006/relationships" xmlns:p="http://schemas.openxmlformats.org/presentationml/2006/main">
+  <p:cSld>
+    <p:spTree>
+      <p:nvGrpSpPr>
+        <p:cNvPr id="1" name=""/>
+        <p:cNvGrpSpPr/>
+        <p:nvPr/>
+      </p:nvGrpSpPr>
+      <p:grpSpPr>
+        <a:xfrm>
+          <a:off x="0" y="0"/>
+          <a:ext cx="0" cy="0"/>
+          <a:chOff x="0" y="0"/>
+          <a:chExt cx="0" cy="0"/>
+        </a:xfrm>
+      </p:grpSpPr>
+      <p:sp>
+        <p:nvSpPr>
+          <p:cNvPr id="2" name="Title 1">
+            <a:extLst>
+              <a:ext uri="{FF2B5EF4-FFF2-40B4-BE49-F238E27FC236}">
                 <a16:creationId xmlns:a16="http://schemas.microsoft.com/office/drawing/2014/main" id="{62698859-F5FD-4296-8205-9A3C874BB9BA}"/>
               </a:ext>
             </a:extLst>
@@ -3762,7 +4436,7 @@
 </p:sld>
 </file>
 
-<file path=ppt/slides/slide11.xml><?xml version="1.0" encoding="utf-8"?>
+<file path=ppt/slides/slide12.xml><?xml version="1.0" encoding="utf-8"?>
 <p:sld xmlns:a="http://schemas.openxmlformats.org/drawingml/2006/main" xmlns:r="http://schemas.openxmlformats.org/officeDocument/2006/relationships" xmlns:p="http://schemas.openxmlformats.org/presentationml/2006/main">
   <p:cSld>
     <p:spTree>
@@ -3956,7 +4630,7 @@
 </p:sld>
 </file>
 
-<file path=ppt/slides/slide12.xml><?xml version="1.0" encoding="utf-8"?>
+<file path=ppt/slides/slide13.xml><?xml version="1.0" encoding="utf-8"?>
 <p:sld xmlns:a="http://schemas.openxmlformats.org/drawingml/2006/main" xmlns:r="http://schemas.openxmlformats.org/officeDocument/2006/relationships" xmlns:p="http://schemas.openxmlformats.org/presentationml/2006/main">
   <p:cSld>
     <p:spTree>
@@ -4483,7 +5157,7 @@
 </p:sld>
 </file>
 
-<file path=ppt/slides/slide13.xml><?xml version="1.0" encoding="utf-8"?>
+<file path=ppt/slides/slide14.xml><?xml version="1.0" encoding="utf-8"?>
 <p:sld xmlns:a="http://schemas.openxmlformats.org/drawingml/2006/main" xmlns:r="http://schemas.openxmlformats.org/officeDocument/2006/relationships" xmlns:p="http://schemas.openxmlformats.org/presentationml/2006/main">
   <p:cSld>
     <p:spTree>
@@ -4966,7 +5640,7 @@
 </p:sld>
 </file>
 
-<file path=ppt/slides/slide14.xml><?xml version="1.0" encoding="utf-8"?>
+<file path=ppt/slides/slide15.xml><?xml version="1.0" encoding="utf-8"?>
 <p:sld xmlns:a="http://schemas.openxmlformats.org/drawingml/2006/main" xmlns:r="http://schemas.openxmlformats.org/officeDocument/2006/relationships" xmlns:p="http://schemas.openxmlformats.org/presentationml/2006/main">
   <p:cSld>
     <p:spTree>
@@ -5387,7 +6061,7 @@
 </p:sld>
 </file>
 
-<file path=ppt/slides/slide15.xml><?xml version="1.0" encoding="utf-8"?>
+<file path=ppt/slides/slide16.xml><?xml version="1.0" encoding="utf-8"?>
 <p:sld xmlns:a="http://schemas.openxmlformats.org/drawingml/2006/main" xmlns:r="http://schemas.openxmlformats.org/officeDocument/2006/relationships" xmlns:p="http://schemas.openxmlformats.org/presentationml/2006/main">
   <p:cSld>
     <p:spTree>
@@ -6045,7 +6719,7 @@
 </p:sld>
 </file>
 
-<file path=ppt/slides/slide16.xml><?xml version="1.0" encoding="utf-8"?>
+<file path=ppt/slides/slide17.xml><?xml version="1.0" encoding="utf-8"?>
 <p:sld xmlns:a="http://schemas.openxmlformats.org/drawingml/2006/main" xmlns:r="http://schemas.openxmlformats.org/officeDocument/2006/relationships" xmlns:p="http://schemas.openxmlformats.org/presentationml/2006/main">
   <p:cSld>
     <p:spTree>
@@ -6135,6 +6809,31 @@
             <a:r>
               <a:rPr lang="en-US" dirty="0"/>
               <a:t>/users/login endpoint</a:t>
+            </a:r>
+          </a:p>
+          <a:p>
+            <a:endParaRPr lang="en-US" dirty="0"/>
+          </a:p>
+          <a:p>
+            <a:r>
+              <a:rPr lang="en-US" dirty="0"/>
+              <a:t>NOTE : Make sure to store the </a:t>
+            </a:r>
+            <a:r>
+              <a:rPr lang="en-US" dirty="0" err="1"/>
+              <a:t>Bcrypt</a:t>
+            </a:r>
+            <a:r>
+              <a:rPr lang="en-US" dirty="0"/>
+              <a:t> encoded passwords in the </a:t>
+            </a:r>
+            <a:r>
+              <a:rPr lang="en-US" dirty="0" err="1"/>
+              <a:t>my_user_details</a:t>
+            </a:r>
+            <a:r>
+              <a:rPr lang="en-US" dirty="0"/>
+              <a:t> table</a:t>
             </a:r>
           </a:p>
           <a:p>
@@ -7110,7 +7809,7 @@
                 </a:solidFill>
                 <a:latin typeface="Courier New" panose="02070309020205020404" pitchFamily="49" charset="0"/>
               </a:rPr>
-              <a:t>"USER, ADMIN"</a:t>
+              <a:t>"USER”</a:t>
             </a:r>
             <a:r>
               <a:rPr lang="en-IN" sz="1800" dirty="0">
@@ -8009,6 +8708,299 @@
           <p:cNvPr id="2" name="Title 1">
             <a:extLst>
               <a:ext uri="{FF2B5EF4-FFF2-40B4-BE49-F238E27FC236}">
+                <a16:creationId xmlns:a16="http://schemas.microsoft.com/office/drawing/2014/main" id="{55E0F003-B93C-40E9-B852-5C3B756B11FC}"/>
+              </a:ext>
+            </a:extLst>
+          </p:cNvPr>
+          <p:cNvSpPr>
+            <a:spLocks noGrp="1"/>
+          </p:cNvSpPr>
+          <p:nvPr>
+            <p:ph type="title"/>
+          </p:nvPr>
+        </p:nvSpPr>
+        <p:spPr/>
+        <p:txBody>
+          <a:bodyPr/>
+          <a:lstStyle/>
+          <a:p>
+            <a:r>
+              <a:rPr lang="en-IN" dirty="0"/>
+              <a:t>Step 4 - Configure secured endpoints in the configuration class - </a:t>
+            </a:r>
+            <a:r>
+              <a:rPr lang="en-IN" dirty="0" err="1"/>
+              <a:t>contd</a:t>
+            </a:r>
+            <a:endParaRPr lang="en-IN" dirty="0"/>
+          </a:p>
+        </p:txBody>
+      </p:sp>
+      <p:sp>
+        <p:nvSpPr>
+          <p:cNvPr id="3" name="Content Placeholder 2">
+            <a:extLst>
+              <a:ext uri="{FF2B5EF4-FFF2-40B4-BE49-F238E27FC236}">
+                <a16:creationId xmlns:a16="http://schemas.microsoft.com/office/drawing/2014/main" id="{FF0260E6-5E90-450D-A956-0686AF51E53B}"/>
+              </a:ext>
+            </a:extLst>
+          </p:cNvPr>
+          <p:cNvSpPr>
+            <a:spLocks noGrp="1"/>
+          </p:cNvSpPr>
+          <p:nvPr>
+            <p:ph idx="1"/>
+          </p:nvPr>
+        </p:nvSpPr>
+        <p:spPr/>
+        <p:txBody>
+          <a:bodyPr>
+            <a:normAutofit fontScale="92500" lnSpcReduction="10000"/>
+          </a:bodyPr>
+          <a:lstStyle/>
+          <a:p>
+            <a:r>
+              <a:rPr lang="en-US" dirty="0"/>
+              <a:t>Configure the </a:t>
+            </a:r>
+            <a:r>
+              <a:rPr lang="en-US" dirty="0" err="1"/>
+              <a:t>AuthenticationManager</a:t>
+            </a:r>
+            <a:endParaRPr lang="en-US" dirty="0"/>
+          </a:p>
+          <a:p>
+            <a:pPr marL="0" indent="0">
+              <a:buNone/>
+            </a:pPr>
+            <a:r>
+              <a:rPr lang="en-IN" dirty="0"/>
+              <a:t>@Bean</a:t>
+            </a:r>
+          </a:p>
+          <a:p>
+            <a:pPr marL="0" indent="0">
+              <a:buNone/>
+            </a:pPr>
+            <a:r>
+              <a:rPr lang="en-IN" b="1" dirty="0"/>
+              <a:t>public</a:t>
+            </a:r>
+            <a:r>
+              <a:rPr lang="en-IN" dirty="0"/>
+              <a:t> </a:t>
+            </a:r>
+            <a:r>
+              <a:rPr lang="en-IN" dirty="0" err="1"/>
+              <a:t>AuthenticationManager</a:t>
+            </a:r>
+            <a:r>
+              <a:rPr lang="en-IN" dirty="0"/>
+              <a:t> </a:t>
+            </a:r>
+            <a:r>
+              <a:rPr lang="en-IN" dirty="0" err="1"/>
+              <a:t>authenticationManager</a:t>
+            </a:r>
+            <a:r>
+              <a:rPr lang="en-IN" dirty="0"/>
+              <a:t>(</a:t>
+            </a:r>
+          </a:p>
+          <a:p>
+            <a:pPr marL="0" indent="0">
+              <a:buNone/>
+            </a:pPr>
+            <a:r>
+              <a:rPr lang="en-IN" dirty="0"/>
+              <a:t>			</a:t>
+            </a:r>
+            <a:r>
+              <a:rPr lang="en-IN" dirty="0" err="1"/>
+              <a:t>UserDetailsService</a:t>
+            </a:r>
+            <a:r>
+              <a:rPr lang="en-IN" dirty="0"/>
+              <a:t> </a:t>
+            </a:r>
+            <a:r>
+              <a:rPr lang="en-IN" dirty="0" err="1"/>
+              <a:t>userDetailsService</a:t>
+            </a:r>
+            <a:r>
+              <a:rPr lang="en-IN" dirty="0"/>
+              <a:t>,</a:t>
+            </a:r>
+          </a:p>
+          <a:p>
+            <a:pPr marL="0" indent="0">
+              <a:buNone/>
+            </a:pPr>
+            <a:r>
+              <a:rPr lang="en-IN" dirty="0"/>
+              <a:t>			</a:t>
+            </a:r>
+            <a:r>
+              <a:rPr lang="en-IN" dirty="0" err="1"/>
+              <a:t>PasswordEncoder</a:t>
+            </a:r>
+            <a:r>
+              <a:rPr lang="en-IN" dirty="0"/>
+              <a:t> </a:t>
+            </a:r>
+            <a:r>
+              <a:rPr lang="en-IN" dirty="0" err="1"/>
+              <a:t>passwordEncoder</a:t>
+            </a:r>
+            <a:r>
+              <a:rPr lang="en-IN" dirty="0"/>
+              <a:t>) {</a:t>
+            </a:r>
+          </a:p>
+          <a:p>
+            <a:pPr marL="0" indent="0">
+              <a:buNone/>
+            </a:pPr>
+            <a:r>
+              <a:rPr lang="en-IN" dirty="0"/>
+              <a:t>	</a:t>
+            </a:r>
+            <a:r>
+              <a:rPr lang="en-IN" dirty="0" err="1"/>
+              <a:t>DaoAuthenticationProvider</a:t>
+            </a:r>
+            <a:r>
+              <a:rPr lang="en-IN" dirty="0"/>
+              <a:t> provider = </a:t>
+            </a:r>
+            <a:r>
+              <a:rPr lang="en-IN" b="1" dirty="0"/>
+              <a:t>new</a:t>
+            </a:r>
+            <a:r>
+              <a:rPr lang="en-IN" dirty="0"/>
+              <a:t> 	</a:t>
+            </a:r>
+            <a:r>
+              <a:rPr lang="en-IN" dirty="0" err="1"/>
+              <a:t>DaoAuthenticationProvider</a:t>
+            </a:r>
+            <a:r>
+              <a:rPr lang="en-IN" dirty="0"/>
+              <a:t>(</a:t>
+            </a:r>
+            <a:r>
+              <a:rPr lang="en-IN" dirty="0" err="1"/>
+              <a:t>userDetailsService</a:t>
+            </a:r>
+            <a:r>
+              <a:rPr lang="en-IN" dirty="0"/>
+              <a:t>);</a:t>
+            </a:r>
+          </a:p>
+          <a:p>
+            <a:pPr marL="0" indent="0">
+              <a:buNone/>
+            </a:pPr>
+            <a:r>
+              <a:rPr lang="en-IN" dirty="0"/>
+              <a:t>	</a:t>
+            </a:r>
+            <a:r>
+              <a:rPr lang="en-IN" dirty="0" err="1"/>
+              <a:t>provider.setPasswordEncoder</a:t>
+            </a:r>
+            <a:r>
+              <a:rPr lang="en-IN" dirty="0"/>
+              <a:t>(</a:t>
+            </a:r>
+            <a:r>
+              <a:rPr lang="en-IN" dirty="0" err="1"/>
+              <a:t>passwordEncoder</a:t>
+            </a:r>
+            <a:r>
+              <a:rPr lang="en-IN" dirty="0"/>
+              <a:t>);</a:t>
+            </a:r>
+          </a:p>
+          <a:p>
+            <a:pPr marL="0" indent="0">
+              <a:buNone/>
+            </a:pPr>
+            <a:r>
+              <a:rPr lang="en-IN" b="1" dirty="0"/>
+              <a:t>	return</a:t>
+            </a:r>
+            <a:r>
+              <a:rPr lang="en-IN" dirty="0"/>
+              <a:t> </a:t>
+            </a:r>
+            <a:r>
+              <a:rPr lang="en-IN" b="1" dirty="0"/>
+              <a:t>new</a:t>
+            </a:r>
+            <a:r>
+              <a:rPr lang="en-IN" dirty="0"/>
+              <a:t> </a:t>
+            </a:r>
+            <a:r>
+              <a:rPr lang="en-IN" dirty="0" err="1"/>
+              <a:t>ProviderManager</a:t>
+            </a:r>
+            <a:r>
+              <a:rPr lang="en-IN" dirty="0"/>
+              <a:t>(provider);</a:t>
+            </a:r>
+          </a:p>
+          <a:p>
+            <a:pPr marL="0" indent="0">
+              <a:buNone/>
+            </a:pPr>
+            <a:r>
+              <a:rPr lang="en-IN" dirty="0"/>
+              <a:t>}</a:t>
+            </a:r>
+          </a:p>
+          <a:p>
+            <a:endParaRPr lang="en-IN" dirty="0"/>
+          </a:p>
+        </p:txBody>
+      </p:sp>
+    </p:spTree>
+    <p:extLst>
+      <p:ext uri="{BB962C8B-B14F-4D97-AF65-F5344CB8AC3E}">
+        <p14:creationId xmlns:p14="http://schemas.microsoft.com/office/powerpoint/2010/main" val="3465071502"/>
+      </p:ext>
+    </p:extLst>
+  </p:cSld>
+  <p:clrMapOvr>
+    <a:masterClrMapping/>
+  </p:clrMapOvr>
+</p:sld>
+</file>
+
+<file path=ppt/slides/slide8.xml><?xml version="1.0" encoding="utf-8"?>
+<p:sld xmlns:a="http://schemas.openxmlformats.org/drawingml/2006/main" xmlns:r="http://schemas.openxmlformats.org/officeDocument/2006/relationships" xmlns:p="http://schemas.openxmlformats.org/presentationml/2006/main">
+  <p:cSld>
+    <p:spTree>
+      <p:nvGrpSpPr>
+        <p:cNvPr id="1" name=""/>
+        <p:cNvGrpSpPr/>
+        <p:nvPr/>
+      </p:nvGrpSpPr>
+      <p:grpSpPr>
+        <a:xfrm>
+          <a:off x="0" y="0"/>
+          <a:ext cx="0" cy="0"/>
+          <a:chOff x="0" y="0"/>
+          <a:chExt cx="0" cy="0"/>
+        </a:xfrm>
+      </p:grpSpPr>
+      <p:sp>
+        <p:nvSpPr>
+          <p:cNvPr id="2" name="Title 1">
+            <a:extLst>
+              <a:ext uri="{FF2B5EF4-FFF2-40B4-BE49-F238E27FC236}">
                 <a16:creationId xmlns:a16="http://schemas.microsoft.com/office/drawing/2014/main" id="{09318A7E-1540-4FE1-8DB8-78A2CC9F3498}"/>
               </a:ext>
             </a:extLst>
@@ -8216,6 +9208,34 @@
             </a:r>
           </a:p>
           <a:p>
+            <a:r>
+              <a:rPr lang="en-IN" dirty="0"/>
+              <a:t>The ideal situation is the user names and password should be stored in DB and Spring Security should authenticate against the DB.</a:t>
+            </a:r>
+          </a:p>
+          <a:p>
+            <a:r>
+              <a:rPr lang="en-IN" dirty="0"/>
+              <a:t>So let us create tables, entities and </a:t>
+            </a:r>
+            <a:r>
+              <a:rPr lang="en-IN" dirty="0" err="1"/>
+              <a:t>dao</a:t>
+            </a:r>
+            <a:r>
+              <a:rPr lang="en-IN" dirty="0"/>
+              <a:t> layer for user, role and </a:t>
+            </a:r>
+            <a:r>
+              <a:rPr lang="en-IN" dirty="0" err="1"/>
+              <a:t>user_roles</a:t>
+            </a:r>
+            <a:r>
+              <a:rPr lang="en-IN" dirty="0"/>
+              <a:t>.</a:t>
+            </a:r>
+          </a:p>
+          <a:p>
             <a:endParaRPr lang="en-IN" dirty="0"/>
           </a:p>
         </p:txBody>
@@ -8233,7 +9253,7 @@
 </p:sld>
 </file>
 
-<file path=ppt/slides/slide8.xml><?xml version="1.0" encoding="utf-8"?>
+<file path=ppt/slides/slide9.xml><?xml version="1.0" encoding="utf-8"?>
 <p:sld xmlns:a="http://schemas.openxmlformats.org/drawingml/2006/main" xmlns:r="http://schemas.openxmlformats.org/officeDocument/2006/relationships" xmlns:p="http://schemas.openxmlformats.org/presentationml/2006/main">
   <p:cSld>
     <p:spTree>
@@ -8894,679 +9914,6 @@
     <p:extLst>
       <p:ext uri="{BB962C8B-B14F-4D97-AF65-F5344CB8AC3E}">
         <p14:creationId xmlns:p14="http://schemas.microsoft.com/office/powerpoint/2010/main" val="1619040822"/>
-      </p:ext>
-    </p:extLst>
-  </p:cSld>
-  <p:clrMapOvr>
-    <a:masterClrMapping/>
-  </p:clrMapOvr>
-</p:sld>
-</file>
-
-<file path=ppt/slides/slide9.xml><?xml version="1.0" encoding="utf-8"?>
-<p:sld xmlns:a="http://schemas.openxmlformats.org/drawingml/2006/main" xmlns:r="http://schemas.openxmlformats.org/officeDocument/2006/relationships" xmlns:p="http://schemas.openxmlformats.org/presentationml/2006/main">
-  <p:cSld>
-    <p:spTree>
-      <p:nvGrpSpPr>
-        <p:cNvPr id="1" name=""/>
-        <p:cNvGrpSpPr/>
-        <p:nvPr/>
-      </p:nvGrpSpPr>
-      <p:grpSpPr>
-        <a:xfrm>
-          <a:off x="0" y="0"/>
-          <a:ext cx="0" cy="0"/>
-          <a:chOff x="0" y="0"/>
-          <a:chExt cx="0" cy="0"/>
-        </a:xfrm>
-      </p:grpSpPr>
-      <p:sp>
-        <p:nvSpPr>
-          <p:cNvPr id="2" name="Title 1">
-            <a:extLst>
-              <a:ext uri="{FF2B5EF4-FFF2-40B4-BE49-F238E27FC236}">
-                <a16:creationId xmlns:a16="http://schemas.microsoft.com/office/drawing/2014/main" id="{BE930EC4-FAEC-42DA-BA07-A0065F8B0905}"/>
-              </a:ext>
-            </a:extLst>
-          </p:cNvPr>
-          <p:cNvSpPr>
-            <a:spLocks noGrp="1"/>
-          </p:cNvSpPr>
-          <p:nvPr>
-            <p:ph type="title"/>
-          </p:nvPr>
-        </p:nvSpPr>
-        <p:spPr/>
-        <p:txBody>
-          <a:bodyPr/>
-          <a:lstStyle/>
-          <a:p>
-            <a:r>
-              <a:rPr lang="en-US" dirty="0"/>
-              <a:t>Step 7: Create </a:t>
-            </a:r>
-            <a:r>
-              <a:rPr lang="en-US" dirty="0" err="1"/>
-              <a:t>MyUserEntity</a:t>
-            </a:r>
-            <a:r>
-              <a:rPr lang="en-US" dirty="0"/>
-              <a:t> and </a:t>
-            </a:r>
-            <a:r>
-              <a:rPr lang="en-US" dirty="0" err="1"/>
-              <a:t>MyRoleEntity</a:t>
-            </a:r>
-            <a:endParaRPr lang="en-IN" dirty="0"/>
-          </a:p>
-        </p:txBody>
-      </p:sp>
-      <p:sp>
-        <p:nvSpPr>
-          <p:cNvPr id="3" name="Content Placeholder 2">
-            <a:extLst>
-              <a:ext uri="{FF2B5EF4-FFF2-40B4-BE49-F238E27FC236}">
-                <a16:creationId xmlns:a16="http://schemas.microsoft.com/office/drawing/2014/main" id="{0376C8C4-3C9F-48C0-A02A-2BD9964E6BF6}"/>
-              </a:ext>
-            </a:extLst>
-          </p:cNvPr>
-          <p:cNvSpPr>
-            <a:spLocks noGrp="1"/>
-          </p:cNvSpPr>
-          <p:nvPr>
-            <p:ph sz="half" idx="1"/>
-          </p:nvPr>
-        </p:nvSpPr>
-        <p:spPr>
-          <a:xfrm>
-            <a:off x="838200" y="1825624"/>
-            <a:ext cx="5181600" cy="5032375"/>
-          </a:xfrm>
-        </p:spPr>
-        <p:txBody>
-          <a:bodyPr>
-            <a:normAutofit fontScale="40000" lnSpcReduction="20000"/>
-          </a:bodyPr>
-          <a:lstStyle/>
-          <a:p>
-            <a:pPr marL="0" indent="0">
-              <a:buNone/>
-            </a:pPr>
-            <a:r>
-              <a:rPr lang="en-US" sz="3400" dirty="0"/>
-              <a:t>@Entity</a:t>
-            </a:r>
-          </a:p>
-          <a:p>
-            <a:pPr marL="0" indent="0">
-              <a:buNone/>
-            </a:pPr>
-            <a:r>
-              <a:rPr lang="en-US" sz="3400" dirty="0"/>
-              <a:t>@Table(name="</a:t>
-            </a:r>
-            <a:r>
-              <a:rPr lang="en-US" sz="3400" dirty="0" err="1"/>
-              <a:t>my_user_details</a:t>
-            </a:r>
-            <a:r>
-              <a:rPr lang="en-US" sz="3400" dirty="0"/>
-              <a:t>")</a:t>
-            </a:r>
-          </a:p>
-          <a:p>
-            <a:pPr marL="0" indent="0">
-              <a:buNone/>
-            </a:pPr>
-            <a:r>
-              <a:rPr lang="en-US" sz="3400" b="1" dirty="0"/>
-              <a:t>public</a:t>
-            </a:r>
-            <a:r>
-              <a:rPr lang="en-US" sz="3400" dirty="0"/>
-              <a:t> </a:t>
-            </a:r>
-            <a:r>
-              <a:rPr lang="en-US" sz="3400" b="1" dirty="0"/>
-              <a:t>class</a:t>
-            </a:r>
-            <a:r>
-              <a:rPr lang="en-US" sz="3400" dirty="0"/>
-              <a:t> </a:t>
-            </a:r>
-            <a:r>
-              <a:rPr lang="en-US" sz="3400" dirty="0" err="1"/>
-              <a:t>MyUserEntity</a:t>
-            </a:r>
-            <a:r>
-              <a:rPr lang="en-US" sz="3400" dirty="0"/>
-              <a:t> {</a:t>
-            </a:r>
-          </a:p>
-          <a:p>
-            <a:pPr marL="0" indent="0">
-              <a:buNone/>
-            </a:pPr>
-            <a:r>
-              <a:rPr lang="en-US" sz="3400" dirty="0"/>
-              <a:t>@Id</a:t>
-            </a:r>
-          </a:p>
-          <a:p>
-            <a:pPr marL="0" indent="0">
-              <a:buNone/>
-            </a:pPr>
-            <a:r>
-              <a:rPr lang="en-US" sz="3400" dirty="0"/>
-              <a:t>@</a:t>
-            </a:r>
-            <a:r>
-              <a:rPr lang="en-US" sz="3400" dirty="0" err="1"/>
-              <a:t>GeneratedValue</a:t>
-            </a:r>
-            <a:r>
-              <a:rPr lang="en-US" sz="3400" dirty="0"/>
-              <a:t>(strategy = </a:t>
-            </a:r>
-            <a:r>
-              <a:rPr lang="en-US" sz="3400" dirty="0" err="1"/>
-              <a:t>GenerationType.</a:t>
-            </a:r>
-            <a:r>
-              <a:rPr lang="en-US" sz="3400" b="1" i="1" dirty="0" err="1"/>
-              <a:t>IDENTITY</a:t>
-            </a:r>
-            <a:r>
-              <a:rPr lang="en-US" sz="3400" dirty="0"/>
-              <a:t>)</a:t>
-            </a:r>
-          </a:p>
-          <a:p>
-            <a:pPr marL="0" indent="0">
-              <a:buNone/>
-            </a:pPr>
-            <a:r>
-              <a:rPr lang="en-US" sz="3400" dirty="0"/>
-              <a:t>@Column(name="</a:t>
-            </a:r>
-            <a:r>
-              <a:rPr lang="en-US" sz="3400" dirty="0" err="1"/>
-              <a:t>user_id</a:t>
-            </a:r>
-            <a:r>
-              <a:rPr lang="en-US" sz="3400" dirty="0"/>
-              <a:t>")</a:t>
-            </a:r>
-          </a:p>
-          <a:p>
-            <a:pPr marL="0" indent="0">
-              <a:buNone/>
-            </a:pPr>
-            <a:r>
-              <a:rPr lang="en-US" sz="3400" b="1" dirty="0"/>
-              <a:t>private</a:t>
-            </a:r>
-            <a:r>
-              <a:rPr lang="en-US" sz="3400" dirty="0"/>
-              <a:t> </a:t>
-            </a:r>
-            <a:r>
-              <a:rPr lang="en-US" sz="3400" b="1" dirty="0"/>
-              <a:t>int</a:t>
-            </a:r>
-            <a:r>
-              <a:rPr lang="en-US" sz="3400" dirty="0"/>
-              <a:t> </a:t>
-            </a:r>
-            <a:r>
-              <a:rPr lang="en-US" sz="3400" dirty="0" err="1"/>
-              <a:t>userId</a:t>
-            </a:r>
-            <a:r>
-              <a:rPr lang="en-US" sz="3400" dirty="0"/>
-              <a:t>;</a:t>
-            </a:r>
-          </a:p>
-          <a:p>
-            <a:pPr marL="0" indent="0">
-              <a:buNone/>
-            </a:pPr>
-            <a:r>
-              <a:rPr lang="en-US" sz="3400" dirty="0"/>
-              <a:t>@Column(name="</a:t>
-            </a:r>
-            <a:r>
-              <a:rPr lang="en-US" sz="3400" dirty="0" err="1"/>
-              <a:t>user_name</a:t>
-            </a:r>
-            <a:r>
-              <a:rPr lang="en-US" sz="3400" dirty="0"/>
-              <a:t>")</a:t>
-            </a:r>
-          </a:p>
-          <a:p>
-            <a:pPr marL="0" indent="0">
-              <a:buNone/>
-            </a:pPr>
-            <a:r>
-              <a:rPr lang="en-US" sz="3400" b="1" dirty="0"/>
-              <a:t>private</a:t>
-            </a:r>
-            <a:r>
-              <a:rPr lang="en-US" sz="3400" dirty="0"/>
-              <a:t> String </a:t>
-            </a:r>
-            <a:r>
-              <a:rPr lang="en-US" sz="3400" dirty="0" err="1"/>
-              <a:t>userName</a:t>
-            </a:r>
-            <a:r>
-              <a:rPr lang="en-US" sz="3400" dirty="0"/>
-              <a:t>;</a:t>
-            </a:r>
-          </a:p>
-          <a:p>
-            <a:pPr marL="0" indent="0">
-              <a:buNone/>
-            </a:pPr>
-            <a:r>
-              <a:rPr lang="en-US" sz="3400" dirty="0"/>
-              <a:t>@Column(name="</a:t>
-            </a:r>
-            <a:r>
-              <a:rPr lang="en-US" sz="3400" dirty="0" err="1"/>
-              <a:t>user_password</a:t>
-            </a:r>
-            <a:r>
-              <a:rPr lang="en-US" sz="3400" dirty="0"/>
-              <a:t>")</a:t>
-            </a:r>
-          </a:p>
-          <a:p>
-            <a:pPr marL="0" indent="0">
-              <a:buNone/>
-            </a:pPr>
-            <a:r>
-              <a:rPr lang="en-US" sz="3400" b="1" dirty="0"/>
-              <a:t>private</a:t>
-            </a:r>
-            <a:r>
-              <a:rPr lang="en-US" sz="3400" dirty="0"/>
-              <a:t> String </a:t>
-            </a:r>
-            <a:r>
-              <a:rPr lang="en-US" sz="3400" dirty="0" err="1"/>
-              <a:t>userPassword</a:t>
-            </a:r>
-            <a:r>
-              <a:rPr lang="en-US" sz="3400" dirty="0"/>
-              <a:t>;</a:t>
-            </a:r>
-          </a:p>
-          <a:p>
-            <a:pPr marL="0" indent="0">
-              <a:buNone/>
-            </a:pPr>
-            <a:r>
-              <a:rPr lang="en-US" sz="3400" dirty="0"/>
-              <a:t>@</a:t>
-            </a:r>
-            <a:r>
-              <a:rPr lang="en-US" sz="3400" dirty="0" err="1"/>
-              <a:t>ManyToMany</a:t>
-            </a:r>
-            <a:endParaRPr lang="en-US" sz="3400" dirty="0"/>
-          </a:p>
-          <a:p>
-            <a:pPr marL="0" indent="0">
-              <a:buNone/>
-            </a:pPr>
-            <a:r>
-              <a:rPr lang="en-US" sz="3400" dirty="0"/>
-              <a:t>@</a:t>
-            </a:r>
-            <a:r>
-              <a:rPr lang="en-US" sz="3400" dirty="0" err="1"/>
-              <a:t>JoinTable</a:t>
-            </a:r>
-            <a:r>
-              <a:rPr lang="en-US" sz="3400" dirty="0"/>
-              <a:t>(name="</a:t>
-            </a:r>
-            <a:r>
-              <a:rPr lang="en-US" sz="3400" dirty="0" err="1"/>
-              <a:t>my_user_role_details</a:t>
-            </a:r>
-            <a:r>
-              <a:rPr lang="en-US" sz="3400" dirty="0"/>
-              <a:t>",</a:t>
-            </a:r>
-          </a:p>
-          <a:p>
-            <a:pPr marL="0" indent="0">
-              <a:buNone/>
-            </a:pPr>
-            <a:r>
-              <a:rPr lang="en-US" sz="3400" dirty="0" err="1"/>
-              <a:t>joinColumns</a:t>
-            </a:r>
-            <a:r>
-              <a:rPr lang="en-US" sz="3400" dirty="0"/>
-              <a:t>= {@</a:t>
-            </a:r>
-            <a:r>
-              <a:rPr lang="en-US" sz="3400" dirty="0" err="1"/>
-              <a:t>JoinColumn</a:t>
-            </a:r>
-            <a:r>
-              <a:rPr lang="en-US" sz="3400" dirty="0"/>
-              <a:t>(name="</a:t>
-            </a:r>
-            <a:r>
-              <a:rPr lang="en-US" sz="3400" dirty="0" err="1"/>
-              <a:t>user_id</a:t>
-            </a:r>
-            <a:r>
-              <a:rPr lang="en-US" sz="3400" dirty="0"/>
-              <a:t>")},</a:t>
-            </a:r>
-          </a:p>
-          <a:p>
-            <a:pPr marL="0" indent="0">
-              <a:buNone/>
-            </a:pPr>
-            <a:r>
-              <a:rPr lang="en-US" sz="3400" dirty="0" err="1"/>
-              <a:t>inverseJoinColumns</a:t>
-            </a:r>
-            <a:r>
-              <a:rPr lang="en-US" sz="3400" dirty="0"/>
-              <a:t> = {@</a:t>
-            </a:r>
-            <a:r>
-              <a:rPr lang="en-US" sz="3400" dirty="0" err="1"/>
-              <a:t>JoinColumn</a:t>
-            </a:r>
-            <a:r>
-              <a:rPr lang="en-US" sz="3400" dirty="0"/>
-              <a:t>(name="</a:t>
-            </a:r>
-            <a:r>
-              <a:rPr lang="en-US" sz="3400" dirty="0" err="1"/>
-              <a:t>role_id</a:t>
-            </a:r>
-            <a:r>
-              <a:rPr lang="en-US" sz="3400" dirty="0"/>
-              <a:t>")}</a:t>
-            </a:r>
-          </a:p>
-          <a:p>
-            <a:pPr marL="0" indent="0">
-              <a:buNone/>
-            </a:pPr>
-            <a:r>
-              <a:rPr lang="en-US" sz="3400" dirty="0"/>
-              <a:t>)</a:t>
-            </a:r>
-          </a:p>
-          <a:p>
-            <a:pPr marL="0" indent="0">
-              <a:buNone/>
-            </a:pPr>
-            <a:r>
-              <a:rPr lang="en-US" sz="3400" dirty="0"/>
-              <a:t>List&lt;</a:t>
-            </a:r>
-            <a:r>
-              <a:rPr lang="en-US" sz="3400" dirty="0" err="1"/>
-              <a:t>MyRoleEntity</a:t>
-            </a:r>
-            <a:r>
-              <a:rPr lang="en-US" sz="3400" dirty="0"/>
-              <a:t>&gt; </a:t>
-            </a:r>
-            <a:r>
-              <a:rPr lang="en-US" sz="3400" dirty="0" err="1"/>
-              <a:t>allRoles</a:t>
-            </a:r>
-            <a:r>
-              <a:rPr lang="en-US" sz="3400" dirty="0"/>
-              <a:t>;</a:t>
-            </a:r>
-          </a:p>
-          <a:p>
-            <a:pPr marL="0" indent="0">
-              <a:buNone/>
-            </a:pPr>
-            <a:r>
-              <a:rPr lang="en-US" sz="3400" dirty="0"/>
-              <a:t>}</a:t>
-            </a:r>
-          </a:p>
-          <a:p>
-            <a:endParaRPr lang="en-IN" dirty="0"/>
-          </a:p>
-        </p:txBody>
-      </p:sp>
-      <p:sp>
-        <p:nvSpPr>
-          <p:cNvPr id="4" name="Content Placeholder 3">
-            <a:extLst>
-              <a:ext uri="{FF2B5EF4-FFF2-40B4-BE49-F238E27FC236}">
-                <a16:creationId xmlns:a16="http://schemas.microsoft.com/office/drawing/2014/main" id="{A2A10DF4-5447-4F6B-85E1-2BA3BAF6182A}"/>
-              </a:ext>
-            </a:extLst>
-          </p:cNvPr>
-          <p:cNvSpPr>
-            <a:spLocks noGrp="1"/>
-          </p:cNvSpPr>
-          <p:nvPr>
-            <p:ph sz="half" idx="2"/>
-          </p:nvPr>
-        </p:nvSpPr>
-        <p:spPr>
-          <a:xfrm>
-            <a:off x="6172200" y="1825625"/>
-            <a:ext cx="5181600" cy="4351338"/>
-          </a:xfrm>
-        </p:spPr>
-        <p:txBody>
-          <a:bodyPr>
-            <a:noAutofit/>
-          </a:bodyPr>
-          <a:lstStyle/>
-          <a:p>
-            <a:pPr marL="0" indent="0">
-              <a:buNone/>
-            </a:pPr>
-            <a:r>
-              <a:rPr lang="en-US" sz="2000" dirty="0"/>
-              <a:t>@Entity</a:t>
-            </a:r>
-          </a:p>
-          <a:p>
-            <a:pPr marL="0" indent="0">
-              <a:buNone/>
-            </a:pPr>
-            <a:r>
-              <a:rPr lang="en-US" sz="2000" dirty="0"/>
-              <a:t>@Table(name="</a:t>
-            </a:r>
-            <a:r>
-              <a:rPr lang="en-US" sz="2000" dirty="0" err="1"/>
-              <a:t>my_role_details</a:t>
-            </a:r>
-            <a:r>
-              <a:rPr lang="en-US" sz="2000" dirty="0"/>
-              <a:t>")</a:t>
-            </a:r>
-          </a:p>
-          <a:p>
-            <a:pPr marL="0" indent="0">
-              <a:buNone/>
-            </a:pPr>
-            <a:r>
-              <a:rPr lang="en-US" sz="2000" b="1" dirty="0"/>
-              <a:t>public</a:t>
-            </a:r>
-            <a:r>
-              <a:rPr lang="en-US" sz="2000" dirty="0"/>
-              <a:t> </a:t>
-            </a:r>
-            <a:r>
-              <a:rPr lang="en-US" sz="2000" b="1" dirty="0"/>
-              <a:t>class</a:t>
-            </a:r>
-            <a:r>
-              <a:rPr lang="en-US" sz="2000" dirty="0"/>
-              <a:t> </a:t>
-            </a:r>
-            <a:r>
-              <a:rPr lang="en-US" sz="2000" dirty="0" err="1"/>
-              <a:t>MyRoleEntity</a:t>
-            </a:r>
-            <a:r>
-              <a:rPr lang="en-US" sz="2000" dirty="0"/>
-              <a:t> {</a:t>
-            </a:r>
-          </a:p>
-          <a:p>
-            <a:pPr marL="0" indent="0">
-              <a:buNone/>
-            </a:pPr>
-            <a:r>
-              <a:rPr lang="en-US" sz="2000" dirty="0"/>
-              <a:t>@Id</a:t>
-            </a:r>
-          </a:p>
-          <a:p>
-            <a:pPr marL="0" indent="0">
-              <a:buNone/>
-            </a:pPr>
-            <a:r>
-              <a:rPr lang="en-US" sz="2000" dirty="0"/>
-              <a:t>@</a:t>
-            </a:r>
-            <a:r>
-              <a:rPr lang="en-US" sz="2000" dirty="0" err="1"/>
-              <a:t>GeneratedValue</a:t>
-            </a:r>
-            <a:r>
-              <a:rPr lang="en-US" sz="2000" dirty="0"/>
-              <a:t>(strategy = </a:t>
-            </a:r>
-            <a:r>
-              <a:rPr lang="en-US" sz="2000" dirty="0" err="1"/>
-              <a:t>GenerationType.</a:t>
-            </a:r>
-            <a:r>
-              <a:rPr lang="en-US" sz="2000" b="1" i="1" dirty="0" err="1"/>
-              <a:t>IDENTITY</a:t>
-            </a:r>
-            <a:r>
-              <a:rPr lang="en-US" sz="2000" dirty="0"/>
-              <a:t>)</a:t>
-            </a:r>
-          </a:p>
-          <a:p>
-            <a:pPr marL="0" indent="0">
-              <a:buNone/>
-            </a:pPr>
-            <a:r>
-              <a:rPr lang="en-US" sz="2000" dirty="0"/>
-              <a:t>@Column(name="</a:t>
-            </a:r>
-            <a:r>
-              <a:rPr lang="en-US" sz="2000" dirty="0" err="1"/>
-              <a:t>role_id</a:t>
-            </a:r>
-            <a:r>
-              <a:rPr lang="en-US" sz="2000" dirty="0"/>
-              <a:t>")</a:t>
-            </a:r>
-          </a:p>
-          <a:p>
-            <a:pPr marL="0" indent="0">
-              <a:buNone/>
-            </a:pPr>
-            <a:r>
-              <a:rPr lang="en-US" sz="2000" b="1" dirty="0"/>
-              <a:t>private</a:t>
-            </a:r>
-            <a:r>
-              <a:rPr lang="en-US" sz="2000" dirty="0"/>
-              <a:t> </a:t>
-            </a:r>
-            <a:r>
-              <a:rPr lang="en-US" sz="2000" b="1" dirty="0"/>
-              <a:t>int</a:t>
-            </a:r>
-            <a:r>
-              <a:rPr lang="en-US" sz="2000" dirty="0"/>
-              <a:t> </a:t>
-            </a:r>
-            <a:r>
-              <a:rPr lang="en-US" sz="2000" dirty="0" err="1"/>
-              <a:t>roleId</a:t>
-            </a:r>
-            <a:r>
-              <a:rPr lang="en-US" sz="2000" dirty="0"/>
-              <a:t>;</a:t>
-            </a:r>
-          </a:p>
-          <a:p>
-            <a:pPr marL="0" indent="0">
-              <a:buNone/>
-            </a:pPr>
-            <a:r>
-              <a:rPr lang="en-US" sz="2000" dirty="0"/>
-              <a:t>@Column(name="</a:t>
-            </a:r>
-            <a:r>
-              <a:rPr lang="en-US" sz="2000" dirty="0" err="1"/>
-              <a:t>role_name</a:t>
-            </a:r>
-            <a:r>
-              <a:rPr lang="en-US" sz="2000" dirty="0"/>
-              <a:t>")</a:t>
-            </a:r>
-          </a:p>
-          <a:p>
-            <a:pPr marL="0" indent="0">
-              <a:buNone/>
-            </a:pPr>
-            <a:r>
-              <a:rPr lang="en-US" sz="2000" b="1" dirty="0"/>
-              <a:t>private</a:t>
-            </a:r>
-            <a:r>
-              <a:rPr lang="en-US" sz="2000" dirty="0"/>
-              <a:t> String </a:t>
-            </a:r>
-            <a:r>
-              <a:rPr lang="en-US" sz="2000" dirty="0" err="1"/>
-              <a:t>roleName</a:t>
-            </a:r>
-            <a:r>
-              <a:rPr lang="en-US" sz="2000" dirty="0"/>
-              <a:t>;</a:t>
-            </a:r>
-          </a:p>
-          <a:p>
-            <a:pPr marL="0" indent="0">
-              <a:buNone/>
-            </a:pPr>
-            <a:r>
-              <a:rPr lang="en-IN" sz="2000" dirty="0"/>
-              <a:t>}</a:t>
-            </a:r>
-          </a:p>
-        </p:txBody>
-      </p:sp>
-    </p:spTree>
-    <p:extLst>
-      <p:ext uri="{BB962C8B-B14F-4D97-AF65-F5344CB8AC3E}">
-        <p14:creationId xmlns:p14="http://schemas.microsoft.com/office/powerpoint/2010/main" val="295295673"/>
       </p:ext>
     </p:extLst>
   </p:cSld>
